--- a/docs/social-flow-orientation.pptx
+++ b/docs/social-flow-orientation.pptx
@@ -39,9 +39,14 @@
     <p:sldId id="287" r:id="rId33"/>
     <p:sldId id="288" r:id="rId34"/>
     <p:sldId id="289" r:id="rId35"/>
+    <p:sldId id="290" r:id="rId36"/>
+    <p:sldId id="291" r:id="rId37"/>
+    <p:sldId id="292" r:id="rId38"/>
+    <p:sldId id="293" r:id="rId39"/>
+    <p:sldId id="294" r:id="rId40"/>
   </p:sldIdLst>
   <p:notesMasterIdLst>
-    <p:notesMasterId r:id="rId36"/>
+    <p:notesMasterId r:id="rId41"/>
   </p:notesMasterIdLst>
   <p:sldSz cx="12188952" cy="6858000"/>
   <p:notesSz cx="6858000" cy="12188952"/>
@@ -2935,6 +2940,446 @@
             <a:fld id="{F7021451-1387-4CA6-816F-3879F97B5CBC}" type="slidenum">
               <a:rPr lang="en-US"/>
               <a:t>34</a:t>
+            </a:fld>
+            <a:endParaRPr lang="en-US"/>
+          </a:p>
+        </p:txBody>
+      </p:sp>
+    </p:spTree>
+    <p:extLst>
+      <p:ext uri="{BB962C8B-B14F-4D97-AF65-F5344CB8AC3E}">
+        <p14:creationId xmlns:p14="http://schemas.microsoft.com/office/powerpoint/2010/main" val="1024086991"/>
+      </p:ext>
+    </p:extLst>
+  </p:cSld>
+  <p:clrMapOvr>
+    <a:masterClrMapping/>
+  </p:clrMapOvr>
+</p:notes>
+</file>
+
+<file path=ppt/notesSlides/notesSlide35.xml><?xml version="1.0" encoding="utf-8"?>
+<p:notes xmlns:a="http://schemas.openxmlformats.org/drawingml/2006/main" xmlns:r="http://schemas.openxmlformats.org/officeDocument/2006/relationships" xmlns:p="http://schemas.openxmlformats.org/presentationml/2006/main">
+  <p:cSld>
+    <p:spTree>
+      <p:nvGrpSpPr>
+        <p:cNvPr id="1" name=""/>
+        <p:cNvGrpSpPr/>
+        <p:nvPr/>
+      </p:nvGrpSpPr>
+      <p:grpSpPr>
+        <a:xfrm>
+          <a:off x="0" y="0"/>
+          <a:ext cx="0" cy="0"/>
+          <a:chOff x="0" y="0"/>
+          <a:chExt cx="0" cy="0"/>
+        </a:xfrm>
+      </p:grpSpPr>
+      <p:sp>
+        <p:nvSpPr>
+          <p:cNvPr id="2" name="Slide Image Placeholder 1"/>
+          <p:cNvSpPr>
+            <a:spLocks noGrp="1" noRot="1" noChangeAspect="1"/>
+          </p:cNvSpPr>
+          <p:nvPr>
+            <p:ph type="sldImg"/>
+          </p:nvPr>
+        </p:nvSpPr>
+        <p:spPr/>
+      </p:sp>
+      <p:sp>
+        <p:nvSpPr>
+          <p:cNvPr id="3" name="Notes Placeholder 2"/>
+          <p:cNvSpPr>
+            <a:spLocks noGrp="1"/>
+          </p:cNvSpPr>
+          <p:nvPr>
+            <p:ph type="body" idx="1"/>
+          </p:nvPr>
+        </p:nvSpPr>
+        <p:spPr/>
+        <p:txBody>
+          <a:bodyPr/>
+          <a:lstStyle/>
+          <a:p>
+            <a:r>
+              <a:rPr lang="en-US" dirty="0"/>
+              <a:t/>
+            </a:r>
+            <a:endParaRPr lang="en-US" dirty="0"/>
+          </a:p>
+        </p:txBody>
+      </p:sp>
+      <p:sp>
+        <p:nvSpPr>
+          <p:cNvPr id="4" name="Slide Number Placeholder 3"/>
+          <p:cNvSpPr>
+            <a:spLocks noGrp="1"/>
+          </p:cNvSpPr>
+          <p:nvPr>
+            <p:ph type="sldNum" sz="quarter" idx="10"/>
+          </p:nvPr>
+        </p:nvSpPr>
+        <p:spPr/>
+        <p:txBody>
+          <a:bodyPr/>
+          <a:lstStyle/>
+          <a:p>
+            <a:fld id="{F7021451-1387-4CA6-816F-3879F97B5CBC}" type="slidenum">
+              <a:rPr lang="en-US"/>
+              <a:t>35</a:t>
+            </a:fld>
+            <a:endParaRPr lang="en-US"/>
+          </a:p>
+        </p:txBody>
+      </p:sp>
+    </p:spTree>
+    <p:extLst>
+      <p:ext uri="{BB962C8B-B14F-4D97-AF65-F5344CB8AC3E}">
+        <p14:creationId xmlns:p14="http://schemas.microsoft.com/office/powerpoint/2010/main" val="1024086991"/>
+      </p:ext>
+    </p:extLst>
+  </p:cSld>
+  <p:clrMapOvr>
+    <a:masterClrMapping/>
+  </p:clrMapOvr>
+</p:notes>
+</file>
+
+<file path=ppt/notesSlides/notesSlide36.xml><?xml version="1.0" encoding="utf-8"?>
+<p:notes xmlns:a="http://schemas.openxmlformats.org/drawingml/2006/main" xmlns:r="http://schemas.openxmlformats.org/officeDocument/2006/relationships" xmlns:p="http://schemas.openxmlformats.org/presentationml/2006/main">
+  <p:cSld>
+    <p:spTree>
+      <p:nvGrpSpPr>
+        <p:cNvPr id="1" name=""/>
+        <p:cNvGrpSpPr/>
+        <p:nvPr/>
+      </p:nvGrpSpPr>
+      <p:grpSpPr>
+        <a:xfrm>
+          <a:off x="0" y="0"/>
+          <a:ext cx="0" cy="0"/>
+          <a:chOff x="0" y="0"/>
+          <a:chExt cx="0" cy="0"/>
+        </a:xfrm>
+      </p:grpSpPr>
+      <p:sp>
+        <p:nvSpPr>
+          <p:cNvPr id="2" name="Slide Image Placeholder 1"/>
+          <p:cNvSpPr>
+            <a:spLocks noGrp="1" noRot="1" noChangeAspect="1"/>
+          </p:cNvSpPr>
+          <p:nvPr>
+            <p:ph type="sldImg"/>
+          </p:nvPr>
+        </p:nvSpPr>
+        <p:spPr/>
+      </p:sp>
+      <p:sp>
+        <p:nvSpPr>
+          <p:cNvPr id="3" name="Notes Placeholder 2"/>
+          <p:cNvSpPr>
+            <a:spLocks noGrp="1"/>
+          </p:cNvSpPr>
+          <p:nvPr>
+            <p:ph type="body" idx="1"/>
+          </p:nvPr>
+        </p:nvSpPr>
+        <p:spPr/>
+        <p:txBody>
+          <a:bodyPr/>
+          <a:lstStyle/>
+          <a:p>
+            <a:r>
+              <a:rPr lang="en-US" dirty="0"/>
+              <a:t/>
+            </a:r>
+            <a:endParaRPr lang="en-US" dirty="0"/>
+          </a:p>
+        </p:txBody>
+      </p:sp>
+      <p:sp>
+        <p:nvSpPr>
+          <p:cNvPr id="4" name="Slide Number Placeholder 3"/>
+          <p:cNvSpPr>
+            <a:spLocks noGrp="1"/>
+          </p:cNvSpPr>
+          <p:nvPr>
+            <p:ph type="sldNum" sz="quarter" idx="10"/>
+          </p:nvPr>
+        </p:nvSpPr>
+        <p:spPr/>
+        <p:txBody>
+          <a:bodyPr/>
+          <a:lstStyle/>
+          <a:p>
+            <a:fld id="{F7021451-1387-4CA6-816F-3879F97B5CBC}" type="slidenum">
+              <a:rPr lang="en-US"/>
+              <a:t>36</a:t>
+            </a:fld>
+            <a:endParaRPr lang="en-US"/>
+          </a:p>
+        </p:txBody>
+      </p:sp>
+    </p:spTree>
+    <p:extLst>
+      <p:ext uri="{BB962C8B-B14F-4D97-AF65-F5344CB8AC3E}">
+        <p14:creationId xmlns:p14="http://schemas.microsoft.com/office/powerpoint/2010/main" val="1024086991"/>
+      </p:ext>
+    </p:extLst>
+  </p:cSld>
+  <p:clrMapOvr>
+    <a:masterClrMapping/>
+  </p:clrMapOvr>
+</p:notes>
+</file>
+
+<file path=ppt/notesSlides/notesSlide37.xml><?xml version="1.0" encoding="utf-8"?>
+<p:notes xmlns:a="http://schemas.openxmlformats.org/drawingml/2006/main" xmlns:r="http://schemas.openxmlformats.org/officeDocument/2006/relationships" xmlns:p="http://schemas.openxmlformats.org/presentationml/2006/main">
+  <p:cSld>
+    <p:spTree>
+      <p:nvGrpSpPr>
+        <p:cNvPr id="1" name=""/>
+        <p:cNvGrpSpPr/>
+        <p:nvPr/>
+      </p:nvGrpSpPr>
+      <p:grpSpPr>
+        <a:xfrm>
+          <a:off x="0" y="0"/>
+          <a:ext cx="0" cy="0"/>
+          <a:chOff x="0" y="0"/>
+          <a:chExt cx="0" cy="0"/>
+        </a:xfrm>
+      </p:grpSpPr>
+      <p:sp>
+        <p:nvSpPr>
+          <p:cNvPr id="2" name="Slide Image Placeholder 1"/>
+          <p:cNvSpPr>
+            <a:spLocks noGrp="1" noRot="1" noChangeAspect="1"/>
+          </p:cNvSpPr>
+          <p:nvPr>
+            <p:ph type="sldImg"/>
+          </p:nvPr>
+        </p:nvSpPr>
+        <p:spPr/>
+      </p:sp>
+      <p:sp>
+        <p:nvSpPr>
+          <p:cNvPr id="3" name="Notes Placeholder 2"/>
+          <p:cNvSpPr>
+            <a:spLocks noGrp="1"/>
+          </p:cNvSpPr>
+          <p:nvPr>
+            <p:ph type="body" idx="1"/>
+          </p:nvPr>
+        </p:nvSpPr>
+        <p:spPr/>
+        <p:txBody>
+          <a:bodyPr/>
+          <a:lstStyle/>
+          <a:p>
+            <a:r>
+              <a:rPr lang="en-US" dirty="0"/>
+              <a:t/>
+            </a:r>
+            <a:endParaRPr lang="en-US" dirty="0"/>
+          </a:p>
+        </p:txBody>
+      </p:sp>
+      <p:sp>
+        <p:nvSpPr>
+          <p:cNvPr id="4" name="Slide Number Placeholder 3"/>
+          <p:cNvSpPr>
+            <a:spLocks noGrp="1"/>
+          </p:cNvSpPr>
+          <p:nvPr>
+            <p:ph type="sldNum" sz="quarter" idx="10"/>
+          </p:nvPr>
+        </p:nvSpPr>
+        <p:spPr/>
+        <p:txBody>
+          <a:bodyPr/>
+          <a:lstStyle/>
+          <a:p>
+            <a:fld id="{F7021451-1387-4CA6-816F-3879F97B5CBC}" type="slidenum">
+              <a:rPr lang="en-US"/>
+              <a:t>37</a:t>
+            </a:fld>
+            <a:endParaRPr lang="en-US"/>
+          </a:p>
+        </p:txBody>
+      </p:sp>
+    </p:spTree>
+    <p:extLst>
+      <p:ext uri="{BB962C8B-B14F-4D97-AF65-F5344CB8AC3E}">
+        <p14:creationId xmlns:p14="http://schemas.microsoft.com/office/powerpoint/2010/main" val="1024086991"/>
+      </p:ext>
+    </p:extLst>
+  </p:cSld>
+  <p:clrMapOvr>
+    <a:masterClrMapping/>
+  </p:clrMapOvr>
+</p:notes>
+</file>
+
+<file path=ppt/notesSlides/notesSlide38.xml><?xml version="1.0" encoding="utf-8"?>
+<p:notes xmlns:a="http://schemas.openxmlformats.org/drawingml/2006/main" xmlns:r="http://schemas.openxmlformats.org/officeDocument/2006/relationships" xmlns:p="http://schemas.openxmlformats.org/presentationml/2006/main">
+  <p:cSld>
+    <p:spTree>
+      <p:nvGrpSpPr>
+        <p:cNvPr id="1" name=""/>
+        <p:cNvGrpSpPr/>
+        <p:nvPr/>
+      </p:nvGrpSpPr>
+      <p:grpSpPr>
+        <a:xfrm>
+          <a:off x="0" y="0"/>
+          <a:ext cx="0" cy="0"/>
+          <a:chOff x="0" y="0"/>
+          <a:chExt cx="0" cy="0"/>
+        </a:xfrm>
+      </p:grpSpPr>
+      <p:sp>
+        <p:nvSpPr>
+          <p:cNvPr id="2" name="Slide Image Placeholder 1"/>
+          <p:cNvSpPr>
+            <a:spLocks noGrp="1" noRot="1" noChangeAspect="1"/>
+          </p:cNvSpPr>
+          <p:nvPr>
+            <p:ph type="sldImg"/>
+          </p:nvPr>
+        </p:nvSpPr>
+        <p:spPr/>
+      </p:sp>
+      <p:sp>
+        <p:nvSpPr>
+          <p:cNvPr id="3" name="Notes Placeholder 2"/>
+          <p:cNvSpPr>
+            <a:spLocks noGrp="1"/>
+          </p:cNvSpPr>
+          <p:nvPr>
+            <p:ph type="body" idx="1"/>
+          </p:nvPr>
+        </p:nvSpPr>
+        <p:spPr/>
+        <p:txBody>
+          <a:bodyPr/>
+          <a:lstStyle/>
+          <a:p>
+            <a:r>
+              <a:rPr lang="en-US" dirty="0"/>
+              <a:t/>
+            </a:r>
+            <a:endParaRPr lang="en-US" dirty="0"/>
+          </a:p>
+        </p:txBody>
+      </p:sp>
+      <p:sp>
+        <p:nvSpPr>
+          <p:cNvPr id="4" name="Slide Number Placeholder 3"/>
+          <p:cNvSpPr>
+            <a:spLocks noGrp="1"/>
+          </p:cNvSpPr>
+          <p:nvPr>
+            <p:ph type="sldNum" sz="quarter" idx="10"/>
+          </p:nvPr>
+        </p:nvSpPr>
+        <p:spPr/>
+        <p:txBody>
+          <a:bodyPr/>
+          <a:lstStyle/>
+          <a:p>
+            <a:fld id="{F7021451-1387-4CA6-816F-3879F97B5CBC}" type="slidenum">
+              <a:rPr lang="en-US"/>
+              <a:t>38</a:t>
+            </a:fld>
+            <a:endParaRPr lang="en-US"/>
+          </a:p>
+        </p:txBody>
+      </p:sp>
+    </p:spTree>
+    <p:extLst>
+      <p:ext uri="{BB962C8B-B14F-4D97-AF65-F5344CB8AC3E}">
+        <p14:creationId xmlns:p14="http://schemas.microsoft.com/office/powerpoint/2010/main" val="1024086991"/>
+      </p:ext>
+    </p:extLst>
+  </p:cSld>
+  <p:clrMapOvr>
+    <a:masterClrMapping/>
+  </p:clrMapOvr>
+</p:notes>
+</file>
+
+<file path=ppt/notesSlides/notesSlide39.xml><?xml version="1.0" encoding="utf-8"?>
+<p:notes xmlns:a="http://schemas.openxmlformats.org/drawingml/2006/main" xmlns:r="http://schemas.openxmlformats.org/officeDocument/2006/relationships" xmlns:p="http://schemas.openxmlformats.org/presentationml/2006/main">
+  <p:cSld>
+    <p:spTree>
+      <p:nvGrpSpPr>
+        <p:cNvPr id="1" name=""/>
+        <p:cNvGrpSpPr/>
+        <p:nvPr/>
+      </p:nvGrpSpPr>
+      <p:grpSpPr>
+        <a:xfrm>
+          <a:off x="0" y="0"/>
+          <a:ext cx="0" cy="0"/>
+          <a:chOff x="0" y="0"/>
+          <a:chExt cx="0" cy="0"/>
+        </a:xfrm>
+      </p:grpSpPr>
+      <p:sp>
+        <p:nvSpPr>
+          <p:cNvPr id="2" name="Slide Image Placeholder 1"/>
+          <p:cNvSpPr>
+            <a:spLocks noGrp="1" noRot="1" noChangeAspect="1"/>
+          </p:cNvSpPr>
+          <p:nvPr>
+            <p:ph type="sldImg"/>
+          </p:nvPr>
+        </p:nvSpPr>
+        <p:spPr/>
+      </p:sp>
+      <p:sp>
+        <p:nvSpPr>
+          <p:cNvPr id="3" name="Notes Placeholder 2"/>
+          <p:cNvSpPr>
+            <a:spLocks noGrp="1"/>
+          </p:cNvSpPr>
+          <p:nvPr>
+            <p:ph type="body" idx="1"/>
+          </p:nvPr>
+        </p:nvSpPr>
+        <p:spPr/>
+        <p:txBody>
+          <a:bodyPr/>
+          <a:lstStyle/>
+          <a:p>
+            <a:r>
+              <a:rPr lang="en-US" dirty="0"/>
+              <a:t/>
+            </a:r>
+            <a:endParaRPr lang="en-US" dirty="0"/>
+          </a:p>
+        </p:txBody>
+      </p:sp>
+      <p:sp>
+        <p:nvSpPr>
+          <p:cNvPr id="4" name="Slide Number Placeholder 3"/>
+          <p:cNvSpPr>
+            <a:spLocks noGrp="1"/>
+          </p:cNvSpPr>
+          <p:nvPr>
+            <p:ph type="sldNum" sz="quarter" idx="10"/>
+          </p:nvPr>
+        </p:nvSpPr>
+        <p:spPr/>
+        <p:txBody>
+          <a:bodyPr/>
+          <a:lstStyle/>
+          <a:p>
+            <a:fld id="{F7021451-1387-4CA6-816F-3879F97B5CBC}" type="slidenum">
+              <a:rPr lang="en-US"/>
+              <a:t>39</a:t>
             </a:fld>
             <a:endParaRPr lang="en-US"/>
           </a:p>
@@ -4150,7 +4595,7 @@
                 <a:ea typeface="Arial" pitchFamily="34" charset="-122"/>
                 <a:cs typeface="Arial" pitchFamily="34" charset="-120"/>
               </a:rPr>
-              <a:t>저장소 (Repository)</a:t>
+              <a:t>Git</a:t>
             </a:r>
             <a:endParaRPr lang="en-US" sz="4000" dirty="0"/>
           </a:p>
@@ -4215,7 +4660,7 @@
                 <a:ea typeface="Arial" pitchFamily="34" charset="-122"/>
                 <a:cs typeface="Arial" pitchFamily="34" charset="-120"/>
               </a:rPr>
-              <a:t>프로젝트의 코드와 변경 이력이 전부 들어있는 폴더예요. 흔히 '레포(repo)'라고 줄여 불러요.</a:t>
+              <a:t>코드를 수정할 때마다 그 변경 이력을 저장해두는 도구예요. 언제 무엇이 바뀌었는지 기록되고, 문제가 생기면 예전 버전으로 되돌릴 수 있어요.</a:t>
             </a:r>
             <a:endParaRPr lang="en-US" sz="2200" dirty="0"/>
           </a:p>
@@ -4223,7 +4668,73 @@
       </p:sp>
       <p:sp>
         <p:nvSpPr>
-          <p:cNvPr id="7" name="Text 5"/>
+          <p:cNvPr id="7" name="Shape 5"/>
+          <p:cNvSpPr/>
+          <p:nvPr/>
+        </p:nvSpPr>
+        <p:spPr>
+          <a:xfrm>
+            <a:off x="548640" y="4663440"/>
+            <a:ext cx="11064240" cy="822960"/>
+          </a:xfrm>
+          <a:prstGeom prst="roundRect">
+            <a:avLst>
+              <a:gd name="adj" fmla="val 8889"/>
+            </a:avLst>
+          </a:prstGeom>
+          <a:solidFill>
+            <a:srgbClr val="202124"/>
+          </a:solidFill>
+          <a:ln w="12700">
+            <a:solidFill>
+              <a:srgbClr val="202124"/>
+            </a:solidFill>
+            <a:prstDash val="solid"/>
+          </a:ln>
+        </p:spPr>
+      </p:sp>
+      <p:sp>
+        <p:nvSpPr>
+          <p:cNvPr id="8" name="Text 6"/>
+          <p:cNvSpPr/>
+          <p:nvPr/>
+        </p:nvSpPr>
+        <p:spPr>
+          <a:xfrm>
+            <a:off x="822960" y="4663440"/>
+            <a:ext cx="10515600" cy="822960"/>
+          </a:xfrm>
+          <a:prstGeom prst="rect">
+            <a:avLst/>
+          </a:prstGeom>
+          <a:noFill/>
+          <a:ln/>
+        </p:spPr>
+        <p:txBody>
+          <a:bodyPr wrap="square" rtlCol="0" anchor="ctr"/>
+          <a:lstStyle/>
+          <a:p>
+            <a:pPr indent="0" marL="0">
+              <a:buNone/>
+            </a:pPr>
+            <a:r>
+              <a:rPr lang="en-US" sz="1500" i="1" dirty="0">
+                <a:solidFill>
+                  <a:srgbClr val="98999D"/>
+                </a:solidFill>
+                <a:latin typeface="Arial" pitchFamily="34" charset="0"/>
+                <a:ea typeface="Arial" pitchFamily="34" charset="-122"/>
+                <a:cs typeface="Arial" pitchFamily="34" charset="-120"/>
+              </a:rPr>
+              <a:t>쉽게 말하면: 문서 작업할 때 쓰는 '버전별로 저장하기'를 훨씬 정교하게 만든 것</a:t>
+            </a:r>
+            <a:endParaRPr lang="en-US" sz="1500" dirty="0"/>
+          </a:p>
+        </p:txBody>
+      </p:sp>
+      <p:sp>
+        <p:nvSpPr>
+          <p:cNvPr id="9" name="Text 7"/>
           <p:cNvSpPr/>
           <p:nvPr/>
         </p:nvSpPr>
@@ -4275,7 +4786,7 @@
                   </a:extLst>
                 </a:hlinkClick>
               </a:rPr>
-              <a:t>https://docs.github.com/en/repositories</a:t>
+              <a:t>https://git-scm.com</a:t>
             </a:r>
             <a:endParaRPr lang="en-US" sz="1500" dirty="0"/>
           </a:p>
@@ -4424,7 +4935,7 @@
                 <a:ea typeface="Arial" pitchFamily="34" charset="-122"/>
                 <a:cs typeface="Arial" pitchFamily="34" charset="-120"/>
               </a:rPr>
-              <a:t>모노리포 (Monorepo)</a:t>
+              <a:t>GitHub</a:t>
             </a:r>
             <a:endParaRPr lang="en-US" sz="4000" dirty="0"/>
           </a:p>
@@ -4489,7 +5000,7 @@
                 <a:ea typeface="Arial" pitchFamily="34" charset="-122"/>
                 <a:cs typeface="Arial" pitchFamily="34" charset="-120"/>
               </a:rPr>
-              <a:t>여러 개의 앱이나 서비스를 하나의 저장소 안에 같이 담아두는 방식이에요. 이 프로젝트는 웹 앱, 관리자 앱, Flutter 앱을 전부 한 저장소에 같이 두고 있어요.</a:t>
+              <a:t>Git으로 관리하는 코드를 인터넷에 올려두고, 여러 사람이 같이 보고 수정할 수 있게 해주는 웹사이트예요.</a:t>
             </a:r>
             <a:endParaRPr lang="en-US" sz="2200" dirty="0"/>
           </a:p>
@@ -4497,7 +5008,73 @@
       </p:sp>
       <p:sp>
         <p:nvSpPr>
-          <p:cNvPr id="7" name="Text 5"/>
+          <p:cNvPr id="7" name="Shape 5"/>
+          <p:cNvSpPr/>
+          <p:nvPr/>
+        </p:nvSpPr>
+        <p:spPr>
+          <a:xfrm>
+            <a:off x="548640" y="4663440"/>
+            <a:ext cx="11064240" cy="822960"/>
+          </a:xfrm>
+          <a:prstGeom prst="roundRect">
+            <a:avLst>
+              <a:gd name="adj" fmla="val 8889"/>
+            </a:avLst>
+          </a:prstGeom>
+          <a:solidFill>
+            <a:srgbClr val="202124"/>
+          </a:solidFill>
+          <a:ln w="12700">
+            <a:solidFill>
+              <a:srgbClr val="202124"/>
+            </a:solidFill>
+            <a:prstDash val="solid"/>
+          </a:ln>
+        </p:spPr>
+      </p:sp>
+      <p:sp>
+        <p:nvSpPr>
+          <p:cNvPr id="8" name="Text 6"/>
+          <p:cNvSpPr/>
+          <p:nvPr/>
+        </p:nvSpPr>
+        <p:spPr>
+          <a:xfrm>
+            <a:off x="822960" y="4663440"/>
+            <a:ext cx="10515600" cy="822960"/>
+          </a:xfrm>
+          <a:prstGeom prst="rect">
+            <a:avLst/>
+          </a:prstGeom>
+          <a:noFill/>
+          <a:ln/>
+        </p:spPr>
+        <p:txBody>
+          <a:bodyPr wrap="square" rtlCol="0" anchor="ctr"/>
+          <a:lstStyle/>
+          <a:p>
+            <a:pPr indent="0" marL="0">
+              <a:buNone/>
+            </a:pPr>
+            <a:r>
+              <a:rPr lang="en-US" sz="1500" i="1" dirty="0">
+                <a:solidFill>
+                  <a:srgbClr val="98999D"/>
+                </a:solidFill>
+                <a:latin typeface="Arial" pitchFamily="34" charset="0"/>
+                <a:ea typeface="Arial" pitchFamily="34" charset="-122"/>
+                <a:cs typeface="Arial" pitchFamily="34" charset="-120"/>
+              </a:rPr>
+              <a:t>쉽게 말하면: 코드를 위한 구글 드라이브 + 협업 도구</a:t>
+            </a:r>
+            <a:endParaRPr lang="en-US" sz="1500" dirty="0"/>
+          </a:p>
+        </p:txBody>
+      </p:sp>
+      <p:sp>
+        <p:nvSpPr>
+          <p:cNvPr id="9" name="Text 7"/>
           <p:cNvSpPr/>
           <p:nvPr/>
         </p:nvSpPr>
@@ -4549,7 +5126,7 @@
                   </a:extLst>
                 </a:hlinkClick>
               </a:rPr>
-              <a:t>https://github.com/white100s/social_flow</a:t>
+              <a:t>https://github.com</a:t>
             </a:r>
             <a:endParaRPr lang="en-US" sz="1500" dirty="0"/>
           </a:p>
@@ -4698,7 +5275,7 @@
                 <a:ea typeface="Arial" pitchFamily="34" charset="-122"/>
                 <a:cs typeface="Arial" pitchFamily="34" charset="-120"/>
               </a:rPr>
-              <a:t>프론트엔드 (Frontend)</a:t>
+              <a:t>저장소 (Repository)</a:t>
             </a:r>
             <a:endParaRPr lang="en-US" sz="4000" dirty="0"/>
           </a:p>
@@ -4763,7 +5340,7 @@
                 <a:ea typeface="Arial" pitchFamily="34" charset="-122"/>
                 <a:cs typeface="Arial" pitchFamily="34" charset="-120"/>
               </a:rPr>
-              <a:t>사용자가 직접 보고 클릭하는 화면 부분이에요. 웹사이트의 디자인, 버튼, 글자 등이 여기 해당돼요.</a:t>
+              <a:t>프로젝트의 코드와 변경 이력이 전부 들어있는 폴더예요. 흔히 '레포(repo)'라고 줄여 불러요.</a:t>
             </a:r>
             <a:endParaRPr lang="en-US" sz="2200" dirty="0"/>
           </a:p>
@@ -4823,7 +5400,7 @@
                   </a:extLst>
                 </a:hlinkClick>
               </a:rPr>
-              <a:t>https://developer.mozilla.org/en-US/docs/Learn/Getting_started_with_the_web</a:t>
+              <a:t>https://docs.github.com/en/repositories</a:t>
             </a:r>
             <a:endParaRPr lang="en-US" sz="1500" dirty="0"/>
           </a:p>
@@ -4972,7 +5549,7 @@
                 <a:ea typeface="Arial" pitchFamily="34" charset="-122"/>
                 <a:cs typeface="Arial" pitchFamily="34" charset="-120"/>
               </a:rPr>
-              <a:t>백엔드 (Backend)</a:t>
+              <a:t>모노리포 (Monorepo)</a:t>
             </a:r>
             <a:endParaRPr lang="en-US" sz="4000" dirty="0"/>
           </a:p>
@@ -5037,7 +5614,7 @@
                 <a:ea typeface="Arial" pitchFamily="34" charset="-122"/>
                 <a:cs typeface="Arial" pitchFamily="34" charset="-120"/>
               </a:rPr>
-              <a:t>화면 뒤에서 데이터를 저장하고 처리하는 부분이에요. 로그인 확인, 게시글 저장 같은 일이 여기서 일어나요.</a:t>
+              <a:t>여러 개의 앱이나 서비스를 하나의 저장소 안에 같이 담아두는 방식이에요. 이 프로젝트는 웹 앱, 관리자 앱, Flutter 앱을 전부 한 저장소에 같이 두고 있어요.</a:t>
             </a:r>
             <a:endParaRPr lang="en-US" sz="2200" dirty="0"/>
           </a:p>
@@ -5097,7 +5674,7 @@
                   </a:extLst>
                 </a:hlinkClick>
               </a:rPr>
-              <a:t>https://developer.mozilla.org/en-US/docs/Learn/Server-side/First_steps</a:t>
+              <a:t>https://github.com/white100s/social_flow</a:t>
             </a:r>
             <a:endParaRPr lang="en-US" sz="1500" dirty="0"/>
           </a:p>
@@ -5246,7 +5823,7 @@
                 <a:ea typeface="Arial" pitchFamily="34" charset="-122"/>
                 <a:cs typeface="Arial" pitchFamily="34" charset="-120"/>
               </a:rPr>
-              <a:t>API</a:t>
+              <a:t>프론트엔드 (Frontend)</a:t>
             </a:r>
             <a:endParaRPr lang="en-US" sz="4000" dirty="0"/>
           </a:p>
@@ -5311,7 +5888,7 @@
                 <a:ea typeface="Arial" pitchFamily="34" charset="-122"/>
                 <a:cs typeface="Arial" pitchFamily="34" charset="-120"/>
               </a:rPr>
-              <a:t>프론트엔드가 백엔드에게 데이터를 요청하고 받을 때 쓰는, 서로 약속된 통신 방법이에요.</a:t>
+              <a:t>사용자가 직접 보고 클릭하는 화면 부분이에요. 웹사이트의 디자인, 버튼, 글자 등이 여기 해당돼요.</a:t>
             </a:r>
             <a:endParaRPr lang="en-US" sz="2200" dirty="0"/>
           </a:p>
@@ -5371,7 +5948,7 @@
                   </a:extLst>
                 </a:hlinkClick>
               </a:rPr>
-              <a:t>https://developer.mozilla.org/en-US/docs/Web/API</a:t>
+              <a:t>https://developer.mozilla.org/en-US/docs/Learn/Getting_started_with_the_web</a:t>
             </a:r>
             <a:endParaRPr lang="en-US" sz="1500" dirty="0"/>
           </a:p>
@@ -5520,7 +6097,7 @@
                 <a:ea typeface="Arial" pitchFamily="34" charset="-122"/>
                 <a:cs typeface="Arial" pitchFamily="34" charset="-120"/>
               </a:rPr>
-              <a:t>Next.js</a:t>
+              <a:t>백엔드 (Backend)</a:t>
             </a:r>
             <a:endParaRPr lang="en-US" sz="4000" dirty="0"/>
           </a:p>
@@ -5585,7 +6162,7 @@
                 <a:ea typeface="Arial" pitchFamily="34" charset="-122"/>
                 <a:cs typeface="Arial" pitchFamily="34" charset="-120"/>
               </a:rPr>
-              <a:t>리액트(React) 기반으로 웹사이트를 쉽게 만들 수 있게 도와주는 프레임워크예요. 이 프로젝트의 웹 앱과 관리자 앱이 Next.js로 만들어졌어요.</a:t>
+              <a:t>화면 뒤에서 데이터를 저장하고 처리하는 부분이에요. 로그인 확인, 게시글 저장 같은 일이 여기서 일어나요.</a:t>
             </a:r>
             <a:endParaRPr lang="en-US" sz="2200" dirty="0"/>
           </a:p>
@@ -5645,7 +6222,7 @@
                   </a:extLst>
                 </a:hlinkClick>
               </a:rPr>
-              <a:t>https://nextjs.org</a:t>
+              <a:t>https://developer.mozilla.org/en-US/docs/Learn/Server-side/First_steps</a:t>
             </a:r>
             <a:endParaRPr lang="en-US" sz="1500" dirty="0"/>
           </a:p>
@@ -5794,7 +6371,7 @@
                 <a:ea typeface="Arial" pitchFamily="34" charset="-122"/>
                 <a:cs typeface="Arial" pitchFamily="34" charset="-120"/>
               </a:rPr>
-              <a:t>Vercel</a:t>
+              <a:t>API</a:t>
             </a:r>
             <a:endParaRPr lang="en-US" sz="4000" dirty="0"/>
           </a:p>
@@ -5859,7 +6436,7 @@
                 <a:ea typeface="Arial" pitchFamily="34" charset="-122"/>
                 <a:cs typeface="Arial" pitchFamily="34" charset="-120"/>
               </a:rPr>
-              <a:t>Next.js를 만든 회사이고, Next.js로 만든 웹사이트를 인터넷에 올려서 서비스할 수 있게 해주는 배포 플랫폼이에요.</a:t>
+              <a:t>프론트엔드가 백엔드에게 데이터를 요청하고 받을 때 쓰는, 서로 약속된 통신 방법이에요.</a:t>
             </a:r>
             <a:endParaRPr lang="en-US" sz="2200" dirty="0"/>
           </a:p>
@@ -5919,7 +6496,7 @@
                   </a:extLst>
                 </a:hlinkClick>
               </a:rPr>
-              <a:t>https://vercel.com</a:t>
+              <a:t>https://developer.mozilla.org/en-US/docs/Web/API</a:t>
             </a:r>
             <a:endParaRPr lang="en-US" sz="1500" dirty="0"/>
           </a:p>
@@ -6068,7 +6645,7 @@
                 <a:ea typeface="Arial" pitchFamily="34" charset="-122"/>
                 <a:cs typeface="Arial" pitchFamily="34" charset="-120"/>
               </a:rPr>
-              <a:t>Supabase</a:t>
+              <a:t>Next.js</a:t>
             </a:r>
             <a:endParaRPr lang="en-US" sz="4000" dirty="0"/>
           </a:p>
@@ -6133,7 +6710,7 @@
                 <a:ea typeface="Arial" pitchFamily="34" charset="-122"/>
                 <a:cs typeface="Arial" pitchFamily="34" charset="-120"/>
               </a:rPr>
-              <a:t>데이터베이스, 회원가입/로그인, API를 한 번에 제공해주는 서비스예요. 직접 서버를 만들지 않아도 백엔드를 빠르게 갖출 수 있어요. 이 프로젝트의 실제 데이터베이스이자 로그인 시스템이에요.</a:t>
+              <a:t>리액트(React) 기반으로 웹사이트를 쉽게 만들 수 있게 도와주는 프레임워크예요. 이 프로젝트의 웹 앱과 관리자 앱이 Next.js로 만들어졌어요.</a:t>
             </a:r>
             <a:endParaRPr lang="en-US" sz="2200" dirty="0"/>
           </a:p>
@@ -6193,7 +6770,7 @@
                   </a:extLst>
                 </a:hlinkClick>
               </a:rPr>
-              <a:t>https://supabase.com</a:t>
+              <a:t>https://nextjs.org</a:t>
             </a:r>
             <a:endParaRPr lang="en-US" sz="1500" dirty="0"/>
           </a:p>
@@ -6342,7 +6919,7 @@
                 <a:ea typeface="Arial" pitchFamily="34" charset="-122"/>
                 <a:cs typeface="Arial" pitchFamily="34" charset="-120"/>
               </a:rPr>
-              <a:t>RLS (Row Level Security)</a:t>
+              <a:t>Vercel</a:t>
             </a:r>
             <a:endParaRPr lang="en-US" sz="4000" dirty="0"/>
           </a:p>
@@ -6407,7 +6984,7 @@
                 <a:ea typeface="Arial" pitchFamily="34" charset="-122"/>
                 <a:cs typeface="Arial" pitchFamily="34" charset="-120"/>
               </a:rPr>
-              <a:t>데이터베이스 안에서 '누가 어떤 데이터를 보고 고칠 수 있는지'를 강제하는 보안 규칙이에요. 예: '내 글은 나만 지울 수 있다'를 DB가 직접 강제함.</a:t>
+              <a:t>Next.js를 만든 회사이고, Next.js로 만든 웹사이트를 인터넷에 올려서 서비스할 수 있게 해주는 배포 플랫폼이에요.</a:t>
             </a:r>
             <a:endParaRPr lang="en-US" sz="2200" dirty="0"/>
           </a:p>
@@ -6467,7 +7044,7 @@
                   </a:extLst>
                 </a:hlinkClick>
               </a:rPr>
-              <a:t>https://supabase.com/docs/guides/database/postgres/row-level-security</a:t>
+              <a:t>https://vercel.com</a:t>
             </a:r>
             <a:endParaRPr lang="en-US" sz="1500" dirty="0"/>
           </a:p>
@@ -6616,7 +7193,7 @@
                 <a:ea typeface="Arial" pitchFamily="34" charset="-122"/>
                 <a:cs typeface="Arial" pitchFamily="34" charset="-120"/>
               </a:rPr>
-              <a:t>Flutter</a:t>
+              <a:t>Supabase</a:t>
             </a:r>
             <a:endParaRPr lang="en-US" sz="4000" dirty="0"/>
           </a:p>
@@ -6681,7 +7258,7 @@
                 <a:ea typeface="Arial" pitchFamily="34" charset="-122"/>
                 <a:cs typeface="Arial" pitchFamily="34" charset="-120"/>
               </a:rPr>
-              <a:t>구글이 만든 도구로, 코드 하나로 아이폰, 안드로이드, 맥, 윈도우용 앱을 동시에 만들 수 있게 해줘요.</a:t>
+              <a:t>데이터베이스, 회원가입/로그인, API를 한 번에 제공해주는 서비스예요. 직접 서버를 만들지 않아도 백엔드를 빠르게 갖출 수 있어요. 이 프로젝트의 실제 데이터베이스이자 로그인 시스템이에요.</a:t>
             </a:r>
             <a:endParaRPr lang="en-US" sz="2200" dirty="0"/>
           </a:p>
@@ -6741,7 +7318,7 @@
                   </a:extLst>
                 </a:hlinkClick>
               </a:rPr>
-              <a:t>https://flutter.dev</a:t>
+              <a:t>https://supabase.com</a:t>
             </a:r>
             <a:endParaRPr lang="en-US" sz="1500" dirty="0"/>
           </a:p>
@@ -6851,7 +7428,7 @@
                 <a:ea typeface="Arial" pitchFamily="34" charset="-122"/>
                 <a:cs typeface="Arial" pitchFamily="34" charset="-120"/>
               </a:rPr>
-              <a:t>커리큘럼 로드맵</a:t>
+              <a:t>가장 먼저: Claude 계정 만들기</a:t>
             </a:r>
             <a:endParaRPr lang="en-US" sz="3000" dirty="0"/>
           </a:p>
@@ -6890,7 +7467,7 @@
                 <a:ea typeface="Arial" pitchFamily="34" charset="-122"/>
                 <a:cs typeface="Arial" pitchFamily="34" charset="-120"/>
               </a:rPr>
-              <a:t>이 오리엔테이션은 전체 과정 중 어디에 있을까요?</a:t>
+              <a:t>Claude Code를 쓰려면 계정이 필요해요</a:t>
             </a:r>
             <a:endParaRPr lang="en-US" sz="1600" dirty="0"/>
           </a:p>
@@ -6921,293 +7498,107 @@
       </p:sp>
       <p:sp>
         <p:nvSpPr>
-          <p:cNvPr id="6" name="Shape 4"/>
+          <p:cNvPr id="6" name="Text 4"/>
           <p:cNvSpPr/>
           <p:nvPr/>
         </p:nvSpPr>
         <p:spPr>
           <a:xfrm>
             <a:off x="548640" y="1828800"/>
-            <a:ext cx="11064240" cy="731520"/>
-          </a:xfrm>
-          <a:prstGeom prst="roundRect">
-            <a:avLst>
-              <a:gd name="adj" fmla="val 10000"/>
-            </a:avLst>
-          </a:prstGeom>
-          <a:solidFill>
-            <a:srgbClr val="202124"/>
-          </a:solidFill>
-          <a:ln w="12700">
-            <a:solidFill>
-              <a:srgbClr val="5B8DEF"/>
-            </a:solidFill>
-            <a:prstDash val="solid"/>
-          </a:ln>
-        </p:spPr>
-      </p:sp>
-      <p:sp>
-        <p:nvSpPr>
-          <p:cNvPr id="7" name="Text 5"/>
-          <p:cNvSpPr/>
-          <p:nvPr/>
-        </p:nvSpPr>
-        <p:spPr>
-          <a:xfrm>
-            <a:off x="822960" y="1828800"/>
-            <a:ext cx="10515600" cy="731520"/>
-          </a:xfrm>
-          <a:prstGeom prst="rect">
-            <a:avLst/>
-          </a:prstGeom>
-          <a:noFill/>
-          <a:ln/>
-        </p:spPr>
-        <p:txBody>
-          <a:bodyPr wrap="square" rtlCol="0" anchor="ctr"/>
-          <a:lstStyle/>
-          <a:p>
-            <a:pPr indent="0" marL="0">
-              <a:buNone/>
-            </a:pPr>
-            <a:r>
-              <a:rPr lang="en-US" sz="1600" b="1" dirty="0">
-                <a:solidFill>
-                  <a:srgbClr val="5B8DEF"/>
-                </a:solidFill>
-                <a:latin typeface="Arial" pitchFamily="34" charset="0"/>
-                <a:ea typeface="Arial" pitchFamily="34" charset="-122"/>
-                <a:cs typeface="Arial" pitchFamily="34" charset="-120"/>
-              </a:rPr>
-              <a:t>오리엔테이션  ← 지금 여기</a:t>
-            </a:r>
-            <a:pPr indent="0" marL="0">
-              <a:buNone/>
-            </a:pPr>
-            <a:r>
-              <a:rPr lang="en-US" sz="1600" dirty="0">
-                <a:solidFill>
-                  <a:srgbClr val="98999D"/>
-                </a:solidFill>
-                <a:latin typeface="Arial" pitchFamily="34" charset="0"/>
-                <a:ea typeface="Arial" pitchFamily="34" charset="-122"/>
-                <a:cs typeface="Arial" pitchFamily="34" charset="-120"/>
-              </a:rPr>
-              <a:t>   맛보기 강의 · Claude Code &amp; AI 에이전트 기초</a:t>
-            </a:r>
-            <a:endParaRPr lang="en-US" sz="1600" dirty="0"/>
-          </a:p>
-        </p:txBody>
-      </p:sp>
-      <p:sp>
-        <p:nvSpPr>
-          <p:cNvPr id="8" name="Text 6"/>
-          <p:cNvSpPr/>
-          <p:nvPr/>
-        </p:nvSpPr>
-        <p:spPr>
-          <a:xfrm>
-            <a:off x="822960" y="2670048"/>
-            <a:ext cx="10515600" cy="731520"/>
-          </a:xfrm>
-          <a:prstGeom prst="rect">
-            <a:avLst/>
-          </a:prstGeom>
-          <a:noFill/>
-          <a:ln/>
-        </p:spPr>
-        <p:txBody>
-          <a:bodyPr wrap="square" rtlCol="0" anchor="ctr"/>
-          <a:lstStyle/>
-          <a:p>
-            <a:pPr indent="0" marL="0">
-              <a:buNone/>
-            </a:pPr>
-            <a:r>
-              <a:rPr lang="en-US" sz="1600" b="1" dirty="0">
-                <a:solidFill>
-                  <a:srgbClr val="F2F2F0"/>
-                </a:solidFill>
-                <a:latin typeface="Arial" pitchFamily="34" charset="0"/>
-                <a:ea typeface="Arial" pitchFamily="34" charset="-122"/>
-                <a:cs typeface="Arial" pitchFamily="34" charset="-120"/>
-              </a:rPr>
-              <a:t>1주차</a:t>
-            </a:r>
-            <a:pPr indent="0" marL="0">
-              <a:buNone/>
-            </a:pPr>
-            <a:r>
-              <a:rPr lang="en-US" sz="1600" dirty="0">
-                <a:solidFill>
-                  <a:srgbClr val="98999D"/>
-                </a:solidFill>
-                <a:latin typeface="Arial" pitchFamily="34" charset="0"/>
-                <a:ea typeface="Arial" pitchFamily="34" charset="-122"/>
-                <a:cs typeface="Arial" pitchFamily="34" charset="-120"/>
-              </a:rPr>
-              <a:t>   프로젝트 시작</a:t>
-            </a:r>
-            <a:endParaRPr lang="en-US" sz="1600" dirty="0"/>
-          </a:p>
-        </p:txBody>
-      </p:sp>
-      <p:sp>
-        <p:nvSpPr>
-          <p:cNvPr id="9" name="Text 7"/>
-          <p:cNvSpPr/>
-          <p:nvPr/>
-        </p:nvSpPr>
-        <p:spPr>
-          <a:xfrm>
-            <a:off x="822960" y="3511296"/>
-            <a:ext cx="10515600" cy="731520"/>
-          </a:xfrm>
-          <a:prstGeom prst="rect">
-            <a:avLst/>
-          </a:prstGeom>
-          <a:noFill/>
-          <a:ln/>
-        </p:spPr>
-        <p:txBody>
-          <a:bodyPr wrap="square" rtlCol="0" anchor="ctr"/>
-          <a:lstStyle/>
-          <a:p>
-            <a:pPr indent="0" marL="0">
-              <a:buNone/>
-            </a:pPr>
-            <a:r>
-              <a:rPr lang="en-US" sz="1600" b="1" dirty="0">
-                <a:solidFill>
-                  <a:srgbClr val="F2F2F0"/>
-                </a:solidFill>
-                <a:latin typeface="Arial" pitchFamily="34" charset="0"/>
-                <a:ea typeface="Arial" pitchFamily="34" charset="-122"/>
-                <a:cs typeface="Arial" pitchFamily="34" charset="-120"/>
-              </a:rPr>
-              <a:t>2주차</a:t>
-            </a:r>
-            <a:pPr indent="0" marL="0">
-              <a:buNone/>
-            </a:pPr>
-            <a:r>
-              <a:rPr lang="en-US" sz="1600" dirty="0">
-                <a:solidFill>
-                  <a:srgbClr val="98999D"/>
-                </a:solidFill>
-                <a:latin typeface="Arial" pitchFamily="34" charset="0"/>
-                <a:ea typeface="Arial" pitchFamily="34" charset="-122"/>
-                <a:cs typeface="Arial" pitchFamily="34" charset="-120"/>
-              </a:rPr>
-              <a:t>   백엔드 구축</a:t>
-            </a:r>
-            <a:endParaRPr lang="en-US" sz="1600" dirty="0"/>
-          </a:p>
-        </p:txBody>
-      </p:sp>
-      <p:sp>
-        <p:nvSpPr>
-          <p:cNvPr id="10" name="Text 8"/>
-          <p:cNvSpPr/>
-          <p:nvPr/>
-        </p:nvSpPr>
-        <p:spPr>
-          <a:xfrm>
-            <a:off x="822960" y="4352544"/>
-            <a:ext cx="10515600" cy="731520"/>
-          </a:xfrm>
-          <a:prstGeom prst="rect">
-            <a:avLst/>
-          </a:prstGeom>
-          <a:noFill/>
-          <a:ln/>
-        </p:spPr>
-        <p:txBody>
-          <a:bodyPr wrap="square" rtlCol="0" anchor="ctr"/>
-          <a:lstStyle/>
-          <a:p>
-            <a:pPr indent="0" marL="0">
-              <a:buNone/>
-            </a:pPr>
-            <a:r>
-              <a:rPr lang="en-US" sz="1600" b="1" dirty="0">
-                <a:solidFill>
-                  <a:srgbClr val="F2F2F0"/>
-                </a:solidFill>
-                <a:latin typeface="Arial" pitchFamily="34" charset="0"/>
-                <a:ea typeface="Arial" pitchFamily="34" charset="-122"/>
-                <a:cs typeface="Arial" pitchFamily="34" charset="-120"/>
-              </a:rPr>
-              <a:t>3주차</a:t>
-            </a:r>
-            <a:pPr indent="0" marL="0">
-              <a:buNone/>
-            </a:pPr>
-            <a:r>
-              <a:rPr lang="en-US" sz="1600" dirty="0">
-                <a:solidFill>
-                  <a:srgbClr val="98999D"/>
-                </a:solidFill>
-                <a:latin typeface="Arial" pitchFamily="34" charset="0"/>
-                <a:ea typeface="Arial" pitchFamily="34" charset="-122"/>
-                <a:cs typeface="Arial" pitchFamily="34" charset="-120"/>
-              </a:rPr>
-              <a:t>   기능 고도화</a:t>
-            </a:r>
-            <a:endParaRPr lang="en-US" sz="1600" dirty="0"/>
-          </a:p>
-        </p:txBody>
-      </p:sp>
-      <p:sp>
-        <p:nvSpPr>
-          <p:cNvPr id="11" name="Text 9"/>
-          <p:cNvSpPr/>
-          <p:nvPr/>
-        </p:nvSpPr>
-        <p:spPr>
-          <a:xfrm>
-            <a:off x="822960" y="5193792"/>
-            <a:ext cx="10515600" cy="731520"/>
-          </a:xfrm>
-          <a:prstGeom prst="rect">
-            <a:avLst/>
-          </a:prstGeom>
-          <a:noFill/>
-          <a:ln/>
-        </p:spPr>
-        <p:txBody>
-          <a:bodyPr wrap="square" rtlCol="0" anchor="ctr"/>
-          <a:lstStyle/>
-          <a:p>
-            <a:pPr indent="0" marL="0">
-              <a:buNone/>
-            </a:pPr>
-            <a:r>
-              <a:rPr lang="en-US" sz="1600" b="1" dirty="0">
-                <a:solidFill>
-                  <a:srgbClr val="F2F2F0"/>
-                </a:solidFill>
-                <a:latin typeface="Arial" pitchFamily="34" charset="0"/>
-                <a:ea typeface="Arial" pitchFamily="34" charset="-122"/>
-                <a:cs typeface="Arial" pitchFamily="34" charset="-120"/>
-              </a:rPr>
-              <a:t>4주차</a:t>
-            </a:r>
-            <a:pPr indent="0" marL="0">
-              <a:buNone/>
-            </a:pPr>
-            <a:r>
-              <a:rPr lang="en-US" sz="1600" dirty="0">
-                <a:solidFill>
-                  <a:srgbClr val="98999D"/>
-                </a:solidFill>
-                <a:latin typeface="Arial" pitchFamily="34" charset="0"/>
-                <a:ea typeface="Arial" pitchFamily="34" charset="-122"/>
-                <a:cs typeface="Arial" pitchFamily="34" charset="-120"/>
-              </a:rPr>
-              <a:t>   배포 및 완성</a:t>
-            </a:r>
-            <a:endParaRPr lang="en-US" sz="1600" dirty="0"/>
+            <a:ext cx="11064240" cy="4572000"/>
+          </a:xfrm>
+          <a:prstGeom prst="rect">
+            <a:avLst/>
+          </a:prstGeom>
+          <a:noFill/>
+          <a:ln/>
+        </p:spPr>
+        <p:txBody>
+          <a:bodyPr wrap="square" rtlCol="0" anchor="t"/>
+          <a:lstStyle/>
+          <a:p>
+            <a:pPr marL="342900" indent="-342900">
+              <a:lnSpc>
+                <a:spcPct val="135000"/>
+              </a:lnSpc>
+              <a:buSzPct val="100000"/>
+              <a:buChar char="•"/>
+            </a:pPr>
+            <a:r>
+              <a:rPr lang="en-US" sz="1800" dirty="0">
+                <a:solidFill>
+                  <a:srgbClr val="F2F2F0"/>
+                </a:solidFill>
+                <a:latin typeface="Arial" pitchFamily="34" charset="0"/>
+                <a:ea typeface="Arial" pitchFamily="34" charset="-122"/>
+                <a:cs typeface="Arial" pitchFamily="34" charset="-120"/>
+              </a:rPr>
+              <a:t>Claude = Anthropic에서 만든 AI 모델/서비스. Claude Code = 그 Claude를 터미널 안에서 쓸 수 있게 해주는 도구</a:t>
+            </a:r>
+            <a:endParaRPr lang="en-US" sz="1800" dirty="0"/>
+          </a:p>
+          <a:p>
+            <a:pPr marL="342900" indent="-342900">
+              <a:lnSpc>
+                <a:spcPct val="135000"/>
+              </a:lnSpc>
+              <a:buSzPct val="100000"/>
+              <a:buChar char="•"/>
+            </a:pPr>
+            <a:r>
+              <a:rPr lang="en-US" sz="1800" dirty="0">
+                <a:solidFill>
+                  <a:srgbClr val="F2F2F0"/>
+                </a:solidFill>
+                <a:latin typeface="Arial" pitchFamily="34" charset="0"/>
+                <a:ea typeface="Arial" pitchFamily="34" charset="-122"/>
+                <a:cs typeface="Arial" pitchFamily="34" charset="-120"/>
+              </a:rPr>
+              <a:t>https://claude.ai 에서 이메일로 무료 가입 가능</a:t>
+            </a:r>
+            <a:endParaRPr lang="en-US" sz="1800" dirty="0"/>
+          </a:p>
+          <a:p>
+            <a:pPr marL="342900" indent="-342900">
+              <a:lnSpc>
+                <a:spcPct val="135000"/>
+              </a:lnSpc>
+              <a:buSzPct val="100000"/>
+              <a:buChar char="•"/>
+            </a:pPr>
+            <a:r>
+              <a:rPr lang="en-US" sz="1800" dirty="0">
+                <a:solidFill>
+                  <a:srgbClr val="F2F2F0"/>
+                </a:solidFill>
+                <a:latin typeface="Arial" pitchFamily="34" charset="0"/>
+                <a:ea typeface="Arial" pitchFamily="34" charset="-122"/>
+                <a:cs typeface="Arial" pitchFamily="34" charset="-120"/>
+              </a:rPr>
+              <a:t>가입한 계정으로 Claude Code를 실행하면 브라우저 로그인 창이 뜨고, 로그인하면 바로 사용 가능</a:t>
+            </a:r>
+            <a:endParaRPr lang="en-US" sz="1800" dirty="0"/>
+          </a:p>
+          <a:p>
+            <a:pPr marL="342900" indent="-342900">
+              <a:lnSpc>
+                <a:spcPct val="135000"/>
+              </a:lnSpc>
+              <a:buSzPct val="100000"/>
+              <a:buChar char="•"/>
+            </a:pPr>
+            <a:r>
+              <a:rPr lang="en-US" sz="1800" dirty="0">
+                <a:solidFill>
+                  <a:srgbClr val="F2F2F0"/>
+                </a:solidFill>
+                <a:latin typeface="Arial" pitchFamily="34" charset="0"/>
+                <a:ea typeface="Arial" pitchFamily="34" charset="-122"/>
+                <a:cs typeface="Arial" pitchFamily="34" charset="-120"/>
+              </a:rPr>
+              <a:t>회사/팀에서 API 키나 Anthropic Console 계정을 따로 준다면 그걸로 로그인해도 됨</a:t>
+            </a:r>
+            <a:endParaRPr lang="en-US" sz="1800" dirty="0"/>
           </a:p>
         </p:txBody>
       </p:sp>
@@ -7354,7 +7745,7 @@
                 <a:ea typeface="Arial" pitchFamily="34" charset="-122"/>
                 <a:cs typeface="Arial" pitchFamily="34" charset="-120"/>
               </a:rPr>
-              <a:t>npm</a:t>
+              <a:t>RLS (Row Level Security)</a:t>
             </a:r>
             <a:endParaRPr lang="en-US" sz="4000" dirty="0"/>
           </a:p>
@@ -7419,7 +7810,7 @@
                 <a:ea typeface="Arial" pitchFamily="34" charset="-122"/>
                 <a:cs typeface="Arial" pitchFamily="34" charset="-120"/>
               </a:rPr>
-              <a:t>자바스크립트 프로젝트에 필요한 외부 코드(라이브러리)를 설치하고 관리해주는 가장 기본적인 도구예요.</a:t>
+              <a:t>데이터베이스 안에서 '누가 어떤 데이터를 보고 고칠 수 있는지'를 강제하는 보안 규칙이에요. 예: '내 글은 나만 지울 수 있다'를 DB가 직접 강제함.</a:t>
             </a:r>
             <a:endParaRPr lang="en-US" sz="2200" dirty="0"/>
           </a:p>
@@ -7479,7 +7870,7 @@
                   </a:extLst>
                 </a:hlinkClick>
               </a:rPr>
-              <a:t>https://www.npmjs.com</a:t>
+              <a:t>https://supabase.com/docs/guides/database/postgres/row-level-security</a:t>
             </a:r>
             <a:endParaRPr lang="en-US" sz="1500" dirty="0"/>
           </a:p>
@@ -7628,7 +8019,7 @@
                 <a:ea typeface="Arial" pitchFamily="34" charset="-122"/>
                 <a:cs typeface="Arial" pitchFamily="34" charset="-120"/>
               </a:rPr>
-              <a:t>pnpm</a:t>
+              <a:t>Flutter</a:t>
             </a:r>
             <a:endParaRPr lang="en-US" sz="4000" dirty="0"/>
           </a:p>
@@ -7693,7 +8084,7 @@
                 <a:ea typeface="Arial" pitchFamily="34" charset="-122"/>
                 <a:cs typeface="Arial" pitchFamily="34" charset="-120"/>
               </a:rPr>
-              <a:t>npm과 같은 역할을 하지만 더 빠르고 디스크 공간을 아껴주는 패키지 매니저예요. 이 프로젝트는 pnpm을 사용해요.</a:t>
+              <a:t>구글이 만든 도구로, 코드 하나로 아이폰, 안드로이드, 맥, 윈도우용 앱을 동시에 만들 수 있게 해줘요.</a:t>
             </a:r>
             <a:endParaRPr lang="en-US" sz="2200" dirty="0"/>
           </a:p>
@@ -7753,7 +8144,7 @@
                   </a:extLst>
                 </a:hlinkClick>
               </a:rPr>
-              <a:t>https://pnpm.io</a:t>
+              <a:t>https://flutter.dev</a:t>
             </a:r>
             <a:endParaRPr lang="en-US" sz="1500" dirty="0"/>
           </a:p>
@@ -7902,7 +8293,7 @@
                 <a:ea typeface="Arial" pitchFamily="34" charset="-122"/>
                 <a:cs typeface="Arial" pitchFamily="34" charset="-120"/>
               </a:rPr>
-              <a:t>Claude Code</a:t>
+              <a:t>npm</a:t>
             </a:r>
             <a:endParaRPr lang="en-US" sz="4000" dirty="0"/>
           </a:p>
@@ -7967,7 +8358,7 @@
                 <a:ea typeface="Arial" pitchFamily="34" charset="-122"/>
                 <a:cs typeface="Arial" pitchFamily="34" charset="-120"/>
               </a:rPr>
-              <a:t>터미널에서 자연어로 대화하면서 코드를 대신 읽고, 쓰고, 실행까지 해주는 AI 코딩 도구예요. 이 프로젝트도 전부 Claude Code와 대화하면서 만들어졌어요.</a:t>
+              <a:t>자바스크립트 프로젝트에 필요한 외부 코드(라이브러리)를 설치하고 관리해주는 가장 기본적인 도구예요.</a:t>
             </a:r>
             <a:endParaRPr lang="en-US" sz="2200" dirty="0"/>
           </a:p>
@@ -8027,7 +8418,7 @@
                   </a:extLst>
                 </a:hlinkClick>
               </a:rPr>
-              <a:t>https://claude.com/claude-code</a:t>
+              <a:t>https://www.npmjs.com</a:t>
             </a:r>
             <a:endParaRPr lang="en-US" sz="1500" dirty="0"/>
           </a:p>
@@ -8112,8 +8503,8 @@
         </p:nvSpPr>
         <p:spPr>
           <a:xfrm>
-            <a:off x="548640" y="365760"/>
-            <a:ext cx="11064240" cy="822960"/>
+            <a:off x="548640" y="457200"/>
+            <a:ext cx="11064240" cy="457200"/>
           </a:xfrm>
           <a:prstGeom prst="rect">
             <a:avLst/>
@@ -8129,17 +8520,17 @@
               <a:buNone/>
             </a:pPr>
             <a:r>
-              <a:rPr lang="en-US" sz="3000" b="1" dirty="0">
-                <a:solidFill>
-                  <a:srgbClr val="F2F2F0"/>
-                </a:solidFill>
-                <a:latin typeface="Arial" pitchFamily="34" charset="0"/>
-                <a:ea typeface="Arial" pitchFamily="34" charset="-122"/>
-                <a:cs typeface="Arial" pitchFamily="34" charset="-120"/>
-              </a:rPr>
-              <a:t>프로젝트 개요</a:t>
-            </a:r>
-            <a:endParaRPr lang="en-US" sz="3000" dirty="0"/>
+              <a:rPr lang="en-US" sz="1400" dirty="0">
+                <a:solidFill>
+                  <a:srgbClr val="98999D"/>
+                </a:solidFill>
+                <a:latin typeface="Arial" pitchFamily="34" charset="0"/>
+                <a:ea typeface="Arial" pitchFamily="34" charset="-122"/>
+                <a:cs typeface="Arial" pitchFamily="34" charset="-120"/>
+              </a:rPr>
+              <a:t>용어 설명</a:t>
+            </a:r>
+            <a:endParaRPr lang="en-US" sz="1400" dirty="0"/>
           </a:p>
         </p:txBody>
       </p:sp>
@@ -8151,8 +8542,8 @@
         </p:nvSpPr>
         <p:spPr>
           <a:xfrm>
-            <a:off x="548640" y="1005840"/>
-            <a:ext cx="11064240" cy="457200"/>
+            <a:off x="548640" y="868680"/>
+            <a:ext cx="11064240" cy="1005840"/>
           </a:xfrm>
           <a:prstGeom prst="rect">
             <a:avLst/>
@@ -8168,17 +8559,17 @@
               <a:buNone/>
             </a:pPr>
             <a:r>
-              <a:rPr lang="en-US" sz="1600" dirty="0">
-                <a:solidFill>
-                  <a:srgbClr val="98999D"/>
-                </a:solidFill>
-                <a:latin typeface="Arial" pitchFamily="34" charset="0"/>
-                <a:ea typeface="Arial" pitchFamily="34" charset="-122"/>
-                <a:cs typeface="Arial" pitchFamily="34" charset="-120"/>
-              </a:rPr>
-              <a:t>무엇을, 왜 만들고 있는가</a:t>
-            </a:r>
-            <a:endParaRPr lang="en-US" sz="1600" dirty="0"/>
+              <a:rPr lang="en-US" sz="4000" b="1" dirty="0">
+                <a:solidFill>
+                  <a:srgbClr val="F2F2F0"/>
+                </a:solidFill>
+                <a:latin typeface="Arial" pitchFamily="34" charset="0"/>
+                <a:ea typeface="Arial" pitchFamily="34" charset="-122"/>
+                <a:cs typeface="Arial" pitchFamily="34" charset="-120"/>
+              </a:rPr>
+              <a:t>pnpm</a:t>
+            </a:r>
+            <a:endParaRPr lang="en-US" sz="4000" dirty="0"/>
           </a:p>
         </p:txBody>
       </p:sp>
@@ -8190,7 +8581,7 @@
         </p:nvSpPr>
         <p:spPr>
           <a:xfrm>
-            <a:off x="548640" y="1508760"/>
+            <a:off x="548640" y="1965960"/>
             <a:ext cx="11064240" cy="0"/>
           </a:xfrm>
           <a:prstGeom prst="line">
@@ -8213,8 +8604,8 @@
         </p:nvSpPr>
         <p:spPr>
           <a:xfrm>
-            <a:off x="548640" y="1828800"/>
-            <a:ext cx="11064240" cy="4572000"/>
+            <a:off x="548640" y="2286000"/>
+            <a:ext cx="11064240" cy="3108960"/>
           </a:xfrm>
           <a:prstGeom prst="rect">
             <a:avLst/>
@@ -8226,109 +8617,84 @@
           <a:bodyPr wrap="square" rtlCol="0" anchor="t"/>
           <a:lstStyle/>
           <a:p>
-            <a:pPr marL="342900" indent="-342900">
+            <a:pPr indent="0" marL="0">
               <a:lnSpc>
-                <a:spcPct val="135000"/>
+                <a:spcPct val="140000"/>
               </a:lnSpc>
-              <a:buSzPct val="100000"/>
-              <a:buChar char="•"/>
-            </a:pPr>
-            <a:r>
-              <a:rPr lang="en-US" sz="1800" dirty="0">
-                <a:solidFill>
-                  <a:srgbClr val="F2F2F0"/>
-                </a:solidFill>
-                <a:latin typeface="Arial" pitchFamily="34" charset="0"/>
-                <a:ea typeface="Arial" pitchFamily="34" charset="-122"/>
-                <a:cs typeface="Arial" pitchFamily="34" charset="-120"/>
-              </a:rPr>
-              <a:t>Threads(스레드)를 벤치마킹한 소셜 앱 — 짧은 글 피드, 좋아요, 팔로우</a:t>
-            </a:r>
-            <a:endParaRPr lang="en-US" sz="1800" dirty="0"/>
-          </a:p>
-          <a:p>
-            <a:pPr marL="342900" indent="-342900">
-              <a:lnSpc>
-                <a:spcPct val="135000"/>
-              </a:lnSpc>
-              <a:buSzPct val="100000"/>
-              <a:buChar char="•"/>
-            </a:pPr>
-            <a:r>
-              <a:rPr lang="en-US" sz="1800" dirty="0">
-                <a:solidFill>
-                  <a:srgbClr val="F2F2F0"/>
-                </a:solidFill>
-                <a:latin typeface="Arial" pitchFamily="34" charset="0"/>
-                <a:ea typeface="Arial" pitchFamily="34" charset="-122"/>
-                <a:cs typeface="Arial" pitchFamily="34" charset="-120"/>
-              </a:rPr>
-              <a:t>백엔드는 Supabase 하나로 통일: Postgres + Auth + RLS + (추후) Storage/Realtime</a:t>
-            </a:r>
-            <a:endParaRPr lang="en-US" sz="1800" dirty="0"/>
-          </a:p>
-          <a:p>
-            <a:pPr marL="342900" indent="-342900">
-              <a:lnSpc>
-                <a:spcPct val="135000"/>
-              </a:lnSpc>
-              <a:buSzPct val="100000"/>
-              <a:buChar char="•"/>
-            </a:pPr>
-            <a:r>
-              <a:rPr lang="en-US" sz="1800" dirty="0">
-                <a:solidFill>
-                  <a:srgbClr val="F2F2F0"/>
-                </a:solidFill>
-                <a:latin typeface="Arial" pitchFamily="34" charset="0"/>
-                <a:ea typeface="Arial" pitchFamily="34" charset="-122"/>
-                <a:cs typeface="Arial" pitchFamily="34" charset="-120"/>
-              </a:rPr>
-              <a:t>클라이언트는 세 개: 웹(Next.js 16), 네이티브 앱(Flutter), 관리자 웹(Next.js)</a:t>
-            </a:r>
-            <a:endParaRPr lang="en-US" sz="1800" dirty="0"/>
-          </a:p>
-          <a:p>
-            <a:pPr marL="342900" indent="-342900">
-              <a:lnSpc>
-                <a:spcPct val="135000"/>
-              </a:lnSpc>
-              <a:buSzPct val="100000"/>
-              <a:buChar char="•"/>
-            </a:pPr>
-            <a:r>
-              <a:rPr lang="en-US" sz="1800" dirty="0">
-                <a:solidFill>
-                  <a:srgbClr val="F2F2F0"/>
-                </a:solidFill>
-                <a:latin typeface="Arial" pitchFamily="34" charset="0"/>
-                <a:ea typeface="Arial" pitchFamily="34" charset="-122"/>
-                <a:cs typeface="Arial" pitchFamily="34" charset="-120"/>
-              </a:rPr>
-              <a:t>Flutter는 macOS/Windows/Android/iOS/Web까지 한 코드베이스로 커버</a:t>
-            </a:r>
-            <a:endParaRPr lang="en-US" sz="1800" dirty="0"/>
-          </a:p>
-          <a:p>
-            <a:pPr marL="342900" indent="-342900">
-              <a:lnSpc>
-                <a:spcPct val="135000"/>
-              </a:lnSpc>
-              <a:buSzPct val="100000"/>
-              <a:buChar char="•"/>
-            </a:pPr>
-            <a:r>
-              <a:rPr lang="en-US" sz="1800" dirty="0">
-                <a:solidFill>
-                  <a:srgbClr val="F2F2F0"/>
-                </a:solidFill>
-                <a:latin typeface="Arial" pitchFamily="34" charset="0"/>
-                <a:ea typeface="Arial" pitchFamily="34" charset="-122"/>
-                <a:cs typeface="Arial" pitchFamily="34" charset="-120"/>
-              </a:rPr>
-              <a:t>리포지토리 하나 안에서 각 앱을 폴더로 분리하는 모노리포 구조</a:t>
-            </a:r>
-            <a:endParaRPr lang="en-US" sz="1800" dirty="0"/>
+              <a:buNone/>
+            </a:pPr>
+            <a:r>
+              <a:rPr lang="en-US" sz="2200" dirty="0">
+                <a:solidFill>
+                  <a:srgbClr val="F2F2F0"/>
+                </a:solidFill>
+                <a:latin typeface="Arial" pitchFamily="34" charset="0"/>
+                <a:ea typeface="Arial" pitchFamily="34" charset="-122"/>
+                <a:cs typeface="Arial" pitchFamily="34" charset="-120"/>
+              </a:rPr>
+              <a:t>npm과 같은 역할을 하지만 더 빠르고 디스크 공간을 아껴주는 패키지 매니저예요. 이 프로젝트는 pnpm을 사용해요.</a:t>
+            </a:r>
+            <a:endParaRPr lang="en-US" sz="2200" dirty="0"/>
+          </a:p>
+        </p:txBody>
+      </p:sp>
+      <p:sp>
+        <p:nvSpPr>
+          <p:cNvPr id="7" name="Text 5"/>
+          <p:cNvSpPr/>
+          <p:nvPr/>
+        </p:nvSpPr>
+        <p:spPr>
+          <a:xfrm>
+            <a:off x="548640" y="5897880"/>
+            <a:ext cx="11064240" cy="365760"/>
+          </a:xfrm>
+          <a:prstGeom prst="rect">
+            <a:avLst/>
+          </a:prstGeom>
+          <a:noFill/>
+          <a:ln/>
+        </p:spPr>
+        <p:txBody>
+          <a:bodyPr wrap="square" rtlCol="0" anchor="ctr"/>
+          <a:lstStyle/>
+          <a:p>
+            <a:pPr indent="0" marL="0">
+              <a:buNone/>
+            </a:pPr>
+            <a:r>
+              <a:rPr lang="en-US" sz="1500" dirty="0">
+                <a:solidFill>
+                  <a:srgbClr val="98999D"/>
+                </a:solidFill>
+                <a:latin typeface="Arial" pitchFamily="34" charset="0"/>
+                <a:ea typeface="Arial" pitchFamily="34" charset="-122"/>
+                <a:cs typeface="Arial" pitchFamily="34" charset="-120"/>
+              </a:rPr>
+              <a:t>자세히 보기: </a:t>
+            </a:r>
+            <a:pPr indent="0" marL="0">
+              <a:buNone/>
+            </a:pPr>
+            <a:r>
+              <a:rPr lang="en-US" sz="1500" u="sng" dirty="0">
+                <a:solidFill>
+                  <a:srgbClr val="5B8DEF"/>
+                </a:solidFill>
+                <a:latin typeface="Arial" pitchFamily="34" charset="0"/>
+                <a:ea typeface="Arial" pitchFamily="34" charset="-122"/>
+                <a:cs typeface="Arial" pitchFamily="34" charset="-120"/>
+                <a:hlinkClick r:id="rId1" invalidUrl="" action="" tgtFrame="" tooltip="" history="1" highlightClick="0" endSnd="0">
+                  <a:extLst>
+                    <a:ext uri="{A12FA001-AC4F-418D-AE19-62706E023703}">
+                      <ahyp:hlinkClr xmlns:ahyp="http://schemas.microsoft.com/office/drawing/2018/hyperlinkcolor" val="tx"/>
+                    </a:ext>
+                  </a:extLst>
+                </a:hlinkClick>
+              </a:rPr>
+              <a:t>https://pnpm.io</a:t>
+            </a:r>
+            <a:endParaRPr lang="en-US" sz="1500" dirty="0"/>
           </a:p>
         </p:txBody>
       </p:sp>
@@ -8411,8 +8777,8 @@
         </p:nvSpPr>
         <p:spPr>
           <a:xfrm>
-            <a:off x="548640" y="365760"/>
-            <a:ext cx="11064240" cy="822960"/>
+            <a:off x="548640" y="457200"/>
+            <a:ext cx="11064240" cy="457200"/>
           </a:xfrm>
           <a:prstGeom prst="rect">
             <a:avLst/>
@@ -8428,17 +8794,17 @@
               <a:buNone/>
             </a:pPr>
             <a:r>
-              <a:rPr lang="en-US" sz="3000" b="1" dirty="0">
-                <a:solidFill>
-                  <a:srgbClr val="F2F2F0"/>
-                </a:solidFill>
-                <a:latin typeface="Arial" pitchFamily="34" charset="0"/>
-                <a:ea typeface="Arial" pitchFamily="34" charset="-122"/>
-                <a:cs typeface="Arial" pitchFamily="34" charset="-120"/>
-              </a:rPr>
-              <a:t>데이터 모델</a:t>
-            </a:r>
-            <a:endParaRPr lang="en-US" sz="3000" dirty="0"/>
+              <a:rPr lang="en-US" sz="1400" dirty="0">
+                <a:solidFill>
+                  <a:srgbClr val="98999D"/>
+                </a:solidFill>
+                <a:latin typeface="Arial" pitchFamily="34" charset="0"/>
+                <a:ea typeface="Arial" pitchFamily="34" charset="-122"/>
+                <a:cs typeface="Arial" pitchFamily="34" charset="-120"/>
+              </a:rPr>
+              <a:t>용어 설명</a:t>
+            </a:r>
+            <a:endParaRPr lang="en-US" sz="1400" dirty="0"/>
           </a:p>
         </p:txBody>
       </p:sp>
@@ -8450,8 +8816,8 @@
         </p:nvSpPr>
         <p:spPr>
           <a:xfrm>
-            <a:off x="548640" y="1005840"/>
-            <a:ext cx="11064240" cy="457200"/>
+            <a:off x="548640" y="868680"/>
+            <a:ext cx="11064240" cy="1005840"/>
           </a:xfrm>
           <a:prstGeom prst="rect">
             <a:avLst/>
@@ -8467,17 +8833,17 @@
               <a:buNone/>
             </a:pPr>
             <a:r>
-              <a:rPr lang="en-US" sz="1600" dirty="0">
-                <a:solidFill>
-                  <a:srgbClr val="98999D"/>
-                </a:solidFill>
-                <a:latin typeface="Arial" pitchFamily="34" charset="0"/>
-                <a:ea typeface="Arial" pitchFamily="34" charset="-122"/>
-                <a:cs typeface="Arial" pitchFamily="34" charset="-120"/>
-              </a:rPr>
-              <a:t>supabase/schema.sql</a:t>
-            </a:r>
-            <a:endParaRPr lang="en-US" sz="1600" dirty="0"/>
+              <a:rPr lang="en-US" sz="4000" b="1" dirty="0">
+                <a:solidFill>
+                  <a:srgbClr val="F2F2F0"/>
+                </a:solidFill>
+                <a:latin typeface="Arial" pitchFamily="34" charset="0"/>
+                <a:ea typeface="Arial" pitchFamily="34" charset="-122"/>
+                <a:cs typeface="Arial" pitchFamily="34" charset="-120"/>
+              </a:rPr>
+              <a:t>Claude Code</a:t>
+            </a:r>
+            <a:endParaRPr lang="en-US" sz="4000" dirty="0"/>
           </a:p>
         </p:txBody>
       </p:sp>
@@ -8489,7 +8855,7 @@
         </p:nvSpPr>
         <p:spPr>
           <a:xfrm>
-            <a:off x="548640" y="1508760"/>
+            <a:off x="548640" y="1965960"/>
             <a:ext cx="11064240" cy="0"/>
           </a:xfrm>
           <a:prstGeom prst="line">
@@ -8506,30 +8872,45 @@
       </p:sp>
       <p:sp>
         <p:nvSpPr>
-          <p:cNvPr id="6" name="Shape 4"/>
-          <p:cNvSpPr/>
-          <p:nvPr/>
-        </p:nvSpPr>
-        <p:spPr>
-          <a:xfrm>
-            <a:off x="548640" y="1828800"/>
-            <a:ext cx="11064240" cy="4206240"/>
-          </a:xfrm>
-          <a:prstGeom prst="roundRect">
-            <a:avLst>
-              <a:gd name="adj" fmla="val 1739"/>
-            </a:avLst>
-          </a:prstGeom>
-          <a:solidFill>
-            <a:srgbClr val="202124"/>
-          </a:solidFill>
-          <a:ln w="12700">
-            <a:solidFill>
-              <a:srgbClr val="202124"/>
-            </a:solidFill>
-            <a:prstDash val="solid"/>
-          </a:ln>
-        </p:spPr>
+          <p:cNvPr id="6" name="Text 4"/>
+          <p:cNvSpPr/>
+          <p:nvPr/>
+        </p:nvSpPr>
+        <p:spPr>
+          <a:xfrm>
+            <a:off x="548640" y="2286000"/>
+            <a:ext cx="11064240" cy="3108960"/>
+          </a:xfrm>
+          <a:prstGeom prst="rect">
+            <a:avLst/>
+          </a:prstGeom>
+          <a:noFill/>
+          <a:ln/>
+        </p:spPr>
+        <p:txBody>
+          <a:bodyPr wrap="square" rtlCol="0" anchor="t"/>
+          <a:lstStyle/>
+          <a:p>
+            <a:pPr indent="0" marL="0">
+              <a:lnSpc>
+                <a:spcPct val="140000"/>
+              </a:lnSpc>
+              <a:buNone/>
+            </a:pPr>
+            <a:r>
+              <a:rPr lang="en-US" sz="2200" dirty="0">
+                <a:solidFill>
+                  <a:srgbClr val="F2F2F0"/>
+                </a:solidFill>
+                <a:latin typeface="Arial" pitchFamily="34" charset="0"/>
+                <a:ea typeface="Arial" pitchFamily="34" charset="-122"/>
+                <a:cs typeface="Arial" pitchFamily="34" charset="-120"/>
+              </a:rPr>
+              <a:t>터미널에서 자연어로 대화하면서 코드를 대신 읽고, 쓰고, 실행까지 해주는 AI 코딩 도구예요. 이 프로젝트도 전부 Claude Code와 대화하면서 만들어졌어요.</a:t>
+            </a:r>
+            <a:endParaRPr lang="en-US" sz="2200" dirty="0"/>
+          </a:p>
+        </p:txBody>
       </p:sp>
       <p:sp>
         <p:nvSpPr>
@@ -8539,137 +8920,55 @@
         </p:nvSpPr>
         <p:spPr>
           <a:xfrm>
-            <a:off x="822960" y="2057400"/>
-            <a:ext cx="10515600" cy="3749040"/>
-          </a:xfrm>
-          <a:prstGeom prst="rect">
-            <a:avLst/>
-          </a:prstGeom>
-          <a:noFill/>
-          <a:ln/>
-        </p:spPr>
-        <p:txBody>
-          <a:bodyPr wrap="square" rtlCol="0" anchor="t"/>
-          <a:lstStyle/>
-          <a:p>
-            <a:pPr indent="0" marL="0">
-              <a:buNone/>
-            </a:pPr>
-            <a:r>
-              <a:rPr lang="en-US" sz="1700" dirty="0">
-                <a:solidFill>
-                  <a:srgbClr val="F2F2F0"/>
-                </a:solidFill>
-                <a:latin typeface="Menlo" pitchFamily="34" charset="0"/>
-                <a:ea typeface="Menlo" pitchFamily="34" charset="-122"/>
-                <a:cs typeface="Menlo" pitchFamily="34" charset="-120"/>
-              </a:rPr>
-              <a:t>profiles   id(uuid, = auth.users.id) · username(unique) · display_name</a:t>
-            </a:r>
-            <a:endParaRPr lang="en-US" sz="1700" dirty="0"/>
-          </a:p>
-          <a:p>
-            <a:pPr indent="0" marL="0">
-              <a:buNone/>
-            </a:pPr>
-            <a:r>
-              <a:rPr lang="en-US" sz="1700" dirty="0">
-                <a:solidFill>
-                  <a:srgbClr val="F2F2F0"/>
-                </a:solidFill>
-                <a:latin typeface="Menlo" pitchFamily="34" charset="0"/>
-                <a:ea typeface="Menlo" pitchFamily="34" charset="-122"/>
-                <a:cs typeface="Menlo" pitchFamily="34" charset="-120"/>
-              </a:rPr>
-              <a:t>           avatar_url · bio · is_admin · is_banned</a:t>
-            </a:r>
-            <a:endParaRPr lang="en-US" sz="1700" dirty="0"/>
-          </a:p>
-          <a:p>
-            <a:pPr indent="0" marL="0">
-              <a:buNone/>
-            </a:pPr>
-            <a:endParaRPr lang="en-US" sz="1700" dirty="0"/>
-          </a:p>
-          <a:p>
-            <a:pPr indent="0" marL="0">
-              <a:buNone/>
-            </a:pPr>
-            <a:r>
-              <a:rPr lang="en-US" sz="1700" dirty="0">
-                <a:solidFill>
-                  <a:srgbClr val="F2F2F0"/>
-                </a:solidFill>
-                <a:latin typeface="Menlo" pitchFamily="34" charset="0"/>
-                <a:ea typeface="Menlo" pitchFamily="34" charset="-122"/>
-                <a:cs typeface="Menlo" pitchFamily="34" charset="-120"/>
-              </a:rPr>
-              <a:t>posts      id · author_id → profiles.id · content · reply_to_id(nullable)</a:t>
-            </a:r>
-            <a:endParaRPr lang="en-US" sz="1700" dirty="0"/>
-          </a:p>
-          <a:p>
-            <a:pPr indent="0" marL="0">
-              <a:buNone/>
-            </a:pPr>
-            <a:endParaRPr lang="en-US" sz="1700" dirty="0"/>
-          </a:p>
-          <a:p>
-            <a:pPr indent="0" marL="0">
-              <a:buNone/>
-            </a:pPr>
-            <a:r>
-              <a:rPr lang="en-US" sz="1700" dirty="0">
-                <a:solidFill>
-                  <a:srgbClr val="F2F2F0"/>
-                </a:solidFill>
-                <a:latin typeface="Menlo" pitchFamily="34" charset="0"/>
-                <a:ea typeface="Menlo" pitchFamily="34" charset="-122"/>
-                <a:cs typeface="Menlo" pitchFamily="34" charset="-120"/>
-              </a:rPr>
-              <a:t>likes      post_id → posts.id · user_id → profiles.id  (복합 PK)</a:t>
-            </a:r>
-            <a:endParaRPr lang="en-US" sz="1700" dirty="0"/>
-          </a:p>
-          <a:p>
-            <a:pPr indent="0" marL="0">
-              <a:buNone/>
-            </a:pPr>
-            <a:endParaRPr lang="en-US" sz="1700" dirty="0"/>
-          </a:p>
-          <a:p>
-            <a:pPr indent="0" marL="0">
-              <a:buNone/>
-            </a:pPr>
-            <a:r>
-              <a:rPr lang="en-US" sz="1700" dirty="0">
-                <a:solidFill>
-                  <a:srgbClr val="F2F2F0"/>
-                </a:solidFill>
-                <a:latin typeface="Menlo" pitchFamily="34" charset="0"/>
-                <a:ea typeface="Menlo" pitchFamily="34" charset="-122"/>
-                <a:cs typeface="Menlo" pitchFamily="34" charset="-120"/>
-              </a:rPr>
-              <a:t>follows    follower_id → profiles.id · following_id → profiles.id</a:t>
-            </a:r>
-            <a:endParaRPr lang="en-US" sz="1700" dirty="0"/>
-          </a:p>
-          <a:p>
-            <a:pPr indent="0" marL="0">
-              <a:buNone/>
-            </a:pPr>
-            <a:r>
-              <a:rPr lang="en-US" sz="1700" dirty="0">
-                <a:solidFill>
-                  <a:srgbClr val="F2F2F0"/>
-                </a:solidFill>
-                <a:latin typeface="Menlo" pitchFamily="34" charset="0"/>
-                <a:ea typeface="Menlo" pitchFamily="34" charset="-122"/>
-                <a:cs typeface="Menlo" pitchFamily="34" charset="-120"/>
-              </a:rPr>
-              <a:t>           (복합 PK, follower ≠ following 체크 제약)</a:t>
-            </a:r>
-            <a:endParaRPr lang="en-US" sz="1700" dirty="0"/>
+            <a:off x="548640" y="5897880"/>
+            <a:ext cx="11064240" cy="365760"/>
+          </a:xfrm>
+          <a:prstGeom prst="rect">
+            <a:avLst/>
+          </a:prstGeom>
+          <a:noFill/>
+          <a:ln/>
+        </p:spPr>
+        <p:txBody>
+          <a:bodyPr wrap="square" rtlCol="0" anchor="ctr"/>
+          <a:lstStyle/>
+          <a:p>
+            <a:pPr indent="0" marL="0">
+              <a:buNone/>
+            </a:pPr>
+            <a:r>
+              <a:rPr lang="en-US" sz="1500" dirty="0">
+                <a:solidFill>
+                  <a:srgbClr val="98999D"/>
+                </a:solidFill>
+                <a:latin typeface="Arial" pitchFamily="34" charset="0"/>
+                <a:ea typeface="Arial" pitchFamily="34" charset="-122"/>
+                <a:cs typeface="Arial" pitchFamily="34" charset="-120"/>
+              </a:rPr>
+              <a:t>자세히 보기: </a:t>
+            </a:r>
+            <a:pPr indent="0" marL="0">
+              <a:buNone/>
+            </a:pPr>
+            <a:r>
+              <a:rPr lang="en-US" sz="1500" u="sng" dirty="0">
+                <a:solidFill>
+                  <a:srgbClr val="5B8DEF"/>
+                </a:solidFill>
+                <a:latin typeface="Arial" pitchFamily="34" charset="0"/>
+                <a:ea typeface="Arial" pitchFamily="34" charset="-122"/>
+                <a:cs typeface="Arial" pitchFamily="34" charset="-120"/>
+                <a:hlinkClick r:id="rId1" invalidUrl="" action="" tgtFrame="" tooltip="" history="1" highlightClick="0" endSnd="0">
+                  <a:extLst>
+                    <a:ext uri="{A12FA001-AC4F-418D-AE19-62706E023703}">
+                      <ahyp:hlinkClr xmlns:ahyp="http://schemas.microsoft.com/office/drawing/2018/hyperlinkcolor" val="tx"/>
+                    </a:ext>
+                  </a:extLst>
+                </a:hlinkClick>
+              </a:rPr>
+              <a:t>https://claude.com/claude-code</a:t>
+            </a:r>
+            <a:endParaRPr lang="en-US" sz="1500" dirty="0"/>
           </a:p>
         </p:txBody>
       </p:sp>
@@ -8777,7 +9076,7 @@
                 <a:ea typeface="Arial" pitchFamily="34" charset="-122"/>
                 <a:cs typeface="Arial" pitchFamily="34" charset="-120"/>
               </a:rPr>
-              <a:t>인증 흐름</a:t>
+              <a:t>프로젝트 개요</a:t>
             </a:r>
             <a:endParaRPr lang="en-US" sz="3000" dirty="0"/>
           </a:p>
@@ -8816,7 +9115,7 @@
                 <a:ea typeface="Arial" pitchFamily="34" charset="-122"/>
                 <a:cs typeface="Arial" pitchFamily="34" charset="-120"/>
               </a:rPr>
-              <a:t>Supabase Auth + 자동 프로필 생성</a:t>
+              <a:t>무엇을, 왜 만들고 있는가</a:t>
             </a:r>
             <a:endParaRPr lang="en-US" sz="1600" dirty="0"/>
           </a:p>
@@ -8882,7 +9181,7 @@
                 <a:ea typeface="Arial" pitchFamily="34" charset="-122"/>
                 <a:cs typeface="Arial" pitchFamily="34" charset="-120"/>
               </a:rPr>
-              <a:t>가입: 이메일 + 비밀번호만 입력 (아이디는 받지 않음)</a:t>
+              <a:t>Threads(스레드)를 벤치마킹한 소셜 앱 — 짧은 글 피드, 좋아요, 팔로우</a:t>
             </a:r>
             <a:endParaRPr lang="en-US" sz="1800" dirty="0"/>
           </a:p>
@@ -8903,7 +9202,7 @@
                 <a:ea typeface="Arial" pitchFamily="34" charset="-122"/>
                 <a:cs typeface="Arial" pitchFamily="34" charset="-120"/>
               </a:rPr>
-              <a:t>auth.users insert 시 handle_new_user 트리거가 profiles row를 자동 생성</a:t>
+              <a:t>백엔드는 Supabase 하나로 통일: Postgres + Auth + RLS + (추후) Storage/Realtime</a:t>
             </a:r>
             <a:endParaRPr lang="en-US" sz="1800" dirty="0"/>
           </a:p>
@@ -8924,7 +9223,7 @@
                 <a:ea typeface="Arial" pitchFamily="34" charset="-122"/>
                 <a:cs typeface="Arial" pitchFamily="34" charset="-120"/>
               </a:rPr>
-              <a:t>username이 없으면 user_&lt;uuid앞8자리&gt;, display_name은 이메일 앞부분으로 대체</a:t>
+              <a:t>클라이언트는 세 개: 웹(Next.js 16), 네이티브 앱(Flutter), 관리자 웹(Next.js)</a:t>
             </a:r>
             <a:endParaRPr lang="en-US" sz="1800" dirty="0"/>
           </a:p>
@@ -8945,7 +9244,7 @@
                 <a:ea typeface="Arial" pitchFamily="34" charset="-122"/>
                 <a:cs typeface="Arial" pitchFamily="34" charset="-120"/>
               </a:rPr>
-              <a:t>이메일 확인(confirm email)이 켜져 있어 인증 전엔 로그인 불가 → /login?confirm=1 안내</a:t>
+              <a:t>Flutter는 macOS/Windows/Android/iOS/Web까지 한 코드베이스로 커버</a:t>
             </a:r>
             <a:endParaRPr lang="en-US" sz="1800" dirty="0"/>
           </a:p>
@@ -8966,7 +9265,7 @@
                 <a:ea typeface="Arial" pitchFamily="34" charset="-122"/>
                 <a:cs typeface="Arial" pitchFamily="34" charset="-120"/>
               </a:rPr>
-              <a:t>모든 테이블에 RLS 적용: 읽기는 공개, 쓰기는 auth.uid()가 본인 것일 때만 허용</a:t>
+              <a:t>리포지토리 하나 안에서 각 앱을 폴더로 분리하는 모노리포 구조</a:t>
             </a:r>
             <a:endParaRPr lang="en-US" sz="1800" dirty="0"/>
           </a:p>
@@ -9076,7 +9375,7 @@
                 <a:ea typeface="Arial" pitchFamily="34" charset="-122"/>
                 <a:cs typeface="Arial" pitchFamily="34" charset="-120"/>
               </a:rPr>
-              <a:t>웹 앱 (Next.js 16)</a:t>
+              <a:t>데이터 모델</a:t>
             </a:r>
             <a:endParaRPr lang="en-US" sz="3000" dirty="0"/>
           </a:p>
@@ -9115,7 +9414,7 @@
                 <a:ea typeface="Arial" pitchFamily="34" charset="-122"/>
                 <a:cs typeface="Arial" pitchFamily="34" charset="-120"/>
               </a:rPr>
-              <a:t>App Router + Server Actions</a:t>
+              <a:t>supabase/schema.sql</a:t>
             </a:r>
             <a:endParaRPr lang="en-US" sz="1600" dirty="0"/>
           </a:p>
@@ -9146,14 +9445,41 @@
       </p:sp>
       <p:sp>
         <p:nvSpPr>
-          <p:cNvPr id="6" name="Text 4"/>
+          <p:cNvPr id="6" name="Shape 4"/>
           <p:cNvSpPr/>
           <p:nvPr/>
         </p:nvSpPr>
         <p:spPr>
           <a:xfrm>
             <a:off x="548640" y="1828800"/>
-            <a:ext cx="11064240" cy="4572000"/>
+            <a:ext cx="11064240" cy="4206240"/>
+          </a:xfrm>
+          <a:prstGeom prst="roundRect">
+            <a:avLst>
+              <a:gd name="adj" fmla="val 1739"/>
+            </a:avLst>
+          </a:prstGeom>
+          <a:solidFill>
+            <a:srgbClr val="202124"/>
+          </a:solidFill>
+          <a:ln w="12700">
+            <a:solidFill>
+              <a:srgbClr val="202124"/>
+            </a:solidFill>
+            <a:prstDash val="solid"/>
+          </a:ln>
+        </p:spPr>
+      </p:sp>
+      <p:sp>
+        <p:nvSpPr>
+          <p:cNvPr id="7" name="Text 5"/>
+          <p:cNvSpPr/>
+          <p:nvPr/>
+        </p:nvSpPr>
+        <p:spPr>
+          <a:xfrm>
+            <a:off x="822960" y="2057400"/>
+            <a:ext cx="10515600" cy="3749040"/>
           </a:xfrm>
           <a:prstGeom prst="rect">
             <a:avLst/>
@@ -9165,109 +9491,124 @@
           <a:bodyPr wrap="square" rtlCol="0" anchor="t"/>
           <a:lstStyle/>
           <a:p>
-            <a:pPr marL="342900" indent="-342900">
-              <a:lnSpc>
-                <a:spcPct val="135000"/>
-              </a:lnSpc>
-              <a:buSzPct val="100000"/>
-              <a:buChar char="•"/>
-            </a:pPr>
-            <a:r>
-              <a:rPr lang="en-US" sz="1800" dirty="0">
-                <a:solidFill>
-                  <a:srgbClr val="F2F2F0"/>
-                </a:solidFill>
-                <a:latin typeface="Arial" pitchFamily="34" charset="0"/>
-                <a:ea typeface="Arial" pitchFamily="34" charset="-122"/>
-                <a:cs typeface="Arial" pitchFamily="34" charset="-120"/>
-              </a:rPr>
-              <a:t>라우트 대부분이 Server Component — 서버에서 Supabase를 직접 쿼리</a:t>
-            </a:r>
-            <a:endParaRPr lang="en-US" sz="1800" dirty="0"/>
-          </a:p>
-          <a:p>
-            <a:pPr marL="342900" indent="-342900">
-              <a:lnSpc>
-                <a:spcPct val="135000"/>
-              </a:lnSpc>
-              <a:buSzPct val="100000"/>
-              <a:buChar char="•"/>
-            </a:pPr>
-            <a:r>
-              <a:rPr lang="en-US" sz="1800" dirty="0">
-                <a:solidFill>
-                  <a:srgbClr val="F2F2F0"/>
-                </a:solidFill>
-                <a:latin typeface="Arial" pitchFamily="34" charset="0"/>
-                <a:ea typeface="Arial" pitchFamily="34" charset="-122"/>
-                <a:cs typeface="Arial" pitchFamily="34" charset="-120"/>
-              </a:rPr>
-              <a:t>쓰기 작업(좋아요, 팔로우, 글쓰기, 로그인/가입)은 전부 Server Actions ("use server")</a:t>
-            </a:r>
-            <a:endParaRPr lang="en-US" sz="1800" dirty="0"/>
-          </a:p>
-          <a:p>
-            <a:pPr marL="342900" indent="-342900">
-              <a:lnSpc>
-                <a:spcPct val="135000"/>
-              </a:lnSpc>
-              <a:buSzPct val="100000"/>
-              <a:buChar char="•"/>
-            </a:pPr>
-            <a:r>
-              <a:rPr lang="en-US" sz="1800" dirty="0">
-                <a:solidFill>
-                  <a:srgbClr val="F2F2F0"/>
-                </a:solidFill>
-                <a:latin typeface="Arial" pitchFamily="34" charset="0"/>
-                <a:ea typeface="Arial" pitchFamily="34" charset="-122"/>
-                <a:cs typeface="Arial" pitchFamily="34" charset="-120"/>
-              </a:rPr>
-              <a:t>src/proxy.ts (Next 16의 middleware 후속 컨벤션)가 세션 갱신 + /new, /settings 보호</a:t>
-            </a:r>
-            <a:endParaRPr lang="en-US" sz="1800" dirty="0"/>
-          </a:p>
-          <a:p>
-            <a:pPr marL="342900" indent="-342900">
-              <a:lnSpc>
-                <a:spcPct val="135000"/>
-              </a:lnSpc>
-              <a:buSzPct val="100000"/>
-              <a:buChar char="•"/>
-            </a:pPr>
-            <a:r>
-              <a:rPr lang="en-US" sz="1800" dirty="0">
-                <a:solidFill>
-                  <a:srgbClr val="F2F2F0"/>
-                </a:solidFill>
-                <a:latin typeface="Arial" pitchFamily="34" charset="0"/>
-                <a:ea typeface="Arial" pitchFamily="34" charset="-122"/>
-                <a:cs typeface="Arial" pitchFamily="34" charset="-120"/>
-              </a:rPr>
-              <a:t>src/lib/supabase/{client,server}.ts — 브라우저용 / 서버용 Supabase 클라이언트 분리</a:t>
-            </a:r>
-            <a:endParaRPr lang="en-US" sz="1800" dirty="0"/>
-          </a:p>
-          <a:p>
-            <a:pPr marL="342900" indent="-342900">
-              <a:lnSpc>
-                <a:spcPct val="135000"/>
-              </a:lnSpc>
-              <a:buSzPct val="100000"/>
-              <a:buChar char="•"/>
-            </a:pPr>
-            <a:r>
-              <a:rPr lang="en-US" sz="1800" dirty="0">
-                <a:solidFill>
-                  <a:srgbClr val="F2F2F0"/>
-                </a:solidFill>
-                <a:latin typeface="Arial" pitchFamily="34" charset="0"/>
-                <a:ea typeface="Arial" pitchFamily="34" charset="-122"/>
-                <a:cs typeface="Arial" pitchFamily="34" charset="-120"/>
-              </a:rPr>
-              <a:t>포트 3721에서 개발 서버 실행 (pnpm dev)</a:t>
-            </a:r>
-            <a:endParaRPr lang="en-US" sz="1800" dirty="0"/>
+            <a:pPr indent="0" marL="0">
+              <a:buNone/>
+            </a:pPr>
+            <a:r>
+              <a:rPr lang="en-US" sz="1700" dirty="0">
+                <a:solidFill>
+                  <a:srgbClr val="F2F2F0"/>
+                </a:solidFill>
+                <a:latin typeface="Menlo" pitchFamily="34" charset="0"/>
+                <a:ea typeface="Menlo" pitchFamily="34" charset="-122"/>
+                <a:cs typeface="Menlo" pitchFamily="34" charset="-120"/>
+              </a:rPr>
+              <a:t>profiles   id(uuid, = auth.users.id) · username(unique) · display_name</a:t>
+            </a:r>
+            <a:endParaRPr lang="en-US" sz="1700" dirty="0"/>
+          </a:p>
+          <a:p>
+            <a:pPr indent="0" marL="0">
+              <a:buNone/>
+            </a:pPr>
+            <a:r>
+              <a:rPr lang="en-US" sz="1700" dirty="0">
+                <a:solidFill>
+                  <a:srgbClr val="F2F2F0"/>
+                </a:solidFill>
+                <a:latin typeface="Menlo" pitchFamily="34" charset="0"/>
+                <a:ea typeface="Menlo" pitchFamily="34" charset="-122"/>
+                <a:cs typeface="Menlo" pitchFamily="34" charset="-120"/>
+              </a:rPr>
+              <a:t>           avatar_url · bio · is_admin · is_banned</a:t>
+            </a:r>
+            <a:endParaRPr lang="en-US" sz="1700" dirty="0"/>
+          </a:p>
+          <a:p>
+            <a:pPr indent="0" marL="0">
+              <a:buNone/>
+            </a:pPr>
+            <a:endParaRPr lang="en-US" sz="1700" dirty="0"/>
+          </a:p>
+          <a:p>
+            <a:pPr indent="0" marL="0">
+              <a:buNone/>
+            </a:pPr>
+            <a:r>
+              <a:rPr lang="en-US" sz="1700" dirty="0">
+                <a:solidFill>
+                  <a:srgbClr val="F2F2F0"/>
+                </a:solidFill>
+                <a:latin typeface="Menlo" pitchFamily="34" charset="0"/>
+                <a:ea typeface="Menlo" pitchFamily="34" charset="-122"/>
+                <a:cs typeface="Menlo" pitchFamily="34" charset="-120"/>
+              </a:rPr>
+              <a:t>posts      id · author_id → profiles.id · content · reply_to_id(nullable)</a:t>
+            </a:r>
+            <a:endParaRPr lang="en-US" sz="1700" dirty="0"/>
+          </a:p>
+          <a:p>
+            <a:pPr indent="0" marL="0">
+              <a:buNone/>
+            </a:pPr>
+            <a:endParaRPr lang="en-US" sz="1700" dirty="0"/>
+          </a:p>
+          <a:p>
+            <a:pPr indent="0" marL="0">
+              <a:buNone/>
+            </a:pPr>
+            <a:r>
+              <a:rPr lang="en-US" sz="1700" dirty="0">
+                <a:solidFill>
+                  <a:srgbClr val="F2F2F0"/>
+                </a:solidFill>
+                <a:latin typeface="Menlo" pitchFamily="34" charset="0"/>
+                <a:ea typeface="Menlo" pitchFamily="34" charset="-122"/>
+                <a:cs typeface="Menlo" pitchFamily="34" charset="-120"/>
+              </a:rPr>
+              <a:t>likes      post_id → posts.id · user_id → profiles.id  (복합 PK)</a:t>
+            </a:r>
+            <a:endParaRPr lang="en-US" sz="1700" dirty="0"/>
+          </a:p>
+          <a:p>
+            <a:pPr indent="0" marL="0">
+              <a:buNone/>
+            </a:pPr>
+            <a:endParaRPr lang="en-US" sz="1700" dirty="0"/>
+          </a:p>
+          <a:p>
+            <a:pPr indent="0" marL="0">
+              <a:buNone/>
+            </a:pPr>
+            <a:r>
+              <a:rPr lang="en-US" sz="1700" dirty="0">
+                <a:solidFill>
+                  <a:srgbClr val="F2F2F0"/>
+                </a:solidFill>
+                <a:latin typeface="Menlo" pitchFamily="34" charset="0"/>
+                <a:ea typeface="Menlo" pitchFamily="34" charset="-122"/>
+                <a:cs typeface="Menlo" pitchFamily="34" charset="-120"/>
+              </a:rPr>
+              <a:t>follows    follower_id → profiles.id · following_id → profiles.id</a:t>
+            </a:r>
+            <a:endParaRPr lang="en-US" sz="1700" dirty="0"/>
+          </a:p>
+          <a:p>
+            <a:pPr indent="0" marL="0">
+              <a:buNone/>
+            </a:pPr>
+            <a:r>
+              <a:rPr lang="en-US" sz="1700" dirty="0">
+                <a:solidFill>
+                  <a:srgbClr val="F2F2F0"/>
+                </a:solidFill>
+                <a:latin typeface="Menlo" pitchFamily="34" charset="0"/>
+                <a:ea typeface="Menlo" pitchFamily="34" charset="-122"/>
+                <a:cs typeface="Menlo" pitchFamily="34" charset="-120"/>
+              </a:rPr>
+              <a:t>           (복합 PK, follower ≠ following 체크 제약)</a:t>
+            </a:r>
+            <a:endParaRPr lang="en-US" sz="1700" dirty="0"/>
           </a:p>
         </p:txBody>
       </p:sp>
@@ -9375,7 +9716,7 @@
                 <a:ea typeface="Arial" pitchFamily="34" charset="-122"/>
                 <a:cs typeface="Arial" pitchFamily="34" charset="-120"/>
               </a:rPr>
-              <a:t>다국어 &amp; 테마</a:t>
+              <a:t>인증 흐름</a:t>
             </a:r>
             <a:endParaRPr lang="en-US" sz="3000" dirty="0"/>
           </a:p>
@@ -9414,7 +9755,7 @@
                 <a:ea typeface="Arial" pitchFamily="34" charset="-122"/>
                 <a:cs typeface="Arial" pitchFamily="34" charset="-120"/>
               </a:rPr>
-              <a:t>쿠키 기반, 서버에서 렌더링</a:t>
+              <a:t>Supabase Auth + 자동 프로필 생성</a:t>
             </a:r>
             <a:endParaRPr lang="en-US" sz="1600" dirty="0"/>
           </a:p>
@@ -9480,7 +9821,7 @@
                 <a:ea typeface="Arial" pitchFamily="34" charset="-122"/>
                 <a:cs typeface="Arial" pitchFamily="34" charset="-120"/>
               </a:rPr>
-              <a:t>한국어 / 영어 지원 — src/lib/i18n/dictionaries.ts 에 모든 문구 집중</a:t>
+              <a:t>가입: 이메일 + 비밀번호만 입력 (아이디는 받지 않음)</a:t>
             </a:r>
             <a:endParaRPr lang="en-US" sz="1800" dirty="0"/>
           </a:p>
@@ -9501,7 +9842,7 @@
                 <a:ea typeface="Arial" pitchFamily="34" charset="-122"/>
                 <a:cs typeface="Arial" pitchFamily="34" charset="-120"/>
               </a:rPr>
-              <a:t>locale 쿠키로 서버 컴포넌트에서 바로 알맞은 언어 렌더링 (클라이언트 JS 불필요)</a:t>
+              <a:t>auth.users insert 시 handle_new_user 트리거가 profiles row를 자동 생성</a:t>
             </a:r>
             <a:endParaRPr lang="en-US" sz="1800" dirty="0"/>
           </a:p>
@@ -9522,7 +9863,7 @@
                 <a:ea typeface="Arial" pitchFamily="34" charset="-122"/>
                 <a:cs typeface="Arial" pitchFamily="34" charset="-120"/>
               </a:rPr>
-              <a:t>다크 / 라이트 테마도 동일 패턴 — theme 쿠키 + data-theme 속성</a:t>
+              <a:t>username이 없으면 user_&lt;uuid앞8자리&gt;, display_name은 이메일 앞부분으로 대체</a:t>
             </a:r>
             <a:endParaRPr lang="en-US" sz="1800" dirty="0"/>
           </a:p>
@@ -9543,7 +9884,7 @@
                 <a:ea typeface="Arial" pitchFamily="34" charset="-122"/>
                 <a:cs typeface="Arial" pitchFamily="34" charset="-120"/>
               </a:rPr>
-              <a:t>다크 모드는 순검정 대신 부드러운 차콜(#17181A) 사용</a:t>
+              <a:t>이메일 확인(confirm email)이 켜져 있어 인증 전엔 로그인 불가 → /login?confirm=1 안내</a:t>
             </a:r>
             <a:endParaRPr lang="en-US" sz="1800" dirty="0"/>
           </a:p>
@@ -9564,7 +9905,7 @@
                 <a:ea typeface="Arial" pitchFamily="34" charset="-122"/>
                 <a:cs typeface="Arial" pitchFamily="34" charset="-120"/>
               </a:rPr>
-              <a:t>Flutter 앱도 동일한 문구·색상 토큰을 그대로 이식 (lib/i18n, lib/theme)</a:t>
+              <a:t>모든 테이블에 RLS 적용: 읽기는 공개, 쓰기는 auth.uid()가 본인 것일 때만 허용</a:t>
             </a:r>
             <a:endParaRPr lang="en-US" sz="1800" dirty="0"/>
           </a:p>
@@ -9674,7 +10015,7 @@
                 <a:ea typeface="Arial" pitchFamily="34" charset="-122"/>
                 <a:cs typeface="Arial" pitchFamily="34" charset="-120"/>
               </a:rPr>
-              <a:t>Flutter 앱</a:t>
+              <a:t>웹 앱 (Next.js 16)</a:t>
             </a:r>
             <a:endParaRPr lang="en-US" sz="3000" dirty="0"/>
           </a:p>
@@ -9713,7 +10054,7 @@
                 <a:ea typeface="Arial" pitchFamily="34" charset="-122"/>
                 <a:cs typeface="Arial" pitchFamily="34" charset="-120"/>
               </a:rPr>
-              <a:t>동일 Supabase 프로젝트를 그대로 사용</a:t>
+              <a:t>App Router + Server Actions</a:t>
             </a:r>
             <a:endParaRPr lang="en-US" sz="1600" dirty="0"/>
           </a:p>
@@ -9744,41 +10085,14 @@
       </p:sp>
       <p:sp>
         <p:nvSpPr>
-          <p:cNvPr id="6" name="Shape 4"/>
+          <p:cNvPr id="6" name="Text 4"/>
           <p:cNvSpPr/>
           <p:nvPr/>
         </p:nvSpPr>
         <p:spPr>
           <a:xfrm>
             <a:off x="548640" y="1828800"/>
-            <a:ext cx="11064240" cy="4206240"/>
-          </a:xfrm>
-          <a:prstGeom prst="roundRect">
-            <a:avLst>
-              <a:gd name="adj" fmla="val 1739"/>
-            </a:avLst>
-          </a:prstGeom>
-          <a:solidFill>
-            <a:srgbClr val="202124"/>
-          </a:solidFill>
-          <a:ln w="12700">
-            <a:solidFill>
-              <a:srgbClr val="202124"/>
-            </a:solidFill>
-            <a:prstDash val="solid"/>
-          </a:ln>
-        </p:spPr>
-      </p:sp>
-      <p:sp>
-        <p:nvSpPr>
-          <p:cNvPr id="7" name="Text 5"/>
-          <p:cNvSpPr/>
-          <p:nvPr/>
-        </p:nvSpPr>
-        <p:spPr>
-          <a:xfrm>
-            <a:off x="822960" y="2057400"/>
-            <a:ext cx="10515600" cy="3749040"/>
+            <a:ext cx="11064240" cy="4572000"/>
           </a:xfrm>
           <a:prstGeom prst="rect">
             <a:avLst/>
@@ -9790,157 +10104,109 @@
           <a:bodyPr wrap="square" rtlCol="0" anchor="t"/>
           <a:lstStyle/>
           <a:p>
-            <a:pPr indent="0" marL="0">
-              <a:buNone/>
-            </a:pPr>
-            <a:r>
-              <a:rPr lang="en-US" sz="1500" dirty="0">
-                <a:solidFill>
-                  <a:srgbClr val="F2F2F0"/>
-                </a:solidFill>
-                <a:latin typeface="Menlo" pitchFamily="34" charset="0"/>
-                <a:ea typeface="Menlo" pitchFamily="34" charset="-122"/>
-                <a:cs typeface="Menlo" pitchFamily="34" charset="-120"/>
-              </a:rPr>
-              <a:t>flutter_app/lib/</a:t>
-            </a:r>
-            <a:endParaRPr lang="en-US" sz="1500" dirty="0"/>
-          </a:p>
-          <a:p>
-            <a:pPr indent="0" marL="0">
-              <a:buNone/>
-            </a:pPr>
-            <a:r>
-              <a:rPr lang="en-US" sz="1500" dirty="0">
-                <a:solidFill>
-                  <a:srgbClr val="F2F2F0"/>
-                </a:solidFill>
-                <a:latin typeface="Menlo" pitchFamily="34" charset="0"/>
-                <a:ea typeface="Menlo" pitchFamily="34" charset="-122"/>
-                <a:cs typeface="Menlo" pitchFamily="34" charset="-120"/>
-              </a:rPr>
-              <a:t>├─ constants.dart        # Supabase URL / anon key</a:t>
-            </a:r>
-            <a:endParaRPr lang="en-US" sz="1500" dirty="0"/>
-          </a:p>
-          <a:p>
-            <a:pPr indent="0" marL="0">
-              <a:buNone/>
-            </a:pPr>
-            <a:r>
-              <a:rPr lang="en-US" sz="1500" dirty="0">
-                <a:solidFill>
-                  <a:srgbClr val="F2F2F0"/>
-                </a:solidFill>
-                <a:latin typeface="Menlo" pitchFamily="34" charset="0"/>
-                <a:ea typeface="Menlo" pitchFamily="34" charset="-122"/>
-                <a:cs typeface="Menlo" pitchFamily="34" charset="-120"/>
-              </a:rPr>
-              <a:t>├─ theme/                # AppColors, AppTheme (웹과 동일 팔레트)</a:t>
-            </a:r>
-            <a:endParaRPr lang="en-US" sz="1500" dirty="0"/>
-          </a:p>
-          <a:p>
-            <a:pPr indent="0" marL="0">
-              <a:buNone/>
-            </a:pPr>
-            <a:r>
-              <a:rPr lang="en-US" sz="1500" dirty="0">
-                <a:solidFill>
-                  <a:srgbClr val="F2F2F0"/>
-                </a:solidFill>
-                <a:latin typeface="Menlo" pitchFamily="34" charset="0"/>
-                <a:ea typeface="Menlo" pitchFamily="34" charset="-122"/>
-                <a:cs typeface="Menlo" pitchFamily="34" charset="-120"/>
-              </a:rPr>
-              <a:t>├─ i18n/                 # dictionaries.dart (웹과 동일 문구)</a:t>
-            </a:r>
-            <a:endParaRPr lang="en-US" sz="1500" dirty="0"/>
-          </a:p>
-          <a:p>
-            <a:pPr indent="0" marL="0">
-              <a:buNone/>
-            </a:pPr>
-            <a:r>
-              <a:rPr lang="en-US" sz="1500" dirty="0">
-                <a:solidFill>
-                  <a:srgbClr val="F2F2F0"/>
-                </a:solidFill>
-                <a:latin typeface="Menlo" pitchFamily="34" charset="0"/>
-                <a:ea typeface="Menlo" pitchFamily="34" charset="-122"/>
-                <a:cs typeface="Menlo" pitchFamily="34" charset="-120"/>
-              </a:rPr>
-              <a:t>├─ state/                # AppPreferences (locale/theme, SharedPreferences)</a:t>
-            </a:r>
-            <a:endParaRPr lang="en-US" sz="1500" dirty="0"/>
-          </a:p>
-          <a:p>
-            <a:pPr indent="0" marL="0">
-              <a:buNone/>
-            </a:pPr>
-            <a:r>
-              <a:rPr lang="en-US" sz="1500" dirty="0">
-                <a:solidFill>
-                  <a:srgbClr val="F2F2F0"/>
-                </a:solidFill>
-                <a:latin typeface="Menlo" pitchFamily="34" charset="0"/>
-                <a:ea typeface="Menlo" pitchFamily="34" charset="-122"/>
-                <a:cs typeface="Menlo" pitchFamily="34" charset="-120"/>
-              </a:rPr>
-              <a:t>├─ services/              # Repository (posts/likes/follows/profiles 쿼리)</a:t>
-            </a:r>
-            <a:endParaRPr lang="en-US" sz="1500" dirty="0"/>
-          </a:p>
-          <a:p>
-            <a:pPr indent="0" marL="0">
-              <a:buNone/>
-            </a:pPr>
-            <a:r>
-              <a:rPr lang="en-US" sz="1500" dirty="0">
-                <a:solidFill>
-                  <a:srgbClr val="F2F2F0"/>
-                </a:solidFill>
-                <a:latin typeface="Menlo" pitchFamily="34" charset="0"/>
-                <a:ea typeface="Menlo" pitchFamily="34" charset="-122"/>
-                <a:cs typeface="Menlo" pitchFamily="34" charset="-120"/>
-              </a:rPr>
-              <a:t>├─ models/                # Profile, Post</a:t>
-            </a:r>
-            <a:endParaRPr lang="en-US" sz="1500" dirty="0"/>
-          </a:p>
-          <a:p>
-            <a:pPr indent="0" marL="0">
-              <a:buNone/>
-            </a:pPr>
-            <a:r>
-              <a:rPr lang="en-US" sz="1500" dirty="0">
-                <a:solidFill>
-                  <a:srgbClr val="F2F2F0"/>
-                </a:solidFill>
-                <a:latin typeface="Menlo" pitchFamily="34" charset="0"/>
-                <a:ea typeface="Menlo" pitchFamily="34" charset="-122"/>
-                <a:cs typeface="Menlo" pitchFamily="34" charset="-120"/>
-              </a:rPr>
-              <a:t>├─ screens/               # Login, Signup, Feed, NewPost, Profile</a:t>
-            </a:r>
-            <a:endParaRPr lang="en-US" sz="1500" dirty="0"/>
-          </a:p>
-          <a:p>
-            <a:pPr indent="0" marL="0">
-              <a:buNone/>
-            </a:pPr>
-            <a:r>
-              <a:rPr lang="en-US" sz="1500" dirty="0">
-                <a:solidFill>
-                  <a:srgbClr val="F2F2F0"/>
-                </a:solidFill>
-                <a:latin typeface="Menlo" pitchFamily="34" charset="0"/>
-                <a:ea typeface="Menlo" pitchFamily="34" charset="-122"/>
-                <a:cs typeface="Menlo" pitchFamily="34" charset="-120"/>
-              </a:rPr>
-              <a:t>└─ widgets/               # PostCard, LikeButton, FollowButton</a:t>
-            </a:r>
-            <a:endParaRPr lang="en-US" sz="1500" dirty="0"/>
+            <a:pPr marL="342900" indent="-342900">
+              <a:lnSpc>
+                <a:spcPct val="135000"/>
+              </a:lnSpc>
+              <a:buSzPct val="100000"/>
+              <a:buChar char="•"/>
+            </a:pPr>
+            <a:r>
+              <a:rPr lang="en-US" sz="1800" dirty="0">
+                <a:solidFill>
+                  <a:srgbClr val="F2F2F0"/>
+                </a:solidFill>
+                <a:latin typeface="Arial" pitchFamily="34" charset="0"/>
+                <a:ea typeface="Arial" pitchFamily="34" charset="-122"/>
+                <a:cs typeface="Arial" pitchFamily="34" charset="-120"/>
+              </a:rPr>
+              <a:t>라우트 대부분이 Server Component — 서버에서 Supabase를 직접 쿼리</a:t>
+            </a:r>
+            <a:endParaRPr lang="en-US" sz="1800" dirty="0"/>
+          </a:p>
+          <a:p>
+            <a:pPr marL="342900" indent="-342900">
+              <a:lnSpc>
+                <a:spcPct val="135000"/>
+              </a:lnSpc>
+              <a:buSzPct val="100000"/>
+              <a:buChar char="•"/>
+            </a:pPr>
+            <a:r>
+              <a:rPr lang="en-US" sz="1800" dirty="0">
+                <a:solidFill>
+                  <a:srgbClr val="F2F2F0"/>
+                </a:solidFill>
+                <a:latin typeface="Arial" pitchFamily="34" charset="0"/>
+                <a:ea typeface="Arial" pitchFamily="34" charset="-122"/>
+                <a:cs typeface="Arial" pitchFamily="34" charset="-120"/>
+              </a:rPr>
+              <a:t>쓰기 작업(좋아요, 팔로우, 글쓰기, 로그인/가입)은 전부 Server Actions ("use server")</a:t>
+            </a:r>
+            <a:endParaRPr lang="en-US" sz="1800" dirty="0"/>
+          </a:p>
+          <a:p>
+            <a:pPr marL="342900" indent="-342900">
+              <a:lnSpc>
+                <a:spcPct val="135000"/>
+              </a:lnSpc>
+              <a:buSzPct val="100000"/>
+              <a:buChar char="•"/>
+            </a:pPr>
+            <a:r>
+              <a:rPr lang="en-US" sz="1800" dirty="0">
+                <a:solidFill>
+                  <a:srgbClr val="F2F2F0"/>
+                </a:solidFill>
+                <a:latin typeface="Arial" pitchFamily="34" charset="0"/>
+                <a:ea typeface="Arial" pitchFamily="34" charset="-122"/>
+                <a:cs typeface="Arial" pitchFamily="34" charset="-120"/>
+              </a:rPr>
+              <a:t>src/proxy.ts (Next 16의 middleware 후속 컨벤션)가 세션 갱신 + /new, /settings 보호</a:t>
+            </a:r>
+            <a:endParaRPr lang="en-US" sz="1800" dirty="0"/>
+          </a:p>
+          <a:p>
+            <a:pPr marL="342900" indent="-342900">
+              <a:lnSpc>
+                <a:spcPct val="135000"/>
+              </a:lnSpc>
+              <a:buSzPct val="100000"/>
+              <a:buChar char="•"/>
+            </a:pPr>
+            <a:r>
+              <a:rPr lang="en-US" sz="1800" dirty="0">
+                <a:solidFill>
+                  <a:srgbClr val="F2F2F0"/>
+                </a:solidFill>
+                <a:latin typeface="Arial" pitchFamily="34" charset="0"/>
+                <a:ea typeface="Arial" pitchFamily="34" charset="-122"/>
+                <a:cs typeface="Arial" pitchFamily="34" charset="-120"/>
+              </a:rPr>
+              <a:t>src/lib/supabase/{client,server}.ts — 브라우저용 / 서버용 Supabase 클라이언트 분리</a:t>
+            </a:r>
+            <a:endParaRPr lang="en-US" sz="1800" dirty="0"/>
+          </a:p>
+          <a:p>
+            <a:pPr marL="342900" indent="-342900">
+              <a:lnSpc>
+                <a:spcPct val="135000"/>
+              </a:lnSpc>
+              <a:buSzPct val="100000"/>
+              <a:buChar char="•"/>
+            </a:pPr>
+            <a:r>
+              <a:rPr lang="en-US" sz="1800" dirty="0">
+                <a:solidFill>
+                  <a:srgbClr val="F2F2F0"/>
+                </a:solidFill>
+                <a:latin typeface="Arial" pitchFamily="34" charset="0"/>
+                <a:ea typeface="Arial" pitchFamily="34" charset="-122"/>
+                <a:cs typeface="Arial" pitchFamily="34" charset="-120"/>
+              </a:rPr>
+              <a:t>포트 3721에서 개발 서버 실행 (pnpm dev)</a:t>
+            </a:r>
+            <a:endParaRPr lang="en-US" sz="1800" dirty="0"/>
           </a:p>
         </p:txBody>
       </p:sp>
@@ -10048,7 +10314,7 @@
                 <a:ea typeface="Arial" pitchFamily="34" charset="-122"/>
                 <a:cs typeface="Arial" pitchFamily="34" charset="-120"/>
               </a:rPr>
-              <a:t>관리자 앱</a:t>
+              <a:t>다국어 &amp; 테마</a:t>
             </a:r>
             <a:endParaRPr lang="en-US" sz="3000" dirty="0"/>
           </a:p>
@@ -10087,7 +10353,7 @@
                 <a:ea typeface="Arial" pitchFamily="34" charset="-122"/>
                 <a:cs typeface="Arial" pitchFamily="34" charset="-120"/>
               </a:rPr>
-              <a:t>같은 Supabase 프로젝트, RLS로 권한 분리</a:t>
+              <a:t>쿠키 기반, 서버에서 렌더링</a:t>
             </a:r>
             <a:endParaRPr lang="en-US" sz="1600" dirty="0"/>
           </a:p>
@@ -10153,7 +10419,7 @@
                 <a:ea typeface="Arial" pitchFamily="34" charset="-122"/>
                 <a:cs typeface="Arial" pitchFamily="34" charset="-120"/>
               </a:rPr>
-              <a:t>별도 Next.js 앱 (admin/) — 서비스 role 키 없이 anon 키 + RLS만으로 동작</a:t>
+              <a:t>한국어 / 영어 지원 — src/lib/i18n/dictionaries.ts 에 모든 문구 집중</a:t>
             </a:r>
             <a:endParaRPr lang="en-US" sz="1800" dirty="0"/>
           </a:p>
@@ -10174,7 +10440,7 @@
                 <a:ea typeface="Arial" pitchFamily="34" charset="-122"/>
                 <a:cs typeface="Arial" pitchFamily="34" charset="-120"/>
               </a:rPr>
-              <a:t>profiles.is_admin 컬럼 + is_admin() security definer 함수로 권한 판정</a:t>
+              <a:t>locale 쿠키로 서버 컴포넌트에서 바로 알맞은 언어 렌더링 (클라이언트 JS 불필요)</a:t>
             </a:r>
             <a:endParaRPr lang="en-US" sz="1800" dirty="0"/>
           </a:p>
@@ -10195,7 +10461,7 @@
                 <a:ea typeface="Arial" pitchFamily="34" charset="-122"/>
                 <a:cs typeface="Arial" pitchFamily="34" charset="-120"/>
               </a:rPr>
-              <a:t>관리자만 다른 사람의 프로필 수정(정지 처리) / 게시물 삭제 가능하도록 RLS 정책 추가</a:t>
+              <a:t>다크 / 라이트 테마도 동일 패턴 — theme 쿠키 + data-theme 속성</a:t>
             </a:r>
             <a:endParaRPr lang="en-US" sz="1800" dirty="0"/>
           </a:p>
@@ -10216,7 +10482,7 @@
                 <a:ea typeface="Arial" pitchFamily="34" charset="-122"/>
                 <a:cs typeface="Arial" pitchFamily="34" charset="-120"/>
               </a:rPr>
-              <a:t>is_banned=true인 계정은 새 글/좋아요/팔로우 작성이 RLS에서 자동 차단</a:t>
+              <a:t>다크 모드는 순검정 대신 부드러운 차콜(#17181A) 사용</a:t>
             </a:r>
             <a:endParaRPr lang="en-US" sz="1800" dirty="0"/>
           </a:p>
@@ -10237,7 +10503,7 @@
                 <a:ea typeface="Arial" pitchFamily="34" charset="-122"/>
                 <a:cs typeface="Arial" pitchFamily="34" charset="-120"/>
               </a:rPr>
-              <a:t>첫 관리자는 SQL로 직접 지정: update profiles set is_admin=true where id=…</a:t>
+              <a:t>Flutter 앱도 동일한 문구·색상 토큰을 그대로 이식 (lib/i18n, lib/theme)</a:t>
             </a:r>
             <a:endParaRPr lang="en-US" sz="1800" dirty="0"/>
           </a:p>
@@ -10322,8 +10588,8 @@
         </p:nvSpPr>
         <p:spPr>
           <a:xfrm>
-            <a:off x="548640" y="548640"/>
-            <a:ext cx="8229600" cy="457200"/>
+            <a:off x="548640" y="365760"/>
+            <a:ext cx="11064240" cy="822960"/>
           </a:xfrm>
           <a:prstGeom prst="rect">
             <a:avLst/>
@@ -10339,57 +10605,30 @@
               <a:buNone/>
             </a:pPr>
             <a:r>
-              <a:rPr lang="en-US" sz="1400" b="1" spc="100" kern="0" dirty="0">
-                <a:solidFill>
-                  <a:srgbClr val="5B8DEF"/>
-                </a:solidFill>
-                <a:latin typeface="Arial" pitchFamily="34" charset="0"/>
-                <a:ea typeface="Arial" pitchFamily="34" charset="-122"/>
-                <a:cs typeface="Arial" pitchFamily="34" charset="-120"/>
-              </a:rPr>
-              <a:t>오리엔테이션</a:t>
-            </a:r>
-            <a:endParaRPr lang="en-US" sz="1400" dirty="0"/>
-          </a:p>
-        </p:txBody>
-      </p:sp>
-      <p:sp>
-        <p:nvSpPr>
-          <p:cNvPr id="4" name="Shape 2"/>
-          <p:cNvSpPr/>
-          <p:nvPr/>
-        </p:nvSpPr>
-        <p:spPr>
-          <a:xfrm>
-            <a:off x="9601200" y="502920"/>
-            <a:ext cx="2011680" cy="457200"/>
-          </a:xfrm>
-          <a:prstGeom prst="roundRect">
-            <a:avLst>
-              <a:gd name="adj" fmla="val 50000"/>
-            </a:avLst>
-          </a:prstGeom>
-          <a:solidFill>
-            <a:srgbClr val="5B8DEF"/>
-          </a:solidFill>
-          <a:ln w="12700">
-            <a:solidFill>
-              <a:srgbClr val="5B8DEF"/>
-            </a:solidFill>
-            <a:prstDash val="solid"/>
-          </a:ln>
-        </p:spPr>
-      </p:sp>
-      <p:sp>
-        <p:nvSpPr>
-          <p:cNvPr id="5" name="Text 3"/>
-          <p:cNvSpPr/>
-          <p:nvPr/>
-        </p:nvSpPr>
-        <p:spPr>
-          <a:xfrm>
-            <a:off x="9601200" y="502920"/>
-            <a:ext cx="2011680" cy="457200"/>
+              <a:rPr lang="en-US" sz="3000" b="1" dirty="0">
+                <a:solidFill>
+                  <a:srgbClr val="F2F2F0"/>
+                </a:solidFill>
+                <a:latin typeface="Arial" pitchFamily="34" charset="0"/>
+                <a:ea typeface="Arial" pitchFamily="34" charset="-122"/>
+                <a:cs typeface="Arial" pitchFamily="34" charset="-120"/>
+              </a:rPr>
+              <a:t>Claude Code 설치하기</a:t>
+            </a:r>
+            <a:endParaRPr lang="en-US" sz="3000" dirty="0"/>
+          </a:p>
+        </p:txBody>
+      </p:sp>
+      <p:sp>
+        <p:nvSpPr>
+          <p:cNvPr id="4" name="Text 2"/>
+          <p:cNvSpPr/>
+          <p:nvPr/>
+        </p:nvSpPr>
+        <p:spPr>
+          <a:xfrm>
+            <a:off x="548640" y="1005840"/>
+            <a:ext cx="11064240" cy="457200"/>
           </a:xfrm>
           <a:prstGeom prst="rect">
             <a:avLst/>
@@ -10401,72 +10640,33 @@
           <a:bodyPr wrap="square" rtlCol="0" anchor="ctr"/>
           <a:lstStyle/>
           <a:p>
-            <a:pPr algn="ctr" indent="0" marL="0">
-              <a:buNone/>
-            </a:pPr>
-            <a:r>
-              <a:rPr lang="en-US" sz="1400" b="1" dirty="0">
-                <a:solidFill>
-                  <a:srgbClr val="17181A"/>
-                </a:solidFill>
-                <a:latin typeface="Arial" pitchFamily="34" charset="0"/>
-                <a:ea typeface="Arial" pitchFamily="34" charset="-122"/>
-                <a:cs typeface="Arial" pitchFamily="34" charset="-120"/>
-              </a:rPr>
-              <a:t>무료</a:t>
-            </a:r>
-            <a:endParaRPr lang="en-US" sz="1400" dirty="0"/>
-          </a:p>
-        </p:txBody>
-      </p:sp>
-      <p:sp>
-        <p:nvSpPr>
-          <p:cNvPr id="6" name="Text 4"/>
-          <p:cNvSpPr/>
-          <p:nvPr/>
-        </p:nvSpPr>
-        <p:spPr>
-          <a:xfrm>
-            <a:off x="548640" y="1051560"/>
-            <a:ext cx="11064240" cy="914400"/>
-          </a:xfrm>
-          <a:prstGeom prst="rect">
-            <a:avLst/>
-          </a:prstGeom>
-          <a:noFill/>
-          <a:ln/>
-        </p:spPr>
-        <p:txBody>
-          <a:bodyPr wrap="square" rtlCol="0" anchor="ctr"/>
-          <a:lstStyle/>
-          <a:p>
-            <a:pPr indent="0" marL="0">
-              <a:buNone/>
-            </a:pPr>
-            <a:r>
-              <a:rPr lang="en-US" sz="3600" b="1" dirty="0">
-                <a:solidFill>
-                  <a:srgbClr val="F2F2F0"/>
-                </a:solidFill>
-                <a:latin typeface="Arial" pitchFamily="34" charset="0"/>
-                <a:ea typeface="Arial" pitchFamily="34" charset="-122"/>
-                <a:cs typeface="Arial" pitchFamily="34" charset="-120"/>
-              </a:rPr>
-              <a:t>맛보기 강의 · Claude Code &amp; AI 에이전트 기초</a:t>
-            </a:r>
-            <a:endParaRPr lang="en-US" sz="3600" dirty="0"/>
-          </a:p>
-        </p:txBody>
-      </p:sp>
-      <p:sp>
-        <p:nvSpPr>
-          <p:cNvPr id="7" name="Shape 5"/>
-          <p:cNvSpPr/>
-          <p:nvPr/>
-        </p:nvSpPr>
-        <p:spPr>
-          <a:xfrm>
-            <a:off x="548640" y="2011680"/>
+            <a:pPr indent="0" marL="0">
+              <a:buNone/>
+            </a:pPr>
+            <a:r>
+              <a:rPr lang="en-US" sz="1600" dirty="0">
+                <a:solidFill>
+                  <a:srgbClr val="98999D"/>
+                </a:solidFill>
+                <a:latin typeface="Arial" pitchFamily="34" charset="0"/>
+                <a:ea typeface="Arial" pitchFamily="34" charset="-122"/>
+                <a:cs typeface="Arial" pitchFamily="34" charset="-120"/>
+              </a:rPr>
+              <a:t>터미널(Terminal / PowerShell)에서 한 번만 하면 끝</a:t>
+            </a:r>
+            <a:endParaRPr lang="en-US" sz="1600" dirty="0"/>
+          </a:p>
+        </p:txBody>
+      </p:sp>
+      <p:sp>
+        <p:nvSpPr>
+          <p:cNvPr id="5" name="Shape 3"/>
+          <p:cNvSpPr/>
+          <p:nvPr/>
+        </p:nvSpPr>
+        <p:spPr>
+          <a:xfrm>
+            <a:off x="548640" y="1508760"/>
             <a:ext cx="11064240" cy="0"/>
           </a:xfrm>
           <a:prstGeom prst="line">
@@ -10483,14 +10683,41 @@
       </p:sp>
       <p:sp>
         <p:nvSpPr>
-          <p:cNvPr id="8" name="Text 6"/>
-          <p:cNvSpPr/>
-          <p:nvPr/>
-        </p:nvSpPr>
-        <p:spPr>
-          <a:xfrm>
-            <a:off x="548640" y="2377440"/>
-            <a:ext cx="11064240" cy="3474720"/>
+          <p:cNvPr id="6" name="Shape 4"/>
+          <p:cNvSpPr/>
+          <p:nvPr/>
+        </p:nvSpPr>
+        <p:spPr>
+          <a:xfrm>
+            <a:off x="548640" y="1828800"/>
+            <a:ext cx="11064240" cy="4206240"/>
+          </a:xfrm>
+          <a:prstGeom prst="roundRect">
+            <a:avLst>
+              <a:gd name="adj" fmla="val 1739"/>
+            </a:avLst>
+          </a:prstGeom>
+          <a:solidFill>
+            <a:srgbClr val="202124"/>
+          </a:solidFill>
+          <a:ln w="12700">
+            <a:solidFill>
+              <a:srgbClr val="202124"/>
+            </a:solidFill>
+            <a:prstDash val="solid"/>
+          </a:ln>
+        </p:spPr>
+      </p:sp>
+      <p:sp>
+        <p:nvSpPr>
+          <p:cNvPr id="7" name="Text 5"/>
+          <p:cNvSpPr/>
+          <p:nvPr/>
+        </p:nvSpPr>
+        <p:spPr>
+          <a:xfrm>
+            <a:off x="822960" y="2057400"/>
+            <a:ext cx="10515600" cy="3749040"/>
           </a:xfrm>
           <a:prstGeom prst="rect">
             <a:avLst/>
@@ -10503,23 +10730,231 @@
           <a:lstStyle/>
           <a:p>
             <a:pPr indent="0" marL="0">
-              <a:lnSpc>
-                <a:spcPct val="145000"/>
-              </a:lnSpc>
-              <a:buNone/>
-            </a:pPr>
-            <a:r>
-              <a:rPr lang="en-US" sz="2000" dirty="0">
-                <a:solidFill>
-                  <a:srgbClr val="F2F2F0"/>
-                </a:solidFill>
-                <a:latin typeface="Arial" pitchFamily="34" charset="0"/>
-                <a:ea typeface="Arial" pitchFamily="34" charset="-122"/>
-                <a:cs typeface="Arial" pitchFamily="34" charset="-120"/>
-              </a:rPr>
-              <a:t>Claude Code와 AI 에이전트 기초, Next.js·Flutter·Supabase 개념, GitHub 사용법을 익히고 뉴스/SNS 등 오픈소스를 활용해 첫 번째 서비스를 만들어봅니다. AI와 협업하는 개발 방식을 익힙니다.</a:t>
-            </a:r>
-            <a:endParaRPr lang="en-US" sz="2000" dirty="0"/>
+              <a:buNone/>
+            </a:pPr>
+            <a:r>
+              <a:rPr lang="en-US" sz="1500" dirty="0">
+                <a:solidFill>
+                  <a:srgbClr val="F2F2F0"/>
+                </a:solidFill>
+                <a:latin typeface="Menlo" pitchFamily="34" charset="0"/>
+                <a:ea typeface="Menlo" pitchFamily="34" charset="-122"/>
+                <a:cs typeface="Menlo" pitchFamily="34" charset="-120"/>
+              </a:rPr>
+              <a:t># 준비물: Node.js 18 이상 (https://nodejs.org 에서 설치)</a:t>
+            </a:r>
+            <a:endParaRPr lang="en-US" sz="1500" dirty="0"/>
+          </a:p>
+          <a:p>
+            <a:pPr indent="0" marL="0">
+              <a:buNone/>
+            </a:pPr>
+            <a:r>
+              <a:rPr lang="en-US" sz="1500" dirty="0">
+                <a:solidFill>
+                  <a:srgbClr val="F2F2F0"/>
+                </a:solidFill>
+                <a:latin typeface="Menlo" pitchFamily="34" charset="0"/>
+                <a:ea typeface="Menlo" pitchFamily="34" charset="-122"/>
+                <a:cs typeface="Menlo" pitchFamily="34" charset="-120"/>
+              </a:rPr>
+              <a:t>node -v</a:t>
+            </a:r>
+            <a:endParaRPr lang="en-US" sz="1500" dirty="0"/>
+          </a:p>
+          <a:p>
+            <a:pPr indent="0" marL="0">
+              <a:buNone/>
+            </a:pPr>
+            <a:endParaRPr lang="en-US" sz="1500" dirty="0"/>
+          </a:p>
+          <a:p>
+            <a:pPr indent="0" marL="0">
+              <a:buNone/>
+            </a:pPr>
+            <a:r>
+              <a:rPr lang="en-US" sz="1500" dirty="0">
+                <a:solidFill>
+                  <a:srgbClr val="F2F2F0"/>
+                </a:solidFill>
+                <a:latin typeface="Menlo" pitchFamily="34" charset="0"/>
+                <a:ea typeface="Menlo" pitchFamily="34" charset="-122"/>
+                <a:cs typeface="Menlo" pitchFamily="34" charset="-120"/>
+              </a:rPr>
+              <a:t># 설치 (macOS / Windows / Linux 공통)</a:t>
+            </a:r>
+            <a:endParaRPr lang="en-US" sz="1500" dirty="0"/>
+          </a:p>
+          <a:p>
+            <a:pPr indent="0" marL="0">
+              <a:buNone/>
+            </a:pPr>
+            <a:r>
+              <a:rPr lang="en-US" sz="1500" dirty="0">
+                <a:solidFill>
+                  <a:srgbClr val="F2F2F0"/>
+                </a:solidFill>
+                <a:latin typeface="Menlo" pitchFamily="34" charset="0"/>
+                <a:ea typeface="Menlo" pitchFamily="34" charset="-122"/>
+                <a:cs typeface="Menlo" pitchFamily="34" charset="-120"/>
+              </a:rPr>
+              <a:t>npm install -g @anthropic-ai/claude-code</a:t>
+            </a:r>
+            <a:endParaRPr lang="en-US" sz="1500" dirty="0"/>
+          </a:p>
+          <a:p>
+            <a:pPr indent="0" marL="0">
+              <a:buNone/>
+            </a:pPr>
+            <a:endParaRPr lang="en-US" sz="1500" dirty="0"/>
+          </a:p>
+          <a:p>
+            <a:pPr indent="0" marL="0">
+              <a:buNone/>
+            </a:pPr>
+            <a:r>
+              <a:rPr lang="en-US" sz="1500" dirty="0">
+                <a:solidFill>
+                  <a:srgbClr val="F2F2F0"/>
+                </a:solidFill>
+                <a:latin typeface="Menlo" pitchFamily="34" charset="0"/>
+                <a:ea typeface="Menlo" pitchFamily="34" charset="-122"/>
+                <a:cs typeface="Menlo" pitchFamily="34" charset="-120"/>
+              </a:rPr>
+              <a:t># macOS / Linux는 아래 방법으로도 설치 가능</a:t>
+            </a:r>
+            <a:endParaRPr lang="en-US" sz="1500" dirty="0"/>
+          </a:p>
+          <a:p>
+            <a:pPr indent="0" marL="0">
+              <a:buNone/>
+            </a:pPr>
+            <a:r>
+              <a:rPr lang="en-US" sz="1500" dirty="0">
+                <a:solidFill>
+                  <a:srgbClr val="F2F2F0"/>
+                </a:solidFill>
+                <a:latin typeface="Menlo" pitchFamily="34" charset="0"/>
+                <a:ea typeface="Menlo" pitchFamily="34" charset="-122"/>
+                <a:cs typeface="Menlo" pitchFamily="34" charset="-120"/>
+              </a:rPr>
+              <a:t>curl -fsSL https://claude.ai/install.sh | bash</a:t>
+            </a:r>
+            <a:endParaRPr lang="en-US" sz="1500" dirty="0"/>
+          </a:p>
+          <a:p>
+            <a:pPr indent="0" marL="0">
+              <a:buNone/>
+            </a:pPr>
+            <a:endParaRPr lang="en-US" sz="1500" dirty="0"/>
+          </a:p>
+          <a:p>
+            <a:pPr indent="0" marL="0">
+              <a:buNone/>
+            </a:pPr>
+            <a:r>
+              <a:rPr lang="en-US" sz="1500" dirty="0">
+                <a:solidFill>
+                  <a:srgbClr val="F2F2F0"/>
+                </a:solidFill>
+                <a:latin typeface="Menlo" pitchFamily="34" charset="0"/>
+                <a:ea typeface="Menlo" pitchFamily="34" charset="-122"/>
+                <a:cs typeface="Menlo" pitchFamily="34" charset="-120"/>
+              </a:rPr>
+              <a:t># 설치 확인</a:t>
+            </a:r>
+            <a:endParaRPr lang="en-US" sz="1500" dirty="0"/>
+          </a:p>
+          <a:p>
+            <a:pPr indent="0" marL="0">
+              <a:buNone/>
+            </a:pPr>
+            <a:r>
+              <a:rPr lang="en-US" sz="1500" dirty="0">
+                <a:solidFill>
+                  <a:srgbClr val="F2F2F0"/>
+                </a:solidFill>
+                <a:latin typeface="Menlo" pitchFamily="34" charset="0"/>
+                <a:ea typeface="Menlo" pitchFamily="34" charset="-122"/>
+                <a:cs typeface="Menlo" pitchFamily="34" charset="-120"/>
+              </a:rPr>
+              <a:t>claude --version</a:t>
+            </a:r>
+            <a:endParaRPr lang="en-US" sz="1500" dirty="0"/>
+          </a:p>
+          <a:p>
+            <a:pPr indent="0" marL="0">
+              <a:buNone/>
+            </a:pPr>
+            <a:endParaRPr lang="en-US" sz="1500" dirty="0"/>
+          </a:p>
+          <a:p>
+            <a:pPr indent="0" marL="0">
+              <a:buNone/>
+            </a:pPr>
+            <a:r>
+              <a:rPr lang="en-US" sz="1500" dirty="0">
+                <a:solidFill>
+                  <a:srgbClr val="F2F2F0"/>
+                </a:solidFill>
+                <a:latin typeface="Menlo" pitchFamily="34" charset="0"/>
+                <a:ea typeface="Menlo" pitchFamily="34" charset="-122"/>
+                <a:cs typeface="Menlo" pitchFamily="34" charset="-120"/>
+              </a:rPr>
+              <a:t># 실행 (프로젝트 폴더 안에서)</a:t>
+            </a:r>
+            <a:endParaRPr lang="en-US" sz="1500" dirty="0"/>
+          </a:p>
+          <a:p>
+            <a:pPr indent="0" marL="0">
+              <a:buNone/>
+            </a:pPr>
+            <a:r>
+              <a:rPr lang="en-US" sz="1500" dirty="0">
+                <a:solidFill>
+                  <a:srgbClr val="F2F2F0"/>
+                </a:solidFill>
+                <a:latin typeface="Menlo" pitchFamily="34" charset="0"/>
+                <a:ea typeface="Menlo" pitchFamily="34" charset="-122"/>
+                <a:cs typeface="Menlo" pitchFamily="34" charset="-120"/>
+              </a:rPr>
+              <a:t>cd 내-프로젝트-폴더</a:t>
+            </a:r>
+            <a:endParaRPr lang="en-US" sz="1500" dirty="0"/>
+          </a:p>
+          <a:p>
+            <a:pPr indent="0" marL="0">
+              <a:buNone/>
+            </a:pPr>
+            <a:r>
+              <a:rPr lang="en-US" sz="1500" dirty="0">
+                <a:solidFill>
+                  <a:srgbClr val="F2F2F0"/>
+                </a:solidFill>
+                <a:latin typeface="Menlo" pitchFamily="34" charset="0"/>
+                <a:ea typeface="Menlo" pitchFamily="34" charset="-122"/>
+                <a:cs typeface="Menlo" pitchFamily="34" charset="-120"/>
+              </a:rPr>
+              <a:t>claude</a:t>
+            </a:r>
+            <a:endParaRPr lang="en-US" sz="1500" dirty="0"/>
+          </a:p>
+          <a:p>
+            <a:pPr indent="0" marL="0">
+              <a:buNone/>
+            </a:pPr>
+            <a:r>
+              <a:rPr lang="en-US" sz="1500" dirty="0">
+                <a:solidFill>
+                  <a:srgbClr val="F2F2F0"/>
+                </a:solidFill>
+                <a:latin typeface="Menlo" pitchFamily="34" charset="0"/>
+                <a:ea typeface="Menlo" pitchFamily="34" charset="-122"/>
+                <a:cs typeface="Menlo" pitchFamily="34" charset="-120"/>
+              </a:rPr>
+              <a:t>  → 처음 실행하면 브라우저가 열리고 Claude 계정으로 로그인하라고 안내함</a:t>
+            </a:r>
+            <a:endParaRPr lang="en-US" sz="1500" dirty="0"/>
           </a:p>
         </p:txBody>
       </p:sp>
@@ -10627,7 +11062,7 @@
                 <a:ea typeface="Arial" pitchFamily="34" charset="-122"/>
                 <a:cs typeface="Arial" pitchFamily="34" charset="-120"/>
               </a:rPr>
-              <a:t>Claude Code 실행하기</a:t>
+              <a:t>Flutter 앱</a:t>
             </a:r>
             <a:endParaRPr lang="en-US" sz="3000" dirty="0"/>
           </a:p>
@@ -10666,7 +11101,7 @@
                 <a:ea typeface="Arial" pitchFamily="34" charset="-122"/>
                 <a:cs typeface="Arial" pitchFamily="34" charset="-120"/>
               </a:rPr>
-              <a:t>터미널에서 대화하며 코드를 만드는 AI 도구</a:t>
+              <a:t>동일 Supabase 프로젝트를 그대로 사용</a:t>
             </a:r>
             <a:endParaRPr lang="en-US" sz="1600" dirty="0"/>
           </a:p>
@@ -10697,14 +11132,41 @@
       </p:sp>
       <p:sp>
         <p:nvSpPr>
-          <p:cNvPr id="6" name="Text 4"/>
+          <p:cNvPr id="6" name="Shape 4"/>
           <p:cNvSpPr/>
           <p:nvPr/>
         </p:nvSpPr>
         <p:spPr>
           <a:xfrm>
             <a:off x="548640" y="1828800"/>
-            <a:ext cx="11064240" cy="4572000"/>
+            <a:ext cx="11064240" cy="4206240"/>
+          </a:xfrm>
+          <a:prstGeom prst="roundRect">
+            <a:avLst>
+              <a:gd name="adj" fmla="val 1739"/>
+            </a:avLst>
+          </a:prstGeom>
+          <a:solidFill>
+            <a:srgbClr val="202124"/>
+          </a:solidFill>
+          <a:ln w="12700">
+            <a:solidFill>
+              <a:srgbClr val="202124"/>
+            </a:solidFill>
+            <a:prstDash val="solid"/>
+          </a:ln>
+        </p:spPr>
+      </p:sp>
+      <p:sp>
+        <p:nvSpPr>
+          <p:cNvPr id="7" name="Text 5"/>
+          <p:cNvSpPr/>
+          <p:nvPr/>
+        </p:nvSpPr>
+        <p:spPr>
+          <a:xfrm>
+            <a:off x="822960" y="2057400"/>
+            <a:ext cx="10515600" cy="3749040"/>
           </a:xfrm>
           <a:prstGeom prst="rect">
             <a:avLst/>
@@ -10716,109 +11178,157 @@
           <a:bodyPr wrap="square" rtlCol="0" anchor="t"/>
           <a:lstStyle/>
           <a:p>
-            <a:pPr marL="342900" indent="-342900">
-              <a:lnSpc>
-                <a:spcPct val="135000"/>
-              </a:lnSpc>
-              <a:buSzPct val="100000"/>
-              <a:buChar char="•"/>
-            </a:pPr>
-            <a:r>
-              <a:rPr lang="en-US" sz="1800" dirty="0">
-                <a:solidFill>
-                  <a:srgbClr val="F2F2F0"/>
-                </a:solidFill>
-                <a:latin typeface="Arial" pitchFamily="34" charset="0"/>
-                <a:ea typeface="Arial" pitchFamily="34" charset="-122"/>
-                <a:cs typeface="Arial" pitchFamily="34" charset="-120"/>
-              </a:rPr>
-              <a:t>설치: npm install -g @anthropic-ai/claude-code (또는 공식 설치 스크립트)</a:t>
-            </a:r>
-            <a:endParaRPr lang="en-US" sz="1800" dirty="0"/>
-          </a:p>
-          <a:p>
-            <a:pPr marL="342900" indent="-342900">
-              <a:lnSpc>
-                <a:spcPct val="135000"/>
-              </a:lnSpc>
-              <a:buSzPct val="100000"/>
-              <a:buChar char="•"/>
-            </a:pPr>
-            <a:r>
-              <a:rPr lang="en-US" sz="1800" dirty="0">
-                <a:solidFill>
-                  <a:srgbClr val="F2F2F0"/>
-                </a:solidFill>
-                <a:latin typeface="Arial" pitchFamily="34" charset="0"/>
-                <a:ea typeface="Arial" pitchFamily="34" charset="-122"/>
-                <a:cs typeface="Arial" pitchFamily="34" charset="-120"/>
-              </a:rPr>
-              <a:t>프로젝트 폴더로 이동한 뒤 터미널에 claude 라고 치면 대화가 시작됨</a:t>
-            </a:r>
-            <a:endParaRPr lang="en-US" sz="1800" dirty="0"/>
-          </a:p>
-          <a:p>
-            <a:pPr marL="342900" indent="-342900">
-              <a:lnSpc>
-                <a:spcPct val="135000"/>
-              </a:lnSpc>
-              <a:buSzPct val="100000"/>
-              <a:buChar char="•"/>
-            </a:pPr>
-            <a:r>
-              <a:rPr lang="en-US" sz="1800" dirty="0">
-                <a:solidFill>
-                  <a:srgbClr val="F2F2F0"/>
-                </a:solidFill>
-                <a:latin typeface="Arial" pitchFamily="34" charset="0"/>
-                <a:ea typeface="Arial" pitchFamily="34" charset="-122"/>
-                <a:cs typeface="Arial" pitchFamily="34" charset="-120"/>
-              </a:rPr>
-              <a:t>'로그인 페이지 만들어줘' 처럼 자연어로 요청하면 파일을 직접 읽고, 쓰고, 필요하면 명령어(빌드/테스트/git)까지 실행함</a:t>
-            </a:r>
-            <a:endParaRPr lang="en-US" sz="1800" dirty="0"/>
-          </a:p>
-          <a:p>
-            <a:pPr marL="342900" indent="-342900">
-              <a:lnSpc>
-                <a:spcPct val="135000"/>
-              </a:lnSpc>
-              <a:buSzPct val="100000"/>
-              <a:buChar char="•"/>
-            </a:pPr>
-            <a:r>
-              <a:rPr lang="en-US" sz="1800" dirty="0">
-                <a:solidFill>
-                  <a:srgbClr val="F2F2F0"/>
-                </a:solidFill>
-                <a:latin typeface="Arial" pitchFamily="34" charset="0"/>
-                <a:ea typeface="Arial" pitchFamily="34" charset="-122"/>
-                <a:cs typeface="Arial" pitchFamily="34" charset="-120"/>
-              </a:rPr>
-              <a:t>사람이 코드를 복사·붙여넣기 하지 않아도 됨 — 결과물을 바로 프로젝트 안에 반영</a:t>
-            </a:r>
-            <a:endParaRPr lang="en-US" sz="1800" dirty="0"/>
-          </a:p>
-          <a:p>
-            <a:pPr marL="342900" indent="-342900">
-              <a:lnSpc>
-                <a:spcPct val="135000"/>
-              </a:lnSpc>
-              <a:buSzPct val="100000"/>
-              <a:buChar char="•"/>
-            </a:pPr>
-            <a:r>
-              <a:rPr lang="en-US" sz="1800" dirty="0">
-                <a:solidFill>
-                  <a:srgbClr val="F2F2F0"/>
-                </a:solidFill>
-                <a:latin typeface="Arial" pitchFamily="34" charset="0"/>
-                <a:ea typeface="Arial" pitchFamily="34" charset="-122"/>
-                <a:cs typeface="Arial" pitchFamily="34" charset="-120"/>
-              </a:rPr>
-              <a:t>이 오리엔테이션 문서와 소셜 플로우 프로젝트 전체가 Claude Code와의 대화로 만들어졌음</a:t>
-            </a:r>
-            <a:endParaRPr lang="en-US" sz="1800" dirty="0"/>
+            <a:pPr indent="0" marL="0">
+              <a:buNone/>
+            </a:pPr>
+            <a:r>
+              <a:rPr lang="en-US" sz="1500" dirty="0">
+                <a:solidFill>
+                  <a:srgbClr val="F2F2F0"/>
+                </a:solidFill>
+                <a:latin typeface="Menlo" pitchFamily="34" charset="0"/>
+                <a:ea typeface="Menlo" pitchFamily="34" charset="-122"/>
+                <a:cs typeface="Menlo" pitchFamily="34" charset="-120"/>
+              </a:rPr>
+              <a:t>flutter_app/lib/</a:t>
+            </a:r>
+            <a:endParaRPr lang="en-US" sz="1500" dirty="0"/>
+          </a:p>
+          <a:p>
+            <a:pPr indent="0" marL="0">
+              <a:buNone/>
+            </a:pPr>
+            <a:r>
+              <a:rPr lang="en-US" sz="1500" dirty="0">
+                <a:solidFill>
+                  <a:srgbClr val="F2F2F0"/>
+                </a:solidFill>
+                <a:latin typeface="Menlo" pitchFamily="34" charset="0"/>
+                <a:ea typeface="Menlo" pitchFamily="34" charset="-122"/>
+                <a:cs typeface="Menlo" pitchFamily="34" charset="-120"/>
+              </a:rPr>
+              <a:t>├─ constants.dart        # Supabase URL / anon key</a:t>
+            </a:r>
+            <a:endParaRPr lang="en-US" sz="1500" dirty="0"/>
+          </a:p>
+          <a:p>
+            <a:pPr indent="0" marL="0">
+              <a:buNone/>
+            </a:pPr>
+            <a:r>
+              <a:rPr lang="en-US" sz="1500" dirty="0">
+                <a:solidFill>
+                  <a:srgbClr val="F2F2F0"/>
+                </a:solidFill>
+                <a:latin typeface="Menlo" pitchFamily="34" charset="0"/>
+                <a:ea typeface="Menlo" pitchFamily="34" charset="-122"/>
+                <a:cs typeface="Menlo" pitchFamily="34" charset="-120"/>
+              </a:rPr>
+              <a:t>├─ theme/                # AppColors, AppTheme (웹과 동일 팔레트)</a:t>
+            </a:r>
+            <a:endParaRPr lang="en-US" sz="1500" dirty="0"/>
+          </a:p>
+          <a:p>
+            <a:pPr indent="0" marL="0">
+              <a:buNone/>
+            </a:pPr>
+            <a:r>
+              <a:rPr lang="en-US" sz="1500" dirty="0">
+                <a:solidFill>
+                  <a:srgbClr val="F2F2F0"/>
+                </a:solidFill>
+                <a:latin typeface="Menlo" pitchFamily="34" charset="0"/>
+                <a:ea typeface="Menlo" pitchFamily="34" charset="-122"/>
+                <a:cs typeface="Menlo" pitchFamily="34" charset="-120"/>
+              </a:rPr>
+              <a:t>├─ i18n/                 # dictionaries.dart (웹과 동일 문구)</a:t>
+            </a:r>
+            <a:endParaRPr lang="en-US" sz="1500" dirty="0"/>
+          </a:p>
+          <a:p>
+            <a:pPr indent="0" marL="0">
+              <a:buNone/>
+            </a:pPr>
+            <a:r>
+              <a:rPr lang="en-US" sz="1500" dirty="0">
+                <a:solidFill>
+                  <a:srgbClr val="F2F2F0"/>
+                </a:solidFill>
+                <a:latin typeface="Menlo" pitchFamily="34" charset="0"/>
+                <a:ea typeface="Menlo" pitchFamily="34" charset="-122"/>
+                <a:cs typeface="Menlo" pitchFamily="34" charset="-120"/>
+              </a:rPr>
+              <a:t>├─ state/                # AppPreferences (locale/theme, SharedPreferences)</a:t>
+            </a:r>
+            <a:endParaRPr lang="en-US" sz="1500" dirty="0"/>
+          </a:p>
+          <a:p>
+            <a:pPr indent="0" marL="0">
+              <a:buNone/>
+            </a:pPr>
+            <a:r>
+              <a:rPr lang="en-US" sz="1500" dirty="0">
+                <a:solidFill>
+                  <a:srgbClr val="F2F2F0"/>
+                </a:solidFill>
+                <a:latin typeface="Menlo" pitchFamily="34" charset="0"/>
+                <a:ea typeface="Menlo" pitchFamily="34" charset="-122"/>
+                <a:cs typeface="Menlo" pitchFamily="34" charset="-120"/>
+              </a:rPr>
+              <a:t>├─ services/              # Repository (posts/likes/follows/profiles 쿼리)</a:t>
+            </a:r>
+            <a:endParaRPr lang="en-US" sz="1500" dirty="0"/>
+          </a:p>
+          <a:p>
+            <a:pPr indent="0" marL="0">
+              <a:buNone/>
+            </a:pPr>
+            <a:r>
+              <a:rPr lang="en-US" sz="1500" dirty="0">
+                <a:solidFill>
+                  <a:srgbClr val="F2F2F0"/>
+                </a:solidFill>
+                <a:latin typeface="Menlo" pitchFamily="34" charset="0"/>
+                <a:ea typeface="Menlo" pitchFamily="34" charset="-122"/>
+                <a:cs typeface="Menlo" pitchFamily="34" charset="-120"/>
+              </a:rPr>
+              <a:t>├─ models/                # Profile, Post</a:t>
+            </a:r>
+            <a:endParaRPr lang="en-US" sz="1500" dirty="0"/>
+          </a:p>
+          <a:p>
+            <a:pPr indent="0" marL="0">
+              <a:buNone/>
+            </a:pPr>
+            <a:r>
+              <a:rPr lang="en-US" sz="1500" dirty="0">
+                <a:solidFill>
+                  <a:srgbClr val="F2F2F0"/>
+                </a:solidFill>
+                <a:latin typeface="Menlo" pitchFamily="34" charset="0"/>
+                <a:ea typeface="Menlo" pitchFamily="34" charset="-122"/>
+                <a:cs typeface="Menlo" pitchFamily="34" charset="-120"/>
+              </a:rPr>
+              <a:t>├─ screens/               # Login, Signup, Feed, NewPost, Profile</a:t>
+            </a:r>
+            <a:endParaRPr lang="en-US" sz="1500" dirty="0"/>
+          </a:p>
+          <a:p>
+            <a:pPr indent="0" marL="0">
+              <a:buNone/>
+            </a:pPr>
+            <a:r>
+              <a:rPr lang="en-US" sz="1500" dirty="0">
+                <a:solidFill>
+                  <a:srgbClr val="F2F2F0"/>
+                </a:solidFill>
+                <a:latin typeface="Menlo" pitchFamily="34" charset="0"/>
+                <a:ea typeface="Menlo" pitchFamily="34" charset="-122"/>
+                <a:cs typeface="Menlo" pitchFamily="34" charset="-120"/>
+              </a:rPr>
+              <a:t>└─ widgets/               # PostCard, LikeButton, FollowButton</a:t>
+            </a:r>
+            <a:endParaRPr lang="en-US" sz="1500" dirty="0"/>
           </a:p>
         </p:txBody>
       </p:sp>
@@ -10926,7 +11436,7 @@
                 <a:ea typeface="Arial" pitchFamily="34" charset="-122"/>
                 <a:cs typeface="Arial" pitchFamily="34" charset="-120"/>
               </a:rPr>
-              <a:t>Claude Code 데모</a:t>
+              <a:t>관리자 앱</a:t>
             </a:r>
             <a:endParaRPr lang="en-US" sz="3000" dirty="0"/>
           </a:p>
@@ -10965,7 +11475,7 @@
                 <a:ea typeface="Arial" pitchFamily="34" charset="-122"/>
                 <a:cs typeface="Arial" pitchFamily="34" charset="-120"/>
               </a:rPr>
-              <a:t>제일 간단한 예시로 감 잡기: 자기소개 페이지</a:t>
+              <a:t>같은 Supabase 프로젝트, RLS로 권한 분리</a:t>
             </a:r>
             <a:endParaRPr lang="en-US" sz="1600" dirty="0"/>
           </a:p>
@@ -10996,41 +11506,14 @@
       </p:sp>
       <p:sp>
         <p:nvSpPr>
-          <p:cNvPr id="6" name="Shape 4"/>
+          <p:cNvPr id="6" name="Text 4"/>
           <p:cNvSpPr/>
           <p:nvPr/>
         </p:nvSpPr>
         <p:spPr>
           <a:xfrm>
             <a:off x="548640" y="1828800"/>
-            <a:ext cx="11064240" cy="4206240"/>
-          </a:xfrm>
-          <a:prstGeom prst="roundRect">
-            <a:avLst>
-              <a:gd name="adj" fmla="val 1739"/>
-            </a:avLst>
-          </a:prstGeom>
-          <a:solidFill>
-            <a:srgbClr val="202124"/>
-          </a:solidFill>
-          <a:ln w="12700">
-            <a:solidFill>
-              <a:srgbClr val="202124"/>
-            </a:solidFill>
-            <a:prstDash val="solid"/>
-          </a:ln>
-        </p:spPr>
-      </p:sp>
-      <p:sp>
-        <p:nvSpPr>
-          <p:cNvPr id="7" name="Text 5"/>
-          <p:cNvSpPr/>
-          <p:nvPr/>
-        </p:nvSpPr>
-        <p:spPr>
-          <a:xfrm>
-            <a:off x="822960" y="2057400"/>
-            <a:ext cx="10515600" cy="3749040"/>
+            <a:ext cx="11064240" cy="4572000"/>
           </a:xfrm>
           <a:prstGeom prst="rect">
             <a:avLst/>
@@ -11042,169 +11525,109 @@
           <a:bodyPr wrap="square" rtlCol="0" anchor="t"/>
           <a:lstStyle/>
           <a:p>
-            <a:pPr indent="0" marL="0">
-              <a:buNone/>
-            </a:pPr>
-            <a:r>
-              <a:rPr lang="en-US" sz="1500" dirty="0">
-                <a:solidFill>
-                  <a:srgbClr val="F2F2F0"/>
-                </a:solidFill>
-                <a:latin typeface="Menlo" pitchFamily="34" charset="0"/>
-                <a:ea typeface="Menlo" pitchFamily="34" charset="-122"/>
-                <a:cs typeface="Menlo" pitchFamily="34" charset="-120"/>
-              </a:rPr>
-              <a:t>내가 입력:</a:t>
-            </a:r>
-            <a:endParaRPr lang="en-US" sz="1500" dirty="0"/>
-          </a:p>
-          <a:p>
-            <a:pPr indent="0" marL="0">
-              <a:buNone/>
-            </a:pPr>
-            <a:r>
-              <a:rPr lang="en-US" sz="1500" dirty="0">
-                <a:solidFill>
-                  <a:srgbClr val="F2F2F0"/>
-                </a:solidFill>
-                <a:latin typeface="Menlo" pitchFamily="34" charset="0"/>
-                <a:ea typeface="Menlo" pitchFamily="34" charset="-122"/>
-                <a:cs typeface="Menlo" pitchFamily="34" charset="-120"/>
-              </a:rPr>
-              <a:t>  "html/css로 자기소개 웹페이지 하나 만들어줘.</a:t>
-            </a:r>
-            <a:endParaRPr lang="en-US" sz="1500" dirty="0"/>
-          </a:p>
-          <a:p>
-            <a:pPr indent="0" marL="0">
-              <a:buNone/>
-            </a:pPr>
-            <a:r>
-              <a:rPr lang="en-US" sz="1500" dirty="0">
-                <a:solidFill>
-                  <a:srgbClr val="F2F2F0"/>
-                </a:solidFill>
-                <a:latin typeface="Menlo" pitchFamily="34" charset="0"/>
-                <a:ea typeface="Menlo" pitchFamily="34" charset="-122"/>
-                <a:cs typeface="Menlo" pitchFamily="34" charset="-120"/>
-              </a:rPr>
-              <a:t>   이름, 사진, 한 줄 소개, 연락처가 들어가면 좋겠어."</a:t>
-            </a:r>
-            <a:endParaRPr lang="en-US" sz="1500" dirty="0"/>
-          </a:p>
-          <a:p>
-            <a:pPr indent="0" marL="0">
-              <a:buNone/>
-            </a:pPr>
-            <a:endParaRPr lang="en-US" sz="1500" dirty="0"/>
-          </a:p>
-          <a:p>
-            <a:pPr indent="0" marL="0">
-              <a:buNone/>
-            </a:pPr>
-            <a:r>
-              <a:rPr lang="en-US" sz="1500" dirty="0">
-                <a:solidFill>
-                  <a:srgbClr val="F2F2F0"/>
-                </a:solidFill>
-                <a:latin typeface="Menlo" pitchFamily="34" charset="0"/>
-                <a:ea typeface="Menlo" pitchFamily="34" charset="-122"/>
-                <a:cs typeface="Menlo" pitchFamily="34" charset="-120"/>
-              </a:rPr>
-              <a:t>Claude Code가 하는 일:</a:t>
-            </a:r>
-            <a:endParaRPr lang="en-US" sz="1500" dirty="0"/>
-          </a:p>
-          <a:p>
-            <a:pPr indent="0" marL="0">
-              <a:buNone/>
-            </a:pPr>
-            <a:r>
-              <a:rPr lang="en-US" sz="1500" dirty="0">
-                <a:solidFill>
-                  <a:srgbClr val="F2F2F0"/>
-                </a:solidFill>
-                <a:latin typeface="Menlo" pitchFamily="34" charset="0"/>
-                <a:ea typeface="Menlo" pitchFamily="34" charset="-122"/>
-                <a:cs typeface="Menlo" pitchFamily="34" charset="-120"/>
-              </a:rPr>
-              <a:t>  1. index.html, style.css 파일을 새로 만듦</a:t>
-            </a:r>
-            <a:endParaRPr lang="en-US" sz="1500" dirty="0"/>
-          </a:p>
-          <a:p>
-            <a:pPr indent="0" marL="0">
-              <a:buNone/>
-            </a:pPr>
-            <a:r>
-              <a:rPr lang="en-US" sz="1500" dirty="0">
-                <a:solidFill>
-                  <a:srgbClr val="F2F2F0"/>
-                </a:solidFill>
-                <a:latin typeface="Menlo" pitchFamily="34" charset="0"/>
-                <a:ea typeface="Menlo" pitchFamily="34" charset="-122"/>
-                <a:cs typeface="Menlo" pitchFamily="34" charset="-120"/>
-              </a:rPr>
-              <a:t>  2. 이름/사진/소개/연락처 영역을 채워 넣음</a:t>
-            </a:r>
-            <a:endParaRPr lang="en-US" sz="1500" dirty="0"/>
-          </a:p>
-          <a:p>
-            <a:pPr indent="0" marL="0">
-              <a:buNone/>
-            </a:pPr>
-            <a:r>
-              <a:rPr lang="en-US" sz="1500" dirty="0">
-                <a:solidFill>
-                  <a:srgbClr val="F2F2F0"/>
-                </a:solidFill>
-                <a:latin typeface="Menlo" pitchFamily="34" charset="0"/>
-                <a:ea typeface="Menlo" pitchFamily="34" charset="-122"/>
-                <a:cs typeface="Menlo" pitchFamily="34" charset="-120"/>
-              </a:rPr>
-              <a:t>  3. 브라우저로 열어서 결과를 바로 확인할 수 있게 안내</a:t>
-            </a:r>
-            <a:endParaRPr lang="en-US" sz="1500" dirty="0"/>
-          </a:p>
-          <a:p>
-            <a:pPr indent="0" marL="0">
-              <a:buNone/>
-            </a:pPr>
-            <a:endParaRPr lang="en-US" sz="1500" dirty="0"/>
-          </a:p>
-          <a:p>
-            <a:pPr indent="0" marL="0">
-              <a:buNone/>
-            </a:pPr>
-            <a:r>
-              <a:rPr lang="en-US" sz="1500" dirty="0">
-                <a:solidFill>
-                  <a:srgbClr val="F2F2F0"/>
-                </a:solidFill>
-                <a:latin typeface="Menlo" pitchFamily="34" charset="0"/>
-                <a:ea typeface="Menlo" pitchFamily="34" charset="-122"/>
-                <a:cs typeface="Menlo" pitchFamily="34" charset="-120"/>
-              </a:rPr>
-              <a:t>포인트: 복잡한 프로젝트(소셜 플로우)도 원리는 똑같음 —</a:t>
-            </a:r>
-            <a:endParaRPr lang="en-US" sz="1500" dirty="0"/>
-          </a:p>
-          <a:p>
-            <a:pPr indent="0" marL="0">
-              <a:buNone/>
-            </a:pPr>
-            <a:r>
-              <a:rPr lang="en-US" sz="1500" dirty="0">
-                <a:solidFill>
-                  <a:srgbClr val="F2F2F0"/>
-                </a:solidFill>
-                <a:latin typeface="Menlo" pitchFamily="34" charset="0"/>
-                <a:ea typeface="Menlo" pitchFamily="34" charset="-122"/>
-                <a:cs typeface="Menlo" pitchFamily="34" charset="-120"/>
-              </a:rPr>
-              <a:t>        '무엇을 만들고 싶은지'를 문장으로 여러 번 주고받는 것의 반복</a:t>
-            </a:r>
-            <a:endParaRPr lang="en-US" sz="1500" dirty="0"/>
+            <a:pPr marL="342900" indent="-342900">
+              <a:lnSpc>
+                <a:spcPct val="135000"/>
+              </a:lnSpc>
+              <a:buSzPct val="100000"/>
+              <a:buChar char="•"/>
+            </a:pPr>
+            <a:r>
+              <a:rPr lang="en-US" sz="1800" dirty="0">
+                <a:solidFill>
+                  <a:srgbClr val="F2F2F0"/>
+                </a:solidFill>
+                <a:latin typeface="Arial" pitchFamily="34" charset="0"/>
+                <a:ea typeface="Arial" pitchFamily="34" charset="-122"/>
+                <a:cs typeface="Arial" pitchFamily="34" charset="-120"/>
+              </a:rPr>
+              <a:t>별도 Next.js 앱 (admin/) — 서비스 role 키 없이 anon 키 + RLS만으로 동작</a:t>
+            </a:r>
+            <a:endParaRPr lang="en-US" sz="1800" dirty="0"/>
+          </a:p>
+          <a:p>
+            <a:pPr marL="342900" indent="-342900">
+              <a:lnSpc>
+                <a:spcPct val="135000"/>
+              </a:lnSpc>
+              <a:buSzPct val="100000"/>
+              <a:buChar char="•"/>
+            </a:pPr>
+            <a:r>
+              <a:rPr lang="en-US" sz="1800" dirty="0">
+                <a:solidFill>
+                  <a:srgbClr val="F2F2F0"/>
+                </a:solidFill>
+                <a:latin typeface="Arial" pitchFamily="34" charset="0"/>
+                <a:ea typeface="Arial" pitchFamily="34" charset="-122"/>
+                <a:cs typeface="Arial" pitchFamily="34" charset="-120"/>
+              </a:rPr>
+              <a:t>profiles.is_admin 컬럼 + is_admin() security definer 함수로 권한 판정</a:t>
+            </a:r>
+            <a:endParaRPr lang="en-US" sz="1800" dirty="0"/>
+          </a:p>
+          <a:p>
+            <a:pPr marL="342900" indent="-342900">
+              <a:lnSpc>
+                <a:spcPct val="135000"/>
+              </a:lnSpc>
+              <a:buSzPct val="100000"/>
+              <a:buChar char="•"/>
+            </a:pPr>
+            <a:r>
+              <a:rPr lang="en-US" sz="1800" dirty="0">
+                <a:solidFill>
+                  <a:srgbClr val="F2F2F0"/>
+                </a:solidFill>
+                <a:latin typeface="Arial" pitchFamily="34" charset="0"/>
+                <a:ea typeface="Arial" pitchFamily="34" charset="-122"/>
+                <a:cs typeface="Arial" pitchFamily="34" charset="-120"/>
+              </a:rPr>
+              <a:t>관리자만 다른 사람의 프로필 수정(정지 처리) / 게시물 삭제 가능하도록 RLS 정책 추가</a:t>
+            </a:r>
+            <a:endParaRPr lang="en-US" sz="1800" dirty="0"/>
+          </a:p>
+          <a:p>
+            <a:pPr marL="342900" indent="-342900">
+              <a:lnSpc>
+                <a:spcPct val="135000"/>
+              </a:lnSpc>
+              <a:buSzPct val="100000"/>
+              <a:buChar char="•"/>
+            </a:pPr>
+            <a:r>
+              <a:rPr lang="en-US" sz="1800" dirty="0">
+                <a:solidFill>
+                  <a:srgbClr val="F2F2F0"/>
+                </a:solidFill>
+                <a:latin typeface="Arial" pitchFamily="34" charset="0"/>
+                <a:ea typeface="Arial" pitchFamily="34" charset="-122"/>
+                <a:cs typeface="Arial" pitchFamily="34" charset="-120"/>
+              </a:rPr>
+              <a:t>is_banned=true인 계정은 새 글/좋아요/팔로우 작성이 RLS에서 자동 차단</a:t>
+            </a:r>
+            <a:endParaRPr lang="en-US" sz="1800" dirty="0"/>
+          </a:p>
+          <a:p>
+            <a:pPr marL="342900" indent="-342900">
+              <a:lnSpc>
+                <a:spcPct val="135000"/>
+              </a:lnSpc>
+              <a:buSzPct val="100000"/>
+              <a:buChar char="•"/>
+            </a:pPr>
+            <a:r>
+              <a:rPr lang="en-US" sz="1800" dirty="0">
+                <a:solidFill>
+                  <a:srgbClr val="F2F2F0"/>
+                </a:solidFill>
+                <a:latin typeface="Arial" pitchFamily="34" charset="0"/>
+                <a:ea typeface="Arial" pitchFamily="34" charset="-122"/>
+                <a:cs typeface="Arial" pitchFamily="34" charset="-120"/>
+              </a:rPr>
+              <a:t>첫 관리자는 SQL로 직접 지정: update profiles set is_admin=true where id=…</a:t>
+            </a:r>
+            <a:endParaRPr lang="en-US" sz="1800" dirty="0"/>
           </a:p>
         </p:txBody>
       </p:sp>
@@ -11312,7 +11735,7 @@
                 <a:ea typeface="Arial" pitchFamily="34" charset="-122"/>
                 <a:cs typeface="Arial" pitchFamily="34" charset="-120"/>
               </a:rPr>
-              <a:t>이 프로젝트 Clone 받아서 실행하기</a:t>
+              <a:t>Claude Code 실행하기</a:t>
             </a:r>
             <a:endParaRPr lang="en-US" sz="3000" dirty="0"/>
           </a:p>
@@ -11320,7 +11743,46 @@
       </p:sp>
       <p:sp>
         <p:nvSpPr>
-          <p:cNvPr id="4" name="Shape 2"/>
+          <p:cNvPr id="4" name="Text 2"/>
+          <p:cNvSpPr/>
+          <p:nvPr/>
+        </p:nvSpPr>
+        <p:spPr>
+          <a:xfrm>
+            <a:off x="548640" y="1005840"/>
+            <a:ext cx="11064240" cy="457200"/>
+          </a:xfrm>
+          <a:prstGeom prst="rect">
+            <a:avLst/>
+          </a:prstGeom>
+          <a:noFill/>
+          <a:ln/>
+        </p:spPr>
+        <p:txBody>
+          <a:bodyPr wrap="square" rtlCol="0" anchor="ctr"/>
+          <a:lstStyle/>
+          <a:p>
+            <a:pPr indent="0" marL="0">
+              <a:buNone/>
+            </a:pPr>
+            <a:r>
+              <a:rPr lang="en-US" sz="1600" dirty="0">
+                <a:solidFill>
+                  <a:srgbClr val="98999D"/>
+                </a:solidFill>
+                <a:latin typeface="Arial" pitchFamily="34" charset="0"/>
+                <a:ea typeface="Arial" pitchFamily="34" charset="-122"/>
+                <a:cs typeface="Arial" pitchFamily="34" charset="-120"/>
+              </a:rPr>
+              <a:t>터미널에서 대화하며 코드를 만드는 AI 도구</a:t>
+            </a:r>
+            <a:endParaRPr lang="en-US" sz="1600" dirty="0"/>
+          </a:p>
+        </p:txBody>
+      </p:sp>
+      <p:sp>
+        <p:nvSpPr>
+          <p:cNvPr id="5" name="Shape 3"/>
           <p:cNvSpPr/>
           <p:nvPr/>
         </p:nvSpPr>
@@ -11343,41 +11805,14 @@
       </p:sp>
       <p:sp>
         <p:nvSpPr>
-          <p:cNvPr id="5" name="Shape 3"/>
+          <p:cNvPr id="6" name="Text 4"/>
           <p:cNvSpPr/>
           <p:nvPr/>
         </p:nvSpPr>
         <p:spPr>
           <a:xfrm>
             <a:off x="548640" y="1828800"/>
-            <a:ext cx="11064240" cy="4206240"/>
-          </a:xfrm>
-          <a:prstGeom prst="roundRect">
-            <a:avLst>
-              <a:gd name="adj" fmla="val 1739"/>
-            </a:avLst>
-          </a:prstGeom>
-          <a:solidFill>
-            <a:srgbClr val="202124"/>
-          </a:solidFill>
-          <a:ln w="12700">
-            <a:solidFill>
-              <a:srgbClr val="202124"/>
-            </a:solidFill>
-            <a:prstDash val="solid"/>
-          </a:ln>
-        </p:spPr>
-      </p:sp>
-      <p:sp>
-        <p:nvSpPr>
-          <p:cNvPr id="6" name="Text 4"/>
-          <p:cNvSpPr/>
-          <p:nvPr/>
-        </p:nvSpPr>
-        <p:spPr>
-          <a:xfrm>
-            <a:off x="822960" y="2057400"/>
-            <a:ext cx="10515600" cy="3749040"/>
+            <a:ext cx="11064240" cy="4572000"/>
           </a:xfrm>
           <a:prstGeom prst="rect">
             <a:avLst/>
@@ -11389,198 +11824,109 @@
           <a:bodyPr wrap="square" rtlCol="0" anchor="t"/>
           <a:lstStyle/>
           <a:p>
-            <a:pPr indent="0" marL="0">
-              <a:buNone/>
-            </a:pPr>
-            <a:r>
-              <a:rPr lang="en-US" sz="1500" dirty="0">
-                <a:solidFill>
-                  <a:srgbClr val="F2F2F0"/>
-                </a:solidFill>
-                <a:latin typeface="Menlo" pitchFamily="34" charset="0"/>
-                <a:ea typeface="Menlo" pitchFamily="34" charset="-122"/>
-                <a:cs typeface="Menlo" pitchFamily="34" charset="-120"/>
-              </a:rPr>
-              <a:t>git clone https://github.com/white100s/social_flow.git</a:t>
-            </a:r>
-            <a:endParaRPr lang="en-US" sz="1500" dirty="0"/>
-          </a:p>
-          <a:p>
-            <a:pPr indent="0" marL="0">
-              <a:buNone/>
-            </a:pPr>
-            <a:r>
-              <a:rPr lang="en-US" sz="1500" dirty="0">
-                <a:solidFill>
-                  <a:srgbClr val="F2F2F0"/>
-                </a:solidFill>
-                <a:latin typeface="Menlo" pitchFamily="34" charset="0"/>
-                <a:ea typeface="Menlo" pitchFamily="34" charset="-122"/>
-                <a:cs typeface="Menlo" pitchFamily="34" charset="-120"/>
-              </a:rPr>
-              <a:t>cd social_flow</a:t>
-            </a:r>
-            <a:endParaRPr lang="en-US" sz="1500" dirty="0"/>
-          </a:p>
-          <a:p>
-            <a:pPr indent="0" marL="0">
-              <a:buNone/>
-            </a:pPr>
-            <a:endParaRPr lang="en-US" sz="1500" dirty="0"/>
-          </a:p>
-          <a:p>
-            <a:pPr indent="0" marL="0">
-              <a:buNone/>
-            </a:pPr>
-            <a:r>
-              <a:rPr lang="en-US" sz="1500" dirty="0">
-                <a:solidFill>
-                  <a:srgbClr val="F2F2F0"/>
-                </a:solidFill>
-                <a:latin typeface="Menlo" pitchFamily="34" charset="0"/>
-                <a:ea typeface="Menlo" pitchFamily="34" charset="-122"/>
-                <a:cs typeface="Menlo" pitchFamily="34" charset="-120"/>
-              </a:rPr>
-              <a:t># 웹 (Next.js)</a:t>
-            </a:r>
-            <a:endParaRPr lang="en-US" sz="1500" dirty="0"/>
-          </a:p>
-          <a:p>
-            <a:pPr indent="0" marL="0">
-              <a:buNone/>
-            </a:pPr>
-            <a:r>
-              <a:rPr lang="en-US" sz="1500" dirty="0">
-                <a:solidFill>
-                  <a:srgbClr val="F2F2F0"/>
-                </a:solidFill>
-                <a:latin typeface="Menlo" pitchFamily="34" charset="0"/>
-                <a:ea typeface="Menlo" pitchFamily="34" charset="-122"/>
-                <a:cs typeface="Menlo" pitchFamily="34" charset="-120"/>
-              </a:rPr>
-              <a:t>pnpm install &amp;&amp; pnpm dev        # http://localhost:3721</a:t>
-            </a:r>
-            <a:endParaRPr lang="en-US" sz="1500" dirty="0"/>
-          </a:p>
-          <a:p>
-            <a:pPr indent="0" marL="0">
-              <a:buNone/>
-            </a:pPr>
-            <a:endParaRPr lang="en-US" sz="1500" dirty="0"/>
-          </a:p>
-          <a:p>
-            <a:pPr indent="0" marL="0">
-              <a:buNone/>
-            </a:pPr>
-            <a:r>
-              <a:rPr lang="en-US" sz="1500" dirty="0">
-                <a:solidFill>
-                  <a:srgbClr val="F2F2F0"/>
-                </a:solidFill>
-                <a:latin typeface="Menlo" pitchFamily="34" charset="0"/>
-                <a:ea typeface="Menlo" pitchFamily="34" charset="-122"/>
-                <a:cs typeface="Menlo" pitchFamily="34" charset="-120"/>
-              </a:rPr>
-              <a:t># 관리자 앱</a:t>
-            </a:r>
-            <a:endParaRPr lang="en-US" sz="1500" dirty="0"/>
-          </a:p>
-          <a:p>
-            <a:pPr indent="0" marL="0">
-              <a:buNone/>
-            </a:pPr>
-            <a:r>
-              <a:rPr lang="en-US" sz="1500" dirty="0">
-                <a:solidFill>
-                  <a:srgbClr val="F2F2F0"/>
-                </a:solidFill>
-                <a:latin typeface="Menlo" pitchFamily="34" charset="0"/>
-                <a:ea typeface="Menlo" pitchFamily="34" charset="-122"/>
-                <a:cs typeface="Menlo" pitchFamily="34" charset="-120"/>
-              </a:rPr>
-              <a:t>cd admin &amp;&amp; pnpm install &amp;&amp; pnpm dev   # http://localhost:3722</a:t>
-            </a:r>
-            <a:endParaRPr lang="en-US" sz="1500" dirty="0"/>
-          </a:p>
-          <a:p>
-            <a:pPr indent="0" marL="0">
-              <a:buNone/>
-            </a:pPr>
-            <a:endParaRPr lang="en-US" sz="1500" dirty="0"/>
-          </a:p>
-          <a:p>
-            <a:pPr indent="0" marL="0">
-              <a:buNone/>
-            </a:pPr>
-            <a:r>
-              <a:rPr lang="en-US" sz="1500" dirty="0">
-                <a:solidFill>
-                  <a:srgbClr val="F2F2F0"/>
-                </a:solidFill>
-                <a:latin typeface="Menlo" pitchFamily="34" charset="0"/>
-                <a:ea typeface="Menlo" pitchFamily="34" charset="-122"/>
-                <a:cs typeface="Menlo" pitchFamily="34" charset="-120"/>
-              </a:rPr>
-              <a:t># Flutter</a:t>
-            </a:r>
-            <a:endParaRPr lang="en-US" sz="1500" dirty="0"/>
-          </a:p>
-          <a:p>
-            <a:pPr indent="0" marL="0">
-              <a:buNone/>
-            </a:pPr>
-            <a:r>
-              <a:rPr lang="en-US" sz="1500" dirty="0">
-                <a:solidFill>
-                  <a:srgbClr val="F2F2F0"/>
-                </a:solidFill>
-                <a:latin typeface="Menlo" pitchFamily="34" charset="0"/>
-                <a:ea typeface="Menlo" pitchFamily="34" charset="-122"/>
-                <a:cs typeface="Menlo" pitchFamily="34" charset="-120"/>
-              </a:rPr>
-              <a:t>cd flutter_app &amp;&amp; flutter pub get &amp;&amp; flutter run -d chrome</a:t>
-            </a:r>
-            <a:endParaRPr lang="en-US" sz="1500" dirty="0"/>
-          </a:p>
-          <a:p>
-            <a:pPr indent="0" marL="0">
-              <a:buNone/>
-            </a:pPr>
-            <a:endParaRPr lang="en-US" sz="1500" dirty="0"/>
-          </a:p>
-          <a:p>
-            <a:pPr indent="0" marL="0">
-              <a:buNone/>
-            </a:pPr>
-            <a:r>
-              <a:rPr lang="en-US" sz="1500" dirty="0">
-                <a:solidFill>
-                  <a:srgbClr val="F2F2F0"/>
-                </a:solidFill>
-                <a:latin typeface="Menlo" pitchFamily="34" charset="0"/>
-                <a:ea typeface="Menlo" pitchFamily="34" charset="-122"/>
-                <a:cs typeface="Menlo" pitchFamily="34" charset="-120"/>
-              </a:rPr>
-              <a:t># DB 스키마 적용 (최초 1회, 재실행해도 안전)</a:t>
-            </a:r>
-            <a:endParaRPr lang="en-US" sz="1500" dirty="0"/>
-          </a:p>
-          <a:p>
-            <a:pPr indent="0" marL="0">
-              <a:buNone/>
-            </a:pPr>
-            <a:r>
-              <a:rPr lang="en-US" sz="1500" dirty="0">
-                <a:solidFill>
-                  <a:srgbClr val="F2F2F0"/>
-                </a:solidFill>
-                <a:latin typeface="Menlo" pitchFamily="34" charset="0"/>
-                <a:ea typeface="Menlo" pitchFamily="34" charset="-122"/>
-                <a:cs typeface="Menlo" pitchFamily="34" charset="-120"/>
-              </a:rPr>
-              <a:t>Supabase 대시보드 → SQL Editor → supabase/schema.sql 실행</a:t>
-            </a:r>
-            <a:endParaRPr lang="en-US" sz="1500" dirty="0"/>
+            <a:pPr marL="342900" indent="-342900">
+              <a:lnSpc>
+                <a:spcPct val="135000"/>
+              </a:lnSpc>
+              <a:buSzPct val="100000"/>
+              <a:buChar char="•"/>
+            </a:pPr>
+            <a:r>
+              <a:rPr lang="en-US" sz="1800" dirty="0">
+                <a:solidFill>
+                  <a:srgbClr val="F2F2F0"/>
+                </a:solidFill>
+                <a:latin typeface="Arial" pitchFamily="34" charset="0"/>
+                <a:ea typeface="Arial" pitchFamily="34" charset="-122"/>
+                <a:cs typeface="Arial" pitchFamily="34" charset="-120"/>
+              </a:rPr>
+              <a:t>설치: npm install -g @anthropic-ai/claude-code (또는 공식 설치 스크립트)</a:t>
+            </a:r>
+            <a:endParaRPr lang="en-US" sz="1800" dirty="0"/>
+          </a:p>
+          <a:p>
+            <a:pPr marL="342900" indent="-342900">
+              <a:lnSpc>
+                <a:spcPct val="135000"/>
+              </a:lnSpc>
+              <a:buSzPct val="100000"/>
+              <a:buChar char="•"/>
+            </a:pPr>
+            <a:r>
+              <a:rPr lang="en-US" sz="1800" dirty="0">
+                <a:solidFill>
+                  <a:srgbClr val="F2F2F0"/>
+                </a:solidFill>
+                <a:latin typeface="Arial" pitchFamily="34" charset="0"/>
+                <a:ea typeface="Arial" pitchFamily="34" charset="-122"/>
+                <a:cs typeface="Arial" pitchFamily="34" charset="-120"/>
+              </a:rPr>
+              <a:t>프로젝트 폴더로 이동한 뒤 터미널에 claude 라고 치면 대화가 시작됨</a:t>
+            </a:r>
+            <a:endParaRPr lang="en-US" sz="1800" dirty="0"/>
+          </a:p>
+          <a:p>
+            <a:pPr marL="342900" indent="-342900">
+              <a:lnSpc>
+                <a:spcPct val="135000"/>
+              </a:lnSpc>
+              <a:buSzPct val="100000"/>
+              <a:buChar char="•"/>
+            </a:pPr>
+            <a:r>
+              <a:rPr lang="en-US" sz="1800" dirty="0">
+                <a:solidFill>
+                  <a:srgbClr val="F2F2F0"/>
+                </a:solidFill>
+                <a:latin typeface="Arial" pitchFamily="34" charset="0"/>
+                <a:ea typeface="Arial" pitchFamily="34" charset="-122"/>
+                <a:cs typeface="Arial" pitchFamily="34" charset="-120"/>
+              </a:rPr>
+              <a:t>'로그인 페이지 만들어줘' 처럼 자연어로 요청하면 파일을 직접 읽고, 쓰고, 필요하면 명령어(빌드/테스트/git)까지 실행함</a:t>
+            </a:r>
+            <a:endParaRPr lang="en-US" sz="1800" dirty="0"/>
+          </a:p>
+          <a:p>
+            <a:pPr marL="342900" indent="-342900">
+              <a:lnSpc>
+                <a:spcPct val="135000"/>
+              </a:lnSpc>
+              <a:buSzPct val="100000"/>
+              <a:buChar char="•"/>
+            </a:pPr>
+            <a:r>
+              <a:rPr lang="en-US" sz="1800" dirty="0">
+                <a:solidFill>
+                  <a:srgbClr val="F2F2F0"/>
+                </a:solidFill>
+                <a:latin typeface="Arial" pitchFamily="34" charset="0"/>
+                <a:ea typeface="Arial" pitchFamily="34" charset="-122"/>
+                <a:cs typeface="Arial" pitchFamily="34" charset="-120"/>
+              </a:rPr>
+              <a:t>사람이 코드를 복사·붙여넣기 하지 않아도 됨 — 결과물을 바로 프로젝트 안에 반영</a:t>
+            </a:r>
+            <a:endParaRPr lang="en-US" sz="1800" dirty="0"/>
+          </a:p>
+          <a:p>
+            <a:pPr marL="342900" indent="-342900">
+              <a:lnSpc>
+                <a:spcPct val="135000"/>
+              </a:lnSpc>
+              <a:buSzPct val="100000"/>
+              <a:buChar char="•"/>
+            </a:pPr>
+            <a:r>
+              <a:rPr lang="en-US" sz="1800" dirty="0">
+                <a:solidFill>
+                  <a:srgbClr val="F2F2F0"/>
+                </a:solidFill>
+                <a:latin typeface="Arial" pitchFamily="34" charset="0"/>
+                <a:ea typeface="Arial" pitchFamily="34" charset="-122"/>
+                <a:cs typeface="Arial" pitchFamily="34" charset="-120"/>
+              </a:rPr>
+              <a:t>이 오리엔테이션 문서와 소셜 플로우 프로젝트 전체가 Claude Code와의 대화로 만들어졌음</a:t>
+            </a:r>
+            <a:endParaRPr lang="en-US" sz="1800" dirty="0"/>
           </a:p>
         </p:txBody>
       </p:sp>
@@ -11688,7 +12034,7 @@
                 <a:ea typeface="Arial" pitchFamily="34" charset="-122"/>
                 <a:cs typeface="Arial" pitchFamily="34" charset="-120"/>
               </a:rPr>
-              <a:t>파일 구조 설명</a:t>
+              <a:t>Claude Code 데모</a:t>
             </a:r>
             <a:endParaRPr lang="en-US" sz="3000" dirty="0"/>
           </a:p>
@@ -11727,7 +12073,7 @@
                 <a:ea typeface="Arial" pitchFamily="34" charset="-122"/>
                 <a:cs typeface="Arial" pitchFamily="34" charset="-120"/>
               </a:rPr>
-              <a:t>모노리포 폴더 배치</a:t>
+              <a:t>제일 간단한 예시로 감 잡기: 자기소개 페이지</a:t>
             </a:r>
             <a:endParaRPr lang="en-US" sz="1600" dirty="0"/>
           </a:p>
@@ -11816,7 +12162,7 @@
                 <a:ea typeface="Menlo" pitchFamily="34" charset="-122"/>
                 <a:cs typeface="Menlo" pitchFamily="34" charset="-120"/>
               </a:rPr>
-              <a:t>social_flows/</a:t>
+              <a:t>내가 입력:</a:t>
             </a:r>
             <a:endParaRPr lang="en-US" sz="1500" dirty="0"/>
           </a:p>
@@ -11833,7 +12179,7 @@
                 <a:ea typeface="Menlo" pitchFamily="34" charset="-122"/>
                 <a:cs typeface="Menlo" pitchFamily="34" charset="-120"/>
               </a:rPr>
-              <a:t>├─ src/                 # Next.js 16 웹 앱 (App Router) · 포트 3721</a:t>
+              <a:t>  "html/css로 자기소개 웹페이지 하나 만들어줘.</a:t>
             </a:r>
             <a:endParaRPr lang="en-US" sz="1500" dirty="0"/>
           </a:p>
@@ -11850,8 +12196,14 @@
                 <a:ea typeface="Menlo" pitchFamily="34" charset="-122"/>
                 <a:cs typeface="Menlo" pitchFamily="34" charset="-120"/>
               </a:rPr>
-              <a:t>│   ├─ app/              # 라우트: /, /login, /signup, /new, /profile/[username]</a:t>
-            </a:r>
+              <a:t>   이름, 사진, 한 줄 소개, 연락처가 들어가면 좋겠어."</a:t>
+            </a:r>
+            <a:endParaRPr lang="en-US" sz="1500" dirty="0"/>
+          </a:p>
+          <a:p>
+            <a:pPr indent="0" marL="0">
+              <a:buNone/>
+            </a:pPr>
             <a:endParaRPr lang="en-US" sz="1500" dirty="0"/>
           </a:p>
           <a:p>
@@ -11867,7 +12219,7 @@
                 <a:ea typeface="Menlo" pitchFamily="34" charset="-122"/>
                 <a:cs typeface="Menlo" pitchFamily="34" charset="-120"/>
               </a:rPr>
-              <a:t>│   ├─ components/       # Header, PostCard, LikeButton, FollowButton …</a:t>
+              <a:t>Claude Code가 하는 일:</a:t>
             </a:r>
             <a:endParaRPr lang="en-US" sz="1500" dirty="0"/>
           </a:p>
@@ -11884,7 +12236,7 @@
                 <a:ea typeface="Menlo" pitchFamily="34" charset="-122"/>
                 <a:cs typeface="Menlo" pitchFamily="34" charset="-120"/>
               </a:rPr>
-              <a:t>│   └─ lib/              # supabase 클라이언트, i18n 사전, theme</a:t>
+              <a:t>  1. index.html, style.css 파일을 새로 만듦</a:t>
             </a:r>
             <a:endParaRPr lang="en-US" sz="1500" dirty="0"/>
           </a:p>
@@ -11901,7 +12253,7 @@
                 <a:ea typeface="Menlo" pitchFamily="34" charset="-122"/>
                 <a:cs typeface="Menlo" pitchFamily="34" charset="-120"/>
               </a:rPr>
-              <a:t>├─ admin/                # 관리자 웹 앱 (Next.js) · 포트 3722</a:t>
+              <a:t>  2. 이름/사진/소개/연락처 영역을 채워 넣음</a:t>
             </a:r>
             <a:endParaRPr lang="en-US" sz="1500" dirty="0"/>
           </a:p>
@@ -11918,8 +12270,14 @@
                 <a:ea typeface="Menlo" pitchFamily="34" charset="-122"/>
                 <a:cs typeface="Menlo" pitchFamily="34" charset="-120"/>
               </a:rPr>
-              <a:t>│   └─ src/app/          # /login, /(대시보드), /users, /posts</a:t>
-            </a:r>
+              <a:t>  3. 브라우저로 열어서 결과를 바로 확인할 수 있게 안내</a:t>
+            </a:r>
+            <a:endParaRPr lang="en-US" sz="1500" dirty="0"/>
+          </a:p>
+          <a:p>
+            <a:pPr indent="0" marL="0">
+              <a:buNone/>
+            </a:pPr>
             <a:endParaRPr lang="en-US" sz="1500" dirty="0"/>
           </a:p>
           <a:p>
@@ -11935,7 +12293,7 @@
                 <a:ea typeface="Menlo" pitchFamily="34" charset="-122"/>
                 <a:cs typeface="Menlo" pitchFamily="34" charset="-120"/>
               </a:rPr>
-              <a:t>├─ supabase/</a:t>
+              <a:t>포인트: 복잡한 프로젝트(소셜 플로우)도 원리는 똑같음 —</a:t>
             </a:r>
             <a:endParaRPr lang="en-US" sz="1500" dirty="0"/>
           </a:p>
@@ -11952,58 +12310,7 @@
                 <a:ea typeface="Menlo" pitchFamily="34" charset="-122"/>
                 <a:cs typeface="Menlo" pitchFamily="34" charset="-120"/>
               </a:rPr>
-              <a:t>│   └─ schema.sql        # 모든 테이블 + RLS + 관리자 정책, 하나의 파일로 통합</a:t>
-            </a:r>
-            <a:endParaRPr lang="en-US" sz="1500" dirty="0"/>
-          </a:p>
-          <a:p>
-            <a:pPr indent="0" marL="0">
-              <a:buNone/>
-            </a:pPr>
-            <a:r>
-              <a:rPr lang="en-US" sz="1500" dirty="0">
-                <a:solidFill>
-                  <a:srgbClr val="F2F2F0"/>
-                </a:solidFill>
-                <a:latin typeface="Menlo" pitchFamily="34" charset="0"/>
-                <a:ea typeface="Menlo" pitchFamily="34" charset="-122"/>
-                <a:cs typeface="Menlo" pitchFamily="34" charset="-120"/>
-              </a:rPr>
-              <a:t>├─ flutter_app/          # Flutter 클라이언트 (macOS/Windows/Android/iOS/Web)</a:t>
-            </a:r>
-            <a:endParaRPr lang="en-US" sz="1500" dirty="0"/>
-          </a:p>
-          <a:p>
-            <a:pPr indent="0" marL="0">
-              <a:buNone/>
-            </a:pPr>
-            <a:r>
-              <a:rPr lang="en-US" sz="1500" dirty="0">
-                <a:solidFill>
-                  <a:srgbClr val="F2F2F0"/>
-                </a:solidFill>
-                <a:latin typeface="Menlo" pitchFamily="34" charset="0"/>
-                <a:ea typeface="Menlo" pitchFamily="34" charset="-122"/>
-                <a:cs typeface="Menlo" pitchFamily="34" charset="-120"/>
-              </a:rPr>
-              <a:t>│   └─ lib/               # screens/, widgets/, services/, i18n/, theme/</a:t>
-            </a:r>
-            <a:endParaRPr lang="en-US" sz="1500" dirty="0"/>
-          </a:p>
-          <a:p>
-            <a:pPr indent="0" marL="0">
-              <a:buNone/>
-            </a:pPr>
-            <a:r>
-              <a:rPr lang="en-US" sz="1500" dirty="0">
-                <a:solidFill>
-                  <a:srgbClr val="F2F2F0"/>
-                </a:solidFill>
-                <a:latin typeface="Menlo" pitchFamily="34" charset="0"/>
-                <a:ea typeface="Menlo" pitchFamily="34" charset="-122"/>
-                <a:cs typeface="Menlo" pitchFamily="34" charset="-120"/>
-              </a:rPr>
-              <a:t>└─ docs/                 # 이 오리엔테이션 자료 생성 스크립트</a:t>
+              <a:t>        '무엇을 만들고 싶은지'를 문장으로 여러 번 주고받는 것의 반복</a:t>
             </a:r>
             <a:endParaRPr lang="en-US" sz="1500" dirty="0"/>
           </a:p>
@@ -12113,7 +12420,7 @@
                 <a:ea typeface="Arial" pitchFamily="34" charset="-122"/>
                 <a:cs typeface="Arial" pitchFamily="34" charset="-120"/>
               </a:rPr>
-              <a:t>다음 단계</a:t>
+              <a:t>이 프로젝트 Clone 받아서 실행하기</a:t>
             </a:r>
             <a:endParaRPr lang="en-US" sz="3000" dirty="0"/>
           </a:p>
@@ -12121,46 +12428,7 @@
       </p:sp>
       <p:sp>
         <p:nvSpPr>
-          <p:cNvPr id="4" name="Text 2"/>
-          <p:cNvSpPr/>
-          <p:nvPr/>
-        </p:nvSpPr>
-        <p:spPr>
-          <a:xfrm>
-            <a:off x="548640" y="1005840"/>
-            <a:ext cx="11064240" cy="457200"/>
-          </a:xfrm>
-          <a:prstGeom prst="rect">
-            <a:avLst/>
-          </a:prstGeom>
-          <a:noFill/>
-          <a:ln/>
-        </p:spPr>
-        <p:txBody>
-          <a:bodyPr wrap="square" rtlCol="0" anchor="ctr"/>
-          <a:lstStyle/>
-          <a:p>
-            <a:pPr indent="0" marL="0">
-              <a:buNone/>
-            </a:pPr>
-            <a:r>
-              <a:rPr lang="en-US" sz="1600" dirty="0">
-                <a:solidFill>
-                  <a:srgbClr val="98999D"/>
-                </a:solidFill>
-                <a:latin typeface="Arial" pitchFamily="34" charset="0"/>
-                <a:ea typeface="Arial" pitchFamily="34" charset="-122"/>
-                <a:cs typeface="Arial" pitchFamily="34" charset="-120"/>
-              </a:rPr>
-              <a:t>아직 안 된 것들</a:t>
-            </a:r>
-            <a:endParaRPr lang="en-US" sz="1600" dirty="0"/>
-          </a:p>
-        </p:txBody>
-      </p:sp>
-      <p:sp>
-        <p:nvSpPr>
-          <p:cNvPr id="5" name="Shape 3"/>
+          <p:cNvPr id="4" name="Shape 2"/>
           <p:cNvSpPr/>
           <p:nvPr/>
         </p:nvSpPr>
@@ -12183,6 +12451,846 @@
       </p:sp>
       <p:sp>
         <p:nvSpPr>
+          <p:cNvPr id="5" name="Shape 3"/>
+          <p:cNvSpPr/>
+          <p:nvPr/>
+        </p:nvSpPr>
+        <p:spPr>
+          <a:xfrm>
+            <a:off x="548640" y="1828800"/>
+            <a:ext cx="11064240" cy="4206240"/>
+          </a:xfrm>
+          <a:prstGeom prst="roundRect">
+            <a:avLst>
+              <a:gd name="adj" fmla="val 1739"/>
+            </a:avLst>
+          </a:prstGeom>
+          <a:solidFill>
+            <a:srgbClr val="202124"/>
+          </a:solidFill>
+          <a:ln w="12700">
+            <a:solidFill>
+              <a:srgbClr val="202124"/>
+            </a:solidFill>
+            <a:prstDash val="solid"/>
+          </a:ln>
+        </p:spPr>
+      </p:sp>
+      <p:sp>
+        <p:nvSpPr>
+          <p:cNvPr id="6" name="Text 4"/>
+          <p:cNvSpPr/>
+          <p:nvPr/>
+        </p:nvSpPr>
+        <p:spPr>
+          <a:xfrm>
+            <a:off x="822960" y="2057400"/>
+            <a:ext cx="10515600" cy="3749040"/>
+          </a:xfrm>
+          <a:prstGeom prst="rect">
+            <a:avLst/>
+          </a:prstGeom>
+          <a:noFill/>
+          <a:ln/>
+        </p:spPr>
+        <p:txBody>
+          <a:bodyPr wrap="square" rtlCol="0" anchor="t"/>
+          <a:lstStyle/>
+          <a:p>
+            <a:pPr indent="0" marL="0">
+              <a:buNone/>
+            </a:pPr>
+            <a:r>
+              <a:rPr lang="en-US" sz="1500" dirty="0">
+                <a:solidFill>
+                  <a:srgbClr val="F2F2F0"/>
+                </a:solidFill>
+                <a:latin typeface="Menlo" pitchFamily="34" charset="0"/>
+                <a:ea typeface="Menlo" pitchFamily="34" charset="-122"/>
+                <a:cs typeface="Menlo" pitchFamily="34" charset="-120"/>
+              </a:rPr>
+              <a:t>git clone https://github.com/white100s/social_flow.git</a:t>
+            </a:r>
+            <a:endParaRPr lang="en-US" sz="1500" dirty="0"/>
+          </a:p>
+          <a:p>
+            <a:pPr indent="0" marL="0">
+              <a:buNone/>
+            </a:pPr>
+            <a:r>
+              <a:rPr lang="en-US" sz="1500" dirty="0">
+                <a:solidFill>
+                  <a:srgbClr val="F2F2F0"/>
+                </a:solidFill>
+                <a:latin typeface="Menlo" pitchFamily="34" charset="0"/>
+                <a:ea typeface="Menlo" pitchFamily="34" charset="-122"/>
+                <a:cs typeface="Menlo" pitchFamily="34" charset="-120"/>
+              </a:rPr>
+              <a:t>cd social_flow</a:t>
+            </a:r>
+            <a:endParaRPr lang="en-US" sz="1500" dirty="0"/>
+          </a:p>
+          <a:p>
+            <a:pPr indent="0" marL="0">
+              <a:buNone/>
+            </a:pPr>
+            <a:endParaRPr lang="en-US" sz="1500" dirty="0"/>
+          </a:p>
+          <a:p>
+            <a:pPr indent="0" marL="0">
+              <a:buNone/>
+            </a:pPr>
+            <a:r>
+              <a:rPr lang="en-US" sz="1500" dirty="0">
+                <a:solidFill>
+                  <a:srgbClr val="F2F2F0"/>
+                </a:solidFill>
+                <a:latin typeface="Menlo" pitchFamily="34" charset="0"/>
+                <a:ea typeface="Menlo" pitchFamily="34" charset="-122"/>
+                <a:cs typeface="Menlo" pitchFamily="34" charset="-120"/>
+              </a:rPr>
+              <a:t># 웹 (Next.js)</a:t>
+            </a:r>
+            <a:endParaRPr lang="en-US" sz="1500" dirty="0"/>
+          </a:p>
+          <a:p>
+            <a:pPr indent="0" marL="0">
+              <a:buNone/>
+            </a:pPr>
+            <a:r>
+              <a:rPr lang="en-US" sz="1500" dirty="0">
+                <a:solidFill>
+                  <a:srgbClr val="F2F2F0"/>
+                </a:solidFill>
+                <a:latin typeface="Menlo" pitchFamily="34" charset="0"/>
+                <a:ea typeface="Menlo" pitchFamily="34" charset="-122"/>
+                <a:cs typeface="Menlo" pitchFamily="34" charset="-120"/>
+              </a:rPr>
+              <a:t>pnpm install &amp;&amp; pnpm dev        # http://localhost:3721</a:t>
+            </a:r>
+            <a:endParaRPr lang="en-US" sz="1500" dirty="0"/>
+          </a:p>
+          <a:p>
+            <a:pPr indent="0" marL="0">
+              <a:buNone/>
+            </a:pPr>
+            <a:endParaRPr lang="en-US" sz="1500" dirty="0"/>
+          </a:p>
+          <a:p>
+            <a:pPr indent="0" marL="0">
+              <a:buNone/>
+            </a:pPr>
+            <a:r>
+              <a:rPr lang="en-US" sz="1500" dirty="0">
+                <a:solidFill>
+                  <a:srgbClr val="F2F2F0"/>
+                </a:solidFill>
+                <a:latin typeface="Menlo" pitchFamily="34" charset="0"/>
+                <a:ea typeface="Menlo" pitchFamily="34" charset="-122"/>
+                <a:cs typeface="Menlo" pitchFamily="34" charset="-120"/>
+              </a:rPr>
+              <a:t># 관리자 앱</a:t>
+            </a:r>
+            <a:endParaRPr lang="en-US" sz="1500" dirty="0"/>
+          </a:p>
+          <a:p>
+            <a:pPr indent="0" marL="0">
+              <a:buNone/>
+            </a:pPr>
+            <a:r>
+              <a:rPr lang="en-US" sz="1500" dirty="0">
+                <a:solidFill>
+                  <a:srgbClr val="F2F2F0"/>
+                </a:solidFill>
+                <a:latin typeface="Menlo" pitchFamily="34" charset="0"/>
+                <a:ea typeface="Menlo" pitchFamily="34" charset="-122"/>
+                <a:cs typeface="Menlo" pitchFamily="34" charset="-120"/>
+              </a:rPr>
+              <a:t>cd admin &amp;&amp; pnpm install &amp;&amp; pnpm dev   # http://localhost:3722</a:t>
+            </a:r>
+            <a:endParaRPr lang="en-US" sz="1500" dirty="0"/>
+          </a:p>
+          <a:p>
+            <a:pPr indent="0" marL="0">
+              <a:buNone/>
+            </a:pPr>
+            <a:endParaRPr lang="en-US" sz="1500" dirty="0"/>
+          </a:p>
+          <a:p>
+            <a:pPr indent="0" marL="0">
+              <a:buNone/>
+            </a:pPr>
+            <a:r>
+              <a:rPr lang="en-US" sz="1500" dirty="0">
+                <a:solidFill>
+                  <a:srgbClr val="F2F2F0"/>
+                </a:solidFill>
+                <a:latin typeface="Menlo" pitchFamily="34" charset="0"/>
+                <a:ea typeface="Menlo" pitchFamily="34" charset="-122"/>
+                <a:cs typeface="Menlo" pitchFamily="34" charset="-120"/>
+              </a:rPr>
+              <a:t># Flutter</a:t>
+            </a:r>
+            <a:endParaRPr lang="en-US" sz="1500" dirty="0"/>
+          </a:p>
+          <a:p>
+            <a:pPr indent="0" marL="0">
+              <a:buNone/>
+            </a:pPr>
+            <a:r>
+              <a:rPr lang="en-US" sz="1500" dirty="0">
+                <a:solidFill>
+                  <a:srgbClr val="F2F2F0"/>
+                </a:solidFill>
+                <a:latin typeface="Menlo" pitchFamily="34" charset="0"/>
+                <a:ea typeface="Menlo" pitchFamily="34" charset="-122"/>
+                <a:cs typeface="Menlo" pitchFamily="34" charset="-120"/>
+              </a:rPr>
+              <a:t>cd flutter_app &amp;&amp; flutter pub get &amp;&amp; flutter run -d chrome</a:t>
+            </a:r>
+            <a:endParaRPr lang="en-US" sz="1500" dirty="0"/>
+          </a:p>
+          <a:p>
+            <a:pPr indent="0" marL="0">
+              <a:buNone/>
+            </a:pPr>
+            <a:endParaRPr lang="en-US" sz="1500" dirty="0"/>
+          </a:p>
+          <a:p>
+            <a:pPr indent="0" marL="0">
+              <a:buNone/>
+            </a:pPr>
+            <a:r>
+              <a:rPr lang="en-US" sz="1500" dirty="0">
+                <a:solidFill>
+                  <a:srgbClr val="F2F2F0"/>
+                </a:solidFill>
+                <a:latin typeface="Menlo" pitchFamily="34" charset="0"/>
+                <a:ea typeface="Menlo" pitchFamily="34" charset="-122"/>
+                <a:cs typeface="Menlo" pitchFamily="34" charset="-120"/>
+              </a:rPr>
+              <a:t># DB 스키마 적용 (최초 1회, 재실행해도 안전)</a:t>
+            </a:r>
+            <a:endParaRPr lang="en-US" sz="1500" dirty="0"/>
+          </a:p>
+          <a:p>
+            <a:pPr indent="0" marL="0">
+              <a:buNone/>
+            </a:pPr>
+            <a:r>
+              <a:rPr lang="en-US" sz="1500" dirty="0">
+                <a:solidFill>
+                  <a:srgbClr val="F2F2F0"/>
+                </a:solidFill>
+                <a:latin typeface="Menlo" pitchFamily="34" charset="0"/>
+                <a:ea typeface="Menlo" pitchFamily="34" charset="-122"/>
+                <a:cs typeface="Menlo" pitchFamily="34" charset="-120"/>
+              </a:rPr>
+              <a:t>Supabase 대시보드 → SQL Editor → supabase/schema.sql 실행</a:t>
+            </a:r>
+            <a:endParaRPr lang="en-US" sz="1500" dirty="0"/>
+          </a:p>
+        </p:txBody>
+      </p:sp>
+    </p:spTree>
+  </p:cSld>
+  <p:clrMapOvr>
+    <a:masterClrMapping/>
+  </p:clrMapOvr>
+</p:sld>
+</file>
+
+<file path=ppt/slides/slide35.xml><?xml version="1.0" encoding="utf-8"?>
+<p:sld xmlns:a="http://schemas.openxmlformats.org/drawingml/2006/main" xmlns:r="http://schemas.openxmlformats.org/officeDocument/2006/relationships" xmlns:p="http://schemas.openxmlformats.org/presentationml/2006/main">
+  <p:cSld name="Slide 35">
+    <p:bg>
+      <p:bgPr>
+        <a:solidFill>
+          <a:srgbClr val="17181A"/>
+        </a:solidFill>
+      </p:bgPr>
+    </p:bg>
+    <p:spTree>
+      <p:nvGrpSpPr>
+        <p:cNvPr id="1" name=""/>
+        <p:cNvGrpSpPr/>
+        <p:nvPr/>
+      </p:nvGrpSpPr>
+      <p:grpSpPr>
+        <a:xfrm>
+          <a:off x="0" y="0"/>
+          <a:ext cx="0" cy="0"/>
+          <a:chOff x="0" y="0"/>
+          <a:chExt cx="0" cy="0"/>
+        </a:xfrm>
+      </p:grpSpPr>
+      <p:sp>
+        <p:nvSpPr>
+          <p:cNvPr id="2" name="Text 0"/>
+          <p:cNvSpPr/>
+          <p:nvPr/>
+        </p:nvSpPr>
+        <p:spPr>
+          <a:xfrm>
+            <a:off x="548640" y="6510528"/>
+            <a:ext cx="7315200" cy="274320"/>
+          </a:xfrm>
+          <a:prstGeom prst="rect">
+            <a:avLst/>
+          </a:prstGeom>
+          <a:noFill/>
+          <a:ln/>
+        </p:spPr>
+        <p:txBody>
+          <a:bodyPr wrap="square" rtlCol="0" anchor="ctr"/>
+          <a:lstStyle/>
+          <a:p>
+            <a:pPr indent="0" marL="0">
+              <a:buNone/>
+            </a:pPr>
+            <a:r>
+              <a:rPr lang="en-US" sz="1000" dirty="0">
+                <a:solidFill>
+                  <a:srgbClr val="98999D"/>
+                </a:solidFill>
+                <a:latin typeface="Arial" pitchFamily="34" charset="0"/>
+                <a:ea typeface="Arial" pitchFamily="34" charset="-122"/>
+                <a:cs typeface="Arial" pitchFamily="34" charset="-120"/>
+              </a:rPr>
+              <a:t>소셜 플로우 오리엔테이션</a:t>
+            </a:r>
+            <a:endParaRPr lang="en-US" sz="1000" dirty="0"/>
+          </a:p>
+        </p:txBody>
+      </p:sp>
+      <p:sp>
+        <p:nvSpPr>
+          <p:cNvPr id="3" name="Text 1"/>
+          <p:cNvSpPr/>
+          <p:nvPr/>
+        </p:nvSpPr>
+        <p:spPr>
+          <a:xfrm>
+            <a:off x="548640" y="365760"/>
+            <a:ext cx="11064240" cy="822960"/>
+          </a:xfrm>
+          <a:prstGeom prst="rect">
+            <a:avLst/>
+          </a:prstGeom>
+          <a:noFill/>
+          <a:ln/>
+        </p:spPr>
+        <p:txBody>
+          <a:bodyPr wrap="square" rtlCol="0" anchor="ctr"/>
+          <a:lstStyle/>
+          <a:p>
+            <a:pPr indent="0" marL="0">
+              <a:buNone/>
+            </a:pPr>
+            <a:r>
+              <a:rPr lang="en-US" sz="3000" b="1" dirty="0">
+                <a:solidFill>
+                  <a:srgbClr val="F2F2F0"/>
+                </a:solidFill>
+                <a:latin typeface="Arial" pitchFamily="34" charset="0"/>
+                <a:ea typeface="Arial" pitchFamily="34" charset="-122"/>
+                <a:cs typeface="Arial" pitchFamily="34" charset="-120"/>
+              </a:rPr>
+              <a:t>파일 구조 설명</a:t>
+            </a:r>
+            <a:endParaRPr lang="en-US" sz="3000" dirty="0"/>
+          </a:p>
+        </p:txBody>
+      </p:sp>
+      <p:sp>
+        <p:nvSpPr>
+          <p:cNvPr id="4" name="Text 2"/>
+          <p:cNvSpPr/>
+          <p:nvPr/>
+        </p:nvSpPr>
+        <p:spPr>
+          <a:xfrm>
+            <a:off x="548640" y="1005840"/>
+            <a:ext cx="11064240" cy="457200"/>
+          </a:xfrm>
+          <a:prstGeom prst="rect">
+            <a:avLst/>
+          </a:prstGeom>
+          <a:noFill/>
+          <a:ln/>
+        </p:spPr>
+        <p:txBody>
+          <a:bodyPr wrap="square" rtlCol="0" anchor="ctr"/>
+          <a:lstStyle/>
+          <a:p>
+            <a:pPr indent="0" marL="0">
+              <a:buNone/>
+            </a:pPr>
+            <a:r>
+              <a:rPr lang="en-US" sz="1600" dirty="0">
+                <a:solidFill>
+                  <a:srgbClr val="98999D"/>
+                </a:solidFill>
+                <a:latin typeface="Arial" pitchFamily="34" charset="0"/>
+                <a:ea typeface="Arial" pitchFamily="34" charset="-122"/>
+                <a:cs typeface="Arial" pitchFamily="34" charset="-120"/>
+              </a:rPr>
+              <a:t>모노리포 폴더 배치</a:t>
+            </a:r>
+            <a:endParaRPr lang="en-US" sz="1600" dirty="0"/>
+          </a:p>
+        </p:txBody>
+      </p:sp>
+      <p:sp>
+        <p:nvSpPr>
+          <p:cNvPr id="5" name="Shape 3"/>
+          <p:cNvSpPr/>
+          <p:nvPr/>
+        </p:nvSpPr>
+        <p:spPr>
+          <a:xfrm>
+            <a:off x="548640" y="1508760"/>
+            <a:ext cx="11064240" cy="0"/>
+          </a:xfrm>
+          <a:prstGeom prst="line">
+            <a:avLst/>
+          </a:prstGeom>
+          <a:noFill/>
+          <a:ln w="19050">
+            <a:solidFill>
+              <a:srgbClr val="202124"/>
+            </a:solidFill>
+            <a:prstDash val="solid"/>
+          </a:ln>
+        </p:spPr>
+      </p:sp>
+      <p:sp>
+        <p:nvSpPr>
+          <p:cNvPr id="6" name="Shape 4"/>
+          <p:cNvSpPr/>
+          <p:nvPr/>
+        </p:nvSpPr>
+        <p:spPr>
+          <a:xfrm>
+            <a:off x="548640" y="1828800"/>
+            <a:ext cx="11064240" cy="4206240"/>
+          </a:xfrm>
+          <a:prstGeom prst="roundRect">
+            <a:avLst>
+              <a:gd name="adj" fmla="val 1739"/>
+            </a:avLst>
+          </a:prstGeom>
+          <a:solidFill>
+            <a:srgbClr val="202124"/>
+          </a:solidFill>
+          <a:ln w="12700">
+            <a:solidFill>
+              <a:srgbClr val="202124"/>
+            </a:solidFill>
+            <a:prstDash val="solid"/>
+          </a:ln>
+        </p:spPr>
+      </p:sp>
+      <p:sp>
+        <p:nvSpPr>
+          <p:cNvPr id="7" name="Text 5"/>
+          <p:cNvSpPr/>
+          <p:nvPr/>
+        </p:nvSpPr>
+        <p:spPr>
+          <a:xfrm>
+            <a:off x="822960" y="2057400"/>
+            <a:ext cx="10515600" cy="3749040"/>
+          </a:xfrm>
+          <a:prstGeom prst="rect">
+            <a:avLst/>
+          </a:prstGeom>
+          <a:noFill/>
+          <a:ln/>
+        </p:spPr>
+        <p:txBody>
+          <a:bodyPr wrap="square" rtlCol="0" anchor="t"/>
+          <a:lstStyle/>
+          <a:p>
+            <a:pPr indent="0" marL="0">
+              <a:buNone/>
+            </a:pPr>
+            <a:r>
+              <a:rPr lang="en-US" sz="1500" dirty="0">
+                <a:solidFill>
+                  <a:srgbClr val="F2F2F0"/>
+                </a:solidFill>
+                <a:latin typeface="Menlo" pitchFamily="34" charset="0"/>
+                <a:ea typeface="Menlo" pitchFamily="34" charset="-122"/>
+                <a:cs typeface="Menlo" pitchFamily="34" charset="-120"/>
+              </a:rPr>
+              <a:t>social_flows/</a:t>
+            </a:r>
+            <a:endParaRPr lang="en-US" sz="1500" dirty="0"/>
+          </a:p>
+          <a:p>
+            <a:pPr indent="0" marL="0">
+              <a:buNone/>
+            </a:pPr>
+            <a:r>
+              <a:rPr lang="en-US" sz="1500" dirty="0">
+                <a:solidFill>
+                  <a:srgbClr val="F2F2F0"/>
+                </a:solidFill>
+                <a:latin typeface="Menlo" pitchFamily="34" charset="0"/>
+                <a:ea typeface="Menlo" pitchFamily="34" charset="-122"/>
+                <a:cs typeface="Menlo" pitchFamily="34" charset="-120"/>
+              </a:rPr>
+              <a:t>├─ src/                 # Next.js 16 웹 앱 (App Router) · 포트 3721</a:t>
+            </a:r>
+            <a:endParaRPr lang="en-US" sz="1500" dirty="0"/>
+          </a:p>
+          <a:p>
+            <a:pPr indent="0" marL="0">
+              <a:buNone/>
+            </a:pPr>
+            <a:r>
+              <a:rPr lang="en-US" sz="1500" dirty="0">
+                <a:solidFill>
+                  <a:srgbClr val="F2F2F0"/>
+                </a:solidFill>
+                <a:latin typeface="Menlo" pitchFamily="34" charset="0"/>
+                <a:ea typeface="Menlo" pitchFamily="34" charset="-122"/>
+                <a:cs typeface="Menlo" pitchFamily="34" charset="-120"/>
+              </a:rPr>
+              <a:t>│   ├─ app/              # 라우트: /, /login, /signup, /new, /profile/[username]</a:t>
+            </a:r>
+            <a:endParaRPr lang="en-US" sz="1500" dirty="0"/>
+          </a:p>
+          <a:p>
+            <a:pPr indent="0" marL="0">
+              <a:buNone/>
+            </a:pPr>
+            <a:r>
+              <a:rPr lang="en-US" sz="1500" dirty="0">
+                <a:solidFill>
+                  <a:srgbClr val="F2F2F0"/>
+                </a:solidFill>
+                <a:latin typeface="Menlo" pitchFamily="34" charset="0"/>
+                <a:ea typeface="Menlo" pitchFamily="34" charset="-122"/>
+                <a:cs typeface="Menlo" pitchFamily="34" charset="-120"/>
+              </a:rPr>
+              <a:t>│   ├─ components/       # Header, PostCard, LikeButton, FollowButton …</a:t>
+            </a:r>
+            <a:endParaRPr lang="en-US" sz="1500" dirty="0"/>
+          </a:p>
+          <a:p>
+            <a:pPr indent="0" marL="0">
+              <a:buNone/>
+            </a:pPr>
+            <a:r>
+              <a:rPr lang="en-US" sz="1500" dirty="0">
+                <a:solidFill>
+                  <a:srgbClr val="F2F2F0"/>
+                </a:solidFill>
+                <a:latin typeface="Menlo" pitchFamily="34" charset="0"/>
+                <a:ea typeface="Menlo" pitchFamily="34" charset="-122"/>
+                <a:cs typeface="Menlo" pitchFamily="34" charset="-120"/>
+              </a:rPr>
+              <a:t>│   └─ lib/              # supabase 클라이언트, i18n 사전, theme</a:t>
+            </a:r>
+            <a:endParaRPr lang="en-US" sz="1500" dirty="0"/>
+          </a:p>
+          <a:p>
+            <a:pPr indent="0" marL="0">
+              <a:buNone/>
+            </a:pPr>
+            <a:r>
+              <a:rPr lang="en-US" sz="1500" dirty="0">
+                <a:solidFill>
+                  <a:srgbClr val="F2F2F0"/>
+                </a:solidFill>
+                <a:latin typeface="Menlo" pitchFamily="34" charset="0"/>
+                <a:ea typeface="Menlo" pitchFamily="34" charset="-122"/>
+                <a:cs typeface="Menlo" pitchFamily="34" charset="-120"/>
+              </a:rPr>
+              <a:t>├─ admin/                # 관리자 웹 앱 (Next.js) · 포트 3722</a:t>
+            </a:r>
+            <a:endParaRPr lang="en-US" sz="1500" dirty="0"/>
+          </a:p>
+          <a:p>
+            <a:pPr indent="0" marL="0">
+              <a:buNone/>
+            </a:pPr>
+            <a:r>
+              <a:rPr lang="en-US" sz="1500" dirty="0">
+                <a:solidFill>
+                  <a:srgbClr val="F2F2F0"/>
+                </a:solidFill>
+                <a:latin typeface="Menlo" pitchFamily="34" charset="0"/>
+                <a:ea typeface="Menlo" pitchFamily="34" charset="-122"/>
+                <a:cs typeface="Menlo" pitchFamily="34" charset="-120"/>
+              </a:rPr>
+              <a:t>│   └─ src/app/          # /login, /(대시보드), /users, /posts</a:t>
+            </a:r>
+            <a:endParaRPr lang="en-US" sz="1500" dirty="0"/>
+          </a:p>
+          <a:p>
+            <a:pPr indent="0" marL="0">
+              <a:buNone/>
+            </a:pPr>
+            <a:r>
+              <a:rPr lang="en-US" sz="1500" dirty="0">
+                <a:solidFill>
+                  <a:srgbClr val="F2F2F0"/>
+                </a:solidFill>
+                <a:latin typeface="Menlo" pitchFamily="34" charset="0"/>
+                <a:ea typeface="Menlo" pitchFamily="34" charset="-122"/>
+                <a:cs typeface="Menlo" pitchFamily="34" charset="-120"/>
+              </a:rPr>
+              <a:t>├─ supabase/</a:t>
+            </a:r>
+            <a:endParaRPr lang="en-US" sz="1500" dirty="0"/>
+          </a:p>
+          <a:p>
+            <a:pPr indent="0" marL="0">
+              <a:buNone/>
+            </a:pPr>
+            <a:r>
+              <a:rPr lang="en-US" sz="1500" dirty="0">
+                <a:solidFill>
+                  <a:srgbClr val="F2F2F0"/>
+                </a:solidFill>
+                <a:latin typeface="Menlo" pitchFamily="34" charset="0"/>
+                <a:ea typeface="Menlo" pitchFamily="34" charset="-122"/>
+                <a:cs typeface="Menlo" pitchFamily="34" charset="-120"/>
+              </a:rPr>
+              <a:t>│   └─ schema.sql        # 모든 테이블 + RLS + 관리자 정책, 하나의 파일로 통합</a:t>
+            </a:r>
+            <a:endParaRPr lang="en-US" sz="1500" dirty="0"/>
+          </a:p>
+          <a:p>
+            <a:pPr indent="0" marL="0">
+              <a:buNone/>
+            </a:pPr>
+            <a:r>
+              <a:rPr lang="en-US" sz="1500" dirty="0">
+                <a:solidFill>
+                  <a:srgbClr val="F2F2F0"/>
+                </a:solidFill>
+                <a:latin typeface="Menlo" pitchFamily="34" charset="0"/>
+                <a:ea typeface="Menlo" pitchFamily="34" charset="-122"/>
+                <a:cs typeface="Menlo" pitchFamily="34" charset="-120"/>
+              </a:rPr>
+              <a:t>├─ flutter_app/          # Flutter 클라이언트 (macOS/Windows/Android/iOS/Web)</a:t>
+            </a:r>
+            <a:endParaRPr lang="en-US" sz="1500" dirty="0"/>
+          </a:p>
+          <a:p>
+            <a:pPr indent="0" marL="0">
+              <a:buNone/>
+            </a:pPr>
+            <a:r>
+              <a:rPr lang="en-US" sz="1500" dirty="0">
+                <a:solidFill>
+                  <a:srgbClr val="F2F2F0"/>
+                </a:solidFill>
+                <a:latin typeface="Menlo" pitchFamily="34" charset="0"/>
+                <a:ea typeface="Menlo" pitchFamily="34" charset="-122"/>
+                <a:cs typeface="Menlo" pitchFamily="34" charset="-120"/>
+              </a:rPr>
+              <a:t>│   └─ lib/               # screens/, widgets/, services/, i18n/, theme/</a:t>
+            </a:r>
+            <a:endParaRPr lang="en-US" sz="1500" dirty="0"/>
+          </a:p>
+          <a:p>
+            <a:pPr indent="0" marL="0">
+              <a:buNone/>
+            </a:pPr>
+            <a:r>
+              <a:rPr lang="en-US" sz="1500" dirty="0">
+                <a:solidFill>
+                  <a:srgbClr val="F2F2F0"/>
+                </a:solidFill>
+                <a:latin typeface="Menlo" pitchFamily="34" charset="0"/>
+                <a:ea typeface="Menlo" pitchFamily="34" charset="-122"/>
+                <a:cs typeface="Menlo" pitchFamily="34" charset="-120"/>
+              </a:rPr>
+              <a:t>└─ docs/                 # 이 오리엔테이션 자료 생성 스크립트</a:t>
+            </a:r>
+            <a:endParaRPr lang="en-US" sz="1500" dirty="0"/>
+          </a:p>
+        </p:txBody>
+      </p:sp>
+    </p:spTree>
+  </p:cSld>
+  <p:clrMapOvr>
+    <a:masterClrMapping/>
+  </p:clrMapOvr>
+</p:sld>
+</file>
+
+<file path=ppt/slides/slide36.xml><?xml version="1.0" encoding="utf-8"?>
+<p:sld xmlns:a="http://schemas.openxmlformats.org/drawingml/2006/main" xmlns:r="http://schemas.openxmlformats.org/officeDocument/2006/relationships" xmlns:p="http://schemas.openxmlformats.org/presentationml/2006/main">
+  <p:cSld name="Slide 36">
+    <p:bg>
+      <p:bgPr>
+        <a:solidFill>
+          <a:srgbClr val="17181A"/>
+        </a:solidFill>
+      </p:bgPr>
+    </p:bg>
+    <p:spTree>
+      <p:nvGrpSpPr>
+        <p:cNvPr id="1" name=""/>
+        <p:cNvGrpSpPr/>
+        <p:nvPr/>
+      </p:nvGrpSpPr>
+      <p:grpSpPr>
+        <a:xfrm>
+          <a:off x="0" y="0"/>
+          <a:ext cx="0" cy="0"/>
+          <a:chOff x="0" y="0"/>
+          <a:chExt cx="0" cy="0"/>
+        </a:xfrm>
+      </p:grpSpPr>
+      <p:sp>
+        <p:nvSpPr>
+          <p:cNvPr id="2" name="Text 0"/>
+          <p:cNvSpPr/>
+          <p:nvPr/>
+        </p:nvSpPr>
+        <p:spPr>
+          <a:xfrm>
+            <a:off x="548640" y="6510528"/>
+            <a:ext cx="7315200" cy="274320"/>
+          </a:xfrm>
+          <a:prstGeom prst="rect">
+            <a:avLst/>
+          </a:prstGeom>
+          <a:noFill/>
+          <a:ln/>
+        </p:spPr>
+        <p:txBody>
+          <a:bodyPr wrap="square" rtlCol="0" anchor="ctr"/>
+          <a:lstStyle/>
+          <a:p>
+            <a:pPr indent="0" marL="0">
+              <a:buNone/>
+            </a:pPr>
+            <a:r>
+              <a:rPr lang="en-US" sz="1000" dirty="0">
+                <a:solidFill>
+                  <a:srgbClr val="98999D"/>
+                </a:solidFill>
+                <a:latin typeface="Arial" pitchFamily="34" charset="0"/>
+                <a:ea typeface="Arial" pitchFamily="34" charset="-122"/>
+                <a:cs typeface="Arial" pitchFamily="34" charset="-120"/>
+              </a:rPr>
+              <a:t>소셜 플로우 오리엔테이션</a:t>
+            </a:r>
+            <a:endParaRPr lang="en-US" sz="1000" dirty="0"/>
+          </a:p>
+        </p:txBody>
+      </p:sp>
+      <p:sp>
+        <p:nvSpPr>
+          <p:cNvPr id="3" name="Text 1"/>
+          <p:cNvSpPr/>
+          <p:nvPr/>
+        </p:nvSpPr>
+        <p:spPr>
+          <a:xfrm>
+            <a:off x="548640" y="365760"/>
+            <a:ext cx="11064240" cy="822960"/>
+          </a:xfrm>
+          <a:prstGeom prst="rect">
+            <a:avLst/>
+          </a:prstGeom>
+          <a:noFill/>
+          <a:ln/>
+        </p:spPr>
+        <p:txBody>
+          <a:bodyPr wrap="square" rtlCol="0" anchor="ctr"/>
+          <a:lstStyle/>
+          <a:p>
+            <a:pPr indent="0" marL="0">
+              <a:buNone/>
+            </a:pPr>
+            <a:r>
+              <a:rPr lang="en-US" sz="3000" b="1" dirty="0">
+                <a:solidFill>
+                  <a:srgbClr val="F2F2F0"/>
+                </a:solidFill>
+                <a:latin typeface="Arial" pitchFamily="34" charset="0"/>
+                <a:ea typeface="Arial" pitchFamily="34" charset="-122"/>
+                <a:cs typeface="Arial" pitchFamily="34" charset="-120"/>
+              </a:rPr>
+              <a:t>다음 단계</a:t>
+            </a:r>
+            <a:endParaRPr lang="en-US" sz="3000" dirty="0"/>
+          </a:p>
+        </p:txBody>
+      </p:sp>
+      <p:sp>
+        <p:nvSpPr>
+          <p:cNvPr id="4" name="Text 2"/>
+          <p:cNvSpPr/>
+          <p:nvPr/>
+        </p:nvSpPr>
+        <p:spPr>
+          <a:xfrm>
+            <a:off x="548640" y="1005840"/>
+            <a:ext cx="11064240" cy="457200"/>
+          </a:xfrm>
+          <a:prstGeom prst="rect">
+            <a:avLst/>
+          </a:prstGeom>
+          <a:noFill/>
+          <a:ln/>
+        </p:spPr>
+        <p:txBody>
+          <a:bodyPr wrap="square" rtlCol="0" anchor="ctr"/>
+          <a:lstStyle/>
+          <a:p>
+            <a:pPr indent="0" marL="0">
+              <a:buNone/>
+            </a:pPr>
+            <a:r>
+              <a:rPr lang="en-US" sz="1600" dirty="0">
+                <a:solidFill>
+                  <a:srgbClr val="98999D"/>
+                </a:solidFill>
+                <a:latin typeface="Arial" pitchFamily="34" charset="0"/>
+                <a:ea typeface="Arial" pitchFamily="34" charset="-122"/>
+                <a:cs typeface="Arial" pitchFamily="34" charset="-120"/>
+              </a:rPr>
+              <a:t>아직 안 된 것들</a:t>
+            </a:r>
+            <a:endParaRPr lang="en-US" sz="1600" dirty="0"/>
+          </a:p>
+        </p:txBody>
+      </p:sp>
+      <p:sp>
+        <p:nvSpPr>
+          <p:cNvPr id="5" name="Shape 3"/>
+          <p:cNvSpPr/>
+          <p:nvPr/>
+        </p:nvSpPr>
+        <p:spPr>
+          <a:xfrm>
+            <a:off x="548640" y="1508760"/>
+            <a:ext cx="11064240" cy="0"/>
+          </a:xfrm>
+          <a:prstGeom prst="line">
+            <a:avLst/>
+          </a:prstGeom>
+          <a:noFill/>
+          <a:ln w="19050">
+            <a:solidFill>
+              <a:srgbClr val="202124"/>
+            </a:solidFill>
+            <a:prstDash val="solid"/>
+          </a:ln>
+        </p:spPr>
+      </p:sp>
+      <p:sp>
+        <p:nvSpPr>
           <p:cNvPr id="6" name="Text 4"/>
           <p:cNvSpPr/>
           <p:nvPr/>
@@ -12303,6 +13411,795 @@
                 <a:cs typeface="Arial" pitchFamily="34" charset="-120"/>
               </a:rPr>
               <a:t>Flutter macOS/iOS는 Xcode 전체 설치 후 빌드 검증 필요, Windows는 Windows 머신에서만</a:t>
+            </a:r>
+            <a:endParaRPr lang="en-US" sz="1800" dirty="0"/>
+          </a:p>
+        </p:txBody>
+      </p:sp>
+    </p:spTree>
+  </p:cSld>
+  <p:clrMapOvr>
+    <a:masterClrMapping/>
+  </p:clrMapOvr>
+</p:sld>
+</file>
+
+<file path=ppt/slides/slide37.xml><?xml version="1.0" encoding="utf-8"?>
+<p:sld xmlns:a="http://schemas.openxmlformats.org/drawingml/2006/main" xmlns:r="http://schemas.openxmlformats.org/officeDocument/2006/relationships" xmlns:p="http://schemas.openxmlformats.org/presentationml/2006/main">
+  <p:cSld name="Slide 37">
+    <p:bg>
+      <p:bgPr>
+        <a:solidFill>
+          <a:srgbClr val="17181A"/>
+        </a:solidFill>
+      </p:bgPr>
+    </p:bg>
+    <p:spTree>
+      <p:nvGrpSpPr>
+        <p:cNvPr id="1" name=""/>
+        <p:cNvGrpSpPr/>
+        <p:nvPr/>
+      </p:nvGrpSpPr>
+      <p:grpSpPr>
+        <a:xfrm>
+          <a:off x="0" y="0"/>
+          <a:ext cx="0" cy="0"/>
+          <a:chOff x="0" y="0"/>
+          <a:chExt cx="0" cy="0"/>
+        </a:xfrm>
+      </p:grpSpPr>
+      <p:sp>
+        <p:nvSpPr>
+          <p:cNvPr id="2" name="Text 0"/>
+          <p:cNvSpPr/>
+          <p:nvPr/>
+        </p:nvSpPr>
+        <p:spPr>
+          <a:xfrm>
+            <a:off x="548640" y="6510528"/>
+            <a:ext cx="7315200" cy="274320"/>
+          </a:xfrm>
+          <a:prstGeom prst="rect">
+            <a:avLst/>
+          </a:prstGeom>
+          <a:noFill/>
+          <a:ln/>
+        </p:spPr>
+        <p:txBody>
+          <a:bodyPr wrap="square" rtlCol="0" anchor="ctr"/>
+          <a:lstStyle/>
+          <a:p>
+            <a:pPr indent="0" marL="0">
+              <a:buNone/>
+            </a:pPr>
+            <a:r>
+              <a:rPr lang="en-US" sz="1000" dirty="0">
+                <a:solidFill>
+                  <a:srgbClr val="98999D"/>
+                </a:solidFill>
+                <a:latin typeface="Arial" pitchFamily="34" charset="0"/>
+                <a:ea typeface="Arial" pitchFamily="34" charset="-122"/>
+                <a:cs typeface="Arial" pitchFamily="34" charset="-120"/>
+              </a:rPr>
+              <a:t>소셜 플로우 오리엔테이션</a:t>
+            </a:r>
+            <a:endParaRPr lang="en-US" sz="1000" dirty="0"/>
+          </a:p>
+        </p:txBody>
+      </p:sp>
+      <p:sp>
+        <p:nvSpPr>
+          <p:cNvPr id="3" name="Text 1"/>
+          <p:cNvSpPr/>
+          <p:nvPr/>
+        </p:nvSpPr>
+        <p:spPr>
+          <a:xfrm>
+            <a:off x="731520" y="2560320"/>
+            <a:ext cx="10698480" cy="914400"/>
+          </a:xfrm>
+          <a:prstGeom prst="rect">
+            <a:avLst/>
+          </a:prstGeom>
+          <a:noFill/>
+          <a:ln/>
+        </p:spPr>
+        <p:txBody>
+          <a:bodyPr wrap="square" rtlCol="0" anchor="ctr"/>
+          <a:lstStyle/>
+          <a:p>
+            <a:pPr indent="0" marL="0">
+              <a:buNone/>
+            </a:pPr>
+            <a:r>
+              <a:rPr lang="en-US" sz="4000" b="1" dirty="0">
+                <a:solidFill>
+                  <a:srgbClr val="F2F2F0"/>
+                </a:solidFill>
+                <a:latin typeface="Arial" pitchFamily="34" charset="0"/>
+                <a:ea typeface="Arial" pitchFamily="34" charset="-122"/>
+                <a:cs typeface="Arial" pitchFamily="34" charset="-120"/>
+              </a:rPr>
+              <a:t>별첨</a:t>
+            </a:r>
+            <a:endParaRPr lang="en-US" sz="4000" dirty="0"/>
+          </a:p>
+        </p:txBody>
+      </p:sp>
+      <p:sp>
+        <p:nvSpPr>
+          <p:cNvPr id="4" name="Text 2"/>
+          <p:cNvSpPr/>
+          <p:nvPr/>
+        </p:nvSpPr>
+        <p:spPr>
+          <a:xfrm>
+            <a:off x="731520" y="3383280"/>
+            <a:ext cx="10698480" cy="548640"/>
+          </a:xfrm>
+          <a:prstGeom prst="rect">
+            <a:avLst/>
+          </a:prstGeom>
+          <a:noFill/>
+          <a:ln/>
+        </p:spPr>
+        <p:txBody>
+          <a:bodyPr wrap="square" rtlCol="0" anchor="ctr"/>
+          <a:lstStyle/>
+          <a:p>
+            <a:pPr indent="0" marL="0">
+              <a:buNone/>
+            </a:pPr>
+            <a:r>
+              <a:rPr lang="en-US" sz="2000" dirty="0">
+                <a:solidFill>
+                  <a:srgbClr val="5B8DEF"/>
+                </a:solidFill>
+                <a:latin typeface="Arial" pitchFamily="34" charset="0"/>
+                <a:ea typeface="Arial" pitchFamily="34" charset="-122"/>
+                <a:cs typeface="Arial" pitchFamily="34" charset="-120"/>
+              </a:rPr>
+              <a:t>기초 개념을 처음부터 제대로 쌓고 싶다면</a:t>
+            </a:r>
+            <a:endParaRPr lang="en-US" sz="2000" dirty="0"/>
+          </a:p>
+        </p:txBody>
+      </p:sp>
+    </p:spTree>
+  </p:cSld>
+  <p:clrMapOvr>
+    <a:masterClrMapping/>
+  </p:clrMapOvr>
+</p:sld>
+</file>
+
+<file path=ppt/slides/slide38.xml><?xml version="1.0" encoding="utf-8"?>
+<p:sld xmlns:a="http://schemas.openxmlformats.org/drawingml/2006/main" xmlns:r="http://schemas.openxmlformats.org/officeDocument/2006/relationships" xmlns:p="http://schemas.openxmlformats.org/presentationml/2006/main">
+  <p:cSld name="Slide 38">
+    <p:bg>
+      <p:bgPr>
+        <a:solidFill>
+          <a:srgbClr val="17181A"/>
+        </a:solidFill>
+      </p:bgPr>
+    </p:bg>
+    <p:spTree>
+      <p:nvGrpSpPr>
+        <p:cNvPr id="1" name=""/>
+        <p:cNvGrpSpPr/>
+        <p:nvPr/>
+      </p:nvGrpSpPr>
+      <p:grpSpPr>
+        <a:xfrm>
+          <a:off x="0" y="0"/>
+          <a:ext cx="0" cy="0"/>
+          <a:chOff x="0" y="0"/>
+          <a:chExt cx="0" cy="0"/>
+        </a:xfrm>
+      </p:grpSpPr>
+      <p:sp>
+        <p:nvSpPr>
+          <p:cNvPr id="2" name="Text 0"/>
+          <p:cNvSpPr/>
+          <p:nvPr/>
+        </p:nvSpPr>
+        <p:spPr>
+          <a:xfrm>
+            <a:off x="548640" y="6510528"/>
+            <a:ext cx="7315200" cy="274320"/>
+          </a:xfrm>
+          <a:prstGeom prst="rect">
+            <a:avLst/>
+          </a:prstGeom>
+          <a:noFill/>
+          <a:ln/>
+        </p:spPr>
+        <p:txBody>
+          <a:bodyPr wrap="square" rtlCol="0" anchor="ctr"/>
+          <a:lstStyle/>
+          <a:p>
+            <a:pPr indent="0" marL="0">
+              <a:buNone/>
+            </a:pPr>
+            <a:r>
+              <a:rPr lang="en-US" sz="1000" dirty="0">
+                <a:solidFill>
+                  <a:srgbClr val="98999D"/>
+                </a:solidFill>
+                <a:latin typeface="Arial" pitchFamily="34" charset="0"/>
+                <a:ea typeface="Arial" pitchFamily="34" charset="-122"/>
+                <a:cs typeface="Arial" pitchFamily="34" charset="-120"/>
+              </a:rPr>
+              <a:t>소셜 플로우 오리엔테이션</a:t>
+            </a:r>
+            <a:endParaRPr lang="en-US" sz="1000" dirty="0"/>
+          </a:p>
+        </p:txBody>
+      </p:sp>
+      <p:sp>
+        <p:nvSpPr>
+          <p:cNvPr id="3" name="Text 1"/>
+          <p:cNvSpPr/>
+          <p:nvPr/>
+        </p:nvSpPr>
+        <p:spPr>
+          <a:xfrm>
+            <a:off x="548640" y="365760"/>
+            <a:ext cx="11064240" cy="822960"/>
+          </a:xfrm>
+          <a:prstGeom prst="rect">
+            <a:avLst/>
+          </a:prstGeom>
+          <a:noFill/>
+          <a:ln/>
+        </p:spPr>
+        <p:txBody>
+          <a:bodyPr wrap="square" rtlCol="0" anchor="ctr"/>
+          <a:lstStyle/>
+          <a:p>
+            <a:pPr indent="0" marL="0">
+              <a:buNone/>
+            </a:pPr>
+            <a:r>
+              <a:rPr lang="en-US" sz="3000" b="1" dirty="0">
+                <a:solidFill>
+                  <a:srgbClr val="F2F2F0"/>
+                </a:solidFill>
+                <a:latin typeface="Arial" pitchFamily="34" charset="0"/>
+                <a:ea typeface="Arial" pitchFamily="34" charset="-122"/>
+                <a:cs typeface="Arial" pitchFamily="34" charset="-120"/>
+              </a:rPr>
+              <a:t>추천 사이트</a:t>
+            </a:r>
+            <a:endParaRPr lang="en-US" sz="3000" dirty="0"/>
+          </a:p>
+        </p:txBody>
+      </p:sp>
+      <p:sp>
+        <p:nvSpPr>
+          <p:cNvPr id="4" name="Text 2"/>
+          <p:cNvSpPr/>
+          <p:nvPr/>
+        </p:nvSpPr>
+        <p:spPr>
+          <a:xfrm>
+            <a:off x="548640" y="1005840"/>
+            <a:ext cx="11064240" cy="457200"/>
+          </a:xfrm>
+          <a:prstGeom prst="rect">
+            <a:avLst/>
+          </a:prstGeom>
+          <a:noFill/>
+          <a:ln/>
+        </p:spPr>
+        <p:txBody>
+          <a:bodyPr wrap="square" rtlCol="0" anchor="ctr"/>
+          <a:lstStyle/>
+          <a:p>
+            <a:pPr indent="0" marL="0">
+              <a:buNone/>
+            </a:pPr>
+            <a:r>
+              <a:rPr lang="en-US" sz="1600" dirty="0">
+                <a:solidFill>
+                  <a:srgbClr val="98999D"/>
+                </a:solidFill>
+                <a:latin typeface="Arial" pitchFamily="34" charset="0"/>
+                <a:ea typeface="Arial" pitchFamily="34" charset="-122"/>
+                <a:cs typeface="Arial" pitchFamily="34" charset="-120"/>
+              </a:rPr>
+              <a:t>무료로 기초부터 다질 수 있는 곳들</a:t>
+            </a:r>
+            <a:endParaRPr lang="en-US" sz="1600" dirty="0"/>
+          </a:p>
+        </p:txBody>
+      </p:sp>
+      <p:sp>
+        <p:nvSpPr>
+          <p:cNvPr id="5" name="Shape 3"/>
+          <p:cNvSpPr/>
+          <p:nvPr/>
+        </p:nvSpPr>
+        <p:spPr>
+          <a:xfrm>
+            <a:off x="548640" y="1508760"/>
+            <a:ext cx="11064240" cy="0"/>
+          </a:xfrm>
+          <a:prstGeom prst="line">
+            <a:avLst/>
+          </a:prstGeom>
+          <a:noFill/>
+          <a:ln w="19050">
+            <a:solidFill>
+              <a:srgbClr val="202124"/>
+            </a:solidFill>
+            <a:prstDash val="solid"/>
+          </a:ln>
+        </p:spPr>
+      </p:sp>
+      <p:sp>
+        <p:nvSpPr>
+          <p:cNvPr id="6" name="Text 4"/>
+          <p:cNvSpPr/>
+          <p:nvPr/>
+        </p:nvSpPr>
+        <p:spPr>
+          <a:xfrm>
+            <a:off x="548640" y="1828800"/>
+            <a:ext cx="11064240" cy="4572000"/>
+          </a:xfrm>
+          <a:prstGeom prst="rect">
+            <a:avLst/>
+          </a:prstGeom>
+          <a:noFill/>
+          <a:ln/>
+        </p:spPr>
+        <p:txBody>
+          <a:bodyPr wrap="square" rtlCol="0" anchor="t"/>
+          <a:lstStyle/>
+          <a:p>
+            <a:pPr marL="342900" indent="-342900">
+              <a:lnSpc>
+                <a:spcPct val="135000"/>
+              </a:lnSpc>
+              <a:buSzPct val="100000"/>
+              <a:buChar char="•"/>
+            </a:pPr>
+            <a:r>
+              <a:rPr lang="en-US" sz="1700" dirty="0">
+                <a:solidFill>
+                  <a:srgbClr val="F2F2F0"/>
+                </a:solidFill>
+                <a:latin typeface="Arial" pitchFamily="34" charset="0"/>
+                <a:ea typeface="Arial" pitchFamily="34" charset="-122"/>
+                <a:cs typeface="Arial" pitchFamily="34" charset="-120"/>
+              </a:rPr>
+              <a:t>MDN Web Docs (developer.mozilla.org) — HTML/CSS/JS, 웹 표준 문서의 정석</a:t>
+            </a:r>
+            <a:endParaRPr lang="en-US" sz="1700" dirty="0"/>
+          </a:p>
+          <a:p>
+            <a:pPr marL="342900" indent="-342900">
+              <a:lnSpc>
+                <a:spcPct val="135000"/>
+              </a:lnSpc>
+              <a:buSzPct val="100000"/>
+              <a:buChar char="•"/>
+            </a:pPr>
+            <a:r>
+              <a:rPr lang="en-US" sz="1700" dirty="0">
+                <a:solidFill>
+                  <a:srgbClr val="F2F2F0"/>
+                </a:solidFill>
+                <a:latin typeface="Arial" pitchFamily="34" charset="0"/>
+                <a:ea typeface="Arial" pitchFamily="34" charset="-122"/>
+                <a:cs typeface="Arial" pitchFamily="34" charset="-120"/>
+              </a:rPr>
+              <a:t>생활코딩 (opentutorials.org) — 한국어로 프로그래밍·Git·DB 기초를 처음부터</a:t>
+            </a:r>
+            <a:endParaRPr lang="en-US" sz="1700" dirty="0"/>
+          </a:p>
+          <a:p>
+            <a:pPr marL="342900" indent="-342900">
+              <a:lnSpc>
+                <a:spcPct val="135000"/>
+              </a:lnSpc>
+              <a:buSzPct val="100000"/>
+              <a:buChar char="•"/>
+            </a:pPr>
+            <a:r>
+              <a:rPr lang="en-US" sz="1700" dirty="0">
+                <a:solidFill>
+                  <a:srgbClr val="F2F2F0"/>
+                </a:solidFill>
+                <a:latin typeface="Arial" pitchFamily="34" charset="0"/>
+                <a:ea typeface="Arial" pitchFamily="34" charset="-122"/>
+                <a:cs typeface="Arial" pitchFamily="34" charset="-120"/>
+              </a:rPr>
+              <a:t>freeCodeCamp (freecodecamp.org) — 무료 커리큘럼 + 실습 위주 웹 개발 기초</a:t>
+            </a:r>
+            <a:endParaRPr lang="en-US" sz="1700" dirty="0"/>
+          </a:p>
+          <a:p>
+            <a:pPr marL="342900" indent="-342900">
+              <a:lnSpc>
+                <a:spcPct val="135000"/>
+              </a:lnSpc>
+              <a:buSzPct val="100000"/>
+              <a:buChar char="•"/>
+            </a:pPr>
+            <a:r>
+              <a:rPr lang="en-US" sz="1700" dirty="0">
+                <a:solidFill>
+                  <a:srgbClr val="F2F2F0"/>
+                </a:solidFill>
+                <a:latin typeface="Arial" pitchFamily="34" charset="0"/>
+                <a:ea typeface="Arial" pitchFamily="34" charset="-122"/>
+                <a:cs typeface="Arial" pitchFamily="34" charset="-120"/>
+              </a:rPr>
+              <a:t>roadmap.sh — 프론트엔드/백엔드/풀스택 등 분야별 학습 로드맵 지도</a:t>
+            </a:r>
+            <a:endParaRPr lang="en-US" sz="1700" dirty="0"/>
+          </a:p>
+          <a:p>
+            <a:pPr marL="342900" indent="-342900">
+              <a:lnSpc>
+                <a:spcPct val="135000"/>
+              </a:lnSpc>
+              <a:buSzPct val="100000"/>
+              <a:buChar char="•"/>
+            </a:pPr>
+            <a:r>
+              <a:rPr lang="en-US" sz="1700" dirty="0">
+                <a:solidFill>
+                  <a:srgbClr val="F2F2F0"/>
+                </a:solidFill>
+                <a:latin typeface="Arial" pitchFamily="34" charset="0"/>
+                <a:ea typeface="Arial" pitchFamily="34" charset="-122"/>
+                <a:cs typeface="Arial" pitchFamily="34" charset="-120"/>
+              </a:rPr>
+              <a:t>Next.js Learn (nextjs.org/learn) — Next.js 공식 인터랙티브 튜토리얼</a:t>
+            </a:r>
+            <a:endParaRPr lang="en-US" sz="1700" dirty="0"/>
+          </a:p>
+          <a:p>
+            <a:pPr marL="342900" indent="-342900">
+              <a:lnSpc>
+                <a:spcPct val="135000"/>
+              </a:lnSpc>
+              <a:buSzPct val="100000"/>
+              <a:buChar char="•"/>
+            </a:pPr>
+            <a:r>
+              <a:rPr lang="en-US" sz="1700" dirty="0">
+                <a:solidFill>
+                  <a:srgbClr val="F2F2F0"/>
+                </a:solidFill>
+                <a:latin typeface="Arial" pitchFamily="34" charset="0"/>
+                <a:ea typeface="Arial" pitchFamily="34" charset="-122"/>
+                <a:cs typeface="Arial" pitchFamily="34" charset="-120"/>
+              </a:rPr>
+              <a:t>Supabase Docs (supabase.com/docs) — Auth/DB/RLS 등 공식 가이드 + 예제</a:t>
+            </a:r>
+            <a:endParaRPr lang="en-US" sz="1700" dirty="0"/>
+          </a:p>
+          <a:p>
+            <a:pPr marL="342900" indent="-342900">
+              <a:lnSpc>
+                <a:spcPct val="135000"/>
+              </a:lnSpc>
+              <a:buSzPct val="100000"/>
+              <a:buChar char="•"/>
+            </a:pPr>
+            <a:r>
+              <a:rPr lang="en-US" sz="1700" dirty="0">
+                <a:solidFill>
+                  <a:srgbClr val="F2F2F0"/>
+                </a:solidFill>
+                <a:latin typeface="Arial" pitchFamily="34" charset="0"/>
+                <a:ea typeface="Arial" pitchFamily="34" charset="-122"/>
+                <a:cs typeface="Arial" pitchFamily="34" charset="-120"/>
+              </a:rPr>
+              <a:t>Flutter 공식 Codelabs (docs.flutter.dev/codelabs) — 손으로 따라 하는 Flutter 튜토리얼</a:t>
+            </a:r>
+            <a:endParaRPr lang="en-US" sz="1700" dirty="0"/>
+          </a:p>
+        </p:txBody>
+      </p:sp>
+    </p:spTree>
+  </p:cSld>
+  <p:clrMapOvr>
+    <a:masterClrMapping/>
+  </p:clrMapOvr>
+</p:sld>
+</file>
+
+<file path=ppt/slides/slide39.xml><?xml version="1.0" encoding="utf-8"?>
+<p:sld xmlns:a="http://schemas.openxmlformats.org/drawingml/2006/main" xmlns:r="http://schemas.openxmlformats.org/officeDocument/2006/relationships" xmlns:p="http://schemas.openxmlformats.org/presentationml/2006/main">
+  <p:cSld name="Slide 39">
+    <p:bg>
+      <p:bgPr>
+        <a:solidFill>
+          <a:srgbClr val="17181A"/>
+        </a:solidFill>
+      </p:bgPr>
+    </p:bg>
+    <p:spTree>
+      <p:nvGrpSpPr>
+        <p:cNvPr id="1" name=""/>
+        <p:cNvGrpSpPr/>
+        <p:nvPr/>
+      </p:nvGrpSpPr>
+      <p:grpSpPr>
+        <a:xfrm>
+          <a:off x="0" y="0"/>
+          <a:ext cx="0" cy="0"/>
+          <a:chOff x="0" y="0"/>
+          <a:chExt cx="0" cy="0"/>
+        </a:xfrm>
+      </p:grpSpPr>
+      <p:sp>
+        <p:nvSpPr>
+          <p:cNvPr id="2" name="Text 0"/>
+          <p:cNvSpPr/>
+          <p:nvPr/>
+        </p:nvSpPr>
+        <p:spPr>
+          <a:xfrm>
+            <a:off x="548640" y="6510528"/>
+            <a:ext cx="7315200" cy="274320"/>
+          </a:xfrm>
+          <a:prstGeom prst="rect">
+            <a:avLst/>
+          </a:prstGeom>
+          <a:noFill/>
+          <a:ln/>
+        </p:spPr>
+        <p:txBody>
+          <a:bodyPr wrap="square" rtlCol="0" anchor="ctr"/>
+          <a:lstStyle/>
+          <a:p>
+            <a:pPr indent="0" marL="0">
+              <a:buNone/>
+            </a:pPr>
+            <a:r>
+              <a:rPr lang="en-US" sz="1000" dirty="0">
+                <a:solidFill>
+                  <a:srgbClr val="98999D"/>
+                </a:solidFill>
+                <a:latin typeface="Arial" pitchFamily="34" charset="0"/>
+                <a:ea typeface="Arial" pitchFamily="34" charset="-122"/>
+                <a:cs typeface="Arial" pitchFamily="34" charset="-120"/>
+              </a:rPr>
+              <a:t>소셜 플로우 오리엔테이션</a:t>
+            </a:r>
+            <a:endParaRPr lang="en-US" sz="1000" dirty="0"/>
+          </a:p>
+        </p:txBody>
+      </p:sp>
+      <p:sp>
+        <p:nvSpPr>
+          <p:cNvPr id="3" name="Text 1"/>
+          <p:cNvSpPr/>
+          <p:nvPr/>
+        </p:nvSpPr>
+        <p:spPr>
+          <a:xfrm>
+            <a:off x="548640" y="365760"/>
+            <a:ext cx="11064240" cy="822960"/>
+          </a:xfrm>
+          <a:prstGeom prst="rect">
+            <a:avLst/>
+          </a:prstGeom>
+          <a:noFill/>
+          <a:ln/>
+        </p:spPr>
+        <p:txBody>
+          <a:bodyPr wrap="square" rtlCol="0" anchor="ctr"/>
+          <a:lstStyle/>
+          <a:p>
+            <a:pPr indent="0" marL="0">
+              <a:buNone/>
+            </a:pPr>
+            <a:r>
+              <a:rPr lang="en-US" sz="3000" b="1" dirty="0">
+                <a:solidFill>
+                  <a:srgbClr val="F2F2F0"/>
+                </a:solidFill>
+                <a:latin typeface="Arial" pitchFamily="34" charset="0"/>
+                <a:ea typeface="Arial" pitchFamily="34" charset="-122"/>
+                <a:cs typeface="Arial" pitchFamily="34" charset="-120"/>
+              </a:rPr>
+              <a:t>추천 책</a:t>
+            </a:r>
+            <a:endParaRPr lang="en-US" sz="3000" dirty="0"/>
+          </a:p>
+        </p:txBody>
+      </p:sp>
+      <p:sp>
+        <p:nvSpPr>
+          <p:cNvPr id="4" name="Text 2"/>
+          <p:cNvSpPr/>
+          <p:nvPr/>
+        </p:nvSpPr>
+        <p:spPr>
+          <a:xfrm>
+            <a:off x="548640" y="1005840"/>
+            <a:ext cx="11064240" cy="457200"/>
+          </a:xfrm>
+          <a:prstGeom prst="rect">
+            <a:avLst/>
+          </a:prstGeom>
+          <a:noFill/>
+          <a:ln/>
+        </p:spPr>
+        <p:txBody>
+          <a:bodyPr wrap="square" rtlCol="0" anchor="ctr"/>
+          <a:lstStyle/>
+          <a:p>
+            <a:pPr indent="0" marL="0">
+              <a:buNone/>
+            </a:pPr>
+            <a:r>
+              <a:rPr lang="en-US" sz="1600" dirty="0">
+                <a:solidFill>
+                  <a:srgbClr val="98999D"/>
+                </a:solidFill>
+                <a:latin typeface="Arial" pitchFamily="34" charset="0"/>
+                <a:ea typeface="Arial" pitchFamily="34" charset="-122"/>
+                <a:cs typeface="Arial" pitchFamily="34" charset="-120"/>
+              </a:rPr>
+              <a:t>개념을 깊이 있게 잡고 싶을 때</a:t>
+            </a:r>
+            <a:endParaRPr lang="en-US" sz="1600" dirty="0"/>
+          </a:p>
+        </p:txBody>
+      </p:sp>
+      <p:sp>
+        <p:nvSpPr>
+          <p:cNvPr id="5" name="Shape 3"/>
+          <p:cNvSpPr/>
+          <p:nvPr/>
+        </p:nvSpPr>
+        <p:spPr>
+          <a:xfrm>
+            <a:off x="548640" y="1508760"/>
+            <a:ext cx="11064240" cy="0"/>
+          </a:xfrm>
+          <a:prstGeom prst="line">
+            <a:avLst/>
+          </a:prstGeom>
+          <a:noFill/>
+          <a:ln w="19050">
+            <a:solidFill>
+              <a:srgbClr val="202124"/>
+            </a:solidFill>
+            <a:prstDash val="solid"/>
+          </a:ln>
+        </p:spPr>
+      </p:sp>
+      <p:sp>
+        <p:nvSpPr>
+          <p:cNvPr id="6" name="Text 4"/>
+          <p:cNvSpPr/>
+          <p:nvPr/>
+        </p:nvSpPr>
+        <p:spPr>
+          <a:xfrm>
+            <a:off x="548640" y="1828800"/>
+            <a:ext cx="11064240" cy="4572000"/>
+          </a:xfrm>
+          <a:prstGeom prst="rect">
+            <a:avLst/>
+          </a:prstGeom>
+          <a:noFill/>
+          <a:ln/>
+        </p:spPr>
+        <p:txBody>
+          <a:bodyPr wrap="square" rtlCol="0" anchor="t"/>
+          <a:lstStyle/>
+          <a:p>
+            <a:pPr marL="342900" indent="-342900">
+              <a:lnSpc>
+                <a:spcPct val="135000"/>
+              </a:lnSpc>
+              <a:buSzPct val="100000"/>
+              <a:buChar char="•"/>
+            </a:pPr>
+            <a:r>
+              <a:rPr lang="en-US" sz="1800" dirty="0">
+                <a:solidFill>
+                  <a:srgbClr val="F2F2F0"/>
+                </a:solidFill>
+                <a:latin typeface="Arial" pitchFamily="34" charset="0"/>
+                <a:ea typeface="Arial" pitchFamily="34" charset="-122"/>
+                <a:cs typeface="Arial" pitchFamily="34" charset="-120"/>
+              </a:rPr>
+              <a:t>『클린 코드』 Robert C. Martin — 좋은 코드/나쁜 코드를 가르는 기준 세우기</a:t>
+            </a:r>
+            <a:endParaRPr lang="en-US" sz="1800" dirty="0"/>
+          </a:p>
+          <a:p>
+            <a:pPr marL="342900" indent="-342900">
+              <a:lnSpc>
+                <a:spcPct val="135000"/>
+              </a:lnSpc>
+              <a:buSzPct val="100000"/>
+              <a:buChar char="•"/>
+            </a:pPr>
+            <a:r>
+              <a:rPr lang="en-US" sz="1800" dirty="0">
+                <a:solidFill>
+                  <a:srgbClr val="F2F2F0"/>
+                </a:solidFill>
+                <a:latin typeface="Arial" pitchFamily="34" charset="0"/>
+                <a:ea typeface="Arial" pitchFamily="34" charset="-122"/>
+                <a:cs typeface="Arial" pitchFamily="34" charset="-120"/>
+              </a:rPr>
+              <a:t>『모던 자바스크립트 Deep Dive』 이웅모 — 자바스크립트 문법의 원리를 제대로</a:t>
+            </a:r>
+            <a:endParaRPr lang="en-US" sz="1800" dirty="0"/>
+          </a:p>
+          <a:p>
+            <a:pPr marL="342900" indent="-342900">
+              <a:lnSpc>
+                <a:spcPct val="135000"/>
+              </a:lnSpc>
+              <a:buSzPct val="100000"/>
+              <a:buChar char="•"/>
+            </a:pPr>
+            <a:r>
+              <a:rPr lang="en-US" sz="1800" dirty="0">
+                <a:solidFill>
+                  <a:srgbClr val="F2F2F0"/>
+                </a:solidFill>
+                <a:latin typeface="Arial" pitchFamily="34" charset="0"/>
+                <a:ea typeface="Arial" pitchFamily="34" charset="-122"/>
+                <a:cs typeface="Arial" pitchFamily="34" charset="-120"/>
+              </a:rPr>
+              <a:t>『Learning React』 Alex Banks &amp; Eve Porcello (O'Reilly) — 리액트 개념을 기초부터</a:t>
+            </a:r>
+            <a:endParaRPr lang="en-US" sz="1800" dirty="0"/>
+          </a:p>
+          <a:p>
+            <a:pPr marL="342900" indent="-342900">
+              <a:lnSpc>
+                <a:spcPct val="135000"/>
+              </a:lnSpc>
+              <a:buSzPct val="100000"/>
+              <a:buChar char="•"/>
+            </a:pPr>
+            <a:r>
+              <a:rPr lang="en-US" sz="1800" dirty="0">
+                <a:solidFill>
+                  <a:srgbClr val="F2F2F0"/>
+                </a:solidFill>
+                <a:latin typeface="Arial" pitchFamily="34" charset="0"/>
+                <a:ea typeface="Arial" pitchFamily="34" charset="-122"/>
+                <a:cs typeface="Arial" pitchFamily="34" charset="-120"/>
+              </a:rPr>
+              <a:t>『혼자 공부하는 컴퓨터 구조+운영체제』 강민철 — 코드 너머의 컴퓨터 동작 원리</a:t>
+            </a:r>
+            <a:endParaRPr lang="en-US" sz="1800" dirty="0"/>
+          </a:p>
+          <a:p>
+            <a:pPr marL="342900" indent="-342900">
+              <a:lnSpc>
+                <a:spcPct val="135000"/>
+              </a:lnSpc>
+              <a:buSzPct val="100000"/>
+              <a:buChar char="•"/>
+            </a:pPr>
+            <a:r>
+              <a:rPr lang="en-US" sz="1800" dirty="0">
+                <a:solidFill>
+                  <a:srgbClr val="F2F2F0"/>
+                </a:solidFill>
+                <a:latin typeface="Arial" pitchFamily="34" charset="0"/>
+                <a:ea typeface="Arial" pitchFamily="34" charset="-122"/>
+                <a:cs typeface="Arial" pitchFamily="34" charset="-120"/>
+              </a:rPr>
+              <a:t>『Designing Data-Intensive Applications』 Martin Kleppmann — 데이터베이스/백엔드를 깊게 (중급 이상)</a:t>
             </a:r>
             <a:endParaRPr lang="en-US" sz="1800" dirty="0"/>
           </a:p>
@@ -12387,8 +14284,8 @@
         </p:nvSpPr>
         <p:spPr>
           <a:xfrm>
-            <a:off x="548640" y="548640"/>
-            <a:ext cx="8229600" cy="457200"/>
+            <a:off x="548640" y="365760"/>
+            <a:ext cx="11064240" cy="822960"/>
           </a:xfrm>
           <a:prstGeom prst="rect">
             <a:avLst/>
@@ -12404,17 +14301,17 @@
               <a:buNone/>
             </a:pPr>
             <a:r>
-              <a:rPr lang="en-US" sz="1400" b="1" spc="100" kern="0" dirty="0">
-                <a:solidFill>
-                  <a:srgbClr val="5B8DEF"/>
-                </a:solidFill>
-                <a:latin typeface="Arial" pitchFamily="34" charset="0"/>
-                <a:ea typeface="Arial" pitchFamily="34" charset="-122"/>
-                <a:cs typeface="Arial" pitchFamily="34" charset="-120"/>
-              </a:rPr>
-              <a:t>1주차</a:t>
-            </a:r>
-            <a:endParaRPr lang="en-US" sz="1400" dirty="0"/>
+              <a:rPr lang="en-US" sz="3000" b="1" dirty="0">
+                <a:solidFill>
+                  <a:srgbClr val="F2F2F0"/>
+                </a:solidFill>
+                <a:latin typeface="Arial" pitchFamily="34" charset="0"/>
+                <a:ea typeface="Arial" pitchFamily="34" charset="-122"/>
+                <a:cs typeface="Arial" pitchFamily="34" charset="-120"/>
+              </a:rPr>
+              <a:t>커리큘럼 로드맵</a:t>
+            </a:r>
+            <a:endParaRPr lang="en-US" sz="3000" dirty="0"/>
           </a:p>
         </p:txBody>
       </p:sp>
@@ -12426,8 +14323,8 @@
         </p:nvSpPr>
         <p:spPr>
           <a:xfrm>
-            <a:off x="548640" y="1051560"/>
-            <a:ext cx="11064240" cy="914400"/>
+            <a:off x="548640" y="1005840"/>
+            <a:ext cx="11064240" cy="457200"/>
           </a:xfrm>
           <a:prstGeom prst="rect">
             <a:avLst/>
@@ -12443,17 +14340,17 @@
               <a:buNone/>
             </a:pPr>
             <a:r>
-              <a:rPr lang="en-US" sz="3600" b="1" dirty="0">
-                <a:solidFill>
-                  <a:srgbClr val="F2F2F0"/>
-                </a:solidFill>
-                <a:latin typeface="Arial" pitchFamily="34" charset="0"/>
-                <a:ea typeface="Arial" pitchFamily="34" charset="-122"/>
-                <a:cs typeface="Arial" pitchFamily="34" charset="-120"/>
-              </a:rPr>
-              <a:t>프로젝트 시작</a:t>
-            </a:r>
-            <a:endParaRPr lang="en-US" sz="3600" dirty="0"/>
+              <a:rPr lang="en-US" sz="1600" dirty="0">
+                <a:solidFill>
+                  <a:srgbClr val="98999D"/>
+                </a:solidFill>
+                <a:latin typeface="Arial" pitchFamily="34" charset="0"/>
+                <a:ea typeface="Arial" pitchFamily="34" charset="-122"/>
+                <a:cs typeface="Arial" pitchFamily="34" charset="-120"/>
+              </a:rPr>
+              <a:t>이 오리엔테이션은 전체 과정 중 어디에 있을까요?</a:t>
+            </a:r>
+            <a:endParaRPr lang="en-US" sz="1600" dirty="0"/>
           </a:p>
         </p:txBody>
       </p:sp>
@@ -12465,7 +14362,7 @@
         </p:nvSpPr>
         <p:spPr>
           <a:xfrm>
-            <a:off x="548640" y="2011680"/>
+            <a:off x="548640" y="1508760"/>
             <a:ext cx="11064240" cy="0"/>
           </a:xfrm>
           <a:prstGeom prst="line">
@@ -12482,43 +14379,293 @@
       </p:sp>
       <p:sp>
         <p:nvSpPr>
-          <p:cNvPr id="6" name="Text 4"/>
-          <p:cNvSpPr/>
-          <p:nvPr/>
-        </p:nvSpPr>
-        <p:spPr>
-          <a:xfrm>
-            <a:off x="548640" y="2377440"/>
-            <a:ext cx="11064240" cy="3474720"/>
-          </a:xfrm>
-          <a:prstGeom prst="rect">
-            <a:avLst/>
-          </a:prstGeom>
-          <a:noFill/>
-          <a:ln/>
-        </p:spPr>
-        <p:txBody>
-          <a:bodyPr wrap="square" rtlCol="0" anchor="t"/>
-          <a:lstStyle/>
-          <a:p>
-            <a:pPr indent="0" marL="0">
-              <a:lnSpc>
-                <a:spcPct val="145000"/>
-              </a:lnSpc>
-              <a:buNone/>
-            </a:pPr>
-            <a:r>
-              <a:rPr lang="en-US" sz="2000" dirty="0">
-                <a:solidFill>
-                  <a:srgbClr val="F2F2F0"/>
-                </a:solidFill>
-                <a:latin typeface="Arial" pitchFamily="34" charset="0"/>
-                <a:ea typeface="Arial" pitchFamily="34" charset="-122"/>
-                <a:cs typeface="Arial" pitchFamily="34" charset="-120"/>
-              </a:rPr>
-              <a:t>커머스 또는 플랫폼 오픈소스를 기반으로 내 서비스 제작을 시작합니다. 프로젝트 구조를 이해하고 UI/UX를 내 아이디어에 맞게 수정하며, GitHub 협업과 Claude Agent를 활용한 개발 워크플로를 익힙니다.</a:t>
-            </a:r>
-            <a:endParaRPr lang="en-US" sz="2000" dirty="0"/>
+          <p:cNvPr id="6" name="Shape 4"/>
+          <p:cNvSpPr/>
+          <p:nvPr/>
+        </p:nvSpPr>
+        <p:spPr>
+          <a:xfrm>
+            <a:off x="548640" y="1828800"/>
+            <a:ext cx="11064240" cy="731520"/>
+          </a:xfrm>
+          <a:prstGeom prst="roundRect">
+            <a:avLst>
+              <a:gd name="adj" fmla="val 10000"/>
+            </a:avLst>
+          </a:prstGeom>
+          <a:solidFill>
+            <a:srgbClr val="202124"/>
+          </a:solidFill>
+          <a:ln w="12700">
+            <a:solidFill>
+              <a:srgbClr val="5B8DEF"/>
+            </a:solidFill>
+            <a:prstDash val="solid"/>
+          </a:ln>
+        </p:spPr>
+      </p:sp>
+      <p:sp>
+        <p:nvSpPr>
+          <p:cNvPr id="7" name="Text 5"/>
+          <p:cNvSpPr/>
+          <p:nvPr/>
+        </p:nvSpPr>
+        <p:spPr>
+          <a:xfrm>
+            <a:off x="822960" y="1828800"/>
+            <a:ext cx="10515600" cy="731520"/>
+          </a:xfrm>
+          <a:prstGeom prst="rect">
+            <a:avLst/>
+          </a:prstGeom>
+          <a:noFill/>
+          <a:ln/>
+        </p:spPr>
+        <p:txBody>
+          <a:bodyPr wrap="square" rtlCol="0" anchor="ctr"/>
+          <a:lstStyle/>
+          <a:p>
+            <a:pPr indent="0" marL="0">
+              <a:buNone/>
+            </a:pPr>
+            <a:r>
+              <a:rPr lang="en-US" sz="1600" b="1" dirty="0">
+                <a:solidFill>
+                  <a:srgbClr val="5B8DEF"/>
+                </a:solidFill>
+                <a:latin typeface="Arial" pitchFamily="34" charset="0"/>
+                <a:ea typeface="Arial" pitchFamily="34" charset="-122"/>
+                <a:cs typeface="Arial" pitchFamily="34" charset="-120"/>
+              </a:rPr>
+              <a:t>오리엔테이션  ← 지금 여기</a:t>
+            </a:r>
+            <a:pPr indent="0" marL="0">
+              <a:buNone/>
+            </a:pPr>
+            <a:r>
+              <a:rPr lang="en-US" sz="1600" dirty="0">
+                <a:solidFill>
+                  <a:srgbClr val="98999D"/>
+                </a:solidFill>
+                <a:latin typeface="Arial" pitchFamily="34" charset="0"/>
+                <a:ea typeface="Arial" pitchFamily="34" charset="-122"/>
+                <a:cs typeface="Arial" pitchFamily="34" charset="-120"/>
+              </a:rPr>
+              <a:t>   맛보기 강의 · Claude Code &amp; AI 에이전트 기초</a:t>
+            </a:r>
+            <a:endParaRPr lang="en-US" sz="1600" dirty="0"/>
+          </a:p>
+        </p:txBody>
+      </p:sp>
+      <p:sp>
+        <p:nvSpPr>
+          <p:cNvPr id="8" name="Text 6"/>
+          <p:cNvSpPr/>
+          <p:nvPr/>
+        </p:nvSpPr>
+        <p:spPr>
+          <a:xfrm>
+            <a:off x="822960" y="2670048"/>
+            <a:ext cx="10515600" cy="731520"/>
+          </a:xfrm>
+          <a:prstGeom prst="rect">
+            <a:avLst/>
+          </a:prstGeom>
+          <a:noFill/>
+          <a:ln/>
+        </p:spPr>
+        <p:txBody>
+          <a:bodyPr wrap="square" rtlCol="0" anchor="ctr"/>
+          <a:lstStyle/>
+          <a:p>
+            <a:pPr indent="0" marL="0">
+              <a:buNone/>
+            </a:pPr>
+            <a:r>
+              <a:rPr lang="en-US" sz="1600" b="1" dirty="0">
+                <a:solidFill>
+                  <a:srgbClr val="F2F2F0"/>
+                </a:solidFill>
+                <a:latin typeface="Arial" pitchFamily="34" charset="0"/>
+                <a:ea typeface="Arial" pitchFamily="34" charset="-122"/>
+                <a:cs typeface="Arial" pitchFamily="34" charset="-120"/>
+              </a:rPr>
+              <a:t>1주차</a:t>
+            </a:r>
+            <a:pPr indent="0" marL="0">
+              <a:buNone/>
+            </a:pPr>
+            <a:r>
+              <a:rPr lang="en-US" sz="1600" dirty="0">
+                <a:solidFill>
+                  <a:srgbClr val="98999D"/>
+                </a:solidFill>
+                <a:latin typeface="Arial" pitchFamily="34" charset="0"/>
+                <a:ea typeface="Arial" pitchFamily="34" charset="-122"/>
+                <a:cs typeface="Arial" pitchFamily="34" charset="-120"/>
+              </a:rPr>
+              <a:t>   프로젝트 시작</a:t>
+            </a:r>
+            <a:endParaRPr lang="en-US" sz="1600" dirty="0"/>
+          </a:p>
+        </p:txBody>
+      </p:sp>
+      <p:sp>
+        <p:nvSpPr>
+          <p:cNvPr id="9" name="Text 7"/>
+          <p:cNvSpPr/>
+          <p:nvPr/>
+        </p:nvSpPr>
+        <p:spPr>
+          <a:xfrm>
+            <a:off x="822960" y="3511296"/>
+            <a:ext cx="10515600" cy="731520"/>
+          </a:xfrm>
+          <a:prstGeom prst="rect">
+            <a:avLst/>
+          </a:prstGeom>
+          <a:noFill/>
+          <a:ln/>
+        </p:spPr>
+        <p:txBody>
+          <a:bodyPr wrap="square" rtlCol="0" anchor="ctr"/>
+          <a:lstStyle/>
+          <a:p>
+            <a:pPr indent="0" marL="0">
+              <a:buNone/>
+            </a:pPr>
+            <a:r>
+              <a:rPr lang="en-US" sz="1600" b="1" dirty="0">
+                <a:solidFill>
+                  <a:srgbClr val="F2F2F0"/>
+                </a:solidFill>
+                <a:latin typeface="Arial" pitchFamily="34" charset="0"/>
+                <a:ea typeface="Arial" pitchFamily="34" charset="-122"/>
+                <a:cs typeface="Arial" pitchFamily="34" charset="-120"/>
+              </a:rPr>
+              <a:t>2주차</a:t>
+            </a:r>
+            <a:pPr indent="0" marL="0">
+              <a:buNone/>
+            </a:pPr>
+            <a:r>
+              <a:rPr lang="en-US" sz="1600" dirty="0">
+                <a:solidFill>
+                  <a:srgbClr val="98999D"/>
+                </a:solidFill>
+                <a:latin typeface="Arial" pitchFamily="34" charset="0"/>
+                <a:ea typeface="Arial" pitchFamily="34" charset="-122"/>
+                <a:cs typeface="Arial" pitchFamily="34" charset="-120"/>
+              </a:rPr>
+              <a:t>   백엔드 구축</a:t>
+            </a:r>
+            <a:endParaRPr lang="en-US" sz="1600" dirty="0"/>
+          </a:p>
+        </p:txBody>
+      </p:sp>
+      <p:sp>
+        <p:nvSpPr>
+          <p:cNvPr id="10" name="Text 8"/>
+          <p:cNvSpPr/>
+          <p:nvPr/>
+        </p:nvSpPr>
+        <p:spPr>
+          <a:xfrm>
+            <a:off x="822960" y="4352544"/>
+            <a:ext cx="10515600" cy="731520"/>
+          </a:xfrm>
+          <a:prstGeom prst="rect">
+            <a:avLst/>
+          </a:prstGeom>
+          <a:noFill/>
+          <a:ln/>
+        </p:spPr>
+        <p:txBody>
+          <a:bodyPr wrap="square" rtlCol="0" anchor="ctr"/>
+          <a:lstStyle/>
+          <a:p>
+            <a:pPr indent="0" marL="0">
+              <a:buNone/>
+            </a:pPr>
+            <a:r>
+              <a:rPr lang="en-US" sz="1600" b="1" dirty="0">
+                <a:solidFill>
+                  <a:srgbClr val="F2F2F0"/>
+                </a:solidFill>
+                <a:latin typeface="Arial" pitchFamily="34" charset="0"/>
+                <a:ea typeface="Arial" pitchFamily="34" charset="-122"/>
+                <a:cs typeface="Arial" pitchFamily="34" charset="-120"/>
+              </a:rPr>
+              <a:t>3주차</a:t>
+            </a:r>
+            <a:pPr indent="0" marL="0">
+              <a:buNone/>
+            </a:pPr>
+            <a:r>
+              <a:rPr lang="en-US" sz="1600" dirty="0">
+                <a:solidFill>
+                  <a:srgbClr val="98999D"/>
+                </a:solidFill>
+                <a:latin typeface="Arial" pitchFamily="34" charset="0"/>
+                <a:ea typeface="Arial" pitchFamily="34" charset="-122"/>
+                <a:cs typeface="Arial" pitchFamily="34" charset="-120"/>
+              </a:rPr>
+              <a:t>   기능 고도화</a:t>
+            </a:r>
+            <a:endParaRPr lang="en-US" sz="1600" dirty="0"/>
+          </a:p>
+        </p:txBody>
+      </p:sp>
+      <p:sp>
+        <p:nvSpPr>
+          <p:cNvPr id="11" name="Text 9"/>
+          <p:cNvSpPr/>
+          <p:nvPr/>
+        </p:nvSpPr>
+        <p:spPr>
+          <a:xfrm>
+            <a:off x="822960" y="5193792"/>
+            <a:ext cx="10515600" cy="731520"/>
+          </a:xfrm>
+          <a:prstGeom prst="rect">
+            <a:avLst/>
+          </a:prstGeom>
+          <a:noFill/>
+          <a:ln/>
+        </p:spPr>
+        <p:txBody>
+          <a:bodyPr wrap="square" rtlCol="0" anchor="ctr"/>
+          <a:lstStyle/>
+          <a:p>
+            <a:pPr indent="0" marL="0">
+              <a:buNone/>
+            </a:pPr>
+            <a:r>
+              <a:rPr lang="en-US" sz="1600" b="1" dirty="0">
+                <a:solidFill>
+                  <a:srgbClr val="F2F2F0"/>
+                </a:solidFill>
+                <a:latin typeface="Arial" pitchFamily="34" charset="0"/>
+                <a:ea typeface="Arial" pitchFamily="34" charset="-122"/>
+                <a:cs typeface="Arial" pitchFamily="34" charset="-120"/>
+              </a:rPr>
+              <a:t>4주차</a:t>
+            </a:r>
+            <a:pPr indent="0" marL="0">
+              <a:buNone/>
+            </a:pPr>
+            <a:r>
+              <a:rPr lang="en-US" sz="1600" dirty="0">
+                <a:solidFill>
+                  <a:srgbClr val="98999D"/>
+                </a:solidFill>
+                <a:latin typeface="Arial" pitchFamily="34" charset="0"/>
+                <a:ea typeface="Arial" pitchFamily="34" charset="-122"/>
+                <a:cs typeface="Arial" pitchFamily="34" charset="-120"/>
+              </a:rPr>
+              <a:t>   배포 및 완성</a:t>
+            </a:r>
+            <a:endParaRPr lang="en-US" sz="1600" dirty="0"/>
           </a:p>
         </p:txBody>
       </p:sp>
@@ -12626,7 +14773,7 @@
                 <a:ea typeface="Arial" pitchFamily="34" charset="-122"/>
                 <a:cs typeface="Arial" pitchFamily="34" charset="-120"/>
               </a:rPr>
-              <a:t>2주차</a:t>
+              <a:t>오리엔테이션</a:t>
             </a:r>
             <a:endParaRPr lang="en-US" sz="1400" dirty="0"/>
           </a:p>
@@ -12634,7 +14781,73 @@
       </p:sp>
       <p:sp>
         <p:nvSpPr>
-          <p:cNvPr id="4" name="Text 2"/>
+          <p:cNvPr id="4" name="Shape 2"/>
+          <p:cNvSpPr/>
+          <p:nvPr/>
+        </p:nvSpPr>
+        <p:spPr>
+          <a:xfrm>
+            <a:off x="9601200" y="502920"/>
+            <a:ext cx="2011680" cy="457200"/>
+          </a:xfrm>
+          <a:prstGeom prst="roundRect">
+            <a:avLst>
+              <a:gd name="adj" fmla="val 50000"/>
+            </a:avLst>
+          </a:prstGeom>
+          <a:solidFill>
+            <a:srgbClr val="5B8DEF"/>
+          </a:solidFill>
+          <a:ln w="12700">
+            <a:solidFill>
+              <a:srgbClr val="5B8DEF"/>
+            </a:solidFill>
+            <a:prstDash val="solid"/>
+          </a:ln>
+        </p:spPr>
+      </p:sp>
+      <p:sp>
+        <p:nvSpPr>
+          <p:cNvPr id="5" name="Text 3"/>
+          <p:cNvSpPr/>
+          <p:nvPr/>
+        </p:nvSpPr>
+        <p:spPr>
+          <a:xfrm>
+            <a:off x="9601200" y="502920"/>
+            <a:ext cx="2011680" cy="457200"/>
+          </a:xfrm>
+          <a:prstGeom prst="rect">
+            <a:avLst/>
+          </a:prstGeom>
+          <a:noFill/>
+          <a:ln/>
+        </p:spPr>
+        <p:txBody>
+          <a:bodyPr wrap="square" rtlCol="0" anchor="ctr"/>
+          <a:lstStyle/>
+          <a:p>
+            <a:pPr algn="ctr" indent="0" marL="0">
+              <a:buNone/>
+            </a:pPr>
+            <a:r>
+              <a:rPr lang="en-US" sz="1400" b="1" dirty="0">
+                <a:solidFill>
+                  <a:srgbClr val="17181A"/>
+                </a:solidFill>
+                <a:latin typeface="Arial" pitchFamily="34" charset="0"/>
+                <a:ea typeface="Arial" pitchFamily="34" charset="-122"/>
+                <a:cs typeface="Arial" pitchFamily="34" charset="-120"/>
+              </a:rPr>
+              <a:t>무료</a:t>
+            </a:r>
+            <a:endParaRPr lang="en-US" sz="1400" dirty="0"/>
+          </a:p>
+        </p:txBody>
+      </p:sp>
+      <p:sp>
+        <p:nvSpPr>
+          <p:cNvPr id="6" name="Text 4"/>
           <p:cNvSpPr/>
           <p:nvPr/>
         </p:nvSpPr>
@@ -12665,7 +14878,7 @@
                 <a:ea typeface="Arial" pitchFamily="34" charset="-122"/>
                 <a:cs typeface="Arial" pitchFamily="34" charset="-120"/>
               </a:rPr>
-              <a:t>백엔드 구축</a:t>
+              <a:t>맛보기 강의 · Claude Code &amp; AI 에이전트 기초</a:t>
             </a:r>
             <a:endParaRPr lang="en-US" sz="3600" dirty="0"/>
           </a:p>
@@ -12673,7 +14886,7 @@
       </p:sp>
       <p:sp>
         <p:nvSpPr>
-          <p:cNvPr id="5" name="Shape 3"/>
+          <p:cNvPr id="7" name="Shape 5"/>
           <p:cNvSpPr/>
           <p:nvPr/>
         </p:nvSpPr>
@@ -12696,7 +14909,7 @@
       </p:sp>
       <p:sp>
         <p:nvSpPr>
-          <p:cNvPr id="6" name="Text 4"/>
+          <p:cNvPr id="8" name="Text 6"/>
           <p:cNvSpPr/>
           <p:nvPr/>
         </p:nvSpPr>
@@ -12730,7 +14943,7 @@
                 <a:ea typeface="Arial" pitchFamily="34" charset="-122"/>
                 <a:cs typeface="Arial" pitchFamily="34" charset="-120"/>
               </a:rPr>
-              <a:t>Supabase를 활용한 데이터베이스 및 회원가입·로그인을 구현합니다. CRUD, API 연동 등 서비스 핵심 기능을 개발하고 데이터 구조 설계와 권한 관리(RLS)를 적용합니다.</a:t>
+              <a:t>Claude Code와 AI 에이전트 기초, Next.js·Flutter·Supabase 개념, GitHub 사용법을 익히고 뉴스/SNS 등 오픈소스를 활용해 첫 번째 서비스를 만들어봅니다. AI와 협업하는 개발 방식을 익힙니다.</a:t>
             </a:r>
             <a:endParaRPr lang="en-US" sz="2000" dirty="0"/>
           </a:p>
@@ -12840,7 +15053,7 @@
                 <a:ea typeface="Arial" pitchFamily="34" charset="-122"/>
                 <a:cs typeface="Arial" pitchFamily="34" charset="-120"/>
               </a:rPr>
-              <a:t>3주차</a:t>
+              <a:t>1주차</a:t>
             </a:r>
             <a:endParaRPr lang="en-US" sz="1400" dirty="0"/>
           </a:p>
@@ -12879,7 +15092,7 @@
                 <a:ea typeface="Arial" pitchFamily="34" charset="-122"/>
                 <a:cs typeface="Arial" pitchFamily="34" charset="-120"/>
               </a:rPr>
-              <a:t>기능 고도화</a:t>
+              <a:t>프로젝트 시작</a:t>
             </a:r>
             <a:endParaRPr lang="en-US" sz="3600" dirty="0"/>
           </a:p>
@@ -12944,7 +15157,7 @@
                 <a:ea typeface="Arial" pitchFamily="34" charset="-122"/>
                 <a:cs typeface="Arial" pitchFamily="34" charset="-120"/>
               </a:rPr>
-              <a:t>AI 기능(MCP, 외부 API)을 연동하고 Flutter 앱 또는 Next.js 웹 기능을 확장합니다. 코드 리팩터링과 기본 보안, 성능 개선을 진행합니다.</a:t>
+              <a:t>커머스 또는 플랫폼 오픈소스를 기반으로 내 서비스 제작을 시작합니다. 프로젝트 구조를 이해하고 UI/UX를 내 아이디어에 맞게 수정하며, GitHub 협업과 Claude Agent를 활용한 개발 워크플로를 익힙니다.</a:t>
             </a:r>
             <a:endParaRPr lang="en-US" sz="2000" dirty="0"/>
           </a:p>
@@ -13054,7 +15267,7 @@
                 <a:ea typeface="Arial" pitchFamily="34" charset="-122"/>
                 <a:cs typeface="Arial" pitchFamily="34" charset="-120"/>
               </a:rPr>
-              <a:t>4주차</a:t>
+              <a:t>2주차</a:t>
             </a:r>
             <a:endParaRPr lang="en-US" sz="1400" dirty="0"/>
           </a:p>
@@ -13093,7 +15306,7 @@
                 <a:ea typeface="Arial" pitchFamily="34" charset="-122"/>
                 <a:cs typeface="Arial" pitchFamily="34" charset="-120"/>
               </a:rPr>
-              <a:t>배포 및 완성</a:t>
+              <a:t>백엔드 구축</a:t>
             </a:r>
             <a:endParaRPr lang="en-US" sz="3600" dirty="0"/>
           </a:p>
@@ -13158,7 +15371,7 @@
                 <a:ea typeface="Arial" pitchFamily="34" charset="-122"/>
                 <a:cs typeface="Arial" pitchFamily="34" charset="-120"/>
               </a:rPr>
-              <a:t>Vercel 배포 및 운영 환경을 설정합니다. 프로젝트를 최종 점검하고 코드 리뷰를 진행한 뒤, 완성된 서비스를 발표하고 향후 확장 방향을 제시합니다.</a:t>
+              <a:t>Supabase를 활용한 데이터베이스 및 회원가입·로그인을 구현합니다. CRUD, API 연동 등 서비스 핵심 기능을 개발하고 데이터 구조 설계와 권한 관리(RLS)를 적용합니다.</a:t>
             </a:r>
             <a:endParaRPr lang="en-US" sz="2000" dirty="0"/>
           </a:p>
@@ -13243,8 +15456,8 @@
         </p:nvSpPr>
         <p:spPr>
           <a:xfrm>
-            <a:off x="548640" y="457200"/>
-            <a:ext cx="11064240" cy="457200"/>
+            <a:off x="548640" y="548640"/>
+            <a:ext cx="8229600" cy="457200"/>
           </a:xfrm>
           <a:prstGeom prst="rect">
             <a:avLst/>
@@ -13260,15 +15473,15 @@
               <a:buNone/>
             </a:pPr>
             <a:r>
-              <a:rPr lang="en-US" sz="1400" dirty="0">
-                <a:solidFill>
-                  <a:srgbClr val="98999D"/>
-                </a:solidFill>
-                <a:latin typeface="Arial" pitchFamily="34" charset="0"/>
-                <a:ea typeface="Arial" pitchFamily="34" charset="-122"/>
-                <a:cs typeface="Arial" pitchFamily="34" charset="-120"/>
-              </a:rPr>
-              <a:t>용어 설명</a:t>
+              <a:rPr lang="en-US" sz="1400" b="1" spc="100" kern="0" dirty="0">
+                <a:solidFill>
+                  <a:srgbClr val="5B8DEF"/>
+                </a:solidFill>
+                <a:latin typeface="Arial" pitchFamily="34" charset="0"/>
+                <a:ea typeface="Arial" pitchFamily="34" charset="-122"/>
+                <a:cs typeface="Arial" pitchFamily="34" charset="-120"/>
+              </a:rPr>
+              <a:t>3주차</a:t>
             </a:r>
             <a:endParaRPr lang="en-US" sz="1400" dirty="0"/>
           </a:p>
@@ -13282,8 +15495,8 @@
         </p:nvSpPr>
         <p:spPr>
           <a:xfrm>
-            <a:off x="548640" y="868680"/>
-            <a:ext cx="11064240" cy="1005840"/>
+            <a:off x="548640" y="1051560"/>
+            <a:ext cx="11064240" cy="914400"/>
           </a:xfrm>
           <a:prstGeom prst="rect">
             <a:avLst/>
@@ -13299,17 +15512,17 @@
               <a:buNone/>
             </a:pPr>
             <a:r>
-              <a:rPr lang="en-US" sz="4000" b="1" dirty="0">
-                <a:solidFill>
-                  <a:srgbClr val="F2F2F0"/>
-                </a:solidFill>
-                <a:latin typeface="Arial" pitchFamily="34" charset="0"/>
-                <a:ea typeface="Arial" pitchFamily="34" charset="-122"/>
-                <a:cs typeface="Arial" pitchFamily="34" charset="-120"/>
-              </a:rPr>
-              <a:t>Git</a:t>
-            </a:r>
-            <a:endParaRPr lang="en-US" sz="4000" dirty="0"/>
+              <a:rPr lang="en-US" sz="3600" b="1" dirty="0">
+                <a:solidFill>
+                  <a:srgbClr val="F2F2F0"/>
+                </a:solidFill>
+                <a:latin typeface="Arial" pitchFamily="34" charset="0"/>
+                <a:ea typeface="Arial" pitchFamily="34" charset="-122"/>
+                <a:cs typeface="Arial" pitchFamily="34" charset="-120"/>
+              </a:rPr>
+              <a:t>기능 고도화</a:t>
+            </a:r>
+            <a:endParaRPr lang="en-US" sz="3600" dirty="0"/>
           </a:p>
         </p:txBody>
       </p:sp>
@@ -13321,7 +15534,7 @@
         </p:nvSpPr>
         <p:spPr>
           <a:xfrm>
-            <a:off x="548640" y="1965960"/>
+            <a:off x="548640" y="2011680"/>
             <a:ext cx="11064240" cy="0"/>
           </a:xfrm>
           <a:prstGeom prst="line">
@@ -13344,8 +15557,8 @@
         </p:nvSpPr>
         <p:spPr>
           <a:xfrm>
-            <a:off x="548640" y="2286000"/>
-            <a:ext cx="11064240" cy="3108960"/>
+            <a:off x="548640" y="2377440"/>
+            <a:ext cx="11064240" cy="3474720"/>
           </a:xfrm>
           <a:prstGeom prst="rect">
             <a:avLst/>
@@ -13359,148 +15572,22 @@
           <a:p>
             <a:pPr indent="0" marL="0">
               <a:lnSpc>
-                <a:spcPct val="140000"/>
+                <a:spcPct val="145000"/>
               </a:lnSpc>
               <a:buNone/>
             </a:pPr>
             <a:r>
-              <a:rPr lang="en-US" sz="2200" dirty="0">
-                <a:solidFill>
-                  <a:srgbClr val="F2F2F0"/>
-                </a:solidFill>
-                <a:latin typeface="Arial" pitchFamily="34" charset="0"/>
-                <a:ea typeface="Arial" pitchFamily="34" charset="-122"/>
-                <a:cs typeface="Arial" pitchFamily="34" charset="-120"/>
-              </a:rPr>
-              <a:t>코드를 수정할 때마다 그 변경 이력을 저장해두는 도구예요. 언제 무엇이 바뀌었는지 기록되고, 문제가 생기면 예전 버전으로 되돌릴 수 있어요.</a:t>
-            </a:r>
-            <a:endParaRPr lang="en-US" sz="2200" dirty="0"/>
-          </a:p>
-        </p:txBody>
-      </p:sp>
-      <p:sp>
-        <p:nvSpPr>
-          <p:cNvPr id="7" name="Shape 5"/>
-          <p:cNvSpPr/>
-          <p:nvPr/>
-        </p:nvSpPr>
-        <p:spPr>
-          <a:xfrm>
-            <a:off x="548640" y="4663440"/>
-            <a:ext cx="11064240" cy="822960"/>
-          </a:xfrm>
-          <a:prstGeom prst="roundRect">
-            <a:avLst>
-              <a:gd name="adj" fmla="val 8889"/>
-            </a:avLst>
-          </a:prstGeom>
-          <a:solidFill>
-            <a:srgbClr val="202124"/>
-          </a:solidFill>
-          <a:ln w="12700">
-            <a:solidFill>
-              <a:srgbClr val="202124"/>
-            </a:solidFill>
-            <a:prstDash val="solid"/>
-          </a:ln>
-        </p:spPr>
-      </p:sp>
-      <p:sp>
-        <p:nvSpPr>
-          <p:cNvPr id="8" name="Text 6"/>
-          <p:cNvSpPr/>
-          <p:nvPr/>
-        </p:nvSpPr>
-        <p:spPr>
-          <a:xfrm>
-            <a:off x="822960" y="4663440"/>
-            <a:ext cx="10515600" cy="822960"/>
-          </a:xfrm>
-          <a:prstGeom prst="rect">
-            <a:avLst/>
-          </a:prstGeom>
-          <a:noFill/>
-          <a:ln/>
-        </p:spPr>
-        <p:txBody>
-          <a:bodyPr wrap="square" rtlCol="0" anchor="ctr"/>
-          <a:lstStyle/>
-          <a:p>
-            <a:pPr indent="0" marL="0">
-              <a:buNone/>
-            </a:pPr>
-            <a:r>
-              <a:rPr lang="en-US" sz="1500" i="1" dirty="0">
-                <a:solidFill>
-                  <a:srgbClr val="98999D"/>
-                </a:solidFill>
-                <a:latin typeface="Arial" pitchFamily="34" charset="0"/>
-                <a:ea typeface="Arial" pitchFamily="34" charset="-122"/>
-                <a:cs typeface="Arial" pitchFamily="34" charset="-120"/>
-              </a:rPr>
-              <a:t>쉽게 말하면: 문서 작업할 때 쓰는 '버전별로 저장하기'를 훨씬 정교하게 만든 것</a:t>
-            </a:r>
-            <a:endParaRPr lang="en-US" sz="1500" dirty="0"/>
-          </a:p>
-        </p:txBody>
-      </p:sp>
-      <p:sp>
-        <p:nvSpPr>
-          <p:cNvPr id="9" name="Text 7"/>
-          <p:cNvSpPr/>
-          <p:nvPr/>
-        </p:nvSpPr>
-        <p:spPr>
-          <a:xfrm>
-            <a:off x="548640" y="5897880"/>
-            <a:ext cx="11064240" cy="365760"/>
-          </a:xfrm>
-          <a:prstGeom prst="rect">
-            <a:avLst/>
-          </a:prstGeom>
-          <a:noFill/>
-          <a:ln/>
-        </p:spPr>
-        <p:txBody>
-          <a:bodyPr wrap="square" rtlCol="0" anchor="ctr"/>
-          <a:lstStyle/>
-          <a:p>
-            <a:pPr indent="0" marL="0">
-              <a:buNone/>
-            </a:pPr>
-            <a:r>
-              <a:rPr lang="en-US" sz="1500" dirty="0">
-                <a:solidFill>
-                  <a:srgbClr val="98999D"/>
-                </a:solidFill>
-                <a:latin typeface="Arial" pitchFamily="34" charset="0"/>
-                <a:ea typeface="Arial" pitchFamily="34" charset="-122"/>
-                <a:cs typeface="Arial" pitchFamily="34" charset="-120"/>
-              </a:rPr>
-              <a:t>자세히 보기: </a:t>
-            </a:r>
-            <a:pPr indent="0" marL="0">
-              <a:buNone/>
-            </a:pPr>
-            <a:r>
-              <a:rPr lang="en-US" sz="1500" u="sng" dirty="0">
-                <a:solidFill>
-                  <a:srgbClr val="5B8DEF"/>
-                </a:solidFill>
-                <a:latin typeface="Arial" pitchFamily="34" charset="0"/>
-                <a:ea typeface="Arial" pitchFamily="34" charset="-122"/>
-                <a:cs typeface="Arial" pitchFamily="34" charset="-120"/>
-                <a:hlinkClick r:id="rId1" invalidUrl="" action="" tgtFrame="" tooltip="" history="1" highlightClick="0" endSnd="0">
-                  <a:extLst>
-                    <a:ext uri="{A12FA001-AC4F-418D-AE19-62706E023703}">
-                      <ahyp:hlinkClr xmlns:ahyp="http://schemas.microsoft.com/office/drawing/2018/hyperlinkcolor" val="tx"/>
-                    </a:ext>
-                  </a:extLst>
-                </a:hlinkClick>
-              </a:rPr>
-              <a:t>https://git-scm.com</a:t>
-            </a:r>
-            <a:endParaRPr lang="en-US" sz="1500" dirty="0"/>
+              <a:rPr lang="en-US" sz="2000" dirty="0">
+                <a:solidFill>
+                  <a:srgbClr val="F2F2F0"/>
+                </a:solidFill>
+                <a:latin typeface="Arial" pitchFamily="34" charset="0"/>
+                <a:ea typeface="Arial" pitchFamily="34" charset="-122"/>
+                <a:cs typeface="Arial" pitchFamily="34" charset="-120"/>
+              </a:rPr>
+              <a:t>AI 기능(MCP, 외부 API)을 연동하고 Flutter 앱 또는 Next.js 웹 기능을 확장합니다. 코드 리팩터링과 기본 보안, 성능 개선을 진행합니다.</a:t>
+            </a:r>
+            <a:endParaRPr lang="en-US" sz="2000" dirty="0"/>
           </a:p>
         </p:txBody>
       </p:sp>
@@ -13583,8 +15670,8 @@
         </p:nvSpPr>
         <p:spPr>
           <a:xfrm>
-            <a:off x="548640" y="457200"/>
-            <a:ext cx="11064240" cy="457200"/>
+            <a:off x="548640" y="548640"/>
+            <a:ext cx="8229600" cy="457200"/>
           </a:xfrm>
           <a:prstGeom prst="rect">
             <a:avLst/>
@@ -13600,15 +15687,15 @@
               <a:buNone/>
             </a:pPr>
             <a:r>
-              <a:rPr lang="en-US" sz="1400" dirty="0">
-                <a:solidFill>
-                  <a:srgbClr val="98999D"/>
-                </a:solidFill>
-                <a:latin typeface="Arial" pitchFamily="34" charset="0"/>
-                <a:ea typeface="Arial" pitchFamily="34" charset="-122"/>
-                <a:cs typeface="Arial" pitchFamily="34" charset="-120"/>
-              </a:rPr>
-              <a:t>용어 설명</a:t>
+              <a:rPr lang="en-US" sz="1400" b="1" spc="100" kern="0" dirty="0">
+                <a:solidFill>
+                  <a:srgbClr val="5B8DEF"/>
+                </a:solidFill>
+                <a:latin typeface="Arial" pitchFamily="34" charset="0"/>
+                <a:ea typeface="Arial" pitchFamily="34" charset="-122"/>
+                <a:cs typeface="Arial" pitchFamily="34" charset="-120"/>
+              </a:rPr>
+              <a:t>4주차</a:t>
             </a:r>
             <a:endParaRPr lang="en-US" sz="1400" dirty="0"/>
           </a:p>
@@ -13622,8 +15709,8 @@
         </p:nvSpPr>
         <p:spPr>
           <a:xfrm>
-            <a:off x="548640" y="868680"/>
-            <a:ext cx="11064240" cy="1005840"/>
+            <a:off x="548640" y="1051560"/>
+            <a:ext cx="11064240" cy="914400"/>
           </a:xfrm>
           <a:prstGeom prst="rect">
             <a:avLst/>
@@ -13639,17 +15726,17 @@
               <a:buNone/>
             </a:pPr>
             <a:r>
-              <a:rPr lang="en-US" sz="4000" b="1" dirty="0">
-                <a:solidFill>
-                  <a:srgbClr val="F2F2F0"/>
-                </a:solidFill>
-                <a:latin typeface="Arial" pitchFamily="34" charset="0"/>
-                <a:ea typeface="Arial" pitchFamily="34" charset="-122"/>
-                <a:cs typeface="Arial" pitchFamily="34" charset="-120"/>
-              </a:rPr>
-              <a:t>GitHub</a:t>
-            </a:r>
-            <a:endParaRPr lang="en-US" sz="4000" dirty="0"/>
+              <a:rPr lang="en-US" sz="3600" b="1" dirty="0">
+                <a:solidFill>
+                  <a:srgbClr val="F2F2F0"/>
+                </a:solidFill>
+                <a:latin typeface="Arial" pitchFamily="34" charset="0"/>
+                <a:ea typeface="Arial" pitchFamily="34" charset="-122"/>
+                <a:cs typeface="Arial" pitchFamily="34" charset="-120"/>
+              </a:rPr>
+              <a:t>배포 및 완성</a:t>
+            </a:r>
+            <a:endParaRPr lang="en-US" sz="3600" dirty="0"/>
           </a:p>
         </p:txBody>
       </p:sp>
@@ -13661,7 +15748,7 @@
         </p:nvSpPr>
         <p:spPr>
           <a:xfrm>
-            <a:off x="548640" y="1965960"/>
+            <a:off x="548640" y="2011680"/>
             <a:ext cx="11064240" cy="0"/>
           </a:xfrm>
           <a:prstGeom prst="line">
@@ -13684,8 +15771,8 @@
         </p:nvSpPr>
         <p:spPr>
           <a:xfrm>
-            <a:off x="548640" y="2286000"/>
-            <a:ext cx="11064240" cy="3108960"/>
+            <a:off x="548640" y="2377440"/>
+            <a:ext cx="11064240" cy="3474720"/>
           </a:xfrm>
           <a:prstGeom prst="rect">
             <a:avLst/>
@@ -13699,148 +15786,22 @@
           <a:p>
             <a:pPr indent="0" marL="0">
               <a:lnSpc>
-                <a:spcPct val="140000"/>
+                <a:spcPct val="145000"/>
               </a:lnSpc>
               <a:buNone/>
             </a:pPr>
             <a:r>
-              <a:rPr lang="en-US" sz="2200" dirty="0">
-                <a:solidFill>
-                  <a:srgbClr val="F2F2F0"/>
-                </a:solidFill>
-                <a:latin typeface="Arial" pitchFamily="34" charset="0"/>
-                <a:ea typeface="Arial" pitchFamily="34" charset="-122"/>
-                <a:cs typeface="Arial" pitchFamily="34" charset="-120"/>
-              </a:rPr>
-              <a:t>Git으로 관리하는 코드를 인터넷에 올려두고, 여러 사람이 같이 보고 수정할 수 있게 해주는 웹사이트예요.</a:t>
-            </a:r>
-            <a:endParaRPr lang="en-US" sz="2200" dirty="0"/>
-          </a:p>
-        </p:txBody>
-      </p:sp>
-      <p:sp>
-        <p:nvSpPr>
-          <p:cNvPr id="7" name="Shape 5"/>
-          <p:cNvSpPr/>
-          <p:nvPr/>
-        </p:nvSpPr>
-        <p:spPr>
-          <a:xfrm>
-            <a:off x="548640" y="4663440"/>
-            <a:ext cx="11064240" cy="822960"/>
-          </a:xfrm>
-          <a:prstGeom prst="roundRect">
-            <a:avLst>
-              <a:gd name="adj" fmla="val 8889"/>
-            </a:avLst>
-          </a:prstGeom>
-          <a:solidFill>
-            <a:srgbClr val="202124"/>
-          </a:solidFill>
-          <a:ln w="12700">
-            <a:solidFill>
-              <a:srgbClr val="202124"/>
-            </a:solidFill>
-            <a:prstDash val="solid"/>
-          </a:ln>
-        </p:spPr>
-      </p:sp>
-      <p:sp>
-        <p:nvSpPr>
-          <p:cNvPr id="8" name="Text 6"/>
-          <p:cNvSpPr/>
-          <p:nvPr/>
-        </p:nvSpPr>
-        <p:spPr>
-          <a:xfrm>
-            <a:off x="822960" y="4663440"/>
-            <a:ext cx="10515600" cy="822960"/>
-          </a:xfrm>
-          <a:prstGeom prst="rect">
-            <a:avLst/>
-          </a:prstGeom>
-          <a:noFill/>
-          <a:ln/>
-        </p:spPr>
-        <p:txBody>
-          <a:bodyPr wrap="square" rtlCol="0" anchor="ctr"/>
-          <a:lstStyle/>
-          <a:p>
-            <a:pPr indent="0" marL="0">
-              <a:buNone/>
-            </a:pPr>
-            <a:r>
-              <a:rPr lang="en-US" sz="1500" i="1" dirty="0">
-                <a:solidFill>
-                  <a:srgbClr val="98999D"/>
-                </a:solidFill>
-                <a:latin typeface="Arial" pitchFamily="34" charset="0"/>
-                <a:ea typeface="Arial" pitchFamily="34" charset="-122"/>
-                <a:cs typeface="Arial" pitchFamily="34" charset="-120"/>
-              </a:rPr>
-              <a:t>쉽게 말하면: 코드를 위한 구글 드라이브 + 협업 도구</a:t>
-            </a:r>
-            <a:endParaRPr lang="en-US" sz="1500" dirty="0"/>
-          </a:p>
-        </p:txBody>
-      </p:sp>
-      <p:sp>
-        <p:nvSpPr>
-          <p:cNvPr id="9" name="Text 7"/>
-          <p:cNvSpPr/>
-          <p:nvPr/>
-        </p:nvSpPr>
-        <p:spPr>
-          <a:xfrm>
-            <a:off x="548640" y="5897880"/>
-            <a:ext cx="11064240" cy="365760"/>
-          </a:xfrm>
-          <a:prstGeom prst="rect">
-            <a:avLst/>
-          </a:prstGeom>
-          <a:noFill/>
-          <a:ln/>
-        </p:spPr>
-        <p:txBody>
-          <a:bodyPr wrap="square" rtlCol="0" anchor="ctr"/>
-          <a:lstStyle/>
-          <a:p>
-            <a:pPr indent="0" marL="0">
-              <a:buNone/>
-            </a:pPr>
-            <a:r>
-              <a:rPr lang="en-US" sz="1500" dirty="0">
-                <a:solidFill>
-                  <a:srgbClr val="98999D"/>
-                </a:solidFill>
-                <a:latin typeface="Arial" pitchFamily="34" charset="0"/>
-                <a:ea typeface="Arial" pitchFamily="34" charset="-122"/>
-                <a:cs typeface="Arial" pitchFamily="34" charset="-120"/>
-              </a:rPr>
-              <a:t>자세히 보기: </a:t>
-            </a:r>
-            <a:pPr indent="0" marL="0">
-              <a:buNone/>
-            </a:pPr>
-            <a:r>
-              <a:rPr lang="en-US" sz="1500" u="sng" dirty="0">
-                <a:solidFill>
-                  <a:srgbClr val="5B8DEF"/>
-                </a:solidFill>
-                <a:latin typeface="Arial" pitchFamily="34" charset="0"/>
-                <a:ea typeface="Arial" pitchFamily="34" charset="-122"/>
-                <a:cs typeface="Arial" pitchFamily="34" charset="-120"/>
-                <a:hlinkClick r:id="rId1" invalidUrl="" action="" tgtFrame="" tooltip="" history="1" highlightClick="0" endSnd="0">
-                  <a:extLst>
-                    <a:ext uri="{A12FA001-AC4F-418D-AE19-62706E023703}">
-                      <ahyp:hlinkClr xmlns:ahyp="http://schemas.microsoft.com/office/drawing/2018/hyperlinkcolor" val="tx"/>
-                    </a:ext>
-                  </a:extLst>
-                </a:hlinkClick>
-              </a:rPr>
-              <a:t>https://github.com</a:t>
-            </a:r>
-            <a:endParaRPr lang="en-US" sz="1500" dirty="0"/>
+              <a:rPr lang="en-US" sz="2000" dirty="0">
+                <a:solidFill>
+                  <a:srgbClr val="F2F2F0"/>
+                </a:solidFill>
+                <a:latin typeface="Arial" pitchFamily="34" charset="0"/>
+                <a:ea typeface="Arial" pitchFamily="34" charset="-122"/>
+                <a:cs typeface="Arial" pitchFamily="34" charset="-120"/>
+              </a:rPr>
+              <a:t>Vercel 배포 및 운영 환경을 설정합니다. 프로젝트를 최종 점검하고 코드 리뷰를 진행한 뒤, 완성된 서비스를 발표하고 향후 확장 방향을 제시합니다.</a:t>
+            </a:r>
+            <a:endParaRPr lang="en-US" sz="2000" dirty="0"/>
           </a:p>
         </p:txBody>
       </p:sp>

--- a/docs/social-flow-orientation.pptx
+++ b/docs/social-flow-orientation.pptx
@@ -44,9 +44,14 @@
     <p:sldId id="292" r:id="rId38"/>
     <p:sldId id="293" r:id="rId39"/>
     <p:sldId id="294" r:id="rId40"/>
+    <p:sldId id="295" r:id="rId41"/>
+    <p:sldId id="296" r:id="rId42"/>
+    <p:sldId id="297" r:id="rId43"/>
+    <p:sldId id="298" r:id="rId44"/>
+    <p:sldId id="299" r:id="rId45"/>
   </p:sldIdLst>
   <p:notesMasterIdLst>
-    <p:notesMasterId r:id="rId41"/>
+    <p:notesMasterId r:id="rId46"/>
   </p:notesMasterIdLst>
   <p:sldSz cx="12188952" cy="6858000"/>
   <p:notesSz cx="6858000" cy="12188952"/>
@@ -3468,6 +3473,446 @@
             <a:fld id="{F7021451-1387-4CA6-816F-3879F97B5CBC}" type="slidenum">
               <a:rPr lang="en-US"/>
               <a:t>4</a:t>
+            </a:fld>
+            <a:endParaRPr lang="en-US"/>
+          </a:p>
+        </p:txBody>
+      </p:sp>
+    </p:spTree>
+    <p:extLst>
+      <p:ext uri="{BB962C8B-B14F-4D97-AF65-F5344CB8AC3E}">
+        <p14:creationId xmlns:p14="http://schemas.microsoft.com/office/powerpoint/2010/main" val="1024086991"/>
+      </p:ext>
+    </p:extLst>
+  </p:cSld>
+  <p:clrMapOvr>
+    <a:masterClrMapping/>
+  </p:clrMapOvr>
+</p:notes>
+</file>
+
+<file path=ppt/notesSlides/notesSlide40.xml><?xml version="1.0" encoding="utf-8"?>
+<p:notes xmlns:a="http://schemas.openxmlformats.org/drawingml/2006/main" xmlns:r="http://schemas.openxmlformats.org/officeDocument/2006/relationships" xmlns:p="http://schemas.openxmlformats.org/presentationml/2006/main">
+  <p:cSld>
+    <p:spTree>
+      <p:nvGrpSpPr>
+        <p:cNvPr id="1" name=""/>
+        <p:cNvGrpSpPr/>
+        <p:nvPr/>
+      </p:nvGrpSpPr>
+      <p:grpSpPr>
+        <a:xfrm>
+          <a:off x="0" y="0"/>
+          <a:ext cx="0" cy="0"/>
+          <a:chOff x="0" y="0"/>
+          <a:chExt cx="0" cy="0"/>
+        </a:xfrm>
+      </p:grpSpPr>
+      <p:sp>
+        <p:nvSpPr>
+          <p:cNvPr id="2" name="Slide Image Placeholder 1"/>
+          <p:cNvSpPr>
+            <a:spLocks noGrp="1" noRot="1" noChangeAspect="1"/>
+          </p:cNvSpPr>
+          <p:nvPr>
+            <p:ph type="sldImg"/>
+          </p:nvPr>
+        </p:nvSpPr>
+        <p:spPr/>
+      </p:sp>
+      <p:sp>
+        <p:nvSpPr>
+          <p:cNvPr id="3" name="Notes Placeholder 2"/>
+          <p:cNvSpPr>
+            <a:spLocks noGrp="1"/>
+          </p:cNvSpPr>
+          <p:nvPr>
+            <p:ph type="body" idx="1"/>
+          </p:nvPr>
+        </p:nvSpPr>
+        <p:spPr/>
+        <p:txBody>
+          <a:bodyPr/>
+          <a:lstStyle/>
+          <a:p>
+            <a:r>
+              <a:rPr lang="en-US" dirty="0"/>
+              <a:t/>
+            </a:r>
+            <a:endParaRPr lang="en-US" dirty="0"/>
+          </a:p>
+        </p:txBody>
+      </p:sp>
+      <p:sp>
+        <p:nvSpPr>
+          <p:cNvPr id="4" name="Slide Number Placeholder 3"/>
+          <p:cNvSpPr>
+            <a:spLocks noGrp="1"/>
+          </p:cNvSpPr>
+          <p:nvPr>
+            <p:ph type="sldNum" sz="quarter" idx="10"/>
+          </p:nvPr>
+        </p:nvSpPr>
+        <p:spPr/>
+        <p:txBody>
+          <a:bodyPr/>
+          <a:lstStyle/>
+          <a:p>
+            <a:fld id="{F7021451-1387-4CA6-816F-3879F97B5CBC}" type="slidenum">
+              <a:rPr lang="en-US"/>
+              <a:t>40</a:t>
+            </a:fld>
+            <a:endParaRPr lang="en-US"/>
+          </a:p>
+        </p:txBody>
+      </p:sp>
+    </p:spTree>
+    <p:extLst>
+      <p:ext uri="{BB962C8B-B14F-4D97-AF65-F5344CB8AC3E}">
+        <p14:creationId xmlns:p14="http://schemas.microsoft.com/office/powerpoint/2010/main" val="1024086991"/>
+      </p:ext>
+    </p:extLst>
+  </p:cSld>
+  <p:clrMapOvr>
+    <a:masterClrMapping/>
+  </p:clrMapOvr>
+</p:notes>
+</file>
+
+<file path=ppt/notesSlides/notesSlide41.xml><?xml version="1.0" encoding="utf-8"?>
+<p:notes xmlns:a="http://schemas.openxmlformats.org/drawingml/2006/main" xmlns:r="http://schemas.openxmlformats.org/officeDocument/2006/relationships" xmlns:p="http://schemas.openxmlformats.org/presentationml/2006/main">
+  <p:cSld>
+    <p:spTree>
+      <p:nvGrpSpPr>
+        <p:cNvPr id="1" name=""/>
+        <p:cNvGrpSpPr/>
+        <p:nvPr/>
+      </p:nvGrpSpPr>
+      <p:grpSpPr>
+        <a:xfrm>
+          <a:off x="0" y="0"/>
+          <a:ext cx="0" cy="0"/>
+          <a:chOff x="0" y="0"/>
+          <a:chExt cx="0" cy="0"/>
+        </a:xfrm>
+      </p:grpSpPr>
+      <p:sp>
+        <p:nvSpPr>
+          <p:cNvPr id="2" name="Slide Image Placeholder 1"/>
+          <p:cNvSpPr>
+            <a:spLocks noGrp="1" noRot="1" noChangeAspect="1"/>
+          </p:cNvSpPr>
+          <p:nvPr>
+            <p:ph type="sldImg"/>
+          </p:nvPr>
+        </p:nvSpPr>
+        <p:spPr/>
+      </p:sp>
+      <p:sp>
+        <p:nvSpPr>
+          <p:cNvPr id="3" name="Notes Placeholder 2"/>
+          <p:cNvSpPr>
+            <a:spLocks noGrp="1"/>
+          </p:cNvSpPr>
+          <p:nvPr>
+            <p:ph type="body" idx="1"/>
+          </p:nvPr>
+        </p:nvSpPr>
+        <p:spPr/>
+        <p:txBody>
+          <a:bodyPr/>
+          <a:lstStyle/>
+          <a:p>
+            <a:r>
+              <a:rPr lang="en-US" dirty="0"/>
+              <a:t/>
+            </a:r>
+            <a:endParaRPr lang="en-US" dirty="0"/>
+          </a:p>
+        </p:txBody>
+      </p:sp>
+      <p:sp>
+        <p:nvSpPr>
+          <p:cNvPr id="4" name="Slide Number Placeholder 3"/>
+          <p:cNvSpPr>
+            <a:spLocks noGrp="1"/>
+          </p:cNvSpPr>
+          <p:nvPr>
+            <p:ph type="sldNum" sz="quarter" idx="10"/>
+          </p:nvPr>
+        </p:nvSpPr>
+        <p:spPr/>
+        <p:txBody>
+          <a:bodyPr/>
+          <a:lstStyle/>
+          <a:p>
+            <a:fld id="{F7021451-1387-4CA6-816F-3879F97B5CBC}" type="slidenum">
+              <a:rPr lang="en-US"/>
+              <a:t>41</a:t>
+            </a:fld>
+            <a:endParaRPr lang="en-US"/>
+          </a:p>
+        </p:txBody>
+      </p:sp>
+    </p:spTree>
+    <p:extLst>
+      <p:ext uri="{BB962C8B-B14F-4D97-AF65-F5344CB8AC3E}">
+        <p14:creationId xmlns:p14="http://schemas.microsoft.com/office/powerpoint/2010/main" val="1024086991"/>
+      </p:ext>
+    </p:extLst>
+  </p:cSld>
+  <p:clrMapOvr>
+    <a:masterClrMapping/>
+  </p:clrMapOvr>
+</p:notes>
+</file>
+
+<file path=ppt/notesSlides/notesSlide42.xml><?xml version="1.0" encoding="utf-8"?>
+<p:notes xmlns:a="http://schemas.openxmlformats.org/drawingml/2006/main" xmlns:r="http://schemas.openxmlformats.org/officeDocument/2006/relationships" xmlns:p="http://schemas.openxmlformats.org/presentationml/2006/main">
+  <p:cSld>
+    <p:spTree>
+      <p:nvGrpSpPr>
+        <p:cNvPr id="1" name=""/>
+        <p:cNvGrpSpPr/>
+        <p:nvPr/>
+      </p:nvGrpSpPr>
+      <p:grpSpPr>
+        <a:xfrm>
+          <a:off x="0" y="0"/>
+          <a:ext cx="0" cy="0"/>
+          <a:chOff x="0" y="0"/>
+          <a:chExt cx="0" cy="0"/>
+        </a:xfrm>
+      </p:grpSpPr>
+      <p:sp>
+        <p:nvSpPr>
+          <p:cNvPr id="2" name="Slide Image Placeholder 1"/>
+          <p:cNvSpPr>
+            <a:spLocks noGrp="1" noRot="1" noChangeAspect="1"/>
+          </p:cNvSpPr>
+          <p:nvPr>
+            <p:ph type="sldImg"/>
+          </p:nvPr>
+        </p:nvSpPr>
+        <p:spPr/>
+      </p:sp>
+      <p:sp>
+        <p:nvSpPr>
+          <p:cNvPr id="3" name="Notes Placeholder 2"/>
+          <p:cNvSpPr>
+            <a:spLocks noGrp="1"/>
+          </p:cNvSpPr>
+          <p:nvPr>
+            <p:ph type="body" idx="1"/>
+          </p:nvPr>
+        </p:nvSpPr>
+        <p:spPr/>
+        <p:txBody>
+          <a:bodyPr/>
+          <a:lstStyle/>
+          <a:p>
+            <a:r>
+              <a:rPr lang="en-US" dirty="0"/>
+              <a:t/>
+            </a:r>
+            <a:endParaRPr lang="en-US" dirty="0"/>
+          </a:p>
+        </p:txBody>
+      </p:sp>
+      <p:sp>
+        <p:nvSpPr>
+          <p:cNvPr id="4" name="Slide Number Placeholder 3"/>
+          <p:cNvSpPr>
+            <a:spLocks noGrp="1"/>
+          </p:cNvSpPr>
+          <p:nvPr>
+            <p:ph type="sldNum" sz="quarter" idx="10"/>
+          </p:nvPr>
+        </p:nvSpPr>
+        <p:spPr/>
+        <p:txBody>
+          <a:bodyPr/>
+          <a:lstStyle/>
+          <a:p>
+            <a:fld id="{F7021451-1387-4CA6-816F-3879F97B5CBC}" type="slidenum">
+              <a:rPr lang="en-US"/>
+              <a:t>42</a:t>
+            </a:fld>
+            <a:endParaRPr lang="en-US"/>
+          </a:p>
+        </p:txBody>
+      </p:sp>
+    </p:spTree>
+    <p:extLst>
+      <p:ext uri="{BB962C8B-B14F-4D97-AF65-F5344CB8AC3E}">
+        <p14:creationId xmlns:p14="http://schemas.microsoft.com/office/powerpoint/2010/main" val="1024086991"/>
+      </p:ext>
+    </p:extLst>
+  </p:cSld>
+  <p:clrMapOvr>
+    <a:masterClrMapping/>
+  </p:clrMapOvr>
+</p:notes>
+</file>
+
+<file path=ppt/notesSlides/notesSlide43.xml><?xml version="1.0" encoding="utf-8"?>
+<p:notes xmlns:a="http://schemas.openxmlformats.org/drawingml/2006/main" xmlns:r="http://schemas.openxmlformats.org/officeDocument/2006/relationships" xmlns:p="http://schemas.openxmlformats.org/presentationml/2006/main">
+  <p:cSld>
+    <p:spTree>
+      <p:nvGrpSpPr>
+        <p:cNvPr id="1" name=""/>
+        <p:cNvGrpSpPr/>
+        <p:nvPr/>
+      </p:nvGrpSpPr>
+      <p:grpSpPr>
+        <a:xfrm>
+          <a:off x="0" y="0"/>
+          <a:ext cx="0" cy="0"/>
+          <a:chOff x="0" y="0"/>
+          <a:chExt cx="0" cy="0"/>
+        </a:xfrm>
+      </p:grpSpPr>
+      <p:sp>
+        <p:nvSpPr>
+          <p:cNvPr id="2" name="Slide Image Placeholder 1"/>
+          <p:cNvSpPr>
+            <a:spLocks noGrp="1" noRot="1" noChangeAspect="1"/>
+          </p:cNvSpPr>
+          <p:nvPr>
+            <p:ph type="sldImg"/>
+          </p:nvPr>
+        </p:nvSpPr>
+        <p:spPr/>
+      </p:sp>
+      <p:sp>
+        <p:nvSpPr>
+          <p:cNvPr id="3" name="Notes Placeholder 2"/>
+          <p:cNvSpPr>
+            <a:spLocks noGrp="1"/>
+          </p:cNvSpPr>
+          <p:nvPr>
+            <p:ph type="body" idx="1"/>
+          </p:nvPr>
+        </p:nvSpPr>
+        <p:spPr/>
+        <p:txBody>
+          <a:bodyPr/>
+          <a:lstStyle/>
+          <a:p>
+            <a:r>
+              <a:rPr lang="en-US" dirty="0"/>
+              <a:t/>
+            </a:r>
+            <a:endParaRPr lang="en-US" dirty="0"/>
+          </a:p>
+        </p:txBody>
+      </p:sp>
+      <p:sp>
+        <p:nvSpPr>
+          <p:cNvPr id="4" name="Slide Number Placeholder 3"/>
+          <p:cNvSpPr>
+            <a:spLocks noGrp="1"/>
+          </p:cNvSpPr>
+          <p:nvPr>
+            <p:ph type="sldNum" sz="quarter" idx="10"/>
+          </p:nvPr>
+        </p:nvSpPr>
+        <p:spPr/>
+        <p:txBody>
+          <a:bodyPr/>
+          <a:lstStyle/>
+          <a:p>
+            <a:fld id="{F7021451-1387-4CA6-816F-3879F97B5CBC}" type="slidenum">
+              <a:rPr lang="en-US"/>
+              <a:t>43</a:t>
+            </a:fld>
+            <a:endParaRPr lang="en-US"/>
+          </a:p>
+        </p:txBody>
+      </p:sp>
+    </p:spTree>
+    <p:extLst>
+      <p:ext uri="{BB962C8B-B14F-4D97-AF65-F5344CB8AC3E}">
+        <p14:creationId xmlns:p14="http://schemas.microsoft.com/office/powerpoint/2010/main" val="1024086991"/>
+      </p:ext>
+    </p:extLst>
+  </p:cSld>
+  <p:clrMapOvr>
+    <a:masterClrMapping/>
+  </p:clrMapOvr>
+</p:notes>
+</file>
+
+<file path=ppt/notesSlides/notesSlide44.xml><?xml version="1.0" encoding="utf-8"?>
+<p:notes xmlns:a="http://schemas.openxmlformats.org/drawingml/2006/main" xmlns:r="http://schemas.openxmlformats.org/officeDocument/2006/relationships" xmlns:p="http://schemas.openxmlformats.org/presentationml/2006/main">
+  <p:cSld>
+    <p:spTree>
+      <p:nvGrpSpPr>
+        <p:cNvPr id="1" name=""/>
+        <p:cNvGrpSpPr/>
+        <p:nvPr/>
+      </p:nvGrpSpPr>
+      <p:grpSpPr>
+        <a:xfrm>
+          <a:off x="0" y="0"/>
+          <a:ext cx="0" cy="0"/>
+          <a:chOff x="0" y="0"/>
+          <a:chExt cx="0" cy="0"/>
+        </a:xfrm>
+      </p:grpSpPr>
+      <p:sp>
+        <p:nvSpPr>
+          <p:cNvPr id="2" name="Slide Image Placeholder 1"/>
+          <p:cNvSpPr>
+            <a:spLocks noGrp="1" noRot="1" noChangeAspect="1"/>
+          </p:cNvSpPr>
+          <p:nvPr>
+            <p:ph type="sldImg"/>
+          </p:nvPr>
+        </p:nvSpPr>
+        <p:spPr/>
+      </p:sp>
+      <p:sp>
+        <p:nvSpPr>
+          <p:cNvPr id="3" name="Notes Placeholder 2"/>
+          <p:cNvSpPr>
+            <a:spLocks noGrp="1"/>
+          </p:cNvSpPr>
+          <p:nvPr>
+            <p:ph type="body" idx="1"/>
+          </p:nvPr>
+        </p:nvSpPr>
+        <p:spPr/>
+        <p:txBody>
+          <a:bodyPr/>
+          <a:lstStyle/>
+          <a:p>
+            <a:r>
+              <a:rPr lang="en-US" dirty="0"/>
+              <a:t/>
+            </a:r>
+            <a:endParaRPr lang="en-US" dirty="0"/>
+          </a:p>
+        </p:txBody>
+      </p:sp>
+      <p:sp>
+        <p:nvSpPr>
+          <p:cNvPr id="4" name="Slide Number Placeholder 3"/>
+          <p:cNvSpPr>
+            <a:spLocks noGrp="1"/>
+          </p:cNvSpPr>
+          <p:nvPr>
+            <p:ph type="sldNum" sz="quarter" idx="10"/>
+          </p:nvPr>
+        </p:nvSpPr>
+        <p:spPr/>
+        <p:txBody>
+          <a:bodyPr/>
+          <a:lstStyle/>
+          <a:p>
+            <a:fld id="{F7021451-1387-4CA6-816F-3879F97B5CBC}" type="slidenum">
+              <a:rPr lang="en-US"/>
+              <a:t>44</a:t>
             </a:fld>
             <a:endParaRPr lang="en-US"/>
           </a:p>
@@ -6645,7 +7090,7 @@
                 <a:ea typeface="Arial" pitchFamily="34" charset="-122"/>
                 <a:cs typeface="Arial" pitchFamily="34" charset="-120"/>
               </a:rPr>
-              <a:t>Next.js</a:t>
+              <a:t>라우팅 (Routing)</a:t>
             </a:r>
             <a:endParaRPr lang="en-US" sz="4000" dirty="0"/>
           </a:p>
@@ -6710,7 +7155,7 @@
                 <a:ea typeface="Arial" pitchFamily="34" charset="-122"/>
                 <a:cs typeface="Arial" pitchFamily="34" charset="-120"/>
               </a:rPr>
-              <a:t>리액트(React) 기반으로 웹사이트를 쉽게 만들 수 있게 도와주는 프레임워크예요. 이 프로젝트의 웹 앱과 관리자 앱이 Next.js로 만들어졌어요.</a:t>
+              <a:t>웹사이트 주소(URL 경로)에 따라 어떤 화면을 보여줄지 정하는 것이에요. 예를 들어 '/login'으로 가면 로그인 화면이, '/profile/철수'로 가면 철수님 프로필 화면이 나오는 식이에요.</a:t>
             </a:r>
             <a:endParaRPr lang="en-US" sz="2200" dirty="0"/>
           </a:p>
@@ -6770,7 +7215,7 @@
                   </a:extLst>
                 </a:hlinkClick>
               </a:rPr>
-              <a:t>https://nextjs.org</a:t>
+              <a:t>https://nextjs.org/docs/app/building-your-application/routing</a:t>
             </a:r>
             <a:endParaRPr lang="en-US" sz="1500" dirty="0"/>
           </a:p>
@@ -6919,7 +7364,7 @@
                 <a:ea typeface="Arial" pitchFamily="34" charset="-122"/>
                 <a:cs typeface="Arial" pitchFamily="34" charset="-120"/>
               </a:rPr>
-              <a:t>Vercel</a:t>
+              <a:t>React</a:t>
             </a:r>
             <a:endParaRPr lang="en-US" sz="4000" dirty="0"/>
           </a:p>
@@ -6984,7 +7429,7 @@
                 <a:ea typeface="Arial" pitchFamily="34" charset="-122"/>
                 <a:cs typeface="Arial" pitchFamily="34" charset="-120"/>
               </a:rPr>
-              <a:t>Next.js를 만든 회사이고, Next.js로 만든 웹사이트를 인터넷에 올려서 서비스할 수 있게 해주는 배포 플랫폼이에요.</a:t>
+              <a:t>메타(페이스북)가 만든 라이브러리로, 화면을 작은 조각(컴포넌트)으로 나눠서 레고처럼 조립할 수 있게 해줘요. Next.js는 이 React 위에 만들어졌어요.</a:t>
             </a:r>
             <a:endParaRPr lang="en-US" sz="2200" dirty="0"/>
           </a:p>
@@ -7044,7 +7489,7 @@
                   </a:extLst>
                 </a:hlinkClick>
               </a:rPr>
-              <a:t>https://vercel.com</a:t>
+              <a:t>https://react.dev</a:t>
             </a:r>
             <a:endParaRPr lang="en-US" sz="1500" dirty="0"/>
           </a:p>
@@ -7193,7 +7638,7 @@
                 <a:ea typeface="Arial" pitchFamily="34" charset="-122"/>
                 <a:cs typeface="Arial" pitchFamily="34" charset="-120"/>
               </a:rPr>
-              <a:t>Supabase</a:t>
+              <a:t>Next.js</a:t>
             </a:r>
             <a:endParaRPr lang="en-US" sz="4000" dirty="0"/>
           </a:p>
@@ -7258,7 +7703,7 @@
                 <a:ea typeface="Arial" pitchFamily="34" charset="-122"/>
                 <a:cs typeface="Arial" pitchFamily="34" charset="-120"/>
               </a:rPr>
-              <a:t>데이터베이스, 회원가입/로그인, API를 한 번에 제공해주는 서비스예요. 직접 서버를 만들지 않아도 백엔드를 빠르게 갖출 수 있어요. 이 프로젝트의 실제 데이터베이스이자 로그인 시스템이에요.</a:t>
+              <a:t>React 기반으로 웹사이트를 쉽게 만들 수 있게 도와주는 프레임워크예요. 이 프로젝트의 웹 앱과 관리자 앱이 Next.js로 만들어졌어요.</a:t>
             </a:r>
             <a:endParaRPr lang="en-US" sz="2200" dirty="0"/>
           </a:p>
@@ -7318,7 +7763,7 @@
                   </a:extLst>
                 </a:hlinkClick>
               </a:rPr>
-              <a:t>https://supabase.com</a:t>
+              <a:t>https://nextjs.org</a:t>
             </a:r>
             <a:endParaRPr lang="en-US" sz="1500" dirty="0"/>
           </a:p>
@@ -7745,7 +8190,7 @@
                 <a:ea typeface="Arial" pitchFamily="34" charset="-122"/>
                 <a:cs typeface="Arial" pitchFamily="34" charset="-120"/>
               </a:rPr>
-              <a:t>RLS (Row Level Security)</a:t>
+              <a:t>서버 컴포넌트 / 클라이언트 컴포넌트</a:t>
             </a:r>
             <a:endParaRPr lang="en-US" sz="4000" dirty="0"/>
           </a:p>
@@ -7810,7 +8255,7 @@
                 <a:ea typeface="Arial" pitchFamily="34" charset="-122"/>
                 <a:cs typeface="Arial" pitchFamily="34" charset="-120"/>
               </a:rPr>
-              <a:t>데이터베이스 안에서 '누가 어떤 데이터를 보고 고칠 수 있는지'를 강제하는 보안 규칙이에요. 예: '내 글은 나만 지울 수 있다'를 DB가 직접 강제함.</a:t>
+              <a:t>Next.js에서 화면 조각(컴포넌트)을 만드는 두 가지 방식이에요. 서버 컴포넌트는 서버가 미리 완성해서 보내주는 화면(더 빠르고 검색엔진에도 잘 보임), 클라이언트 컴포넌트는 브라우저에서 직접 동작하는 화면(버튼 클릭 같은 상호작용이 필요할 때)이에요.</a:t>
             </a:r>
             <a:endParaRPr lang="en-US" sz="2200" dirty="0"/>
           </a:p>
@@ -7870,7 +8315,7 @@
                   </a:extLst>
                 </a:hlinkClick>
               </a:rPr>
-              <a:t>https://supabase.com/docs/guides/database/postgres/row-level-security</a:t>
+              <a:t>https://nextjs.org/docs/app/building-your-application/rendering/server-components</a:t>
             </a:r>
             <a:endParaRPr lang="en-US" sz="1500" dirty="0"/>
           </a:p>
@@ -8019,7 +8464,7 @@
                 <a:ea typeface="Arial" pitchFamily="34" charset="-122"/>
                 <a:cs typeface="Arial" pitchFamily="34" charset="-120"/>
               </a:rPr>
-              <a:t>Flutter</a:t>
+              <a:t>미들웨어 (Middleware) / 프록시</a:t>
             </a:r>
             <a:endParaRPr lang="en-US" sz="4000" dirty="0"/>
           </a:p>
@@ -8084,7 +8529,7 @@
                 <a:ea typeface="Arial" pitchFamily="34" charset="-122"/>
                 <a:cs typeface="Arial" pitchFamily="34" charset="-120"/>
               </a:rPr>
-              <a:t>구글이 만든 도구로, 코드 하나로 아이폰, 안드로이드, 맥, 윈도우용 앱을 동시에 만들 수 있게 해줘요.</a:t>
+              <a:t>요청이 실제 화면에 도착하기 전에 한 번 거쳐 가는 중간 단계예요. 로그인했는지 확인하고, 안 됐으면 로그인 페이지로 돌려보내는 것 같은 일을 여기서 해요.</a:t>
             </a:r>
             <a:endParaRPr lang="en-US" sz="2200" dirty="0"/>
           </a:p>
@@ -8144,7 +8589,7 @@
                   </a:extLst>
                 </a:hlinkClick>
               </a:rPr>
-              <a:t>https://flutter.dev</a:t>
+              <a:t>https://nextjs.org/docs/app/building-your-application/routing/middleware</a:t>
             </a:r>
             <a:endParaRPr lang="en-US" sz="1500" dirty="0"/>
           </a:p>
@@ -8293,7 +8738,7 @@
                 <a:ea typeface="Arial" pitchFamily="34" charset="-122"/>
                 <a:cs typeface="Arial" pitchFamily="34" charset="-120"/>
               </a:rPr>
-              <a:t>npm</a:t>
+              <a:t>포트 (Port)</a:t>
             </a:r>
             <a:endParaRPr lang="en-US" sz="4000" dirty="0"/>
           </a:p>
@@ -8358,7 +8803,7 @@
                 <a:ea typeface="Arial" pitchFamily="34" charset="-122"/>
                 <a:cs typeface="Arial" pitchFamily="34" charset="-120"/>
               </a:rPr>
-              <a:t>자바스크립트 프로젝트에 필요한 외부 코드(라이브러리)를 설치하고 관리해주는 가장 기본적인 도구예요.</a:t>
+              <a:t>한 대의 컴퓨터 안에서 여러 서버(프로그램)를 구분하기 위한 번호예요. localhost:3721은 '내 컴퓨터의 3721번 문으로 들어가기'와 같은 뜻이에요.</a:t>
             </a:r>
             <a:endParaRPr lang="en-US" sz="2200" dirty="0"/>
           </a:p>
@@ -8418,7 +8863,7 @@
                   </a:extLst>
                 </a:hlinkClick>
               </a:rPr>
-              <a:t>https://www.npmjs.com</a:t>
+              <a:t>https://www.cloudflare.com/learning/network-layer/what-is-a-computer-port/</a:t>
             </a:r>
             <a:endParaRPr lang="en-US" sz="1500" dirty="0"/>
           </a:p>
@@ -8567,7 +9012,7 @@
                 <a:ea typeface="Arial" pitchFamily="34" charset="-122"/>
                 <a:cs typeface="Arial" pitchFamily="34" charset="-120"/>
               </a:rPr>
-              <a:t>pnpm</a:t>
+              <a:t>Vercel</a:t>
             </a:r>
             <a:endParaRPr lang="en-US" sz="4000" dirty="0"/>
           </a:p>
@@ -8632,7 +9077,7 @@
                 <a:ea typeface="Arial" pitchFamily="34" charset="-122"/>
                 <a:cs typeface="Arial" pitchFamily="34" charset="-120"/>
               </a:rPr>
-              <a:t>npm과 같은 역할을 하지만 더 빠르고 디스크 공간을 아껴주는 패키지 매니저예요. 이 프로젝트는 pnpm을 사용해요.</a:t>
+              <a:t>Next.js를 만든 회사이고, Next.js로 만든 웹사이트를 인터넷에 올려서 서비스할 수 있게 해주는 배포 플랫폼이에요.</a:t>
             </a:r>
             <a:endParaRPr lang="en-US" sz="2200" dirty="0"/>
           </a:p>
@@ -8692,7 +9137,7 @@
                   </a:extLst>
                 </a:hlinkClick>
               </a:rPr>
-              <a:t>https://pnpm.io</a:t>
+              <a:t>https://vercel.com</a:t>
             </a:r>
             <a:endParaRPr lang="en-US" sz="1500" dirty="0"/>
           </a:p>
@@ -8841,7 +9286,7 @@
                 <a:ea typeface="Arial" pitchFamily="34" charset="-122"/>
                 <a:cs typeface="Arial" pitchFamily="34" charset="-120"/>
               </a:rPr>
-              <a:t>Claude Code</a:t>
+              <a:t>Supabase</a:t>
             </a:r>
             <a:endParaRPr lang="en-US" sz="4000" dirty="0"/>
           </a:p>
@@ -8906,7 +9351,7 @@
                 <a:ea typeface="Arial" pitchFamily="34" charset="-122"/>
                 <a:cs typeface="Arial" pitchFamily="34" charset="-120"/>
               </a:rPr>
-              <a:t>터미널에서 자연어로 대화하면서 코드를 대신 읽고, 쓰고, 실행까지 해주는 AI 코딩 도구예요. 이 프로젝트도 전부 Claude Code와 대화하면서 만들어졌어요.</a:t>
+              <a:t>데이터베이스, 회원가입/로그인, API를 한 번에 제공해주는 서비스예요. 직접 서버를 만들지 않아도 백엔드를 빠르게 갖출 수 있어요. 이 프로젝트의 실제 데이터베이스이자 로그인 시스템이에요.</a:t>
             </a:r>
             <a:endParaRPr lang="en-US" sz="2200" dirty="0"/>
           </a:p>
@@ -8966,7 +9411,7 @@
                   </a:extLst>
                 </a:hlinkClick>
               </a:rPr>
-              <a:t>https://claude.com/claude-code</a:t>
+              <a:t>https://supabase.com</a:t>
             </a:r>
             <a:endParaRPr lang="en-US" sz="1500" dirty="0"/>
           </a:p>
@@ -9051,8 +9496,8 @@
         </p:nvSpPr>
         <p:spPr>
           <a:xfrm>
-            <a:off x="548640" y="365760"/>
-            <a:ext cx="11064240" cy="822960"/>
+            <a:off x="548640" y="457200"/>
+            <a:ext cx="11064240" cy="457200"/>
           </a:xfrm>
           <a:prstGeom prst="rect">
             <a:avLst/>
@@ -9068,17 +9513,17 @@
               <a:buNone/>
             </a:pPr>
             <a:r>
-              <a:rPr lang="en-US" sz="3000" b="1" dirty="0">
-                <a:solidFill>
-                  <a:srgbClr val="F2F2F0"/>
-                </a:solidFill>
-                <a:latin typeface="Arial" pitchFamily="34" charset="0"/>
-                <a:ea typeface="Arial" pitchFamily="34" charset="-122"/>
-                <a:cs typeface="Arial" pitchFamily="34" charset="-120"/>
-              </a:rPr>
-              <a:t>프로젝트 개요</a:t>
-            </a:r>
-            <a:endParaRPr lang="en-US" sz="3000" dirty="0"/>
+              <a:rPr lang="en-US" sz="1400" dirty="0">
+                <a:solidFill>
+                  <a:srgbClr val="98999D"/>
+                </a:solidFill>
+                <a:latin typeface="Arial" pitchFamily="34" charset="0"/>
+                <a:ea typeface="Arial" pitchFamily="34" charset="-122"/>
+                <a:cs typeface="Arial" pitchFamily="34" charset="-120"/>
+              </a:rPr>
+              <a:t>용어 설명</a:t>
+            </a:r>
+            <a:endParaRPr lang="en-US" sz="1400" dirty="0"/>
           </a:p>
         </p:txBody>
       </p:sp>
@@ -9090,8 +9535,8 @@
         </p:nvSpPr>
         <p:spPr>
           <a:xfrm>
-            <a:off x="548640" y="1005840"/>
-            <a:ext cx="11064240" cy="457200"/>
+            <a:off x="548640" y="868680"/>
+            <a:ext cx="11064240" cy="1005840"/>
           </a:xfrm>
           <a:prstGeom prst="rect">
             <a:avLst/>
@@ -9107,17 +9552,17 @@
               <a:buNone/>
             </a:pPr>
             <a:r>
-              <a:rPr lang="en-US" sz="1600" dirty="0">
-                <a:solidFill>
-                  <a:srgbClr val="98999D"/>
-                </a:solidFill>
-                <a:latin typeface="Arial" pitchFamily="34" charset="0"/>
-                <a:ea typeface="Arial" pitchFamily="34" charset="-122"/>
-                <a:cs typeface="Arial" pitchFamily="34" charset="-120"/>
-              </a:rPr>
-              <a:t>무엇을, 왜 만들고 있는가</a:t>
-            </a:r>
-            <a:endParaRPr lang="en-US" sz="1600" dirty="0"/>
+              <a:rPr lang="en-US" sz="4000" b="1" dirty="0">
+                <a:solidFill>
+                  <a:srgbClr val="F2F2F0"/>
+                </a:solidFill>
+                <a:latin typeface="Arial" pitchFamily="34" charset="0"/>
+                <a:ea typeface="Arial" pitchFamily="34" charset="-122"/>
+                <a:cs typeface="Arial" pitchFamily="34" charset="-120"/>
+              </a:rPr>
+              <a:t>RLS (Row Level Security)</a:t>
+            </a:r>
+            <a:endParaRPr lang="en-US" sz="4000" dirty="0"/>
           </a:p>
         </p:txBody>
       </p:sp>
@@ -9129,7 +9574,7 @@
         </p:nvSpPr>
         <p:spPr>
           <a:xfrm>
-            <a:off x="548640" y="1508760"/>
+            <a:off x="548640" y="1965960"/>
             <a:ext cx="11064240" cy="0"/>
           </a:xfrm>
           <a:prstGeom prst="line">
@@ -9152,8 +9597,8 @@
         </p:nvSpPr>
         <p:spPr>
           <a:xfrm>
-            <a:off x="548640" y="1828800"/>
-            <a:ext cx="11064240" cy="4572000"/>
+            <a:off x="548640" y="2286000"/>
+            <a:ext cx="11064240" cy="3108960"/>
           </a:xfrm>
           <a:prstGeom prst="rect">
             <a:avLst/>
@@ -9165,109 +9610,84 @@
           <a:bodyPr wrap="square" rtlCol="0" anchor="t"/>
           <a:lstStyle/>
           <a:p>
-            <a:pPr marL="342900" indent="-342900">
+            <a:pPr indent="0" marL="0">
               <a:lnSpc>
-                <a:spcPct val="135000"/>
+                <a:spcPct val="140000"/>
               </a:lnSpc>
-              <a:buSzPct val="100000"/>
-              <a:buChar char="•"/>
-            </a:pPr>
-            <a:r>
-              <a:rPr lang="en-US" sz="1800" dirty="0">
-                <a:solidFill>
-                  <a:srgbClr val="F2F2F0"/>
-                </a:solidFill>
-                <a:latin typeface="Arial" pitchFamily="34" charset="0"/>
-                <a:ea typeface="Arial" pitchFamily="34" charset="-122"/>
-                <a:cs typeface="Arial" pitchFamily="34" charset="-120"/>
-              </a:rPr>
-              <a:t>Threads(스레드)를 벤치마킹한 소셜 앱 — 짧은 글 피드, 좋아요, 팔로우</a:t>
-            </a:r>
-            <a:endParaRPr lang="en-US" sz="1800" dirty="0"/>
-          </a:p>
-          <a:p>
-            <a:pPr marL="342900" indent="-342900">
-              <a:lnSpc>
-                <a:spcPct val="135000"/>
-              </a:lnSpc>
-              <a:buSzPct val="100000"/>
-              <a:buChar char="•"/>
-            </a:pPr>
-            <a:r>
-              <a:rPr lang="en-US" sz="1800" dirty="0">
-                <a:solidFill>
-                  <a:srgbClr val="F2F2F0"/>
-                </a:solidFill>
-                <a:latin typeface="Arial" pitchFamily="34" charset="0"/>
-                <a:ea typeface="Arial" pitchFamily="34" charset="-122"/>
-                <a:cs typeface="Arial" pitchFamily="34" charset="-120"/>
-              </a:rPr>
-              <a:t>백엔드는 Supabase 하나로 통일: Postgres + Auth + RLS + (추후) Storage/Realtime</a:t>
-            </a:r>
-            <a:endParaRPr lang="en-US" sz="1800" dirty="0"/>
-          </a:p>
-          <a:p>
-            <a:pPr marL="342900" indent="-342900">
-              <a:lnSpc>
-                <a:spcPct val="135000"/>
-              </a:lnSpc>
-              <a:buSzPct val="100000"/>
-              <a:buChar char="•"/>
-            </a:pPr>
-            <a:r>
-              <a:rPr lang="en-US" sz="1800" dirty="0">
-                <a:solidFill>
-                  <a:srgbClr val="F2F2F0"/>
-                </a:solidFill>
-                <a:latin typeface="Arial" pitchFamily="34" charset="0"/>
-                <a:ea typeface="Arial" pitchFamily="34" charset="-122"/>
-                <a:cs typeface="Arial" pitchFamily="34" charset="-120"/>
-              </a:rPr>
-              <a:t>클라이언트는 세 개: 웹(Next.js 16), 네이티브 앱(Flutter), 관리자 웹(Next.js)</a:t>
-            </a:r>
-            <a:endParaRPr lang="en-US" sz="1800" dirty="0"/>
-          </a:p>
-          <a:p>
-            <a:pPr marL="342900" indent="-342900">
-              <a:lnSpc>
-                <a:spcPct val="135000"/>
-              </a:lnSpc>
-              <a:buSzPct val="100000"/>
-              <a:buChar char="•"/>
-            </a:pPr>
-            <a:r>
-              <a:rPr lang="en-US" sz="1800" dirty="0">
-                <a:solidFill>
-                  <a:srgbClr val="F2F2F0"/>
-                </a:solidFill>
-                <a:latin typeface="Arial" pitchFamily="34" charset="0"/>
-                <a:ea typeface="Arial" pitchFamily="34" charset="-122"/>
-                <a:cs typeface="Arial" pitchFamily="34" charset="-120"/>
-              </a:rPr>
-              <a:t>Flutter는 macOS/Windows/Android/iOS/Web까지 한 코드베이스로 커버</a:t>
-            </a:r>
-            <a:endParaRPr lang="en-US" sz="1800" dirty="0"/>
-          </a:p>
-          <a:p>
-            <a:pPr marL="342900" indent="-342900">
-              <a:lnSpc>
-                <a:spcPct val="135000"/>
-              </a:lnSpc>
-              <a:buSzPct val="100000"/>
-              <a:buChar char="•"/>
-            </a:pPr>
-            <a:r>
-              <a:rPr lang="en-US" sz="1800" dirty="0">
-                <a:solidFill>
-                  <a:srgbClr val="F2F2F0"/>
-                </a:solidFill>
-                <a:latin typeface="Arial" pitchFamily="34" charset="0"/>
-                <a:ea typeface="Arial" pitchFamily="34" charset="-122"/>
-                <a:cs typeface="Arial" pitchFamily="34" charset="-120"/>
-              </a:rPr>
-              <a:t>리포지토리 하나 안에서 각 앱을 폴더로 분리하는 모노리포 구조</a:t>
-            </a:r>
-            <a:endParaRPr lang="en-US" sz="1800" dirty="0"/>
+              <a:buNone/>
+            </a:pPr>
+            <a:r>
+              <a:rPr lang="en-US" sz="2200" dirty="0">
+                <a:solidFill>
+                  <a:srgbClr val="F2F2F0"/>
+                </a:solidFill>
+                <a:latin typeface="Arial" pitchFamily="34" charset="0"/>
+                <a:ea typeface="Arial" pitchFamily="34" charset="-122"/>
+                <a:cs typeface="Arial" pitchFamily="34" charset="-120"/>
+              </a:rPr>
+              <a:t>데이터베이스 안에서 '누가 어떤 데이터를 보고 고칠 수 있는지'를 강제하는 보안 규칙이에요. 예: '내 글은 나만 지울 수 있다'를 DB가 직접 강제함.</a:t>
+            </a:r>
+            <a:endParaRPr lang="en-US" sz="2200" dirty="0"/>
+          </a:p>
+        </p:txBody>
+      </p:sp>
+      <p:sp>
+        <p:nvSpPr>
+          <p:cNvPr id="7" name="Text 5"/>
+          <p:cNvSpPr/>
+          <p:nvPr/>
+        </p:nvSpPr>
+        <p:spPr>
+          <a:xfrm>
+            <a:off x="548640" y="5897880"/>
+            <a:ext cx="11064240" cy="365760"/>
+          </a:xfrm>
+          <a:prstGeom prst="rect">
+            <a:avLst/>
+          </a:prstGeom>
+          <a:noFill/>
+          <a:ln/>
+        </p:spPr>
+        <p:txBody>
+          <a:bodyPr wrap="square" rtlCol="0" anchor="ctr"/>
+          <a:lstStyle/>
+          <a:p>
+            <a:pPr indent="0" marL="0">
+              <a:buNone/>
+            </a:pPr>
+            <a:r>
+              <a:rPr lang="en-US" sz="1500" dirty="0">
+                <a:solidFill>
+                  <a:srgbClr val="98999D"/>
+                </a:solidFill>
+                <a:latin typeface="Arial" pitchFamily="34" charset="0"/>
+                <a:ea typeface="Arial" pitchFamily="34" charset="-122"/>
+                <a:cs typeface="Arial" pitchFamily="34" charset="-120"/>
+              </a:rPr>
+              <a:t>자세히 보기: </a:t>
+            </a:r>
+            <a:pPr indent="0" marL="0">
+              <a:buNone/>
+            </a:pPr>
+            <a:r>
+              <a:rPr lang="en-US" sz="1500" u="sng" dirty="0">
+                <a:solidFill>
+                  <a:srgbClr val="5B8DEF"/>
+                </a:solidFill>
+                <a:latin typeface="Arial" pitchFamily="34" charset="0"/>
+                <a:ea typeface="Arial" pitchFamily="34" charset="-122"/>
+                <a:cs typeface="Arial" pitchFamily="34" charset="-120"/>
+                <a:hlinkClick r:id="rId1" invalidUrl="" action="" tgtFrame="" tooltip="" history="1" highlightClick="0" endSnd="0">
+                  <a:extLst>
+                    <a:ext uri="{A12FA001-AC4F-418D-AE19-62706E023703}">
+                      <ahyp:hlinkClr xmlns:ahyp="http://schemas.microsoft.com/office/drawing/2018/hyperlinkcolor" val="tx"/>
+                    </a:ext>
+                  </a:extLst>
+                </a:hlinkClick>
+              </a:rPr>
+              <a:t>https://supabase.com/docs/guides/database/postgres/row-level-security</a:t>
+            </a:r>
+            <a:endParaRPr lang="en-US" sz="1500" dirty="0"/>
           </a:p>
         </p:txBody>
       </p:sp>
@@ -9350,8 +9770,8 @@
         </p:nvSpPr>
         <p:spPr>
           <a:xfrm>
-            <a:off x="548640" y="365760"/>
-            <a:ext cx="11064240" cy="822960"/>
+            <a:off x="548640" y="457200"/>
+            <a:ext cx="11064240" cy="457200"/>
           </a:xfrm>
           <a:prstGeom prst="rect">
             <a:avLst/>
@@ -9367,17 +9787,17 @@
               <a:buNone/>
             </a:pPr>
             <a:r>
-              <a:rPr lang="en-US" sz="3000" b="1" dirty="0">
-                <a:solidFill>
-                  <a:srgbClr val="F2F2F0"/>
-                </a:solidFill>
-                <a:latin typeface="Arial" pitchFamily="34" charset="0"/>
-                <a:ea typeface="Arial" pitchFamily="34" charset="-122"/>
-                <a:cs typeface="Arial" pitchFamily="34" charset="-120"/>
-              </a:rPr>
-              <a:t>데이터 모델</a:t>
-            </a:r>
-            <a:endParaRPr lang="en-US" sz="3000" dirty="0"/>
+              <a:rPr lang="en-US" sz="1400" dirty="0">
+                <a:solidFill>
+                  <a:srgbClr val="98999D"/>
+                </a:solidFill>
+                <a:latin typeface="Arial" pitchFamily="34" charset="0"/>
+                <a:ea typeface="Arial" pitchFamily="34" charset="-122"/>
+                <a:cs typeface="Arial" pitchFamily="34" charset="-120"/>
+              </a:rPr>
+              <a:t>용어 설명</a:t>
+            </a:r>
+            <a:endParaRPr lang="en-US" sz="1400" dirty="0"/>
           </a:p>
         </p:txBody>
       </p:sp>
@@ -9389,8 +9809,8 @@
         </p:nvSpPr>
         <p:spPr>
           <a:xfrm>
-            <a:off x="548640" y="1005840"/>
-            <a:ext cx="11064240" cy="457200"/>
+            <a:off x="548640" y="868680"/>
+            <a:ext cx="11064240" cy="1005840"/>
           </a:xfrm>
           <a:prstGeom prst="rect">
             <a:avLst/>
@@ -9406,17 +9826,17 @@
               <a:buNone/>
             </a:pPr>
             <a:r>
-              <a:rPr lang="en-US" sz="1600" dirty="0">
-                <a:solidFill>
-                  <a:srgbClr val="98999D"/>
-                </a:solidFill>
-                <a:latin typeface="Arial" pitchFamily="34" charset="0"/>
-                <a:ea typeface="Arial" pitchFamily="34" charset="-122"/>
-                <a:cs typeface="Arial" pitchFamily="34" charset="-120"/>
-              </a:rPr>
-              <a:t>supabase/schema.sql</a:t>
-            </a:r>
-            <a:endParaRPr lang="en-US" sz="1600" dirty="0"/>
+              <a:rPr lang="en-US" sz="4000" b="1" dirty="0">
+                <a:solidFill>
+                  <a:srgbClr val="F2F2F0"/>
+                </a:solidFill>
+                <a:latin typeface="Arial" pitchFamily="34" charset="0"/>
+                <a:ea typeface="Arial" pitchFamily="34" charset="-122"/>
+                <a:cs typeface="Arial" pitchFamily="34" charset="-120"/>
+              </a:rPr>
+              <a:t>Flutter</a:t>
+            </a:r>
+            <a:endParaRPr lang="en-US" sz="4000" dirty="0"/>
           </a:p>
         </p:txBody>
       </p:sp>
@@ -9428,7 +9848,7 @@
         </p:nvSpPr>
         <p:spPr>
           <a:xfrm>
-            <a:off x="548640" y="1508760"/>
+            <a:off x="548640" y="1965960"/>
             <a:ext cx="11064240" cy="0"/>
           </a:xfrm>
           <a:prstGeom prst="line">
@@ -9445,30 +9865,45 @@
       </p:sp>
       <p:sp>
         <p:nvSpPr>
-          <p:cNvPr id="6" name="Shape 4"/>
-          <p:cNvSpPr/>
-          <p:nvPr/>
-        </p:nvSpPr>
-        <p:spPr>
-          <a:xfrm>
-            <a:off x="548640" y="1828800"/>
-            <a:ext cx="11064240" cy="4206240"/>
-          </a:xfrm>
-          <a:prstGeom prst="roundRect">
-            <a:avLst>
-              <a:gd name="adj" fmla="val 1739"/>
-            </a:avLst>
-          </a:prstGeom>
-          <a:solidFill>
-            <a:srgbClr val="202124"/>
-          </a:solidFill>
-          <a:ln w="12700">
-            <a:solidFill>
-              <a:srgbClr val="202124"/>
-            </a:solidFill>
-            <a:prstDash val="solid"/>
-          </a:ln>
-        </p:spPr>
+          <p:cNvPr id="6" name="Text 4"/>
+          <p:cNvSpPr/>
+          <p:nvPr/>
+        </p:nvSpPr>
+        <p:spPr>
+          <a:xfrm>
+            <a:off x="548640" y="2286000"/>
+            <a:ext cx="11064240" cy="3108960"/>
+          </a:xfrm>
+          <a:prstGeom prst="rect">
+            <a:avLst/>
+          </a:prstGeom>
+          <a:noFill/>
+          <a:ln/>
+        </p:spPr>
+        <p:txBody>
+          <a:bodyPr wrap="square" rtlCol="0" anchor="t"/>
+          <a:lstStyle/>
+          <a:p>
+            <a:pPr indent="0" marL="0">
+              <a:lnSpc>
+                <a:spcPct val="140000"/>
+              </a:lnSpc>
+              <a:buNone/>
+            </a:pPr>
+            <a:r>
+              <a:rPr lang="en-US" sz="2200" dirty="0">
+                <a:solidFill>
+                  <a:srgbClr val="F2F2F0"/>
+                </a:solidFill>
+                <a:latin typeface="Arial" pitchFamily="34" charset="0"/>
+                <a:ea typeface="Arial" pitchFamily="34" charset="-122"/>
+                <a:cs typeface="Arial" pitchFamily="34" charset="-120"/>
+              </a:rPr>
+              <a:t>구글이 만든 도구로, 코드 하나로 아이폰, 안드로이드, 맥, 윈도우용 앱을 동시에 만들 수 있게 해줘요.</a:t>
+            </a:r>
+            <a:endParaRPr lang="en-US" sz="2200" dirty="0"/>
+          </a:p>
+        </p:txBody>
       </p:sp>
       <p:sp>
         <p:nvSpPr>
@@ -9478,137 +9913,55 @@
         </p:nvSpPr>
         <p:spPr>
           <a:xfrm>
-            <a:off x="822960" y="2057400"/>
-            <a:ext cx="10515600" cy="3749040"/>
-          </a:xfrm>
-          <a:prstGeom prst="rect">
-            <a:avLst/>
-          </a:prstGeom>
-          <a:noFill/>
-          <a:ln/>
-        </p:spPr>
-        <p:txBody>
-          <a:bodyPr wrap="square" rtlCol="0" anchor="t"/>
-          <a:lstStyle/>
-          <a:p>
-            <a:pPr indent="0" marL="0">
-              <a:buNone/>
-            </a:pPr>
-            <a:r>
-              <a:rPr lang="en-US" sz="1700" dirty="0">
-                <a:solidFill>
-                  <a:srgbClr val="F2F2F0"/>
-                </a:solidFill>
-                <a:latin typeface="Menlo" pitchFamily="34" charset="0"/>
-                <a:ea typeface="Menlo" pitchFamily="34" charset="-122"/>
-                <a:cs typeface="Menlo" pitchFamily="34" charset="-120"/>
-              </a:rPr>
-              <a:t>profiles   id(uuid, = auth.users.id) · username(unique) · display_name</a:t>
-            </a:r>
-            <a:endParaRPr lang="en-US" sz="1700" dirty="0"/>
-          </a:p>
-          <a:p>
-            <a:pPr indent="0" marL="0">
-              <a:buNone/>
-            </a:pPr>
-            <a:r>
-              <a:rPr lang="en-US" sz="1700" dirty="0">
-                <a:solidFill>
-                  <a:srgbClr val="F2F2F0"/>
-                </a:solidFill>
-                <a:latin typeface="Menlo" pitchFamily="34" charset="0"/>
-                <a:ea typeface="Menlo" pitchFamily="34" charset="-122"/>
-                <a:cs typeface="Menlo" pitchFamily="34" charset="-120"/>
-              </a:rPr>
-              <a:t>           avatar_url · bio · is_admin · is_banned</a:t>
-            </a:r>
-            <a:endParaRPr lang="en-US" sz="1700" dirty="0"/>
-          </a:p>
-          <a:p>
-            <a:pPr indent="0" marL="0">
-              <a:buNone/>
-            </a:pPr>
-            <a:endParaRPr lang="en-US" sz="1700" dirty="0"/>
-          </a:p>
-          <a:p>
-            <a:pPr indent="0" marL="0">
-              <a:buNone/>
-            </a:pPr>
-            <a:r>
-              <a:rPr lang="en-US" sz="1700" dirty="0">
-                <a:solidFill>
-                  <a:srgbClr val="F2F2F0"/>
-                </a:solidFill>
-                <a:latin typeface="Menlo" pitchFamily="34" charset="0"/>
-                <a:ea typeface="Menlo" pitchFamily="34" charset="-122"/>
-                <a:cs typeface="Menlo" pitchFamily="34" charset="-120"/>
-              </a:rPr>
-              <a:t>posts      id · author_id → profiles.id · content · reply_to_id(nullable)</a:t>
-            </a:r>
-            <a:endParaRPr lang="en-US" sz="1700" dirty="0"/>
-          </a:p>
-          <a:p>
-            <a:pPr indent="0" marL="0">
-              <a:buNone/>
-            </a:pPr>
-            <a:endParaRPr lang="en-US" sz="1700" dirty="0"/>
-          </a:p>
-          <a:p>
-            <a:pPr indent="0" marL="0">
-              <a:buNone/>
-            </a:pPr>
-            <a:r>
-              <a:rPr lang="en-US" sz="1700" dirty="0">
-                <a:solidFill>
-                  <a:srgbClr val="F2F2F0"/>
-                </a:solidFill>
-                <a:latin typeface="Menlo" pitchFamily="34" charset="0"/>
-                <a:ea typeface="Menlo" pitchFamily="34" charset="-122"/>
-                <a:cs typeface="Menlo" pitchFamily="34" charset="-120"/>
-              </a:rPr>
-              <a:t>likes      post_id → posts.id · user_id → profiles.id  (복합 PK)</a:t>
-            </a:r>
-            <a:endParaRPr lang="en-US" sz="1700" dirty="0"/>
-          </a:p>
-          <a:p>
-            <a:pPr indent="0" marL="0">
-              <a:buNone/>
-            </a:pPr>
-            <a:endParaRPr lang="en-US" sz="1700" dirty="0"/>
-          </a:p>
-          <a:p>
-            <a:pPr indent="0" marL="0">
-              <a:buNone/>
-            </a:pPr>
-            <a:r>
-              <a:rPr lang="en-US" sz="1700" dirty="0">
-                <a:solidFill>
-                  <a:srgbClr val="F2F2F0"/>
-                </a:solidFill>
-                <a:latin typeface="Menlo" pitchFamily="34" charset="0"/>
-                <a:ea typeface="Menlo" pitchFamily="34" charset="-122"/>
-                <a:cs typeface="Menlo" pitchFamily="34" charset="-120"/>
-              </a:rPr>
-              <a:t>follows    follower_id → profiles.id · following_id → profiles.id</a:t>
-            </a:r>
-            <a:endParaRPr lang="en-US" sz="1700" dirty="0"/>
-          </a:p>
-          <a:p>
-            <a:pPr indent="0" marL="0">
-              <a:buNone/>
-            </a:pPr>
-            <a:r>
-              <a:rPr lang="en-US" sz="1700" dirty="0">
-                <a:solidFill>
-                  <a:srgbClr val="F2F2F0"/>
-                </a:solidFill>
-                <a:latin typeface="Menlo" pitchFamily="34" charset="0"/>
-                <a:ea typeface="Menlo" pitchFamily="34" charset="-122"/>
-                <a:cs typeface="Menlo" pitchFamily="34" charset="-120"/>
-              </a:rPr>
-              <a:t>           (복합 PK, follower ≠ following 체크 제약)</a:t>
-            </a:r>
-            <a:endParaRPr lang="en-US" sz="1700" dirty="0"/>
+            <a:off x="548640" y="5897880"/>
+            <a:ext cx="11064240" cy="365760"/>
+          </a:xfrm>
+          <a:prstGeom prst="rect">
+            <a:avLst/>
+          </a:prstGeom>
+          <a:noFill/>
+          <a:ln/>
+        </p:spPr>
+        <p:txBody>
+          <a:bodyPr wrap="square" rtlCol="0" anchor="ctr"/>
+          <a:lstStyle/>
+          <a:p>
+            <a:pPr indent="0" marL="0">
+              <a:buNone/>
+            </a:pPr>
+            <a:r>
+              <a:rPr lang="en-US" sz="1500" dirty="0">
+                <a:solidFill>
+                  <a:srgbClr val="98999D"/>
+                </a:solidFill>
+                <a:latin typeface="Arial" pitchFamily="34" charset="0"/>
+                <a:ea typeface="Arial" pitchFamily="34" charset="-122"/>
+                <a:cs typeface="Arial" pitchFamily="34" charset="-120"/>
+              </a:rPr>
+              <a:t>자세히 보기: </a:t>
+            </a:r>
+            <a:pPr indent="0" marL="0">
+              <a:buNone/>
+            </a:pPr>
+            <a:r>
+              <a:rPr lang="en-US" sz="1500" u="sng" dirty="0">
+                <a:solidFill>
+                  <a:srgbClr val="5B8DEF"/>
+                </a:solidFill>
+                <a:latin typeface="Arial" pitchFamily="34" charset="0"/>
+                <a:ea typeface="Arial" pitchFamily="34" charset="-122"/>
+                <a:cs typeface="Arial" pitchFamily="34" charset="-120"/>
+                <a:hlinkClick r:id="rId1" invalidUrl="" action="" tgtFrame="" tooltip="" history="1" highlightClick="0" endSnd="0">
+                  <a:extLst>
+                    <a:ext uri="{A12FA001-AC4F-418D-AE19-62706E023703}">
+                      <ahyp:hlinkClr xmlns:ahyp="http://schemas.microsoft.com/office/drawing/2018/hyperlinkcolor" val="tx"/>
+                    </a:ext>
+                  </a:extLst>
+                </a:hlinkClick>
+              </a:rPr>
+              <a:t>https://flutter.dev</a:t>
+            </a:r>
+            <a:endParaRPr lang="en-US" sz="1500" dirty="0"/>
           </a:p>
         </p:txBody>
       </p:sp>
@@ -9691,8 +10044,8 @@
         </p:nvSpPr>
         <p:spPr>
           <a:xfrm>
-            <a:off x="548640" y="365760"/>
-            <a:ext cx="11064240" cy="822960"/>
+            <a:off x="548640" y="457200"/>
+            <a:ext cx="11064240" cy="457200"/>
           </a:xfrm>
           <a:prstGeom prst="rect">
             <a:avLst/>
@@ -9708,17 +10061,17 @@
               <a:buNone/>
             </a:pPr>
             <a:r>
-              <a:rPr lang="en-US" sz="3000" b="1" dirty="0">
-                <a:solidFill>
-                  <a:srgbClr val="F2F2F0"/>
-                </a:solidFill>
-                <a:latin typeface="Arial" pitchFamily="34" charset="0"/>
-                <a:ea typeface="Arial" pitchFamily="34" charset="-122"/>
-                <a:cs typeface="Arial" pitchFamily="34" charset="-120"/>
-              </a:rPr>
-              <a:t>인증 흐름</a:t>
-            </a:r>
-            <a:endParaRPr lang="en-US" sz="3000" dirty="0"/>
+              <a:rPr lang="en-US" sz="1400" dirty="0">
+                <a:solidFill>
+                  <a:srgbClr val="98999D"/>
+                </a:solidFill>
+                <a:latin typeface="Arial" pitchFamily="34" charset="0"/>
+                <a:ea typeface="Arial" pitchFamily="34" charset="-122"/>
+                <a:cs typeface="Arial" pitchFamily="34" charset="-120"/>
+              </a:rPr>
+              <a:t>용어 설명</a:t>
+            </a:r>
+            <a:endParaRPr lang="en-US" sz="1400" dirty="0"/>
           </a:p>
         </p:txBody>
       </p:sp>
@@ -9730,8 +10083,8 @@
         </p:nvSpPr>
         <p:spPr>
           <a:xfrm>
-            <a:off x="548640" y="1005840"/>
-            <a:ext cx="11064240" cy="457200"/>
+            <a:off x="548640" y="868680"/>
+            <a:ext cx="11064240" cy="1005840"/>
           </a:xfrm>
           <a:prstGeom prst="rect">
             <a:avLst/>
@@ -9747,17 +10100,17 @@
               <a:buNone/>
             </a:pPr>
             <a:r>
-              <a:rPr lang="en-US" sz="1600" dirty="0">
-                <a:solidFill>
-                  <a:srgbClr val="98999D"/>
-                </a:solidFill>
-                <a:latin typeface="Arial" pitchFamily="34" charset="0"/>
-                <a:ea typeface="Arial" pitchFamily="34" charset="-122"/>
-                <a:cs typeface="Arial" pitchFamily="34" charset="-120"/>
-              </a:rPr>
-              <a:t>Supabase Auth + 자동 프로필 생성</a:t>
-            </a:r>
-            <a:endParaRPr lang="en-US" sz="1600" dirty="0"/>
+              <a:rPr lang="en-US" sz="4000" b="1" dirty="0">
+                <a:solidFill>
+                  <a:srgbClr val="F2F2F0"/>
+                </a:solidFill>
+                <a:latin typeface="Arial" pitchFamily="34" charset="0"/>
+                <a:ea typeface="Arial" pitchFamily="34" charset="-122"/>
+                <a:cs typeface="Arial" pitchFamily="34" charset="-120"/>
+              </a:rPr>
+              <a:t>npm</a:t>
+            </a:r>
+            <a:endParaRPr lang="en-US" sz="4000" dirty="0"/>
           </a:p>
         </p:txBody>
       </p:sp>
@@ -9769,7 +10122,7 @@
         </p:nvSpPr>
         <p:spPr>
           <a:xfrm>
-            <a:off x="548640" y="1508760"/>
+            <a:off x="548640" y="1965960"/>
             <a:ext cx="11064240" cy="0"/>
           </a:xfrm>
           <a:prstGeom prst="line">
@@ -9792,8 +10145,8 @@
         </p:nvSpPr>
         <p:spPr>
           <a:xfrm>
-            <a:off x="548640" y="1828800"/>
-            <a:ext cx="11064240" cy="4572000"/>
+            <a:off x="548640" y="2286000"/>
+            <a:ext cx="11064240" cy="3108960"/>
           </a:xfrm>
           <a:prstGeom prst="rect">
             <a:avLst/>
@@ -9805,109 +10158,84 @@
           <a:bodyPr wrap="square" rtlCol="0" anchor="t"/>
           <a:lstStyle/>
           <a:p>
-            <a:pPr marL="342900" indent="-342900">
+            <a:pPr indent="0" marL="0">
               <a:lnSpc>
-                <a:spcPct val="135000"/>
+                <a:spcPct val="140000"/>
               </a:lnSpc>
-              <a:buSzPct val="100000"/>
-              <a:buChar char="•"/>
-            </a:pPr>
-            <a:r>
-              <a:rPr lang="en-US" sz="1800" dirty="0">
-                <a:solidFill>
-                  <a:srgbClr val="F2F2F0"/>
-                </a:solidFill>
-                <a:latin typeface="Arial" pitchFamily="34" charset="0"/>
-                <a:ea typeface="Arial" pitchFamily="34" charset="-122"/>
-                <a:cs typeface="Arial" pitchFamily="34" charset="-120"/>
-              </a:rPr>
-              <a:t>가입: 이메일 + 비밀번호만 입력 (아이디는 받지 않음)</a:t>
-            </a:r>
-            <a:endParaRPr lang="en-US" sz="1800" dirty="0"/>
-          </a:p>
-          <a:p>
-            <a:pPr marL="342900" indent="-342900">
-              <a:lnSpc>
-                <a:spcPct val="135000"/>
-              </a:lnSpc>
-              <a:buSzPct val="100000"/>
-              <a:buChar char="•"/>
-            </a:pPr>
-            <a:r>
-              <a:rPr lang="en-US" sz="1800" dirty="0">
-                <a:solidFill>
-                  <a:srgbClr val="F2F2F0"/>
-                </a:solidFill>
-                <a:latin typeface="Arial" pitchFamily="34" charset="0"/>
-                <a:ea typeface="Arial" pitchFamily="34" charset="-122"/>
-                <a:cs typeface="Arial" pitchFamily="34" charset="-120"/>
-              </a:rPr>
-              <a:t>auth.users insert 시 handle_new_user 트리거가 profiles row를 자동 생성</a:t>
-            </a:r>
-            <a:endParaRPr lang="en-US" sz="1800" dirty="0"/>
-          </a:p>
-          <a:p>
-            <a:pPr marL="342900" indent="-342900">
-              <a:lnSpc>
-                <a:spcPct val="135000"/>
-              </a:lnSpc>
-              <a:buSzPct val="100000"/>
-              <a:buChar char="•"/>
-            </a:pPr>
-            <a:r>
-              <a:rPr lang="en-US" sz="1800" dirty="0">
-                <a:solidFill>
-                  <a:srgbClr val="F2F2F0"/>
-                </a:solidFill>
-                <a:latin typeface="Arial" pitchFamily="34" charset="0"/>
-                <a:ea typeface="Arial" pitchFamily="34" charset="-122"/>
-                <a:cs typeface="Arial" pitchFamily="34" charset="-120"/>
-              </a:rPr>
-              <a:t>username이 없으면 user_&lt;uuid앞8자리&gt;, display_name은 이메일 앞부분으로 대체</a:t>
-            </a:r>
-            <a:endParaRPr lang="en-US" sz="1800" dirty="0"/>
-          </a:p>
-          <a:p>
-            <a:pPr marL="342900" indent="-342900">
-              <a:lnSpc>
-                <a:spcPct val="135000"/>
-              </a:lnSpc>
-              <a:buSzPct val="100000"/>
-              <a:buChar char="•"/>
-            </a:pPr>
-            <a:r>
-              <a:rPr lang="en-US" sz="1800" dirty="0">
-                <a:solidFill>
-                  <a:srgbClr val="F2F2F0"/>
-                </a:solidFill>
-                <a:latin typeface="Arial" pitchFamily="34" charset="0"/>
-                <a:ea typeface="Arial" pitchFamily="34" charset="-122"/>
-                <a:cs typeface="Arial" pitchFamily="34" charset="-120"/>
-              </a:rPr>
-              <a:t>이메일 확인(confirm email)이 켜져 있어 인증 전엔 로그인 불가 → /login?confirm=1 안내</a:t>
-            </a:r>
-            <a:endParaRPr lang="en-US" sz="1800" dirty="0"/>
-          </a:p>
-          <a:p>
-            <a:pPr marL="342900" indent="-342900">
-              <a:lnSpc>
-                <a:spcPct val="135000"/>
-              </a:lnSpc>
-              <a:buSzPct val="100000"/>
-              <a:buChar char="•"/>
-            </a:pPr>
-            <a:r>
-              <a:rPr lang="en-US" sz="1800" dirty="0">
-                <a:solidFill>
-                  <a:srgbClr val="F2F2F0"/>
-                </a:solidFill>
-                <a:latin typeface="Arial" pitchFamily="34" charset="0"/>
-                <a:ea typeface="Arial" pitchFamily="34" charset="-122"/>
-                <a:cs typeface="Arial" pitchFamily="34" charset="-120"/>
-              </a:rPr>
-              <a:t>모든 테이블에 RLS 적용: 읽기는 공개, 쓰기는 auth.uid()가 본인 것일 때만 허용</a:t>
-            </a:r>
-            <a:endParaRPr lang="en-US" sz="1800" dirty="0"/>
+              <a:buNone/>
+            </a:pPr>
+            <a:r>
+              <a:rPr lang="en-US" sz="2200" dirty="0">
+                <a:solidFill>
+                  <a:srgbClr val="F2F2F0"/>
+                </a:solidFill>
+                <a:latin typeface="Arial" pitchFamily="34" charset="0"/>
+                <a:ea typeface="Arial" pitchFamily="34" charset="-122"/>
+                <a:cs typeface="Arial" pitchFamily="34" charset="-120"/>
+              </a:rPr>
+              <a:t>자바스크립트 프로젝트에 필요한 외부 코드(라이브러리)를 설치하고 관리해주는 가장 기본적인 도구예요.</a:t>
+            </a:r>
+            <a:endParaRPr lang="en-US" sz="2200" dirty="0"/>
+          </a:p>
+        </p:txBody>
+      </p:sp>
+      <p:sp>
+        <p:nvSpPr>
+          <p:cNvPr id="7" name="Text 5"/>
+          <p:cNvSpPr/>
+          <p:nvPr/>
+        </p:nvSpPr>
+        <p:spPr>
+          <a:xfrm>
+            <a:off x="548640" y="5897880"/>
+            <a:ext cx="11064240" cy="365760"/>
+          </a:xfrm>
+          <a:prstGeom prst="rect">
+            <a:avLst/>
+          </a:prstGeom>
+          <a:noFill/>
+          <a:ln/>
+        </p:spPr>
+        <p:txBody>
+          <a:bodyPr wrap="square" rtlCol="0" anchor="ctr"/>
+          <a:lstStyle/>
+          <a:p>
+            <a:pPr indent="0" marL="0">
+              <a:buNone/>
+            </a:pPr>
+            <a:r>
+              <a:rPr lang="en-US" sz="1500" dirty="0">
+                <a:solidFill>
+                  <a:srgbClr val="98999D"/>
+                </a:solidFill>
+                <a:latin typeface="Arial" pitchFamily="34" charset="0"/>
+                <a:ea typeface="Arial" pitchFamily="34" charset="-122"/>
+                <a:cs typeface="Arial" pitchFamily="34" charset="-120"/>
+              </a:rPr>
+              <a:t>자세히 보기: </a:t>
+            </a:r>
+            <a:pPr indent="0" marL="0">
+              <a:buNone/>
+            </a:pPr>
+            <a:r>
+              <a:rPr lang="en-US" sz="1500" u="sng" dirty="0">
+                <a:solidFill>
+                  <a:srgbClr val="5B8DEF"/>
+                </a:solidFill>
+                <a:latin typeface="Arial" pitchFamily="34" charset="0"/>
+                <a:ea typeface="Arial" pitchFamily="34" charset="-122"/>
+                <a:cs typeface="Arial" pitchFamily="34" charset="-120"/>
+                <a:hlinkClick r:id="rId1" invalidUrl="" action="" tgtFrame="" tooltip="" history="1" highlightClick="0" endSnd="0">
+                  <a:extLst>
+                    <a:ext uri="{A12FA001-AC4F-418D-AE19-62706E023703}">
+                      <ahyp:hlinkClr xmlns:ahyp="http://schemas.microsoft.com/office/drawing/2018/hyperlinkcolor" val="tx"/>
+                    </a:ext>
+                  </a:extLst>
+                </a:hlinkClick>
+              </a:rPr>
+              <a:t>https://www.npmjs.com</a:t>
+            </a:r>
+            <a:endParaRPr lang="en-US" sz="1500" dirty="0"/>
           </a:p>
         </p:txBody>
       </p:sp>
@@ -9990,8 +10318,8 @@
         </p:nvSpPr>
         <p:spPr>
           <a:xfrm>
-            <a:off x="548640" y="365760"/>
-            <a:ext cx="11064240" cy="822960"/>
+            <a:off x="548640" y="457200"/>
+            <a:ext cx="11064240" cy="457200"/>
           </a:xfrm>
           <a:prstGeom prst="rect">
             <a:avLst/>
@@ -10007,17 +10335,17 @@
               <a:buNone/>
             </a:pPr>
             <a:r>
-              <a:rPr lang="en-US" sz="3000" b="1" dirty="0">
-                <a:solidFill>
-                  <a:srgbClr val="F2F2F0"/>
-                </a:solidFill>
-                <a:latin typeface="Arial" pitchFamily="34" charset="0"/>
-                <a:ea typeface="Arial" pitchFamily="34" charset="-122"/>
-                <a:cs typeface="Arial" pitchFamily="34" charset="-120"/>
-              </a:rPr>
-              <a:t>웹 앱 (Next.js 16)</a:t>
-            </a:r>
-            <a:endParaRPr lang="en-US" sz="3000" dirty="0"/>
+              <a:rPr lang="en-US" sz="1400" dirty="0">
+                <a:solidFill>
+                  <a:srgbClr val="98999D"/>
+                </a:solidFill>
+                <a:latin typeface="Arial" pitchFamily="34" charset="0"/>
+                <a:ea typeface="Arial" pitchFamily="34" charset="-122"/>
+                <a:cs typeface="Arial" pitchFamily="34" charset="-120"/>
+              </a:rPr>
+              <a:t>용어 설명</a:t>
+            </a:r>
+            <a:endParaRPr lang="en-US" sz="1400" dirty="0"/>
           </a:p>
         </p:txBody>
       </p:sp>
@@ -10029,8 +10357,8 @@
         </p:nvSpPr>
         <p:spPr>
           <a:xfrm>
-            <a:off x="548640" y="1005840"/>
-            <a:ext cx="11064240" cy="457200"/>
+            <a:off x="548640" y="868680"/>
+            <a:ext cx="11064240" cy="1005840"/>
           </a:xfrm>
           <a:prstGeom prst="rect">
             <a:avLst/>
@@ -10046,17 +10374,17 @@
               <a:buNone/>
             </a:pPr>
             <a:r>
-              <a:rPr lang="en-US" sz="1600" dirty="0">
-                <a:solidFill>
-                  <a:srgbClr val="98999D"/>
-                </a:solidFill>
-                <a:latin typeface="Arial" pitchFamily="34" charset="0"/>
-                <a:ea typeface="Arial" pitchFamily="34" charset="-122"/>
-                <a:cs typeface="Arial" pitchFamily="34" charset="-120"/>
-              </a:rPr>
-              <a:t>App Router + Server Actions</a:t>
-            </a:r>
-            <a:endParaRPr lang="en-US" sz="1600" dirty="0"/>
+              <a:rPr lang="en-US" sz="4000" b="1" dirty="0">
+                <a:solidFill>
+                  <a:srgbClr val="F2F2F0"/>
+                </a:solidFill>
+                <a:latin typeface="Arial" pitchFamily="34" charset="0"/>
+                <a:ea typeface="Arial" pitchFamily="34" charset="-122"/>
+                <a:cs typeface="Arial" pitchFamily="34" charset="-120"/>
+              </a:rPr>
+              <a:t>pnpm</a:t>
+            </a:r>
+            <a:endParaRPr lang="en-US" sz="4000" dirty="0"/>
           </a:p>
         </p:txBody>
       </p:sp>
@@ -10068,7 +10396,7 @@
         </p:nvSpPr>
         <p:spPr>
           <a:xfrm>
-            <a:off x="548640" y="1508760"/>
+            <a:off x="548640" y="1965960"/>
             <a:ext cx="11064240" cy="0"/>
           </a:xfrm>
           <a:prstGeom prst="line">
@@ -10091,8 +10419,8 @@
         </p:nvSpPr>
         <p:spPr>
           <a:xfrm>
-            <a:off x="548640" y="1828800"/>
-            <a:ext cx="11064240" cy="4572000"/>
+            <a:off x="548640" y="2286000"/>
+            <a:ext cx="11064240" cy="3108960"/>
           </a:xfrm>
           <a:prstGeom prst="rect">
             <a:avLst/>
@@ -10104,109 +10432,84 @@
           <a:bodyPr wrap="square" rtlCol="0" anchor="t"/>
           <a:lstStyle/>
           <a:p>
-            <a:pPr marL="342900" indent="-342900">
+            <a:pPr indent="0" marL="0">
               <a:lnSpc>
-                <a:spcPct val="135000"/>
+                <a:spcPct val="140000"/>
               </a:lnSpc>
-              <a:buSzPct val="100000"/>
-              <a:buChar char="•"/>
-            </a:pPr>
-            <a:r>
-              <a:rPr lang="en-US" sz="1800" dirty="0">
-                <a:solidFill>
-                  <a:srgbClr val="F2F2F0"/>
-                </a:solidFill>
-                <a:latin typeface="Arial" pitchFamily="34" charset="0"/>
-                <a:ea typeface="Arial" pitchFamily="34" charset="-122"/>
-                <a:cs typeface="Arial" pitchFamily="34" charset="-120"/>
-              </a:rPr>
-              <a:t>라우트 대부분이 Server Component — 서버에서 Supabase를 직접 쿼리</a:t>
-            </a:r>
-            <a:endParaRPr lang="en-US" sz="1800" dirty="0"/>
-          </a:p>
-          <a:p>
-            <a:pPr marL="342900" indent="-342900">
-              <a:lnSpc>
-                <a:spcPct val="135000"/>
-              </a:lnSpc>
-              <a:buSzPct val="100000"/>
-              <a:buChar char="•"/>
-            </a:pPr>
-            <a:r>
-              <a:rPr lang="en-US" sz="1800" dirty="0">
-                <a:solidFill>
-                  <a:srgbClr val="F2F2F0"/>
-                </a:solidFill>
-                <a:latin typeface="Arial" pitchFamily="34" charset="0"/>
-                <a:ea typeface="Arial" pitchFamily="34" charset="-122"/>
-                <a:cs typeface="Arial" pitchFamily="34" charset="-120"/>
-              </a:rPr>
-              <a:t>쓰기 작업(좋아요, 팔로우, 글쓰기, 로그인/가입)은 전부 Server Actions ("use server")</a:t>
-            </a:r>
-            <a:endParaRPr lang="en-US" sz="1800" dirty="0"/>
-          </a:p>
-          <a:p>
-            <a:pPr marL="342900" indent="-342900">
-              <a:lnSpc>
-                <a:spcPct val="135000"/>
-              </a:lnSpc>
-              <a:buSzPct val="100000"/>
-              <a:buChar char="•"/>
-            </a:pPr>
-            <a:r>
-              <a:rPr lang="en-US" sz="1800" dirty="0">
-                <a:solidFill>
-                  <a:srgbClr val="F2F2F0"/>
-                </a:solidFill>
-                <a:latin typeface="Arial" pitchFamily="34" charset="0"/>
-                <a:ea typeface="Arial" pitchFamily="34" charset="-122"/>
-                <a:cs typeface="Arial" pitchFamily="34" charset="-120"/>
-              </a:rPr>
-              <a:t>src/proxy.ts (Next 16의 middleware 후속 컨벤션)가 세션 갱신 + /new, /settings 보호</a:t>
-            </a:r>
-            <a:endParaRPr lang="en-US" sz="1800" dirty="0"/>
-          </a:p>
-          <a:p>
-            <a:pPr marL="342900" indent="-342900">
-              <a:lnSpc>
-                <a:spcPct val="135000"/>
-              </a:lnSpc>
-              <a:buSzPct val="100000"/>
-              <a:buChar char="•"/>
-            </a:pPr>
-            <a:r>
-              <a:rPr lang="en-US" sz="1800" dirty="0">
-                <a:solidFill>
-                  <a:srgbClr val="F2F2F0"/>
-                </a:solidFill>
-                <a:latin typeface="Arial" pitchFamily="34" charset="0"/>
-                <a:ea typeface="Arial" pitchFamily="34" charset="-122"/>
-                <a:cs typeface="Arial" pitchFamily="34" charset="-120"/>
-              </a:rPr>
-              <a:t>src/lib/supabase/{client,server}.ts — 브라우저용 / 서버용 Supabase 클라이언트 분리</a:t>
-            </a:r>
-            <a:endParaRPr lang="en-US" sz="1800" dirty="0"/>
-          </a:p>
-          <a:p>
-            <a:pPr marL="342900" indent="-342900">
-              <a:lnSpc>
-                <a:spcPct val="135000"/>
-              </a:lnSpc>
-              <a:buSzPct val="100000"/>
-              <a:buChar char="•"/>
-            </a:pPr>
-            <a:r>
-              <a:rPr lang="en-US" sz="1800" dirty="0">
-                <a:solidFill>
-                  <a:srgbClr val="F2F2F0"/>
-                </a:solidFill>
-                <a:latin typeface="Arial" pitchFamily="34" charset="0"/>
-                <a:ea typeface="Arial" pitchFamily="34" charset="-122"/>
-                <a:cs typeface="Arial" pitchFamily="34" charset="-120"/>
-              </a:rPr>
-              <a:t>포트 3721에서 개발 서버 실행 (pnpm dev)</a:t>
-            </a:r>
-            <a:endParaRPr lang="en-US" sz="1800" dirty="0"/>
+              <a:buNone/>
+            </a:pPr>
+            <a:r>
+              <a:rPr lang="en-US" sz="2200" dirty="0">
+                <a:solidFill>
+                  <a:srgbClr val="F2F2F0"/>
+                </a:solidFill>
+                <a:latin typeface="Arial" pitchFamily="34" charset="0"/>
+                <a:ea typeface="Arial" pitchFamily="34" charset="-122"/>
+                <a:cs typeface="Arial" pitchFamily="34" charset="-120"/>
+              </a:rPr>
+              <a:t>npm과 같은 역할을 하지만 더 빠르고 디스크 공간을 아껴주는 패키지 매니저예요. 이 프로젝트는 pnpm을 사용해요.</a:t>
+            </a:r>
+            <a:endParaRPr lang="en-US" sz="2200" dirty="0"/>
+          </a:p>
+        </p:txBody>
+      </p:sp>
+      <p:sp>
+        <p:nvSpPr>
+          <p:cNvPr id="7" name="Text 5"/>
+          <p:cNvSpPr/>
+          <p:nvPr/>
+        </p:nvSpPr>
+        <p:spPr>
+          <a:xfrm>
+            <a:off x="548640" y="5897880"/>
+            <a:ext cx="11064240" cy="365760"/>
+          </a:xfrm>
+          <a:prstGeom prst="rect">
+            <a:avLst/>
+          </a:prstGeom>
+          <a:noFill/>
+          <a:ln/>
+        </p:spPr>
+        <p:txBody>
+          <a:bodyPr wrap="square" rtlCol="0" anchor="ctr"/>
+          <a:lstStyle/>
+          <a:p>
+            <a:pPr indent="0" marL="0">
+              <a:buNone/>
+            </a:pPr>
+            <a:r>
+              <a:rPr lang="en-US" sz="1500" dirty="0">
+                <a:solidFill>
+                  <a:srgbClr val="98999D"/>
+                </a:solidFill>
+                <a:latin typeface="Arial" pitchFamily="34" charset="0"/>
+                <a:ea typeface="Arial" pitchFamily="34" charset="-122"/>
+                <a:cs typeface="Arial" pitchFamily="34" charset="-120"/>
+              </a:rPr>
+              <a:t>자세히 보기: </a:t>
+            </a:r>
+            <a:pPr indent="0" marL="0">
+              <a:buNone/>
+            </a:pPr>
+            <a:r>
+              <a:rPr lang="en-US" sz="1500" u="sng" dirty="0">
+                <a:solidFill>
+                  <a:srgbClr val="5B8DEF"/>
+                </a:solidFill>
+                <a:latin typeface="Arial" pitchFamily="34" charset="0"/>
+                <a:ea typeface="Arial" pitchFamily="34" charset="-122"/>
+                <a:cs typeface="Arial" pitchFamily="34" charset="-120"/>
+                <a:hlinkClick r:id="rId1" invalidUrl="" action="" tgtFrame="" tooltip="" history="1" highlightClick="0" endSnd="0">
+                  <a:extLst>
+                    <a:ext uri="{A12FA001-AC4F-418D-AE19-62706E023703}">
+                      <ahyp:hlinkClr xmlns:ahyp="http://schemas.microsoft.com/office/drawing/2018/hyperlinkcolor" val="tx"/>
+                    </a:ext>
+                  </a:extLst>
+                </a:hlinkClick>
+              </a:rPr>
+              <a:t>https://pnpm.io</a:t>
+            </a:r>
+            <a:endParaRPr lang="en-US" sz="1500" dirty="0"/>
           </a:p>
         </p:txBody>
       </p:sp>
@@ -10289,8 +10592,8 @@
         </p:nvSpPr>
         <p:spPr>
           <a:xfrm>
-            <a:off x="548640" y="365760"/>
-            <a:ext cx="11064240" cy="822960"/>
+            <a:off x="548640" y="457200"/>
+            <a:ext cx="11064240" cy="457200"/>
           </a:xfrm>
           <a:prstGeom prst="rect">
             <a:avLst/>
@@ -10306,17 +10609,17 @@
               <a:buNone/>
             </a:pPr>
             <a:r>
-              <a:rPr lang="en-US" sz="3000" b="1" dirty="0">
-                <a:solidFill>
-                  <a:srgbClr val="F2F2F0"/>
-                </a:solidFill>
-                <a:latin typeface="Arial" pitchFamily="34" charset="0"/>
-                <a:ea typeface="Arial" pitchFamily="34" charset="-122"/>
-                <a:cs typeface="Arial" pitchFamily="34" charset="-120"/>
-              </a:rPr>
-              <a:t>다국어 &amp; 테마</a:t>
-            </a:r>
-            <a:endParaRPr lang="en-US" sz="3000" dirty="0"/>
+              <a:rPr lang="en-US" sz="1400" dirty="0">
+                <a:solidFill>
+                  <a:srgbClr val="98999D"/>
+                </a:solidFill>
+                <a:latin typeface="Arial" pitchFamily="34" charset="0"/>
+                <a:ea typeface="Arial" pitchFamily="34" charset="-122"/>
+                <a:cs typeface="Arial" pitchFamily="34" charset="-120"/>
+              </a:rPr>
+              <a:t>용어 설명</a:t>
+            </a:r>
+            <a:endParaRPr lang="en-US" sz="1400" dirty="0"/>
           </a:p>
         </p:txBody>
       </p:sp>
@@ -10328,8 +10631,8 @@
         </p:nvSpPr>
         <p:spPr>
           <a:xfrm>
-            <a:off x="548640" y="1005840"/>
-            <a:ext cx="11064240" cy="457200"/>
+            <a:off x="548640" y="868680"/>
+            <a:ext cx="11064240" cy="1005840"/>
           </a:xfrm>
           <a:prstGeom prst="rect">
             <a:avLst/>
@@ -10345,17 +10648,17 @@
               <a:buNone/>
             </a:pPr>
             <a:r>
-              <a:rPr lang="en-US" sz="1600" dirty="0">
-                <a:solidFill>
-                  <a:srgbClr val="98999D"/>
-                </a:solidFill>
-                <a:latin typeface="Arial" pitchFamily="34" charset="0"/>
-                <a:ea typeface="Arial" pitchFamily="34" charset="-122"/>
-                <a:cs typeface="Arial" pitchFamily="34" charset="-120"/>
-              </a:rPr>
-              <a:t>쿠키 기반, 서버에서 렌더링</a:t>
-            </a:r>
-            <a:endParaRPr lang="en-US" sz="1600" dirty="0"/>
+              <a:rPr lang="en-US" sz="4000" b="1" dirty="0">
+                <a:solidFill>
+                  <a:srgbClr val="F2F2F0"/>
+                </a:solidFill>
+                <a:latin typeface="Arial" pitchFamily="34" charset="0"/>
+                <a:ea typeface="Arial" pitchFamily="34" charset="-122"/>
+                <a:cs typeface="Arial" pitchFamily="34" charset="-120"/>
+              </a:rPr>
+              <a:t>Claude Code</a:t>
+            </a:r>
+            <a:endParaRPr lang="en-US" sz="4000" dirty="0"/>
           </a:p>
         </p:txBody>
       </p:sp>
@@ -10367,7 +10670,7 @@
         </p:nvSpPr>
         <p:spPr>
           <a:xfrm>
-            <a:off x="548640" y="1508760"/>
+            <a:off x="548640" y="1965960"/>
             <a:ext cx="11064240" cy="0"/>
           </a:xfrm>
           <a:prstGeom prst="line">
@@ -10390,8 +10693,8 @@
         </p:nvSpPr>
         <p:spPr>
           <a:xfrm>
-            <a:off x="548640" y="1828800"/>
-            <a:ext cx="11064240" cy="4572000"/>
+            <a:off x="548640" y="2286000"/>
+            <a:ext cx="11064240" cy="3108960"/>
           </a:xfrm>
           <a:prstGeom prst="rect">
             <a:avLst/>
@@ -10403,109 +10706,84 @@
           <a:bodyPr wrap="square" rtlCol="0" anchor="t"/>
           <a:lstStyle/>
           <a:p>
-            <a:pPr marL="342900" indent="-342900">
+            <a:pPr indent="0" marL="0">
               <a:lnSpc>
-                <a:spcPct val="135000"/>
+                <a:spcPct val="140000"/>
               </a:lnSpc>
-              <a:buSzPct val="100000"/>
-              <a:buChar char="•"/>
-            </a:pPr>
-            <a:r>
-              <a:rPr lang="en-US" sz="1800" dirty="0">
-                <a:solidFill>
-                  <a:srgbClr val="F2F2F0"/>
-                </a:solidFill>
-                <a:latin typeface="Arial" pitchFamily="34" charset="0"/>
-                <a:ea typeface="Arial" pitchFamily="34" charset="-122"/>
-                <a:cs typeface="Arial" pitchFamily="34" charset="-120"/>
-              </a:rPr>
-              <a:t>한국어 / 영어 지원 — src/lib/i18n/dictionaries.ts 에 모든 문구 집중</a:t>
-            </a:r>
-            <a:endParaRPr lang="en-US" sz="1800" dirty="0"/>
-          </a:p>
-          <a:p>
-            <a:pPr marL="342900" indent="-342900">
-              <a:lnSpc>
-                <a:spcPct val="135000"/>
-              </a:lnSpc>
-              <a:buSzPct val="100000"/>
-              <a:buChar char="•"/>
-            </a:pPr>
-            <a:r>
-              <a:rPr lang="en-US" sz="1800" dirty="0">
-                <a:solidFill>
-                  <a:srgbClr val="F2F2F0"/>
-                </a:solidFill>
-                <a:latin typeface="Arial" pitchFamily="34" charset="0"/>
-                <a:ea typeface="Arial" pitchFamily="34" charset="-122"/>
-                <a:cs typeface="Arial" pitchFamily="34" charset="-120"/>
-              </a:rPr>
-              <a:t>locale 쿠키로 서버 컴포넌트에서 바로 알맞은 언어 렌더링 (클라이언트 JS 불필요)</a:t>
-            </a:r>
-            <a:endParaRPr lang="en-US" sz="1800" dirty="0"/>
-          </a:p>
-          <a:p>
-            <a:pPr marL="342900" indent="-342900">
-              <a:lnSpc>
-                <a:spcPct val="135000"/>
-              </a:lnSpc>
-              <a:buSzPct val="100000"/>
-              <a:buChar char="•"/>
-            </a:pPr>
-            <a:r>
-              <a:rPr lang="en-US" sz="1800" dirty="0">
-                <a:solidFill>
-                  <a:srgbClr val="F2F2F0"/>
-                </a:solidFill>
-                <a:latin typeface="Arial" pitchFamily="34" charset="0"/>
-                <a:ea typeface="Arial" pitchFamily="34" charset="-122"/>
-                <a:cs typeface="Arial" pitchFamily="34" charset="-120"/>
-              </a:rPr>
-              <a:t>다크 / 라이트 테마도 동일 패턴 — theme 쿠키 + data-theme 속성</a:t>
-            </a:r>
-            <a:endParaRPr lang="en-US" sz="1800" dirty="0"/>
-          </a:p>
-          <a:p>
-            <a:pPr marL="342900" indent="-342900">
-              <a:lnSpc>
-                <a:spcPct val="135000"/>
-              </a:lnSpc>
-              <a:buSzPct val="100000"/>
-              <a:buChar char="•"/>
-            </a:pPr>
-            <a:r>
-              <a:rPr lang="en-US" sz="1800" dirty="0">
-                <a:solidFill>
-                  <a:srgbClr val="F2F2F0"/>
-                </a:solidFill>
-                <a:latin typeface="Arial" pitchFamily="34" charset="0"/>
-                <a:ea typeface="Arial" pitchFamily="34" charset="-122"/>
-                <a:cs typeface="Arial" pitchFamily="34" charset="-120"/>
-              </a:rPr>
-              <a:t>다크 모드는 순검정 대신 부드러운 차콜(#17181A) 사용</a:t>
-            </a:r>
-            <a:endParaRPr lang="en-US" sz="1800" dirty="0"/>
-          </a:p>
-          <a:p>
-            <a:pPr marL="342900" indent="-342900">
-              <a:lnSpc>
-                <a:spcPct val="135000"/>
-              </a:lnSpc>
-              <a:buSzPct val="100000"/>
-              <a:buChar char="•"/>
-            </a:pPr>
-            <a:r>
-              <a:rPr lang="en-US" sz="1800" dirty="0">
-                <a:solidFill>
-                  <a:srgbClr val="F2F2F0"/>
-                </a:solidFill>
-                <a:latin typeface="Arial" pitchFamily="34" charset="0"/>
-                <a:ea typeface="Arial" pitchFamily="34" charset="-122"/>
-                <a:cs typeface="Arial" pitchFamily="34" charset="-120"/>
-              </a:rPr>
-              <a:t>Flutter 앱도 동일한 문구·색상 토큰을 그대로 이식 (lib/i18n, lib/theme)</a:t>
-            </a:r>
-            <a:endParaRPr lang="en-US" sz="1800" dirty="0"/>
+              <a:buNone/>
+            </a:pPr>
+            <a:r>
+              <a:rPr lang="en-US" sz="2200" dirty="0">
+                <a:solidFill>
+                  <a:srgbClr val="F2F2F0"/>
+                </a:solidFill>
+                <a:latin typeface="Arial" pitchFamily="34" charset="0"/>
+                <a:ea typeface="Arial" pitchFamily="34" charset="-122"/>
+                <a:cs typeface="Arial" pitchFamily="34" charset="-120"/>
+              </a:rPr>
+              <a:t>터미널에서 자연어로 대화하면서 코드를 대신 읽고, 쓰고, 실행까지 해주는 AI 코딩 도구예요. 이 프로젝트도 전부 Claude Code와 대화하면서 만들어졌어요.</a:t>
+            </a:r>
+            <a:endParaRPr lang="en-US" sz="2200" dirty="0"/>
+          </a:p>
+        </p:txBody>
+      </p:sp>
+      <p:sp>
+        <p:nvSpPr>
+          <p:cNvPr id="7" name="Text 5"/>
+          <p:cNvSpPr/>
+          <p:nvPr/>
+        </p:nvSpPr>
+        <p:spPr>
+          <a:xfrm>
+            <a:off x="548640" y="5897880"/>
+            <a:ext cx="11064240" cy="365760"/>
+          </a:xfrm>
+          <a:prstGeom prst="rect">
+            <a:avLst/>
+          </a:prstGeom>
+          <a:noFill/>
+          <a:ln/>
+        </p:spPr>
+        <p:txBody>
+          <a:bodyPr wrap="square" rtlCol="0" anchor="ctr"/>
+          <a:lstStyle/>
+          <a:p>
+            <a:pPr indent="0" marL="0">
+              <a:buNone/>
+            </a:pPr>
+            <a:r>
+              <a:rPr lang="en-US" sz="1500" dirty="0">
+                <a:solidFill>
+                  <a:srgbClr val="98999D"/>
+                </a:solidFill>
+                <a:latin typeface="Arial" pitchFamily="34" charset="0"/>
+                <a:ea typeface="Arial" pitchFamily="34" charset="-122"/>
+                <a:cs typeface="Arial" pitchFamily="34" charset="-120"/>
+              </a:rPr>
+              <a:t>자세히 보기: </a:t>
+            </a:r>
+            <a:pPr indent="0" marL="0">
+              <a:buNone/>
+            </a:pPr>
+            <a:r>
+              <a:rPr lang="en-US" sz="1500" u="sng" dirty="0">
+                <a:solidFill>
+                  <a:srgbClr val="5B8DEF"/>
+                </a:solidFill>
+                <a:latin typeface="Arial" pitchFamily="34" charset="0"/>
+                <a:ea typeface="Arial" pitchFamily="34" charset="-122"/>
+                <a:cs typeface="Arial" pitchFamily="34" charset="-120"/>
+                <a:hlinkClick r:id="rId1" invalidUrl="" action="" tgtFrame="" tooltip="" history="1" highlightClick="0" endSnd="0">
+                  <a:extLst>
+                    <a:ext uri="{A12FA001-AC4F-418D-AE19-62706E023703}">
+                      <ahyp:hlinkClr xmlns:ahyp="http://schemas.microsoft.com/office/drawing/2018/hyperlinkcolor" val="tx"/>
+                    </a:ext>
+                  </a:extLst>
+                </a:hlinkClick>
+              </a:rPr>
+              <a:t>https://claude.com/claude-code</a:t>
+            </a:r>
+            <a:endParaRPr lang="en-US" sz="1500" dirty="0"/>
           </a:p>
         </p:txBody>
       </p:sp>
@@ -11062,7 +11340,7 @@
                 <a:ea typeface="Arial" pitchFamily="34" charset="-122"/>
                 <a:cs typeface="Arial" pitchFamily="34" charset="-120"/>
               </a:rPr>
-              <a:t>Flutter 앱</a:t>
+              <a:t>프로젝트 개요</a:t>
             </a:r>
             <a:endParaRPr lang="en-US" sz="3000" dirty="0"/>
           </a:p>
@@ -11101,7 +11379,7 @@
                 <a:ea typeface="Arial" pitchFamily="34" charset="-122"/>
                 <a:cs typeface="Arial" pitchFamily="34" charset="-120"/>
               </a:rPr>
-              <a:t>동일 Supabase 프로젝트를 그대로 사용</a:t>
+              <a:t>무엇을, 왜 만들고 있는가</a:t>
             </a:r>
             <a:endParaRPr lang="en-US" sz="1600" dirty="0"/>
           </a:p>
@@ -11132,41 +11410,14 @@
       </p:sp>
       <p:sp>
         <p:nvSpPr>
-          <p:cNvPr id="6" name="Shape 4"/>
+          <p:cNvPr id="6" name="Text 4"/>
           <p:cNvSpPr/>
           <p:nvPr/>
         </p:nvSpPr>
         <p:spPr>
           <a:xfrm>
             <a:off x="548640" y="1828800"/>
-            <a:ext cx="11064240" cy="4206240"/>
-          </a:xfrm>
-          <a:prstGeom prst="roundRect">
-            <a:avLst>
-              <a:gd name="adj" fmla="val 1739"/>
-            </a:avLst>
-          </a:prstGeom>
-          <a:solidFill>
-            <a:srgbClr val="202124"/>
-          </a:solidFill>
-          <a:ln w="12700">
-            <a:solidFill>
-              <a:srgbClr val="202124"/>
-            </a:solidFill>
-            <a:prstDash val="solid"/>
-          </a:ln>
-        </p:spPr>
-      </p:sp>
-      <p:sp>
-        <p:nvSpPr>
-          <p:cNvPr id="7" name="Text 5"/>
-          <p:cNvSpPr/>
-          <p:nvPr/>
-        </p:nvSpPr>
-        <p:spPr>
-          <a:xfrm>
-            <a:off x="822960" y="2057400"/>
-            <a:ext cx="10515600" cy="3749040"/>
+            <a:ext cx="11064240" cy="4572000"/>
           </a:xfrm>
           <a:prstGeom prst="rect">
             <a:avLst/>
@@ -11178,157 +11429,109 @@
           <a:bodyPr wrap="square" rtlCol="0" anchor="t"/>
           <a:lstStyle/>
           <a:p>
-            <a:pPr indent="0" marL="0">
-              <a:buNone/>
-            </a:pPr>
-            <a:r>
-              <a:rPr lang="en-US" sz="1500" dirty="0">
-                <a:solidFill>
-                  <a:srgbClr val="F2F2F0"/>
-                </a:solidFill>
-                <a:latin typeface="Menlo" pitchFamily="34" charset="0"/>
-                <a:ea typeface="Menlo" pitchFamily="34" charset="-122"/>
-                <a:cs typeface="Menlo" pitchFamily="34" charset="-120"/>
-              </a:rPr>
-              <a:t>flutter_app/lib/</a:t>
-            </a:r>
-            <a:endParaRPr lang="en-US" sz="1500" dirty="0"/>
-          </a:p>
-          <a:p>
-            <a:pPr indent="0" marL="0">
-              <a:buNone/>
-            </a:pPr>
-            <a:r>
-              <a:rPr lang="en-US" sz="1500" dirty="0">
-                <a:solidFill>
-                  <a:srgbClr val="F2F2F0"/>
-                </a:solidFill>
-                <a:latin typeface="Menlo" pitchFamily="34" charset="0"/>
-                <a:ea typeface="Menlo" pitchFamily="34" charset="-122"/>
-                <a:cs typeface="Menlo" pitchFamily="34" charset="-120"/>
-              </a:rPr>
-              <a:t>├─ constants.dart        # Supabase URL / anon key</a:t>
-            </a:r>
-            <a:endParaRPr lang="en-US" sz="1500" dirty="0"/>
-          </a:p>
-          <a:p>
-            <a:pPr indent="0" marL="0">
-              <a:buNone/>
-            </a:pPr>
-            <a:r>
-              <a:rPr lang="en-US" sz="1500" dirty="0">
-                <a:solidFill>
-                  <a:srgbClr val="F2F2F0"/>
-                </a:solidFill>
-                <a:latin typeface="Menlo" pitchFamily="34" charset="0"/>
-                <a:ea typeface="Menlo" pitchFamily="34" charset="-122"/>
-                <a:cs typeface="Menlo" pitchFamily="34" charset="-120"/>
-              </a:rPr>
-              <a:t>├─ theme/                # AppColors, AppTheme (웹과 동일 팔레트)</a:t>
-            </a:r>
-            <a:endParaRPr lang="en-US" sz="1500" dirty="0"/>
-          </a:p>
-          <a:p>
-            <a:pPr indent="0" marL="0">
-              <a:buNone/>
-            </a:pPr>
-            <a:r>
-              <a:rPr lang="en-US" sz="1500" dirty="0">
-                <a:solidFill>
-                  <a:srgbClr val="F2F2F0"/>
-                </a:solidFill>
-                <a:latin typeface="Menlo" pitchFamily="34" charset="0"/>
-                <a:ea typeface="Menlo" pitchFamily="34" charset="-122"/>
-                <a:cs typeface="Menlo" pitchFamily="34" charset="-120"/>
-              </a:rPr>
-              <a:t>├─ i18n/                 # dictionaries.dart (웹과 동일 문구)</a:t>
-            </a:r>
-            <a:endParaRPr lang="en-US" sz="1500" dirty="0"/>
-          </a:p>
-          <a:p>
-            <a:pPr indent="0" marL="0">
-              <a:buNone/>
-            </a:pPr>
-            <a:r>
-              <a:rPr lang="en-US" sz="1500" dirty="0">
-                <a:solidFill>
-                  <a:srgbClr val="F2F2F0"/>
-                </a:solidFill>
-                <a:latin typeface="Menlo" pitchFamily="34" charset="0"/>
-                <a:ea typeface="Menlo" pitchFamily="34" charset="-122"/>
-                <a:cs typeface="Menlo" pitchFamily="34" charset="-120"/>
-              </a:rPr>
-              <a:t>├─ state/                # AppPreferences (locale/theme, SharedPreferences)</a:t>
-            </a:r>
-            <a:endParaRPr lang="en-US" sz="1500" dirty="0"/>
-          </a:p>
-          <a:p>
-            <a:pPr indent="0" marL="0">
-              <a:buNone/>
-            </a:pPr>
-            <a:r>
-              <a:rPr lang="en-US" sz="1500" dirty="0">
-                <a:solidFill>
-                  <a:srgbClr val="F2F2F0"/>
-                </a:solidFill>
-                <a:latin typeface="Menlo" pitchFamily="34" charset="0"/>
-                <a:ea typeface="Menlo" pitchFamily="34" charset="-122"/>
-                <a:cs typeface="Menlo" pitchFamily="34" charset="-120"/>
-              </a:rPr>
-              <a:t>├─ services/              # Repository (posts/likes/follows/profiles 쿼리)</a:t>
-            </a:r>
-            <a:endParaRPr lang="en-US" sz="1500" dirty="0"/>
-          </a:p>
-          <a:p>
-            <a:pPr indent="0" marL="0">
-              <a:buNone/>
-            </a:pPr>
-            <a:r>
-              <a:rPr lang="en-US" sz="1500" dirty="0">
-                <a:solidFill>
-                  <a:srgbClr val="F2F2F0"/>
-                </a:solidFill>
-                <a:latin typeface="Menlo" pitchFamily="34" charset="0"/>
-                <a:ea typeface="Menlo" pitchFamily="34" charset="-122"/>
-                <a:cs typeface="Menlo" pitchFamily="34" charset="-120"/>
-              </a:rPr>
-              <a:t>├─ models/                # Profile, Post</a:t>
-            </a:r>
-            <a:endParaRPr lang="en-US" sz="1500" dirty="0"/>
-          </a:p>
-          <a:p>
-            <a:pPr indent="0" marL="0">
-              <a:buNone/>
-            </a:pPr>
-            <a:r>
-              <a:rPr lang="en-US" sz="1500" dirty="0">
-                <a:solidFill>
-                  <a:srgbClr val="F2F2F0"/>
-                </a:solidFill>
-                <a:latin typeface="Menlo" pitchFamily="34" charset="0"/>
-                <a:ea typeface="Menlo" pitchFamily="34" charset="-122"/>
-                <a:cs typeface="Menlo" pitchFamily="34" charset="-120"/>
-              </a:rPr>
-              <a:t>├─ screens/               # Login, Signup, Feed, NewPost, Profile</a:t>
-            </a:r>
-            <a:endParaRPr lang="en-US" sz="1500" dirty="0"/>
-          </a:p>
-          <a:p>
-            <a:pPr indent="0" marL="0">
-              <a:buNone/>
-            </a:pPr>
-            <a:r>
-              <a:rPr lang="en-US" sz="1500" dirty="0">
-                <a:solidFill>
-                  <a:srgbClr val="F2F2F0"/>
-                </a:solidFill>
-                <a:latin typeface="Menlo" pitchFamily="34" charset="0"/>
-                <a:ea typeface="Menlo" pitchFamily="34" charset="-122"/>
-                <a:cs typeface="Menlo" pitchFamily="34" charset="-120"/>
-              </a:rPr>
-              <a:t>└─ widgets/               # PostCard, LikeButton, FollowButton</a:t>
-            </a:r>
-            <a:endParaRPr lang="en-US" sz="1500" dirty="0"/>
+            <a:pPr marL="342900" indent="-342900">
+              <a:lnSpc>
+                <a:spcPct val="135000"/>
+              </a:lnSpc>
+              <a:buSzPct val="100000"/>
+              <a:buChar char="•"/>
+            </a:pPr>
+            <a:r>
+              <a:rPr lang="en-US" sz="1800" dirty="0">
+                <a:solidFill>
+                  <a:srgbClr val="F2F2F0"/>
+                </a:solidFill>
+                <a:latin typeface="Arial" pitchFamily="34" charset="0"/>
+                <a:ea typeface="Arial" pitchFamily="34" charset="-122"/>
+                <a:cs typeface="Arial" pitchFamily="34" charset="-120"/>
+              </a:rPr>
+              <a:t>Threads(스레드)를 벤치마킹한 소셜 앱 — 짧은 글 피드, 좋아요, 팔로우</a:t>
+            </a:r>
+            <a:endParaRPr lang="en-US" sz="1800" dirty="0"/>
+          </a:p>
+          <a:p>
+            <a:pPr marL="342900" indent="-342900">
+              <a:lnSpc>
+                <a:spcPct val="135000"/>
+              </a:lnSpc>
+              <a:buSzPct val="100000"/>
+              <a:buChar char="•"/>
+            </a:pPr>
+            <a:r>
+              <a:rPr lang="en-US" sz="1800" dirty="0">
+                <a:solidFill>
+                  <a:srgbClr val="F2F2F0"/>
+                </a:solidFill>
+                <a:latin typeface="Arial" pitchFamily="34" charset="0"/>
+                <a:ea typeface="Arial" pitchFamily="34" charset="-122"/>
+                <a:cs typeface="Arial" pitchFamily="34" charset="-120"/>
+              </a:rPr>
+              <a:t>백엔드는 Supabase 하나로 통일: Postgres + Auth + RLS + (추후) Storage/Realtime</a:t>
+            </a:r>
+            <a:endParaRPr lang="en-US" sz="1800" dirty="0"/>
+          </a:p>
+          <a:p>
+            <a:pPr marL="342900" indent="-342900">
+              <a:lnSpc>
+                <a:spcPct val="135000"/>
+              </a:lnSpc>
+              <a:buSzPct val="100000"/>
+              <a:buChar char="•"/>
+            </a:pPr>
+            <a:r>
+              <a:rPr lang="en-US" sz="1800" dirty="0">
+                <a:solidFill>
+                  <a:srgbClr val="F2F2F0"/>
+                </a:solidFill>
+                <a:latin typeface="Arial" pitchFamily="34" charset="0"/>
+                <a:ea typeface="Arial" pitchFamily="34" charset="-122"/>
+                <a:cs typeface="Arial" pitchFamily="34" charset="-120"/>
+              </a:rPr>
+              <a:t>클라이언트는 세 개: 웹(Next.js 16), 네이티브 앱(Flutter), 관리자 웹(Next.js)</a:t>
+            </a:r>
+            <a:endParaRPr lang="en-US" sz="1800" dirty="0"/>
+          </a:p>
+          <a:p>
+            <a:pPr marL="342900" indent="-342900">
+              <a:lnSpc>
+                <a:spcPct val="135000"/>
+              </a:lnSpc>
+              <a:buSzPct val="100000"/>
+              <a:buChar char="•"/>
+            </a:pPr>
+            <a:r>
+              <a:rPr lang="en-US" sz="1800" dirty="0">
+                <a:solidFill>
+                  <a:srgbClr val="F2F2F0"/>
+                </a:solidFill>
+                <a:latin typeface="Arial" pitchFamily="34" charset="0"/>
+                <a:ea typeface="Arial" pitchFamily="34" charset="-122"/>
+                <a:cs typeface="Arial" pitchFamily="34" charset="-120"/>
+              </a:rPr>
+              <a:t>Flutter는 macOS/Windows/Android/iOS/Web까지 한 코드베이스로 커버</a:t>
+            </a:r>
+            <a:endParaRPr lang="en-US" sz="1800" dirty="0"/>
+          </a:p>
+          <a:p>
+            <a:pPr marL="342900" indent="-342900">
+              <a:lnSpc>
+                <a:spcPct val="135000"/>
+              </a:lnSpc>
+              <a:buSzPct val="100000"/>
+              <a:buChar char="•"/>
+            </a:pPr>
+            <a:r>
+              <a:rPr lang="en-US" sz="1800" dirty="0">
+                <a:solidFill>
+                  <a:srgbClr val="F2F2F0"/>
+                </a:solidFill>
+                <a:latin typeface="Arial" pitchFamily="34" charset="0"/>
+                <a:ea typeface="Arial" pitchFamily="34" charset="-122"/>
+                <a:cs typeface="Arial" pitchFamily="34" charset="-120"/>
+              </a:rPr>
+              <a:t>리포지토리 하나 안에서 각 앱을 폴더로 분리하는 모노리포 구조</a:t>
+            </a:r>
+            <a:endParaRPr lang="en-US" sz="1800" dirty="0"/>
           </a:p>
         </p:txBody>
       </p:sp>
@@ -11436,7 +11639,7 @@
                 <a:ea typeface="Arial" pitchFamily="34" charset="-122"/>
                 <a:cs typeface="Arial" pitchFamily="34" charset="-120"/>
               </a:rPr>
-              <a:t>관리자 앱</a:t>
+              <a:t>데이터 모델</a:t>
             </a:r>
             <a:endParaRPr lang="en-US" sz="3000" dirty="0"/>
           </a:p>
@@ -11475,7 +11678,7 @@
                 <a:ea typeface="Arial" pitchFamily="34" charset="-122"/>
                 <a:cs typeface="Arial" pitchFamily="34" charset="-120"/>
               </a:rPr>
-              <a:t>같은 Supabase 프로젝트, RLS로 권한 분리</a:t>
+              <a:t>supabase/schema.sql</a:t>
             </a:r>
             <a:endParaRPr lang="en-US" sz="1600" dirty="0"/>
           </a:p>
@@ -11506,14 +11709,41 @@
       </p:sp>
       <p:sp>
         <p:nvSpPr>
-          <p:cNvPr id="6" name="Text 4"/>
+          <p:cNvPr id="6" name="Shape 4"/>
           <p:cNvSpPr/>
           <p:nvPr/>
         </p:nvSpPr>
         <p:spPr>
           <a:xfrm>
             <a:off x="548640" y="1828800"/>
-            <a:ext cx="11064240" cy="4572000"/>
+            <a:ext cx="11064240" cy="4206240"/>
+          </a:xfrm>
+          <a:prstGeom prst="roundRect">
+            <a:avLst>
+              <a:gd name="adj" fmla="val 1739"/>
+            </a:avLst>
+          </a:prstGeom>
+          <a:solidFill>
+            <a:srgbClr val="202124"/>
+          </a:solidFill>
+          <a:ln w="12700">
+            <a:solidFill>
+              <a:srgbClr val="202124"/>
+            </a:solidFill>
+            <a:prstDash val="solid"/>
+          </a:ln>
+        </p:spPr>
+      </p:sp>
+      <p:sp>
+        <p:nvSpPr>
+          <p:cNvPr id="7" name="Text 5"/>
+          <p:cNvSpPr/>
+          <p:nvPr/>
+        </p:nvSpPr>
+        <p:spPr>
+          <a:xfrm>
+            <a:off x="822960" y="2057400"/>
+            <a:ext cx="10515600" cy="3749040"/>
           </a:xfrm>
           <a:prstGeom prst="rect">
             <a:avLst/>
@@ -11525,109 +11755,124 @@
           <a:bodyPr wrap="square" rtlCol="0" anchor="t"/>
           <a:lstStyle/>
           <a:p>
-            <a:pPr marL="342900" indent="-342900">
-              <a:lnSpc>
-                <a:spcPct val="135000"/>
-              </a:lnSpc>
-              <a:buSzPct val="100000"/>
-              <a:buChar char="•"/>
-            </a:pPr>
-            <a:r>
-              <a:rPr lang="en-US" sz="1800" dirty="0">
-                <a:solidFill>
-                  <a:srgbClr val="F2F2F0"/>
-                </a:solidFill>
-                <a:latin typeface="Arial" pitchFamily="34" charset="0"/>
-                <a:ea typeface="Arial" pitchFamily="34" charset="-122"/>
-                <a:cs typeface="Arial" pitchFamily="34" charset="-120"/>
-              </a:rPr>
-              <a:t>별도 Next.js 앱 (admin/) — 서비스 role 키 없이 anon 키 + RLS만으로 동작</a:t>
-            </a:r>
-            <a:endParaRPr lang="en-US" sz="1800" dirty="0"/>
-          </a:p>
-          <a:p>
-            <a:pPr marL="342900" indent="-342900">
-              <a:lnSpc>
-                <a:spcPct val="135000"/>
-              </a:lnSpc>
-              <a:buSzPct val="100000"/>
-              <a:buChar char="•"/>
-            </a:pPr>
-            <a:r>
-              <a:rPr lang="en-US" sz="1800" dirty="0">
-                <a:solidFill>
-                  <a:srgbClr val="F2F2F0"/>
-                </a:solidFill>
-                <a:latin typeface="Arial" pitchFamily="34" charset="0"/>
-                <a:ea typeface="Arial" pitchFamily="34" charset="-122"/>
-                <a:cs typeface="Arial" pitchFamily="34" charset="-120"/>
-              </a:rPr>
-              <a:t>profiles.is_admin 컬럼 + is_admin() security definer 함수로 권한 판정</a:t>
-            </a:r>
-            <a:endParaRPr lang="en-US" sz="1800" dirty="0"/>
-          </a:p>
-          <a:p>
-            <a:pPr marL="342900" indent="-342900">
-              <a:lnSpc>
-                <a:spcPct val="135000"/>
-              </a:lnSpc>
-              <a:buSzPct val="100000"/>
-              <a:buChar char="•"/>
-            </a:pPr>
-            <a:r>
-              <a:rPr lang="en-US" sz="1800" dirty="0">
-                <a:solidFill>
-                  <a:srgbClr val="F2F2F0"/>
-                </a:solidFill>
-                <a:latin typeface="Arial" pitchFamily="34" charset="0"/>
-                <a:ea typeface="Arial" pitchFamily="34" charset="-122"/>
-                <a:cs typeface="Arial" pitchFamily="34" charset="-120"/>
-              </a:rPr>
-              <a:t>관리자만 다른 사람의 프로필 수정(정지 처리) / 게시물 삭제 가능하도록 RLS 정책 추가</a:t>
-            </a:r>
-            <a:endParaRPr lang="en-US" sz="1800" dirty="0"/>
-          </a:p>
-          <a:p>
-            <a:pPr marL="342900" indent="-342900">
-              <a:lnSpc>
-                <a:spcPct val="135000"/>
-              </a:lnSpc>
-              <a:buSzPct val="100000"/>
-              <a:buChar char="•"/>
-            </a:pPr>
-            <a:r>
-              <a:rPr lang="en-US" sz="1800" dirty="0">
-                <a:solidFill>
-                  <a:srgbClr val="F2F2F0"/>
-                </a:solidFill>
-                <a:latin typeface="Arial" pitchFamily="34" charset="0"/>
-                <a:ea typeface="Arial" pitchFamily="34" charset="-122"/>
-                <a:cs typeface="Arial" pitchFamily="34" charset="-120"/>
-              </a:rPr>
-              <a:t>is_banned=true인 계정은 새 글/좋아요/팔로우 작성이 RLS에서 자동 차단</a:t>
-            </a:r>
-            <a:endParaRPr lang="en-US" sz="1800" dirty="0"/>
-          </a:p>
-          <a:p>
-            <a:pPr marL="342900" indent="-342900">
-              <a:lnSpc>
-                <a:spcPct val="135000"/>
-              </a:lnSpc>
-              <a:buSzPct val="100000"/>
-              <a:buChar char="•"/>
-            </a:pPr>
-            <a:r>
-              <a:rPr lang="en-US" sz="1800" dirty="0">
-                <a:solidFill>
-                  <a:srgbClr val="F2F2F0"/>
-                </a:solidFill>
-                <a:latin typeface="Arial" pitchFamily="34" charset="0"/>
-                <a:ea typeface="Arial" pitchFamily="34" charset="-122"/>
-                <a:cs typeface="Arial" pitchFamily="34" charset="-120"/>
-              </a:rPr>
-              <a:t>첫 관리자는 SQL로 직접 지정: update profiles set is_admin=true where id=…</a:t>
-            </a:r>
-            <a:endParaRPr lang="en-US" sz="1800" dirty="0"/>
+            <a:pPr indent="0" marL="0">
+              <a:buNone/>
+            </a:pPr>
+            <a:r>
+              <a:rPr lang="en-US" sz="1700" dirty="0">
+                <a:solidFill>
+                  <a:srgbClr val="F2F2F0"/>
+                </a:solidFill>
+                <a:latin typeface="Menlo" pitchFamily="34" charset="0"/>
+                <a:ea typeface="Menlo" pitchFamily="34" charset="-122"/>
+                <a:cs typeface="Menlo" pitchFamily="34" charset="-120"/>
+              </a:rPr>
+              <a:t>profiles   id(uuid, = auth.users.id) · username(unique) · display_name</a:t>
+            </a:r>
+            <a:endParaRPr lang="en-US" sz="1700" dirty="0"/>
+          </a:p>
+          <a:p>
+            <a:pPr indent="0" marL="0">
+              <a:buNone/>
+            </a:pPr>
+            <a:r>
+              <a:rPr lang="en-US" sz="1700" dirty="0">
+                <a:solidFill>
+                  <a:srgbClr val="F2F2F0"/>
+                </a:solidFill>
+                <a:latin typeface="Menlo" pitchFamily="34" charset="0"/>
+                <a:ea typeface="Menlo" pitchFamily="34" charset="-122"/>
+                <a:cs typeface="Menlo" pitchFamily="34" charset="-120"/>
+              </a:rPr>
+              <a:t>           avatar_url · bio · is_admin · is_banned</a:t>
+            </a:r>
+            <a:endParaRPr lang="en-US" sz="1700" dirty="0"/>
+          </a:p>
+          <a:p>
+            <a:pPr indent="0" marL="0">
+              <a:buNone/>
+            </a:pPr>
+            <a:endParaRPr lang="en-US" sz="1700" dirty="0"/>
+          </a:p>
+          <a:p>
+            <a:pPr indent="0" marL="0">
+              <a:buNone/>
+            </a:pPr>
+            <a:r>
+              <a:rPr lang="en-US" sz="1700" dirty="0">
+                <a:solidFill>
+                  <a:srgbClr val="F2F2F0"/>
+                </a:solidFill>
+                <a:latin typeface="Menlo" pitchFamily="34" charset="0"/>
+                <a:ea typeface="Menlo" pitchFamily="34" charset="-122"/>
+                <a:cs typeface="Menlo" pitchFamily="34" charset="-120"/>
+              </a:rPr>
+              <a:t>posts      id · author_id → profiles.id · content · reply_to_id(nullable)</a:t>
+            </a:r>
+            <a:endParaRPr lang="en-US" sz="1700" dirty="0"/>
+          </a:p>
+          <a:p>
+            <a:pPr indent="0" marL="0">
+              <a:buNone/>
+            </a:pPr>
+            <a:endParaRPr lang="en-US" sz="1700" dirty="0"/>
+          </a:p>
+          <a:p>
+            <a:pPr indent="0" marL="0">
+              <a:buNone/>
+            </a:pPr>
+            <a:r>
+              <a:rPr lang="en-US" sz="1700" dirty="0">
+                <a:solidFill>
+                  <a:srgbClr val="F2F2F0"/>
+                </a:solidFill>
+                <a:latin typeface="Menlo" pitchFamily="34" charset="0"/>
+                <a:ea typeface="Menlo" pitchFamily="34" charset="-122"/>
+                <a:cs typeface="Menlo" pitchFamily="34" charset="-120"/>
+              </a:rPr>
+              <a:t>likes      post_id → posts.id · user_id → profiles.id  (복합 PK)</a:t>
+            </a:r>
+            <a:endParaRPr lang="en-US" sz="1700" dirty="0"/>
+          </a:p>
+          <a:p>
+            <a:pPr indent="0" marL="0">
+              <a:buNone/>
+            </a:pPr>
+            <a:endParaRPr lang="en-US" sz="1700" dirty="0"/>
+          </a:p>
+          <a:p>
+            <a:pPr indent="0" marL="0">
+              <a:buNone/>
+            </a:pPr>
+            <a:r>
+              <a:rPr lang="en-US" sz="1700" dirty="0">
+                <a:solidFill>
+                  <a:srgbClr val="F2F2F0"/>
+                </a:solidFill>
+                <a:latin typeface="Menlo" pitchFamily="34" charset="0"/>
+                <a:ea typeface="Menlo" pitchFamily="34" charset="-122"/>
+                <a:cs typeface="Menlo" pitchFamily="34" charset="-120"/>
+              </a:rPr>
+              <a:t>follows    follower_id → profiles.id · following_id → profiles.id</a:t>
+            </a:r>
+            <a:endParaRPr lang="en-US" sz="1700" dirty="0"/>
+          </a:p>
+          <a:p>
+            <a:pPr indent="0" marL="0">
+              <a:buNone/>
+            </a:pPr>
+            <a:r>
+              <a:rPr lang="en-US" sz="1700" dirty="0">
+                <a:solidFill>
+                  <a:srgbClr val="F2F2F0"/>
+                </a:solidFill>
+                <a:latin typeface="Menlo" pitchFamily="34" charset="0"/>
+                <a:ea typeface="Menlo" pitchFamily="34" charset="-122"/>
+                <a:cs typeface="Menlo" pitchFamily="34" charset="-120"/>
+              </a:rPr>
+              <a:t>           (복합 PK, follower ≠ following 체크 제약)</a:t>
+            </a:r>
+            <a:endParaRPr lang="en-US" sz="1700" dirty="0"/>
           </a:p>
         </p:txBody>
       </p:sp>
@@ -11735,7 +11980,7 @@
                 <a:ea typeface="Arial" pitchFamily="34" charset="-122"/>
                 <a:cs typeface="Arial" pitchFamily="34" charset="-120"/>
               </a:rPr>
-              <a:t>Claude Code 실행하기</a:t>
+              <a:t>인증 흐름</a:t>
             </a:r>
             <a:endParaRPr lang="en-US" sz="3000" dirty="0"/>
           </a:p>
@@ -11774,7 +12019,7 @@
                 <a:ea typeface="Arial" pitchFamily="34" charset="-122"/>
                 <a:cs typeface="Arial" pitchFamily="34" charset="-120"/>
               </a:rPr>
-              <a:t>터미널에서 대화하며 코드를 만드는 AI 도구</a:t>
+              <a:t>Supabase Auth + 자동 프로필 생성</a:t>
             </a:r>
             <a:endParaRPr lang="en-US" sz="1600" dirty="0"/>
           </a:p>
@@ -11840,7 +12085,7 @@
                 <a:ea typeface="Arial" pitchFamily="34" charset="-122"/>
                 <a:cs typeface="Arial" pitchFamily="34" charset="-120"/>
               </a:rPr>
-              <a:t>설치: npm install -g @anthropic-ai/claude-code (또는 공식 설치 스크립트)</a:t>
+              <a:t>가입: 이메일 + 비밀번호만 입력 (아이디는 받지 않음)</a:t>
             </a:r>
             <a:endParaRPr lang="en-US" sz="1800" dirty="0"/>
           </a:p>
@@ -11861,7 +12106,7 @@
                 <a:ea typeface="Arial" pitchFamily="34" charset="-122"/>
                 <a:cs typeface="Arial" pitchFamily="34" charset="-120"/>
               </a:rPr>
-              <a:t>프로젝트 폴더로 이동한 뒤 터미널에 claude 라고 치면 대화가 시작됨</a:t>
+              <a:t>auth.users insert 시 handle_new_user 트리거가 profiles row를 자동 생성</a:t>
             </a:r>
             <a:endParaRPr lang="en-US" sz="1800" dirty="0"/>
           </a:p>
@@ -11882,7 +12127,7 @@
                 <a:ea typeface="Arial" pitchFamily="34" charset="-122"/>
                 <a:cs typeface="Arial" pitchFamily="34" charset="-120"/>
               </a:rPr>
-              <a:t>'로그인 페이지 만들어줘' 처럼 자연어로 요청하면 파일을 직접 읽고, 쓰고, 필요하면 명령어(빌드/테스트/git)까지 실행함</a:t>
+              <a:t>username이 없으면 user_&lt;uuid앞8자리&gt;, display_name은 이메일 앞부분으로 대체</a:t>
             </a:r>
             <a:endParaRPr lang="en-US" sz="1800" dirty="0"/>
           </a:p>
@@ -11903,7 +12148,7 @@
                 <a:ea typeface="Arial" pitchFamily="34" charset="-122"/>
                 <a:cs typeface="Arial" pitchFamily="34" charset="-120"/>
               </a:rPr>
-              <a:t>사람이 코드를 복사·붙여넣기 하지 않아도 됨 — 결과물을 바로 프로젝트 안에 반영</a:t>
+              <a:t>이메일 확인(confirm email)이 켜져 있어 인증 전엔 로그인 불가 → /login?confirm=1 안내</a:t>
             </a:r>
             <a:endParaRPr lang="en-US" sz="1800" dirty="0"/>
           </a:p>
@@ -11924,7 +12169,7 @@
                 <a:ea typeface="Arial" pitchFamily="34" charset="-122"/>
                 <a:cs typeface="Arial" pitchFamily="34" charset="-120"/>
               </a:rPr>
-              <a:t>이 오리엔테이션 문서와 소셜 플로우 프로젝트 전체가 Claude Code와의 대화로 만들어졌음</a:t>
+              <a:t>모든 테이블에 RLS 적용: 읽기는 공개, 쓰기는 auth.uid()가 본인 것일 때만 허용</a:t>
             </a:r>
             <a:endParaRPr lang="en-US" sz="1800" dirty="0"/>
           </a:p>
@@ -12034,7 +12279,7 @@
                 <a:ea typeface="Arial" pitchFamily="34" charset="-122"/>
                 <a:cs typeface="Arial" pitchFamily="34" charset="-120"/>
               </a:rPr>
-              <a:t>Claude Code 데모</a:t>
+              <a:t>웹 앱 (Next.js 16)</a:t>
             </a:r>
             <a:endParaRPr lang="en-US" sz="3000" dirty="0"/>
           </a:p>
@@ -12073,7 +12318,7 @@
                 <a:ea typeface="Arial" pitchFamily="34" charset="-122"/>
                 <a:cs typeface="Arial" pitchFamily="34" charset="-120"/>
               </a:rPr>
-              <a:t>제일 간단한 예시로 감 잡기: 자기소개 페이지</a:t>
+              <a:t>화면 대부분은 서버가 미리 완성해서 보내줌</a:t>
             </a:r>
             <a:endParaRPr lang="en-US" sz="1600" dirty="0"/>
           </a:p>
@@ -12104,41 +12349,14 @@
       </p:sp>
       <p:sp>
         <p:nvSpPr>
-          <p:cNvPr id="6" name="Shape 4"/>
+          <p:cNvPr id="6" name="Text 4"/>
           <p:cNvSpPr/>
           <p:nvPr/>
         </p:nvSpPr>
         <p:spPr>
           <a:xfrm>
             <a:off x="548640" y="1828800"/>
-            <a:ext cx="11064240" cy="4206240"/>
-          </a:xfrm>
-          <a:prstGeom prst="roundRect">
-            <a:avLst>
-              <a:gd name="adj" fmla="val 1739"/>
-            </a:avLst>
-          </a:prstGeom>
-          <a:solidFill>
-            <a:srgbClr val="202124"/>
-          </a:solidFill>
-          <a:ln w="12700">
-            <a:solidFill>
-              <a:srgbClr val="202124"/>
-            </a:solidFill>
-            <a:prstDash val="solid"/>
-          </a:ln>
-        </p:spPr>
-      </p:sp>
-      <p:sp>
-        <p:nvSpPr>
-          <p:cNvPr id="7" name="Text 5"/>
-          <p:cNvSpPr/>
-          <p:nvPr/>
-        </p:nvSpPr>
-        <p:spPr>
-          <a:xfrm>
-            <a:off x="822960" y="2057400"/>
-            <a:ext cx="10515600" cy="3749040"/>
+            <a:ext cx="11064240" cy="4572000"/>
           </a:xfrm>
           <a:prstGeom prst="rect">
             <a:avLst/>
@@ -12150,169 +12368,109 @@
           <a:bodyPr wrap="square" rtlCol="0" anchor="t"/>
           <a:lstStyle/>
           <a:p>
-            <a:pPr indent="0" marL="0">
-              <a:buNone/>
-            </a:pPr>
-            <a:r>
-              <a:rPr lang="en-US" sz="1500" dirty="0">
-                <a:solidFill>
-                  <a:srgbClr val="F2F2F0"/>
-                </a:solidFill>
-                <a:latin typeface="Menlo" pitchFamily="34" charset="0"/>
-                <a:ea typeface="Menlo" pitchFamily="34" charset="-122"/>
-                <a:cs typeface="Menlo" pitchFamily="34" charset="-120"/>
-              </a:rPr>
-              <a:t>내가 입력:</a:t>
-            </a:r>
-            <a:endParaRPr lang="en-US" sz="1500" dirty="0"/>
-          </a:p>
-          <a:p>
-            <a:pPr indent="0" marL="0">
-              <a:buNone/>
-            </a:pPr>
-            <a:r>
-              <a:rPr lang="en-US" sz="1500" dirty="0">
-                <a:solidFill>
-                  <a:srgbClr val="F2F2F0"/>
-                </a:solidFill>
-                <a:latin typeface="Menlo" pitchFamily="34" charset="0"/>
-                <a:ea typeface="Menlo" pitchFamily="34" charset="-122"/>
-                <a:cs typeface="Menlo" pitchFamily="34" charset="-120"/>
-              </a:rPr>
-              <a:t>  "html/css로 자기소개 웹페이지 하나 만들어줘.</a:t>
-            </a:r>
-            <a:endParaRPr lang="en-US" sz="1500" dirty="0"/>
-          </a:p>
-          <a:p>
-            <a:pPr indent="0" marL="0">
-              <a:buNone/>
-            </a:pPr>
-            <a:r>
-              <a:rPr lang="en-US" sz="1500" dirty="0">
-                <a:solidFill>
-                  <a:srgbClr val="F2F2F0"/>
-                </a:solidFill>
-                <a:latin typeface="Menlo" pitchFamily="34" charset="0"/>
-                <a:ea typeface="Menlo" pitchFamily="34" charset="-122"/>
-                <a:cs typeface="Menlo" pitchFamily="34" charset="-120"/>
-              </a:rPr>
-              <a:t>   이름, 사진, 한 줄 소개, 연락처가 들어가면 좋겠어."</a:t>
-            </a:r>
-            <a:endParaRPr lang="en-US" sz="1500" dirty="0"/>
-          </a:p>
-          <a:p>
-            <a:pPr indent="0" marL="0">
-              <a:buNone/>
-            </a:pPr>
-            <a:endParaRPr lang="en-US" sz="1500" dirty="0"/>
-          </a:p>
-          <a:p>
-            <a:pPr indent="0" marL="0">
-              <a:buNone/>
-            </a:pPr>
-            <a:r>
-              <a:rPr lang="en-US" sz="1500" dirty="0">
-                <a:solidFill>
-                  <a:srgbClr val="F2F2F0"/>
-                </a:solidFill>
-                <a:latin typeface="Menlo" pitchFamily="34" charset="0"/>
-                <a:ea typeface="Menlo" pitchFamily="34" charset="-122"/>
-                <a:cs typeface="Menlo" pitchFamily="34" charset="-120"/>
-              </a:rPr>
-              <a:t>Claude Code가 하는 일:</a:t>
-            </a:r>
-            <a:endParaRPr lang="en-US" sz="1500" dirty="0"/>
-          </a:p>
-          <a:p>
-            <a:pPr indent="0" marL="0">
-              <a:buNone/>
-            </a:pPr>
-            <a:r>
-              <a:rPr lang="en-US" sz="1500" dirty="0">
-                <a:solidFill>
-                  <a:srgbClr val="F2F2F0"/>
-                </a:solidFill>
-                <a:latin typeface="Menlo" pitchFamily="34" charset="0"/>
-                <a:ea typeface="Menlo" pitchFamily="34" charset="-122"/>
-                <a:cs typeface="Menlo" pitchFamily="34" charset="-120"/>
-              </a:rPr>
-              <a:t>  1. index.html, style.css 파일을 새로 만듦</a:t>
-            </a:r>
-            <a:endParaRPr lang="en-US" sz="1500" dirty="0"/>
-          </a:p>
-          <a:p>
-            <a:pPr indent="0" marL="0">
-              <a:buNone/>
-            </a:pPr>
-            <a:r>
-              <a:rPr lang="en-US" sz="1500" dirty="0">
-                <a:solidFill>
-                  <a:srgbClr val="F2F2F0"/>
-                </a:solidFill>
-                <a:latin typeface="Menlo" pitchFamily="34" charset="0"/>
-                <a:ea typeface="Menlo" pitchFamily="34" charset="-122"/>
-                <a:cs typeface="Menlo" pitchFamily="34" charset="-120"/>
-              </a:rPr>
-              <a:t>  2. 이름/사진/소개/연락처 영역을 채워 넣음</a:t>
-            </a:r>
-            <a:endParaRPr lang="en-US" sz="1500" dirty="0"/>
-          </a:p>
-          <a:p>
-            <a:pPr indent="0" marL="0">
-              <a:buNone/>
-            </a:pPr>
-            <a:r>
-              <a:rPr lang="en-US" sz="1500" dirty="0">
-                <a:solidFill>
-                  <a:srgbClr val="F2F2F0"/>
-                </a:solidFill>
-                <a:latin typeface="Menlo" pitchFamily="34" charset="0"/>
-                <a:ea typeface="Menlo" pitchFamily="34" charset="-122"/>
-                <a:cs typeface="Menlo" pitchFamily="34" charset="-120"/>
-              </a:rPr>
-              <a:t>  3. 브라우저로 열어서 결과를 바로 확인할 수 있게 안내</a:t>
-            </a:r>
-            <a:endParaRPr lang="en-US" sz="1500" dirty="0"/>
-          </a:p>
-          <a:p>
-            <a:pPr indent="0" marL="0">
-              <a:buNone/>
-            </a:pPr>
-            <a:endParaRPr lang="en-US" sz="1500" dirty="0"/>
-          </a:p>
-          <a:p>
-            <a:pPr indent="0" marL="0">
-              <a:buNone/>
-            </a:pPr>
-            <a:r>
-              <a:rPr lang="en-US" sz="1500" dirty="0">
-                <a:solidFill>
-                  <a:srgbClr val="F2F2F0"/>
-                </a:solidFill>
-                <a:latin typeface="Menlo" pitchFamily="34" charset="0"/>
-                <a:ea typeface="Menlo" pitchFamily="34" charset="-122"/>
-                <a:cs typeface="Menlo" pitchFamily="34" charset="-120"/>
-              </a:rPr>
-              <a:t>포인트: 복잡한 프로젝트(소셜 플로우)도 원리는 똑같음 —</a:t>
-            </a:r>
-            <a:endParaRPr lang="en-US" sz="1500" dirty="0"/>
-          </a:p>
-          <a:p>
-            <a:pPr indent="0" marL="0">
-              <a:buNone/>
-            </a:pPr>
-            <a:r>
-              <a:rPr lang="en-US" sz="1500" dirty="0">
-                <a:solidFill>
-                  <a:srgbClr val="F2F2F0"/>
-                </a:solidFill>
-                <a:latin typeface="Menlo" pitchFamily="34" charset="0"/>
-                <a:ea typeface="Menlo" pitchFamily="34" charset="-122"/>
-                <a:cs typeface="Menlo" pitchFamily="34" charset="-120"/>
-              </a:rPr>
-              <a:t>        '무엇을 만들고 싶은지'를 문장으로 여러 번 주고받는 것의 반복</a:t>
-            </a:r>
-            <a:endParaRPr lang="en-US" sz="1500" dirty="0"/>
+            <a:pPr marL="342900" indent="-342900">
+              <a:lnSpc>
+                <a:spcPct val="135000"/>
+              </a:lnSpc>
+              <a:buSzPct val="100000"/>
+              <a:buChar char="•"/>
+            </a:pPr>
+            <a:r>
+              <a:rPr lang="en-US" sz="1600" dirty="0">
+                <a:solidFill>
+                  <a:srgbClr val="F2F2F0"/>
+                </a:solidFill>
+                <a:latin typeface="Arial" pitchFamily="34" charset="0"/>
+                <a:ea typeface="Arial" pitchFamily="34" charset="-122"/>
+                <a:cs typeface="Arial" pitchFamily="34" charset="-120"/>
+              </a:rPr>
+              <a:t>화면 대부분이 '서버 컴포넌트'예요 — 브라우저가 아니라 서버에서 Supabase 데이터를 미리 가져와 완성된 화면으로 보내줘요 (그래서 더 빠르고, 검색엔진에도 잘 보여요)</a:t>
+            </a:r>
+            <a:endParaRPr lang="en-US" sz="1600" dirty="0"/>
+          </a:p>
+          <a:p>
+            <a:pPr marL="342900" indent="-342900">
+              <a:lnSpc>
+                <a:spcPct val="135000"/>
+              </a:lnSpc>
+              <a:buSzPct val="100000"/>
+              <a:buChar char="•"/>
+            </a:pPr>
+            <a:r>
+              <a:rPr lang="en-US" sz="1600" dirty="0">
+                <a:solidFill>
+                  <a:srgbClr val="F2F2F0"/>
+                </a:solidFill>
+                <a:latin typeface="Arial" pitchFamily="34" charset="0"/>
+                <a:ea typeface="Arial" pitchFamily="34" charset="-122"/>
+                <a:cs typeface="Arial" pitchFamily="34" charset="-120"/>
+              </a:rPr>
+              <a:t>좋아요·팔로우·글쓰기·로그인처럼 '뭔가를 바꾸는' 동작은 'Server Action'이라는 방식으로 처리해요 — 버튼을 누르면 서버 쪽 함수가 바로 실행돼요 (API를 따로 안 만들어도 됨)</a:t>
+            </a:r>
+            <a:endParaRPr lang="en-US" sz="1600" dirty="0"/>
+          </a:p>
+          <a:p>
+            <a:pPr marL="342900" indent="-342900">
+              <a:lnSpc>
+                <a:spcPct val="135000"/>
+              </a:lnSpc>
+              <a:buSzPct val="100000"/>
+              <a:buChar char="•"/>
+            </a:pPr>
+            <a:r>
+              <a:rPr lang="en-US" sz="1600" dirty="0">
+                <a:solidFill>
+                  <a:srgbClr val="F2F2F0"/>
+                </a:solidFill>
+                <a:latin typeface="Arial" pitchFamily="34" charset="0"/>
+                <a:ea typeface="Arial" pitchFamily="34" charset="-122"/>
+                <a:cs typeface="Arial" pitchFamily="34" charset="-120"/>
+              </a:rPr>
+              <a:t>모든 요청은 먼저 프록시(proxy, 예전 이름은 middleware)를 한 번 거쳐가요 — 여기서 로그인 상태를 확인하고, 안 됐으면 로그인 페이지로 돌려보내요</a:t>
+            </a:r>
+            <a:endParaRPr lang="en-US" sz="1600" dirty="0"/>
+          </a:p>
+          <a:p>
+            <a:pPr marL="342900" indent="-342900">
+              <a:lnSpc>
+                <a:spcPct val="135000"/>
+              </a:lnSpc>
+              <a:buSzPct val="100000"/>
+              <a:buChar char="•"/>
+            </a:pPr>
+            <a:r>
+              <a:rPr lang="en-US" sz="1600" dirty="0">
+                <a:solidFill>
+                  <a:srgbClr val="F2F2F0"/>
+                </a:solidFill>
+                <a:latin typeface="Arial" pitchFamily="34" charset="0"/>
+                <a:ea typeface="Arial" pitchFamily="34" charset="-122"/>
+                <a:cs typeface="Arial" pitchFamily="34" charset="-120"/>
+              </a:rPr>
+              <a:t>Supabase에 접속하는 코드는 브라우저용/서버용으로 나뉘어 있어요 — 브라우저에서 접속하는 방법과 서버에서 접속하는 방법이 조금 다르기 때문이에요</a:t>
+            </a:r>
+            <a:endParaRPr lang="en-US" sz="1600" dirty="0"/>
+          </a:p>
+          <a:p>
+            <a:pPr marL="342900" indent="-342900">
+              <a:lnSpc>
+                <a:spcPct val="135000"/>
+              </a:lnSpc>
+              <a:buSzPct val="100000"/>
+              <a:buChar char="•"/>
+            </a:pPr>
+            <a:r>
+              <a:rPr lang="en-US" sz="1600" dirty="0">
+                <a:solidFill>
+                  <a:srgbClr val="F2F2F0"/>
+                </a:solidFill>
+                <a:latin typeface="Arial" pitchFamily="34" charset="0"/>
+                <a:ea typeface="Arial" pitchFamily="34" charset="-122"/>
+                <a:cs typeface="Arial" pitchFamily="34" charset="-120"/>
+              </a:rPr>
+              <a:t>로컬에서는 3721번 포트로 개발 서버를 띄워요 — pnpm dev 명령어 한 줄이면 끝</a:t>
+            </a:r>
+            <a:endParaRPr lang="en-US" sz="1600" dirty="0"/>
           </a:p>
         </p:txBody>
       </p:sp>
@@ -12420,7 +12578,7 @@
                 <a:ea typeface="Arial" pitchFamily="34" charset="-122"/>
                 <a:cs typeface="Arial" pitchFamily="34" charset="-120"/>
               </a:rPr>
-              <a:t>이 프로젝트 Clone 받아서 실행하기</a:t>
+              <a:t>다국어 &amp; 테마</a:t>
             </a:r>
             <a:endParaRPr lang="en-US" sz="3000" dirty="0"/>
           </a:p>
@@ -12428,7 +12586,46 @@
       </p:sp>
       <p:sp>
         <p:nvSpPr>
-          <p:cNvPr id="4" name="Shape 2"/>
+          <p:cNvPr id="4" name="Text 2"/>
+          <p:cNvSpPr/>
+          <p:nvPr/>
+        </p:nvSpPr>
+        <p:spPr>
+          <a:xfrm>
+            <a:off x="548640" y="1005840"/>
+            <a:ext cx="11064240" cy="457200"/>
+          </a:xfrm>
+          <a:prstGeom prst="rect">
+            <a:avLst/>
+          </a:prstGeom>
+          <a:noFill/>
+          <a:ln/>
+        </p:spPr>
+        <p:txBody>
+          <a:bodyPr wrap="square" rtlCol="0" anchor="ctr"/>
+          <a:lstStyle/>
+          <a:p>
+            <a:pPr indent="0" marL="0">
+              <a:buNone/>
+            </a:pPr>
+            <a:r>
+              <a:rPr lang="en-US" sz="1600" dirty="0">
+                <a:solidFill>
+                  <a:srgbClr val="98999D"/>
+                </a:solidFill>
+                <a:latin typeface="Arial" pitchFamily="34" charset="0"/>
+                <a:ea typeface="Arial" pitchFamily="34" charset="-122"/>
+                <a:cs typeface="Arial" pitchFamily="34" charset="-120"/>
+              </a:rPr>
+              <a:t>쿠키 기반, 서버에서 렌더링</a:t>
+            </a:r>
+            <a:endParaRPr lang="en-US" sz="1600" dirty="0"/>
+          </a:p>
+        </p:txBody>
+      </p:sp>
+      <p:sp>
+        <p:nvSpPr>
+          <p:cNvPr id="5" name="Shape 3"/>
           <p:cNvSpPr/>
           <p:nvPr/>
         </p:nvSpPr>
@@ -12451,41 +12648,14 @@
       </p:sp>
       <p:sp>
         <p:nvSpPr>
-          <p:cNvPr id="5" name="Shape 3"/>
+          <p:cNvPr id="6" name="Text 4"/>
           <p:cNvSpPr/>
           <p:nvPr/>
         </p:nvSpPr>
         <p:spPr>
           <a:xfrm>
             <a:off x="548640" y="1828800"/>
-            <a:ext cx="11064240" cy="4206240"/>
-          </a:xfrm>
-          <a:prstGeom prst="roundRect">
-            <a:avLst>
-              <a:gd name="adj" fmla="val 1739"/>
-            </a:avLst>
-          </a:prstGeom>
-          <a:solidFill>
-            <a:srgbClr val="202124"/>
-          </a:solidFill>
-          <a:ln w="12700">
-            <a:solidFill>
-              <a:srgbClr val="202124"/>
-            </a:solidFill>
-            <a:prstDash val="solid"/>
-          </a:ln>
-        </p:spPr>
-      </p:sp>
-      <p:sp>
-        <p:nvSpPr>
-          <p:cNvPr id="6" name="Text 4"/>
-          <p:cNvSpPr/>
-          <p:nvPr/>
-        </p:nvSpPr>
-        <p:spPr>
-          <a:xfrm>
-            <a:off x="822960" y="2057400"/>
-            <a:ext cx="10515600" cy="3749040"/>
+            <a:ext cx="11064240" cy="4572000"/>
           </a:xfrm>
           <a:prstGeom prst="rect">
             <a:avLst/>
@@ -12497,198 +12667,109 @@
           <a:bodyPr wrap="square" rtlCol="0" anchor="t"/>
           <a:lstStyle/>
           <a:p>
-            <a:pPr indent="0" marL="0">
-              <a:buNone/>
-            </a:pPr>
-            <a:r>
-              <a:rPr lang="en-US" sz="1500" dirty="0">
-                <a:solidFill>
-                  <a:srgbClr val="F2F2F0"/>
-                </a:solidFill>
-                <a:latin typeface="Menlo" pitchFamily="34" charset="0"/>
-                <a:ea typeface="Menlo" pitchFamily="34" charset="-122"/>
-                <a:cs typeface="Menlo" pitchFamily="34" charset="-120"/>
-              </a:rPr>
-              <a:t>git clone https://github.com/white100s/social_flow.git</a:t>
-            </a:r>
-            <a:endParaRPr lang="en-US" sz="1500" dirty="0"/>
-          </a:p>
-          <a:p>
-            <a:pPr indent="0" marL="0">
-              <a:buNone/>
-            </a:pPr>
-            <a:r>
-              <a:rPr lang="en-US" sz="1500" dirty="0">
-                <a:solidFill>
-                  <a:srgbClr val="F2F2F0"/>
-                </a:solidFill>
-                <a:latin typeface="Menlo" pitchFamily="34" charset="0"/>
-                <a:ea typeface="Menlo" pitchFamily="34" charset="-122"/>
-                <a:cs typeface="Menlo" pitchFamily="34" charset="-120"/>
-              </a:rPr>
-              <a:t>cd social_flow</a:t>
-            </a:r>
-            <a:endParaRPr lang="en-US" sz="1500" dirty="0"/>
-          </a:p>
-          <a:p>
-            <a:pPr indent="0" marL="0">
-              <a:buNone/>
-            </a:pPr>
-            <a:endParaRPr lang="en-US" sz="1500" dirty="0"/>
-          </a:p>
-          <a:p>
-            <a:pPr indent="0" marL="0">
-              <a:buNone/>
-            </a:pPr>
-            <a:r>
-              <a:rPr lang="en-US" sz="1500" dirty="0">
-                <a:solidFill>
-                  <a:srgbClr val="F2F2F0"/>
-                </a:solidFill>
-                <a:latin typeface="Menlo" pitchFamily="34" charset="0"/>
-                <a:ea typeface="Menlo" pitchFamily="34" charset="-122"/>
-                <a:cs typeface="Menlo" pitchFamily="34" charset="-120"/>
-              </a:rPr>
-              <a:t># 웹 (Next.js)</a:t>
-            </a:r>
-            <a:endParaRPr lang="en-US" sz="1500" dirty="0"/>
-          </a:p>
-          <a:p>
-            <a:pPr indent="0" marL="0">
-              <a:buNone/>
-            </a:pPr>
-            <a:r>
-              <a:rPr lang="en-US" sz="1500" dirty="0">
-                <a:solidFill>
-                  <a:srgbClr val="F2F2F0"/>
-                </a:solidFill>
-                <a:latin typeface="Menlo" pitchFamily="34" charset="0"/>
-                <a:ea typeface="Menlo" pitchFamily="34" charset="-122"/>
-                <a:cs typeface="Menlo" pitchFamily="34" charset="-120"/>
-              </a:rPr>
-              <a:t>pnpm install &amp;&amp; pnpm dev        # http://localhost:3721</a:t>
-            </a:r>
-            <a:endParaRPr lang="en-US" sz="1500" dirty="0"/>
-          </a:p>
-          <a:p>
-            <a:pPr indent="0" marL="0">
-              <a:buNone/>
-            </a:pPr>
-            <a:endParaRPr lang="en-US" sz="1500" dirty="0"/>
-          </a:p>
-          <a:p>
-            <a:pPr indent="0" marL="0">
-              <a:buNone/>
-            </a:pPr>
-            <a:r>
-              <a:rPr lang="en-US" sz="1500" dirty="0">
-                <a:solidFill>
-                  <a:srgbClr val="F2F2F0"/>
-                </a:solidFill>
-                <a:latin typeface="Menlo" pitchFamily="34" charset="0"/>
-                <a:ea typeface="Menlo" pitchFamily="34" charset="-122"/>
-                <a:cs typeface="Menlo" pitchFamily="34" charset="-120"/>
-              </a:rPr>
-              <a:t># 관리자 앱</a:t>
-            </a:r>
-            <a:endParaRPr lang="en-US" sz="1500" dirty="0"/>
-          </a:p>
-          <a:p>
-            <a:pPr indent="0" marL="0">
-              <a:buNone/>
-            </a:pPr>
-            <a:r>
-              <a:rPr lang="en-US" sz="1500" dirty="0">
-                <a:solidFill>
-                  <a:srgbClr val="F2F2F0"/>
-                </a:solidFill>
-                <a:latin typeface="Menlo" pitchFamily="34" charset="0"/>
-                <a:ea typeface="Menlo" pitchFamily="34" charset="-122"/>
-                <a:cs typeface="Menlo" pitchFamily="34" charset="-120"/>
-              </a:rPr>
-              <a:t>cd admin &amp;&amp; pnpm install &amp;&amp; pnpm dev   # http://localhost:3722</a:t>
-            </a:r>
-            <a:endParaRPr lang="en-US" sz="1500" dirty="0"/>
-          </a:p>
-          <a:p>
-            <a:pPr indent="0" marL="0">
-              <a:buNone/>
-            </a:pPr>
-            <a:endParaRPr lang="en-US" sz="1500" dirty="0"/>
-          </a:p>
-          <a:p>
-            <a:pPr indent="0" marL="0">
-              <a:buNone/>
-            </a:pPr>
-            <a:r>
-              <a:rPr lang="en-US" sz="1500" dirty="0">
-                <a:solidFill>
-                  <a:srgbClr val="F2F2F0"/>
-                </a:solidFill>
-                <a:latin typeface="Menlo" pitchFamily="34" charset="0"/>
-                <a:ea typeface="Menlo" pitchFamily="34" charset="-122"/>
-                <a:cs typeface="Menlo" pitchFamily="34" charset="-120"/>
-              </a:rPr>
-              <a:t># Flutter</a:t>
-            </a:r>
-            <a:endParaRPr lang="en-US" sz="1500" dirty="0"/>
-          </a:p>
-          <a:p>
-            <a:pPr indent="0" marL="0">
-              <a:buNone/>
-            </a:pPr>
-            <a:r>
-              <a:rPr lang="en-US" sz="1500" dirty="0">
-                <a:solidFill>
-                  <a:srgbClr val="F2F2F0"/>
-                </a:solidFill>
-                <a:latin typeface="Menlo" pitchFamily="34" charset="0"/>
-                <a:ea typeface="Menlo" pitchFamily="34" charset="-122"/>
-                <a:cs typeface="Menlo" pitchFamily="34" charset="-120"/>
-              </a:rPr>
-              <a:t>cd flutter_app &amp;&amp; flutter pub get &amp;&amp; flutter run -d chrome</a:t>
-            </a:r>
-            <a:endParaRPr lang="en-US" sz="1500" dirty="0"/>
-          </a:p>
-          <a:p>
-            <a:pPr indent="0" marL="0">
-              <a:buNone/>
-            </a:pPr>
-            <a:endParaRPr lang="en-US" sz="1500" dirty="0"/>
-          </a:p>
-          <a:p>
-            <a:pPr indent="0" marL="0">
-              <a:buNone/>
-            </a:pPr>
-            <a:r>
-              <a:rPr lang="en-US" sz="1500" dirty="0">
-                <a:solidFill>
-                  <a:srgbClr val="F2F2F0"/>
-                </a:solidFill>
-                <a:latin typeface="Menlo" pitchFamily="34" charset="0"/>
-                <a:ea typeface="Menlo" pitchFamily="34" charset="-122"/>
-                <a:cs typeface="Menlo" pitchFamily="34" charset="-120"/>
-              </a:rPr>
-              <a:t># DB 스키마 적용 (최초 1회, 재실행해도 안전)</a:t>
-            </a:r>
-            <a:endParaRPr lang="en-US" sz="1500" dirty="0"/>
-          </a:p>
-          <a:p>
-            <a:pPr indent="0" marL="0">
-              <a:buNone/>
-            </a:pPr>
-            <a:r>
-              <a:rPr lang="en-US" sz="1500" dirty="0">
-                <a:solidFill>
-                  <a:srgbClr val="F2F2F0"/>
-                </a:solidFill>
-                <a:latin typeface="Menlo" pitchFamily="34" charset="0"/>
-                <a:ea typeface="Menlo" pitchFamily="34" charset="-122"/>
-                <a:cs typeface="Menlo" pitchFamily="34" charset="-120"/>
-              </a:rPr>
-              <a:t>Supabase 대시보드 → SQL Editor → supabase/schema.sql 실행</a:t>
-            </a:r>
-            <a:endParaRPr lang="en-US" sz="1500" dirty="0"/>
+            <a:pPr marL="342900" indent="-342900">
+              <a:lnSpc>
+                <a:spcPct val="135000"/>
+              </a:lnSpc>
+              <a:buSzPct val="100000"/>
+              <a:buChar char="•"/>
+            </a:pPr>
+            <a:r>
+              <a:rPr lang="en-US" sz="1800" dirty="0">
+                <a:solidFill>
+                  <a:srgbClr val="F2F2F0"/>
+                </a:solidFill>
+                <a:latin typeface="Arial" pitchFamily="34" charset="0"/>
+                <a:ea typeface="Arial" pitchFamily="34" charset="-122"/>
+                <a:cs typeface="Arial" pitchFamily="34" charset="-120"/>
+              </a:rPr>
+              <a:t>한국어 / 영어 지원 — src/lib/i18n/dictionaries.ts 에 모든 문구 집중</a:t>
+            </a:r>
+            <a:endParaRPr lang="en-US" sz="1800" dirty="0"/>
+          </a:p>
+          <a:p>
+            <a:pPr marL="342900" indent="-342900">
+              <a:lnSpc>
+                <a:spcPct val="135000"/>
+              </a:lnSpc>
+              <a:buSzPct val="100000"/>
+              <a:buChar char="•"/>
+            </a:pPr>
+            <a:r>
+              <a:rPr lang="en-US" sz="1800" dirty="0">
+                <a:solidFill>
+                  <a:srgbClr val="F2F2F0"/>
+                </a:solidFill>
+                <a:latin typeface="Arial" pitchFamily="34" charset="0"/>
+                <a:ea typeface="Arial" pitchFamily="34" charset="-122"/>
+                <a:cs typeface="Arial" pitchFamily="34" charset="-120"/>
+              </a:rPr>
+              <a:t>locale 쿠키로 서버 컴포넌트에서 바로 알맞은 언어 렌더링 (클라이언트 JS 불필요)</a:t>
+            </a:r>
+            <a:endParaRPr lang="en-US" sz="1800" dirty="0"/>
+          </a:p>
+          <a:p>
+            <a:pPr marL="342900" indent="-342900">
+              <a:lnSpc>
+                <a:spcPct val="135000"/>
+              </a:lnSpc>
+              <a:buSzPct val="100000"/>
+              <a:buChar char="•"/>
+            </a:pPr>
+            <a:r>
+              <a:rPr lang="en-US" sz="1800" dirty="0">
+                <a:solidFill>
+                  <a:srgbClr val="F2F2F0"/>
+                </a:solidFill>
+                <a:latin typeface="Arial" pitchFamily="34" charset="0"/>
+                <a:ea typeface="Arial" pitchFamily="34" charset="-122"/>
+                <a:cs typeface="Arial" pitchFamily="34" charset="-120"/>
+              </a:rPr>
+              <a:t>다크 / 라이트 테마도 동일 패턴 — theme 쿠키 + data-theme 속성</a:t>
+            </a:r>
+            <a:endParaRPr lang="en-US" sz="1800" dirty="0"/>
+          </a:p>
+          <a:p>
+            <a:pPr marL="342900" indent="-342900">
+              <a:lnSpc>
+                <a:spcPct val="135000"/>
+              </a:lnSpc>
+              <a:buSzPct val="100000"/>
+              <a:buChar char="•"/>
+            </a:pPr>
+            <a:r>
+              <a:rPr lang="en-US" sz="1800" dirty="0">
+                <a:solidFill>
+                  <a:srgbClr val="F2F2F0"/>
+                </a:solidFill>
+                <a:latin typeface="Arial" pitchFamily="34" charset="0"/>
+                <a:ea typeface="Arial" pitchFamily="34" charset="-122"/>
+                <a:cs typeface="Arial" pitchFamily="34" charset="-120"/>
+              </a:rPr>
+              <a:t>다크 모드는 순검정 대신 부드러운 차콜(#17181A) 사용</a:t>
+            </a:r>
+            <a:endParaRPr lang="en-US" sz="1800" dirty="0"/>
+          </a:p>
+          <a:p>
+            <a:pPr marL="342900" indent="-342900">
+              <a:lnSpc>
+                <a:spcPct val="135000"/>
+              </a:lnSpc>
+              <a:buSzPct val="100000"/>
+              <a:buChar char="•"/>
+            </a:pPr>
+            <a:r>
+              <a:rPr lang="en-US" sz="1800" dirty="0">
+                <a:solidFill>
+                  <a:srgbClr val="F2F2F0"/>
+                </a:solidFill>
+                <a:latin typeface="Arial" pitchFamily="34" charset="0"/>
+                <a:ea typeface="Arial" pitchFamily="34" charset="-122"/>
+                <a:cs typeface="Arial" pitchFamily="34" charset="-120"/>
+              </a:rPr>
+              <a:t>Flutter 앱도 동일한 문구·색상 토큰을 그대로 이식 (lib/i18n, lib/theme)</a:t>
+            </a:r>
+            <a:endParaRPr lang="en-US" sz="1800" dirty="0"/>
           </a:p>
         </p:txBody>
       </p:sp>
@@ -12796,7 +12877,7 @@
                 <a:ea typeface="Arial" pitchFamily="34" charset="-122"/>
                 <a:cs typeface="Arial" pitchFamily="34" charset="-120"/>
               </a:rPr>
-              <a:t>파일 구조 설명</a:t>
+              <a:t>Flutter 앱</a:t>
             </a:r>
             <a:endParaRPr lang="en-US" sz="3000" dirty="0"/>
           </a:p>
@@ -12835,7 +12916,7 @@
                 <a:ea typeface="Arial" pitchFamily="34" charset="-122"/>
                 <a:cs typeface="Arial" pitchFamily="34" charset="-120"/>
               </a:rPr>
-              <a:t>모노리포 폴더 배치</a:t>
+              <a:t>동일 Supabase 프로젝트를 그대로 사용</a:t>
             </a:r>
             <a:endParaRPr lang="en-US" sz="1600" dirty="0"/>
           </a:p>
@@ -12924,7 +13005,7 @@
                 <a:ea typeface="Menlo" pitchFamily="34" charset="-122"/>
                 <a:cs typeface="Menlo" pitchFamily="34" charset="-120"/>
               </a:rPr>
-              <a:t>social_flows/</a:t>
+              <a:t>flutter_app/lib/</a:t>
             </a:r>
             <a:endParaRPr lang="en-US" sz="1500" dirty="0"/>
           </a:p>
@@ -12941,7 +13022,7 @@
                 <a:ea typeface="Menlo" pitchFamily="34" charset="-122"/>
                 <a:cs typeface="Menlo" pitchFamily="34" charset="-120"/>
               </a:rPr>
-              <a:t>├─ src/                 # Next.js 16 웹 앱 (App Router) · 포트 3721</a:t>
+              <a:t>├─ constants.dart        # Supabase URL / anon key</a:t>
             </a:r>
             <a:endParaRPr lang="en-US" sz="1500" dirty="0"/>
           </a:p>
@@ -12958,7 +13039,7 @@
                 <a:ea typeface="Menlo" pitchFamily="34" charset="-122"/>
                 <a:cs typeface="Menlo" pitchFamily="34" charset="-120"/>
               </a:rPr>
-              <a:t>│   ├─ app/              # 라우트: /, /login, /signup, /new, /profile/[username]</a:t>
+              <a:t>├─ theme/                # AppColors, AppTheme (웹과 동일 팔레트)</a:t>
             </a:r>
             <a:endParaRPr lang="en-US" sz="1500" dirty="0"/>
           </a:p>
@@ -12975,7 +13056,7 @@
                 <a:ea typeface="Menlo" pitchFamily="34" charset="-122"/>
                 <a:cs typeface="Menlo" pitchFamily="34" charset="-120"/>
               </a:rPr>
-              <a:t>│   ├─ components/       # Header, PostCard, LikeButton, FollowButton …</a:t>
+              <a:t>├─ i18n/                 # dictionaries.dart (웹과 동일 문구)</a:t>
             </a:r>
             <a:endParaRPr lang="en-US" sz="1500" dirty="0"/>
           </a:p>
@@ -12992,7 +13073,7 @@
                 <a:ea typeface="Menlo" pitchFamily="34" charset="-122"/>
                 <a:cs typeface="Menlo" pitchFamily="34" charset="-120"/>
               </a:rPr>
-              <a:t>│   └─ lib/              # supabase 클라이언트, i18n 사전, theme</a:t>
+              <a:t>├─ state/                # AppPreferences (locale/theme, SharedPreferences)</a:t>
             </a:r>
             <a:endParaRPr lang="en-US" sz="1500" dirty="0"/>
           </a:p>
@@ -13009,7 +13090,7 @@
                 <a:ea typeface="Menlo" pitchFamily="34" charset="-122"/>
                 <a:cs typeface="Menlo" pitchFamily="34" charset="-120"/>
               </a:rPr>
-              <a:t>├─ admin/                # 관리자 웹 앱 (Next.js) · 포트 3722</a:t>
+              <a:t>├─ services/              # Repository (posts/likes/follows/profiles 쿼리)</a:t>
             </a:r>
             <a:endParaRPr lang="en-US" sz="1500" dirty="0"/>
           </a:p>
@@ -13026,7 +13107,7 @@
                 <a:ea typeface="Menlo" pitchFamily="34" charset="-122"/>
                 <a:cs typeface="Menlo" pitchFamily="34" charset="-120"/>
               </a:rPr>
-              <a:t>│   └─ src/app/          # /login, /(대시보드), /users, /posts</a:t>
+              <a:t>├─ models/                # Profile, Post</a:t>
             </a:r>
             <a:endParaRPr lang="en-US" sz="1500" dirty="0"/>
           </a:p>
@@ -13043,7 +13124,7 @@
                 <a:ea typeface="Menlo" pitchFamily="34" charset="-122"/>
                 <a:cs typeface="Menlo" pitchFamily="34" charset="-120"/>
               </a:rPr>
-              <a:t>├─ supabase/</a:t>
+              <a:t>├─ screens/               # Login, Signup, Feed, NewPost, Profile</a:t>
             </a:r>
             <a:endParaRPr lang="en-US" sz="1500" dirty="0"/>
           </a:p>
@@ -13060,58 +13141,7 @@
                 <a:ea typeface="Menlo" pitchFamily="34" charset="-122"/>
                 <a:cs typeface="Menlo" pitchFamily="34" charset="-120"/>
               </a:rPr>
-              <a:t>│   └─ schema.sql        # 모든 테이블 + RLS + 관리자 정책, 하나의 파일로 통합</a:t>
-            </a:r>
-            <a:endParaRPr lang="en-US" sz="1500" dirty="0"/>
-          </a:p>
-          <a:p>
-            <a:pPr indent="0" marL="0">
-              <a:buNone/>
-            </a:pPr>
-            <a:r>
-              <a:rPr lang="en-US" sz="1500" dirty="0">
-                <a:solidFill>
-                  <a:srgbClr val="F2F2F0"/>
-                </a:solidFill>
-                <a:latin typeface="Menlo" pitchFamily="34" charset="0"/>
-                <a:ea typeface="Menlo" pitchFamily="34" charset="-122"/>
-                <a:cs typeface="Menlo" pitchFamily="34" charset="-120"/>
-              </a:rPr>
-              <a:t>├─ flutter_app/          # Flutter 클라이언트 (macOS/Windows/Android/iOS/Web)</a:t>
-            </a:r>
-            <a:endParaRPr lang="en-US" sz="1500" dirty="0"/>
-          </a:p>
-          <a:p>
-            <a:pPr indent="0" marL="0">
-              <a:buNone/>
-            </a:pPr>
-            <a:r>
-              <a:rPr lang="en-US" sz="1500" dirty="0">
-                <a:solidFill>
-                  <a:srgbClr val="F2F2F0"/>
-                </a:solidFill>
-                <a:latin typeface="Menlo" pitchFamily="34" charset="0"/>
-                <a:ea typeface="Menlo" pitchFamily="34" charset="-122"/>
-                <a:cs typeface="Menlo" pitchFamily="34" charset="-120"/>
-              </a:rPr>
-              <a:t>│   └─ lib/               # screens/, widgets/, services/, i18n/, theme/</a:t>
-            </a:r>
-            <a:endParaRPr lang="en-US" sz="1500" dirty="0"/>
-          </a:p>
-          <a:p>
-            <a:pPr indent="0" marL="0">
-              <a:buNone/>
-            </a:pPr>
-            <a:r>
-              <a:rPr lang="en-US" sz="1500" dirty="0">
-                <a:solidFill>
-                  <a:srgbClr val="F2F2F0"/>
-                </a:solidFill>
-                <a:latin typeface="Menlo" pitchFamily="34" charset="0"/>
-                <a:ea typeface="Menlo" pitchFamily="34" charset="-122"/>
-                <a:cs typeface="Menlo" pitchFamily="34" charset="-120"/>
-              </a:rPr>
-              <a:t>└─ docs/                 # 이 오리엔테이션 자료 생성 스크립트</a:t>
+              <a:t>└─ widgets/               # PostCard, LikeButton, FollowButton</a:t>
             </a:r>
             <a:endParaRPr lang="en-US" sz="1500" dirty="0"/>
           </a:p>
@@ -13221,7 +13251,7 @@
                 <a:ea typeface="Arial" pitchFamily="34" charset="-122"/>
                 <a:cs typeface="Arial" pitchFamily="34" charset="-120"/>
               </a:rPr>
-              <a:t>다음 단계</a:t>
+              <a:t>관리자 앱</a:t>
             </a:r>
             <a:endParaRPr lang="en-US" sz="3000" dirty="0"/>
           </a:p>
@@ -13260,7 +13290,7 @@
                 <a:ea typeface="Arial" pitchFamily="34" charset="-122"/>
                 <a:cs typeface="Arial" pitchFamily="34" charset="-120"/>
               </a:rPr>
-              <a:t>아직 안 된 것들</a:t>
+              <a:t>같은 Supabase 프로젝트, RLS로 권한 분리</a:t>
             </a:r>
             <a:endParaRPr lang="en-US" sz="1600" dirty="0"/>
           </a:p>
@@ -13326,7 +13356,7 @@
                 <a:ea typeface="Arial" pitchFamily="34" charset="-122"/>
                 <a:cs typeface="Arial" pitchFamily="34" charset="-120"/>
               </a:rPr>
-              <a:t>답글(스레드) UI — posts.reply_to_id는 이미 스키마에 있음</a:t>
+              <a:t>별도 Next.js 앱 (admin/) — 서비스 role 키 없이 anon 키 + RLS만으로 동작</a:t>
             </a:r>
             <a:endParaRPr lang="en-US" sz="1800" dirty="0"/>
           </a:p>
@@ -13347,7 +13377,7 @@
                 <a:ea typeface="Arial" pitchFamily="34" charset="-122"/>
                 <a:cs typeface="Arial" pitchFamily="34" charset="-120"/>
               </a:rPr>
-              <a:t>이미지 업로드 (Supabase Storage)</a:t>
+              <a:t>profiles.is_admin 컬럼 + is_admin() security definer 함수로 권한 판정</a:t>
             </a:r>
             <a:endParaRPr lang="en-US" sz="1800" dirty="0"/>
           </a:p>
@@ -13368,7 +13398,7 @@
                 <a:ea typeface="Arial" pitchFamily="34" charset="-122"/>
                 <a:cs typeface="Arial" pitchFamily="34" charset="-120"/>
               </a:rPr>
-              <a:t>실시간 피드 업데이트 (Supabase Realtime)</a:t>
+              <a:t>관리자만 다른 사람의 프로필 수정(정지 처리) / 게시물 삭제 가능하도록 RLS 정책 추가</a:t>
             </a:r>
             <a:endParaRPr lang="en-US" sz="1800" dirty="0"/>
           </a:p>
@@ -13389,7 +13419,7 @@
                 <a:ea typeface="Arial" pitchFamily="34" charset="-122"/>
                 <a:cs typeface="Arial" pitchFamily="34" charset="-120"/>
               </a:rPr>
-              <a:t>신고/문의 처리 흐름을 관리자 앱에 추가</a:t>
+              <a:t>is_banned=true인 계정은 새 글/좋아요/팔로우 작성이 RLS에서 자동 차단</a:t>
             </a:r>
             <a:endParaRPr lang="en-US" sz="1800" dirty="0"/>
           </a:p>
@@ -13410,7 +13440,7 @@
                 <a:ea typeface="Arial" pitchFamily="34" charset="-122"/>
                 <a:cs typeface="Arial" pitchFamily="34" charset="-120"/>
               </a:rPr>
-              <a:t>Flutter macOS/iOS는 Xcode 전체 설치 후 빌드 검증 필요, Windows는 Windows 머신에서만</a:t>
+              <a:t>첫 관리자는 SQL로 직접 지정: update profiles set is_admin=true where id=…</a:t>
             </a:r>
             <a:endParaRPr lang="en-US" sz="1800" dirty="0"/>
           </a:p>
@@ -13495,8 +13525,8 @@
         </p:nvSpPr>
         <p:spPr>
           <a:xfrm>
-            <a:off x="731520" y="2560320"/>
-            <a:ext cx="10698480" cy="914400"/>
+            <a:off x="548640" y="365760"/>
+            <a:ext cx="11064240" cy="822960"/>
           </a:xfrm>
           <a:prstGeom prst="rect">
             <a:avLst/>
@@ -13512,17 +13542,17 @@
               <a:buNone/>
             </a:pPr>
             <a:r>
-              <a:rPr lang="en-US" sz="4000" b="1" dirty="0">
-                <a:solidFill>
-                  <a:srgbClr val="F2F2F0"/>
-                </a:solidFill>
-                <a:latin typeface="Arial" pitchFamily="34" charset="0"/>
-                <a:ea typeface="Arial" pitchFamily="34" charset="-122"/>
-                <a:cs typeface="Arial" pitchFamily="34" charset="-120"/>
-              </a:rPr>
-              <a:t>별첨</a:t>
-            </a:r>
-            <a:endParaRPr lang="en-US" sz="4000" dirty="0"/>
+              <a:rPr lang="en-US" sz="3000" b="1" dirty="0">
+                <a:solidFill>
+                  <a:srgbClr val="F2F2F0"/>
+                </a:solidFill>
+                <a:latin typeface="Arial" pitchFamily="34" charset="0"/>
+                <a:ea typeface="Arial" pitchFamily="34" charset="-122"/>
+                <a:cs typeface="Arial" pitchFamily="34" charset="-120"/>
+              </a:rPr>
+              <a:t>Claude Code 실행하기</a:t>
+            </a:r>
+            <a:endParaRPr lang="en-US" sz="3000" dirty="0"/>
           </a:p>
         </p:txBody>
       </p:sp>
@@ -13534,8 +13564,8 @@
         </p:nvSpPr>
         <p:spPr>
           <a:xfrm>
-            <a:off x="731520" y="3383280"/>
-            <a:ext cx="10698480" cy="548640"/>
+            <a:off x="548640" y="1005840"/>
+            <a:ext cx="11064240" cy="457200"/>
           </a:xfrm>
           <a:prstGeom prst="rect">
             <a:avLst/>
@@ -13551,17 +13581,167 @@
               <a:buNone/>
             </a:pPr>
             <a:r>
-              <a:rPr lang="en-US" sz="2000" dirty="0">
-                <a:solidFill>
-                  <a:srgbClr val="5B8DEF"/>
-                </a:solidFill>
-                <a:latin typeface="Arial" pitchFamily="34" charset="0"/>
-                <a:ea typeface="Arial" pitchFamily="34" charset="-122"/>
-                <a:cs typeface="Arial" pitchFamily="34" charset="-120"/>
-              </a:rPr>
-              <a:t>기초 개념을 처음부터 제대로 쌓고 싶다면</a:t>
-            </a:r>
-            <a:endParaRPr lang="en-US" sz="2000" dirty="0"/>
+              <a:rPr lang="en-US" sz="1600" dirty="0">
+                <a:solidFill>
+                  <a:srgbClr val="98999D"/>
+                </a:solidFill>
+                <a:latin typeface="Arial" pitchFamily="34" charset="0"/>
+                <a:ea typeface="Arial" pitchFamily="34" charset="-122"/>
+                <a:cs typeface="Arial" pitchFamily="34" charset="-120"/>
+              </a:rPr>
+              <a:t>터미널에서 대화하며 코드를 만드는 AI 도구</a:t>
+            </a:r>
+            <a:endParaRPr lang="en-US" sz="1600" dirty="0"/>
+          </a:p>
+        </p:txBody>
+      </p:sp>
+      <p:sp>
+        <p:nvSpPr>
+          <p:cNvPr id="5" name="Shape 3"/>
+          <p:cNvSpPr/>
+          <p:nvPr/>
+        </p:nvSpPr>
+        <p:spPr>
+          <a:xfrm>
+            <a:off x="548640" y="1508760"/>
+            <a:ext cx="11064240" cy="0"/>
+          </a:xfrm>
+          <a:prstGeom prst="line">
+            <a:avLst/>
+          </a:prstGeom>
+          <a:noFill/>
+          <a:ln w="19050">
+            <a:solidFill>
+              <a:srgbClr val="202124"/>
+            </a:solidFill>
+            <a:prstDash val="solid"/>
+          </a:ln>
+        </p:spPr>
+      </p:sp>
+      <p:sp>
+        <p:nvSpPr>
+          <p:cNvPr id="6" name="Text 4"/>
+          <p:cNvSpPr/>
+          <p:nvPr/>
+        </p:nvSpPr>
+        <p:spPr>
+          <a:xfrm>
+            <a:off x="548640" y="1828800"/>
+            <a:ext cx="11064240" cy="4572000"/>
+          </a:xfrm>
+          <a:prstGeom prst="rect">
+            <a:avLst/>
+          </a:prstGeom>
+          <a:noFill/>
+          <a:ln/>
+        </p:spPr>
+        <p:txBody>
+          <a:bodyPr wrap="square" rtlCol="0" anchor="t"/>
+          <a:lstStyle/>
+          <a:p>
+            <a:pPr marL="342900" indent="-342900">
+              <a:lnSpc>
+                <a:spcPct val="135000"/>
+              </a:lnSpc>
+              <a:buSzPct val="100000"/>
+              <a:buChar char="•"/>
+            </a:pPr>
+            <a:r>
+              <a:rPr lang="en-US" sz="1800" dirty="0">
+                <a:solidFill>
+                  <a:srgbClr val="F2F2F0"/>
+                </a:solidFill>
+                <a:latin typeface="Arial" pitchFamily="34" charset="0"/>
+                <a:ea typeface="Arial" pitchFamily="34" charset="-122"/>
+                <a:cs typeface="Arial" pitchFamily="34" charset="-120"/>
+              </a:rPr>
+              <a:t>설치: npm install -g @anthropic-ai/claude-code (또는 공식 설치 스크립트)</a:t>
+            </a:r>
+            <a:endParaRPr lang="en-US" sz="1800" dirty="0"/>
+          </a:p>
+          <a:p>
+            <a:pPr marL="342900" indent="-342900">
+              <a:lnSpc>
+                <a:spcPct val="135000"/>
+              </a:lnSpc>
+              <a:buSzPct val="100000"/>
+              <a:buChar char="•"/>
+            </a:pPr>
+            <a:r>
+              <a:rPr lang="en-US" sz="1800" dirty="0">
+                <a:solidFill>
+                  <a:srgbClr val="F2F2F0"/>
+                </a:solidFill>
+                <a:latin typeface="Arial" pitchFamily="34" charset="0"/>
+                <a:ea typeface="Arial" pitchFamily="34" charset="-122"/>
+                <a:cs typeface="Arial" pitchFamily="34" charset="-120"/>
+              </a:rPr>
+              <a:t>프로젝트 폴더로 이동한 뒤 터미널에 claude 라고 치면 대화가 시작됨</a:t>
+            </a:r>
+            <a:endParaRPr lang="en-US" sz="1800" dirty="0"/>
+          </a:p>
+          <a:p>
+            <a:pPr marL="342900" indent="-342900">
+              <a:lnSpc>
+                <a:spcPct val="135000"/>
+              </a:lnSpc>
+              <a:buSzPct val="100000"/>
+              <a:buChar char="•"/>
+            </a:pPr>
+            <a:r>
+              <a:rPr lang="en-US" sz="1800" dirty="0">
+                <a:solidFill>
+                  <a:srgbClr val="F2F2F0"/>
+                </a:solidFill>
+                <a:latin typeface="Arial" pitchFamily="34" charset="0"/>
+                <a:ea typeface="Arial" pitchFamily="34" charset="-122"/>
+                <a:cs typeface="Arial" pitchFamily="34" charset="-120"/>
+              </a:rPr>
+              <a:t>'로그인 페이지 만들어줘' 처럼 자연어로 요청하면 파일을 직접 읽고, 쓰고, 필요하면 명령어(빌드/테스트/git)까지 실행함</a:t>
+            </a:r>
+            <a:endParaRPr lang="en-US" sz="1800" dirty="0"/>
+          </a:p>
+          <a:p>
+            <a:pPr marL="342900" indent="-342900">
+              <a:lnSpc>
+                <a:spcPct val="135000"/>
+              </a:lnSpc>
+              <a:buSzPct val="100000"/>
+              <a:buChar char="•"/>
+            </a:pPr>
+            <a:r>
+              <a:rPr lang="en-US" sz="1800" dirty="0">
+                <a:solidFill>
+                  <a:srgbClr val="F2F2F0"/>
+                </a:solidFill>
+                <a:latin typeface="Arial" pitchFamily="34" charset="0"/>
+                <a:ea typeface="Arial" pitchFamily="34" charset="-122"/>
+                <a:cs typeface="Arial" pitchFamily="34" charset="-120"/>
+              </a:rPr>
+              <a:t>사람이 코드를 복사·붙여넣기 하지 않아도 됨 — 결과물을 바로 프로젝트 안에 반영</a:t>
+            </a:r>
+            <a:endParaRPr lang="en-US" sz="1800" dirty="0"/>
+          </a:p>
+          <a:p>
+            <a:pPr marL="342900" indent="-342900">
+              <a:lnSpc>
+                <a:spcPct val="135000"/>
+              </a:lnSpc>
+              <a:buSzPct val="100000"/>
+              <a:buChar char="•"/>
+            </a:pPr>
+            <a:r>
+              <a:rPr lang="en-US" sz="1800" dirty="0">
+                <a:solidFill>
+                  <a:srgbClr val="F2F2F0"/>
+                </a:solidFill>
+                <a:latin typeface="Arial" pitchFamily="34" charset="0"/>
+                <a:ea typeface="Arial" pitchFamily="34" charset="-122"/>
+                <a:cs typeface="Arial" pitchFamily="34" charset="-120"/>
+              </a:rPr>
+              <a:t>이 오리엔테이션 문서와 소셜 플로우 프로젝트 전체가 Claude Code와의 대화로 만들어졌음</a:t>
+            </a:r>
+            <a:endParaRPr lang="en-US" sz="1800" dirty="0"/>
           </a:p>
         </p:txBody>
       </p:sp>
@@ -13669,7 +13849,7 @@
                 <a:ea typeface="Arial" pitchFamily="34" charset="-122"/>
                 <a:cs typeface="Arial" pitchFamily="34" charset="-120"/>
               </a:rPr>
-              <a:t>추천 사이트</a:t>
+              <a:t>Claude Code 데모</a:t>
             </a:r>
             <a:endParaRPr lang="en-US" sz="3000" dirty="0"/>
           </a:p>
@@ -13708,7 +13888,7 @@
                 <a:ea typeface="Arial" pitchFamily="34" charset="-122"/>
                 <a:cs typeface="Arial" pitchFamily="34" charset="-120"/>
               </a:rPr>
-              <a:t>무료로 기초부터 다질 수 있는 곳들</a:t>
+              <a:t>제일 간단한 예시로 감 잡기: 자기소개 페이지</a:t>
             </a:r>
             <a:endParaRPr lang="en-US" sz="1600" dirty="0"/>
           </a:p>
@@ -13739,14 +13919,41 @@
       </p:sp>
       <p:sp>
         <p:nvSpPr>
-          <p:cNvPr id="6" name="Text 4"/>
+          <p:cNvPr id="6" name="Shape 4"/>
           <p:cNvSpPr/>
           <p:nvPr/>
         </p:nvSpPr>
         <p:spPr>
           <a:xfrm>
             <a:off x="548640" y="1828800"/>
-            <a:ext cx="11064240" cy="4572000"/>
+            <a:ext cx="11064240" cy="4206240"/>
+          </a:xfrm>
+          <a:prstGeom prst="roundRect">
+            <a:avLst>
+              <a:gd name="adj" fmla="val 1739"/>
+            </a:avLst>
+          </a:prstGeom>
+          <a:solidFill>
+            <a:srgbClr val="202124"/>
+          </a:solidFill>
+          <a:ln w="12700">
+            <a:solidFill>
+              <a:srgbClr val="202124"/>
+            </a:solidFill>
+            <a:prstDash val="solid"/>
+          </a:ln>
+        </p:spPr>
+      </p:sp>
+      <p:sp>
+        <p:nvSpPr>
+          <p:cNvPr id="7" name="Text 5"/>
+          <p:cNvSpPr/>
+          <p:nvPr/>
+        </p:nvSpPr>
+        <p:spPr>
+          <a:xfrm>
+            <a:off x="822960" y="2057400"/>
+            <a:ext cx="10515600" cy="3749040"/>
           </a:xfrm>
           <a:prstGeom prst="rect">
             <a:avLst/>
@@ -13758,151 +13965,169 @@
           <a:bodyPr wrap="square" rtlCol="0" anchor="t"/>
           <a:lstStyle/>
           <a:p>
-            <a:pPr marL="342900" indent="-342900">
-              <a:lnSpc>
-                <a:spcPct val="135000"/>
-              </a:lnSpc>
-              <a:buSzPct val="100000"/>
-              <a:buChar char="•"/>
-            </a:pPr>
-            <a:r>
-              <a:rPr lang="en-US" sz="1700" dirty="0">
-                <a:solidFill>
-                  <a:srgbClr val="F2F2F0"/>
-                </a:solidFill>
-                <a:latin typeface="Arial" pitchFamily="34" charset="0"/>
-                <a:ea typeface="Arial" pitchFamily="34" charset="-122"/>
-                <a:cs typeface="Arial" pitchFamily="34" charset="-120"/>
-              </a:rPr>
-              <a:t>MDN Web Docs (developer.mozilla.org) — HTML/CSS/JS, 웹 표준 문서의 정석</a:t>
-            </a:r>
-            <a:endParaRPr lang="en-US" sz="1700" dirty="0"/>
-          </a:p>
-          <a:p>
-            <a:pPr marL="342900" indent="-342900">
-              <a:lnSpc>
-                <a:spcPct val="135000"/>
-              </a:lnSpc>
-              <a:buSzPct val="100000"/>
-              <a:buChar char="•"/>
-            </a:pPr>
-            <a:r>
-              <a:rPr lang="en-US" sz="1700" dirty="0">
-                <a:solidFill>
-                  <a:srgbClr val="F2F2F0"/>
-                </a:solidFill>
-                <a:latin typeface="Arial" pitchFamily="34" charset="0"/>
-                <a:ea typeface="Arial" pitchFamily="34" charset="-122"/>
-                <a:cs typeface="Arial" pitchFamily="34" charset="-120"/>
-              </a:rPr>
-              <a:t>생활코딩 (opentutorials.org) — 한국어로 프로그래밍·Git·DB 기초를 처음부터</a:t>
-            </a:r>
-            <a:endParaRPr lang="en-US" sz="1700" dirty="0"/>
-          </a:p>
-          <a:p>
-            <a:pPr marL="342900" indent="-342900">
-              <a:lnSpc>
-                <a:spcPct val="135000"/>
-              </a:lnSpc>
-              <a:buSzPct val="100000"/>
-              <a:buChar char="•"/>
-            </a:pPr>
-            <a:r>
-              <a:rPr lang="en-US" sz="1700" dirty="0">
-                <a:solidFill>
-                  <a:srgbClr val="F2F2F0"/>
-                </a:solidFill>
-                <a:latin typeface="Arial" pitchFamily="34" charset="0"/>
-                <a:ea typeface="Arial" pitchFamily="34" charset="-122"/>
-                <a:cs typeface="Arial" pitchFamily="34" charset="-120"/>
-              </a:rPr>
-              <a:t>freeCodeCamp (freecodecamp.org) — 무료 커리큘럼 + 실습 위주 웹 개발 기초</a:t>
-            </a:r>
-            <a:endParaRPr lang="en-US" sz="1700" dirty="0"/>
-          </a:p>
-          <a:p>
-            <a:pPr marL="342900" indent="-342900">
-              <a:lnSpc>
-                <a:spcPct val="135000"/>
-              </a:lnSpc>
-              <a:buSzPct val="100000"/>
-              <a:buChar char="•"/>
-            </a:pPr>
-            <a:r>
-              <a:rPr lang="en-US" sz="1700" dirty="0">
-                <a:solidFill>
-                  <a:srgbClr val="F2F2F0"/>
-                </a:solidFill>
-                <a:latin typeface="Arial" pitchFamily="34" charset="0"/>
-                <a:ea typeface="Arial" pitchFamily="34" charset="-122"/>
-                <a:cs typeface="Arial" pitchFamily="34" charset="-120"/>
-              </a:rPr>
-              <a:t>roadmap.sh — 프론트엔드/백엔드/풀스택 등 분야별 학습 로드맵 지도</a:t>
-            </a:r>
-            <a:endParaRPr lang="en-US" sz="1700" dirty="0"/>
-          </a:p>
-          <a:p>
-            <a:pPr marL="342900" indent="-342900">
-              <a:lnSpc>
-                <a:spcPct val="135000"/>
-              </a:lnSpc>
-              <a:buSzPct val="100000"/>
-              <a:buChar char="•"/>
-            </a:pPr>
-            <a:r>
-              <a:rPr lang="en-US" sz="1700" dirty="0">
-                <a:solidFill>
-                  <a:srgbClr val="F2F2F0"/>
-                </a:solidFill>
-                <a:latin typeface="Arial" pitchFamily="34" charset="0"/>
-                <a:ea typeface="Arial" pitchFamily="34" charset="-122"/>
-                <a:cs typeface="Arial" pitchFamily="34" charset="-120"/>
-              </a:rPr>
-              <a:t>Next.js Learn (nextjs.org/learn) — Next.js 공식 인터랙티브 튜토리얼</a:t>
-            </a:r>
-            <a:endParaRPr lang="en-US" sz="1700" dirty="0"/>
-          </a:p>
-          <a:p>
-            <a:pPr marL="342900" indent="-342900">
-              <a:lnSpc>
-                <a:spcPct val="135000"/>
-              </a:lnSpc>
-              <a:buSzPct val="100000"/>
-              <a:buChar char="•"/>
-            </a:pPr>
-            <a:r>
-              <a:rPr lang="en-US" sz="1700" dirty="0">
-                <a:solidFill>
-                  <a:srgbClr val="F2F2F0"/>
-                </a:solidFill>
-                <a:latin typeface="Arial" pitchFamily="34" charset="0"/>
-                <a:ea typeface="Arial" pitchFamily="34" charset="-122"/>
-                <a:cs typeface="Arial" pitchFamily="34" charset="-120"/>
-              </a:rPr>
-              <a:t>Supabase Docs (supabase.com/docs) — Auth/DB/RLS 등 공식 가이드 + 예제</a:t>
-            </a:r>
-            <a:endParaRPr lang="en-US" sz="1700" dirty="0"/>
-          </a:p>
-          <a:p>
-            <a:pPr marL="342900" indent="-342900">
-              <a:lnSpc>
-                <a:spcPct val="135000"/>
-              </a:lnSpc>
-              <a:buSzPct val="100000"/>
-              <a:buChar char="•"/>
-            </a:pPr>
-            <a:r>
-              <a:rPr lang="en-US" sz="1700" dirty="0">
-                <a:solidFill>
-                  <a:srgbClr val="F2F2F0"/>
-                </a:solidFill>
-                <a:latin typeface="Arial" pitchFamily="34" charset="0"/>
-                <a:ea typeface="Arial" pitchFamily="34" charset="-122"/>
-                <a:cs typeface="Arial" pitchFamily="34" charset="-120"/>
-              </a:rPr>
-              <a:t>Flutter 공식 Codelabs (docs.flutter.dev/codelabs) — 손으로 따라 하는 Flutter 튜토리얼</a:t>
-            </a:r>
-            <a:endParaRPr lang="en-US" sz="1700" dirty="0"/>
+            <a:pPr indent="0" marL="0">
+              <a:buNone/>
+            </a:pPr>
+            <a:r>
+              <a:rPr lang="en-US" sz="1500" dirty="0">
+                <a:solidFill>
+                  <a:srgbClr val="F2F2F0"/>
+                </a:solidFill>
+                <a:latin typeface="Menlo" pitchFamily="34" charset="0"/>
+                <a:ea typeface="Menlo" pitchFamily="34" charset="-122"/>
+                <a:cs typeface="Menlo" pitchFamily="34" charset="-120"/>
+              </a:rPr>
+              <a:t>내가 입력:</a:t>
+            </a:r>
+            <a:endParaRPr lang="en-US" sz="1500" dirty="0"/>
+          </a:p>
+          <a:p>
+            <a:pPr indent="0" marL="0">
+              <a:buNone/>
+            </a:pPr>
+            <a:r>
+              <a:rPr lang="en-US" sz="1500" dirty="0">
+                <a:solidFill>
+                  <a:srgbClr val="F2F2F0"/>
+                </a:solidFill>
+                <a:latin typeface="Menlo" pitchFamily="34" charset="0"/>
+                <a:ea typeface="Menlo" pitchFamily="34" charset="-122"/>
+                <a:cs typeface="Menlo" pitchFamily="34" charset="-120"/>
+              </a:rPr>
+              <a:t>  "html/css로 자기소개 웹페이지 하나 만들어줘.</a:t>
+            </a:r>
+            <a:endParaRPr lang="en-US" sz="1500" dirty="0"/>
+          </a:p>
+          <a:p>
+            <a:pPr indent="0" marL="0">
+              <a:buNone/>
+            </a:pPr>
+            <a:r>
+              <a:rPr lang="en-US" sz="1500" dirty="0">
+                <a:solidFill>
+                  <a:srgbClr val="F2F2F0"/>
+                </a:solidFill>
+                <a:latin typeface="Menlo" pitchFamily="34" charset="0"/>
+                <a:ea typeface="Menlo" pitchFamily="34" charset="-122"/>
+                <a:cs typeface="Menlo" pitchFamily="34" charset="-120"/>
+              </a:rPr>
+              <a:t>   이름, 사진, 한 줄 소개, 연락처가 들어가면 좋겠어."</a:t>
+            </a:r>
+            <a:endParaRPr lang="en-US" sz="1500" dirty="0"/>
+          </a:p>
+          <a:p>
+            <a:pPr indent="0" marL="0">
+              <a:buNone/>
+            </a:pPr>
+            <a:endParaRPr lang="en-US" sz="1500" dirty="0"/>
+          </a:p>
+          <a:p>
+            <a:pPr indent="0" marL="0">
+              <a:buNone/>
+            </a:pPr>
+            <a:r>
+              <a:rPr lang="en-US" sz="1500" dirty="0">
+                <a:solidFill>
+                  <a:srgbClr val="F2F2F0"/>
+                </a:solidFill>
+                <a:latin typeface="Menlo" pitchFamily="34" charset="0"/>
+                <a:ea typeface="Menlo" pitchFamily="34" charset="-122"/>
+                <a:cs typeface="Menlo" pitchFamily="34" charset="-120"/>
+              </a:rPr>
+              <a:t>Claude Code가 하는 일:</a:t>
+            </a:r>
+            <a:endParaRPr lang="en-US" sz="1500" dirty="0"/>
+          </a:p>
+          <a:p>
+            <a:pPr indent="0" marL="0">
+              <a:buNone/>
+            </a:pPr>
+            <a:r>
+              <a:rPr lang="en-US" sz="1500" dirty="0">
+                <a:solidFill>
+                  <a:srgbClr val="F2F2F0"/>
+                </a:solidFill>
+                <a:latin typeface="Menlo" pitchFamily="34" charset="0"/>
+                <a:ea typeface="Menlo" pitchFamily="34" charset="-122"/>
+                <a:cs typeface="Menlo" pitchFamily="34" charset="-120"/>
+              </a:rPr>
+              <a:t>  1. index.html, style.css 파일을 새로 만듦</a:t>
+            </a:r>
+            <a:endParaRPr lang="en-US" sz="1500" dirty="0"/>
+          </a:p>
+          <a:p>
+            <a:pPr indent="0" marL="0">
+              <a:buNone/>
+            </a:pPr>
+            <a:r>
+              <a:rPr lang="en-US" sz="1500" dirty="0">
+                <a:solidFill>
+                  <a:srgbClr val="F2F2F0"/>
+                </a:solidFill>
+                <a:latin typeface="Menlo" pitchFamily="34" charset="0"/>
+                <a:ea typeface="Menlo" pitchFamily="34" charset="-122"/>
+                <a:cs typeface="Menlo" pitchFamily="34" charset="-120"/>
+              </a:rPr>
+              <a:t>  2. 이름/사진/소개/연락처 영역을 채워 넣음</a:t>
+            </a:r>
+            <a:endParaRPr lang="en-US" sz="1500" dirty="0"/>
+          </a:p>
+          <a:p>
+            <a:pPr indent="0" marL="0">
+              <a:buNone/>
+            </a:pPr>
+            <a:r>
+              <a:rPr lang="en-US" sz="1500" dirty="0">
+                <a:solidFill>
+                  <a:srgbClr val="F2F2F0"/>
+                </a:solidFill>
+                <a:latin typeface="Menlo" pitchFamily="34" charset="0"/>
+                <a:ea typeface="Menlo" pitchFamily="34" charset="-122"/>
+                <a:cs typeface="Menlo" pitchFamily="34" charset="-120"/>
+              </a:rPr>
+              <a:t>  3. 브라우저로 열어서 결과를 바로 확인할 수 있게 안내</a:t>
+            </a:r>
+            <a:endParaRPr lang="en-US" sz="1500" dirty="0"/>
+          </a:p>
+          <a:p>
+            <a:pPr indent="0" marL="0">
+              <a:buNone/>
+            </a:pPr>
+            <a:endParaRPr lang="en-US" sz="1500" dirty="0"/>
+          </a:p>
+          <a:p>
+            <a:pPr indent="0" marL="0">
+              <a:buNone/>
+            </a:pPr>
+            <a:r>
+              <a:rPr lang="en-US" sz="1500" dirty="0">
+                <a:solidFill>
+                  <a:srgbClr val="F2F2F0"/>
+                </a:solidFill>
+                <a:latin typeface="Menlo" pitchFamily="34" charset="0"/>
+                <a:ea typeface="Menlo" pitchFamily="34" charset="-122"/>
+                <a:cs typeface="Menlo" pitchFamily="34" charset="-120"/>
+              </a:rPr>
+              <a:t>포인트: 복잡한 프로젝트(소셜 플로우)도 원리는 똑같음 —</a:t>
+            </a:r>
+            <a:endParaRPr lang="en-US" sz="1500" dirty="0"/>
+          </a:p>
+          <a:p>
+            <a:pPr indent="0" marL="0">
+              <a:buNone/>
+            </a:pPr>
+            <a:r>
+              <a:rPr lang="en-US" sz="1500" dirty="0">
+                <a:solidFill>
+                  <a:srgbClr val="F2F2F0"/>
+                </a:solidFill>
+                <a:latin typeface="Menlo" pitchFamily="34" charset="0"/>
+                <a:ea typeface="Menlo" pitchFamily="34" charset="-122"/>
+                <a:cs typeface="Menlo" pitchFamily="34" charset="-120"/>
+              </a:rPr>
+              <a:t>        '무엇을 만들고 싶은지'를 문장으로 여러 번 주고받는 것의 반복</a:t>
+            </a:r>
+            <a:endParaRPr lang="en-US" sz="1500" dirty="0"/>
           </a:p>
         </p:txBody>
       </p:sp>
@@ -14010,7 +14235,7 @@
                 <a:ea typeface="Arial" pitchFamily="34" charset="-122"/>
                 <a:cs typeface="Arial" pitchFamily="34" charset="-120"/>
               </a:rPr>
-              <a:t>추천 책</a:t>
+              <a:t>이 프로젝트 Clone 받아서 실행하기</a:t>
             </a:r>
             <a:endParaRPr lang="en-US" sz="3000" dirty="0"/>
           </a:p>
@@ -14018,46 +14243,7 @@
       </p:sp>
       <p:sp>
         <p:nvSpPr>
-          <p:cNvPr id="4" name="Text 2"/>
-          <p:cNvSpPr/>
-          <p:nvPr/>
-        </p:nvSpPr>
-        <p:spPr>
-          <a:xfrm>
-            <a:off x="548640" y="1005840"/>
-            <a:ext cx="11064240" cy="457200"/>
-          </a:xfrm>
-          <a:prstGeom prst="rect">
-            <a:avLst/>
-          </a:prstGeom>
-          <a:noFill/>
-          <a:ln/>
-        </p:spPr>
-        <p:txBody>
-          <a:bodyPr wrap="square" rtlCol="0" anchor="ctr"/>
-          <a:lstStyle/>
-          <a:p>
-            <a:pPr indent="0" marL="0">
-              <a:buNone/>
-            </a:pPr>
-            <a:r>
-              <a:rPr lang="en-US" sz="1600" dirty="0">
-                <a:solidFill>
-                  <a:srgbClr val="98999D"/>
-                </a:solidFill>
-                <a:latin typeface="Arial" pitchFamily="34" charset="0"/>
-                <a:ea typeface="Arial" pitchFamily="34" charset="-122"/>
-                <a:cs typeface="Arial" pitchFamily="34" charset="-120"/>
-              </a:rPr>
-              <a:t>개념을 깊이 있게 잡고 싶을 때</a:t>
-            </a:r>
-            <a:endParaRPr lang="en-US" sz="1600" dirty="0"/>
-          </a:p>
-        </p:txBody>
-      </p:sp>
-      <p:sp>
-        <p:nvSpPr>
-          <p:cNvPr id="5" name="Shape 3"/>
+          <p:cNvPr id="4" name="Shape 2"/>
           <p:cNvSpPr/>
           <p:nvPr/>
         </p:nvSpPr>
@@ -14080,14 +14266,41 @@
       </p:sp>
       <p:sp>
         <p:nvSpPr>
+          <p:cNvPr id="5" name="Shape 3"/>
+          <p:cNvSpPr/>
+          <p:nvPr/>
+        </p:nvSpPr>
+        <p:spPr>
+          <a:xfrm>
+            <a:off x="548640" y="1828800"/>
+            <a:ext cx="11064240" cy="4206240"/>
+          </a:xfrm>
+          <a:prstGeom prst="roundRect">
+            <a:avLst>
+              <a:gd name="adj" fmla="val 1739"/>
+            </a:avLst>
+          </a:prstGeom>
+          <a:solidFill>
+            <a:srgbClr val="202124"/>
+          </a:solidFill>
+          <a:ln w="12700">
+            <a:solidFill>
+              <a:srgbClr val="202124"/>
+            </a:solidFill>
+            <a:prstDash val="solid"/>
+          </a:ln>
+        </p:spPr>
+      </p:sp>
+      <p:sp>
+        <p:nvSpPr>
           <p:cNvPr id="6" name="Text 4"/>
           <p:cNvSpPr/>
           <p:nvPr/>
         </p:nvSpPr>
         <p:spPr>
           <a:xfrm>
-            <a:off x="548640" y="1828800"/>
-            <a:ext cx="11064240" cy="4572000"/>
+            <a:off x="822960" y="2057400"/>
+            <a:ext cx="10515600" cy="3749040"/>
           </a:xfrm>
           <a:prstGeom prst="rect">
             <a:avLst/>
@@ -14099,109 +14312,198 @@
           <a:bodyPr wrap="square" rtlCol="0" anchor="t"/>
           <a:lstStyle/>
           <a:p>
-            <a:pPr marL="342900" indent="-342900">
-              <a:lnSpc>
-                <a:spcPct val="135000"/>
-              </a:lnSpc>
-              <a:buSzPct val="100000"/>
-              <a:buChar char="•"/>
-            </a:pPr>
-            <a:r>
-              <a:rPr lang="en-US" sz="1800" dirty="0">
-                <a:solidFill>
-                  <a:srgbClr val="F2F2F0"/>
-                </a:solidFill>
-                <a:latin typeface="Arial" pitchFamily="34" charset="0"/>
-                <a:ea typeface="Arial" pitchFamily="34" charset="-122"/>
-                <a:cs typeface="Arial" pitchFamily="34" charset="-120"/>
-              </a:rPr>
-              <a:t>『클린 코드』 Robert C. Martin — 좋은 코드/나쁜 코드를 가르는 기준 세우기</a:t>
-            </a:r>
-            <a:endParaRPr lang="en-US" sz="1800" dirty="0"/>
-          </a:p>
-          <a:p>
-            <a:pPr marL="342900" indent="-342900">
-              <a:lnSpc>
-                <a:spcPct val="135000"/>
-              </a:lnSpc>
-              <a:buSzPct val="100000"/>
-              <a:buChar char="•"/>
-            </a:pPr>
-            <a:r>
-              <a:rPr lang="en-US" sz="1800" dirty="0">
-                <a:solidFill>
-                  <a:srgbClr val="F2F2F0"/>
-                </a:solidFill>
-                <a:latin typeface="Arial" pitchFamily="34" charset="0"/>
-                <a:ea typeface="Arial" pitchFamily="34" charset="-122"/>
-                <a:cs typeface="Arial" pitchFamily="34" charset="-120"/>
-              </a:rPr>
-              <a:t>『모던 자바스크립트 Deep Dive』 이웅모 — 자바스크립트 문법의 원리를 제대로</a:t>
-            </a:r>
-            <a:endParaRPr lang="en-US" sz="1800" dirty="0"/>
-          </a:p>
-          <a:p>
-            <a:pPr marL="342900" indent="-342900">
-              <a:lnSpc>
-                <a:spcPct val="135000"/>
-              </a:lnSpc>
-              <a:buSzPct val="100000"/>
-              <a:buChar char="•"/>
-            </a:pPr>
-            <a:r>
-              <a:rPr lang="en-US" sz="1800" dirty="0">
-                <a:solidFill>
-                  <a:srgbClr val="F2F2F0"/>
-                </a:solidFill>
-                <a:latin typeface="Arial" pitchFamily="34" charset="0"/>
-                <a:ea typeface="Arial" pitchFamily="34" charset="-122"/>
-                <a:cs typeface="Arial" pitchFamily="34" charset="-120"/>
-              </a:rPr>
-              <a:t>『Learning React』 Alex Banks &amp; Eve Porcello (O'Reilly) — 리액트 개념을 기초부터</a:t>
-            </a:r>
-            <a:endParaRPr lang="en-US" sz="1800" dirty="0"/>
-          </a:p>
-          <a:p>
-            <a:pPr marL="342900" indent="-342900">
-              <a:lnSpc>
-                <a:spcPct val="135000"/>
-              </a:lnSpc>
-              <a:buSzPct val="100000"/>
-              <a:buChar char="•"/>
-            </a:pPr>
-            <a:r>
-              <a:rPr lang="en-US" sz="1800" dirty="0">
-                <a:solidFill>
-                  <a:srgbClr val="F2F2F0"/>
-                </a:solidFill>
-                <a:latin typeface="Arial" pitchFamily="34" charset="0"/>
-                <a:ea typeface="Arial" pitchFamily="34" charset="-122"/>
-                <a:cs typeface="Arial" pitchFamily="34" charset="-120"/>
-              </a:rPr>
-              <a:t>『혼자 공부하는 컴퓨터 구조+운영체제』 강민철 — 코드 너머의 컴퓨터 동작 원리</a:t>
-            </a:r>
-            <a:endParaRPr lang="en-US" sz="1800" dirty="0"/>
-          </a:p>
-          <a:p>
-            <a:pPr marL="342900" indent="-342900">
-              <a:lnSpc>
-                <a:spcPct val="135000"/>
-              </a:lnSpc>
-              <a:buSzPct val="100000"/>
-              <a:buChar char="•"/>
-            </a:pPr>
-            <a:r>
-              <a:rPr lang="en-US" sz="1800" dirty="0">
-                <a:solidFill>
-                  <a:srgbClr val="F2F2F0"/>
-                </a:solidFill>
-                <a:latin typeface="Arial" pitchFamily="34" charset="0"/>
-                <a:ea typeface="Arial" pitchFamily="34" charset="-122"/>
-                <a:cs typeface="Arial" pitchFamily="34" charset="-120"/>
-              </a:rPr>
-              <a:t>『Designing Data-Intensive Applications』 Martin Kleppmann — 데이터베이스/백엔드를 깊게 (중급 이상)</a:t>
-            </a:r>
-            <a:endParaRPr lang="en-US" sz="1800" dirty="0"/>
+            <a:pPr indent="0" marL="0">
+              <a:buNone/>
+            </a:pPr>
+            <a:r>
+              <a:rPr lang="en-US" sz="1500" dirty="0">
+                <a:solidFill>
+                  <a:srgbClr val="F2F2F0"/>
+                </a:solidFill>
+                <a:latin typeface="Menlo" pitchFamily="34" charset="0"/>
+                <a:ea typeface="Menlo" pitchFamily="34" charset="-122"/>
+                <a:cs typeface="Menlo" pitchFamily="34" charset="-120"/>
+              </a:rPr>
+              <a:t>git clone https://github.com/white100s/social_flow.git</a:t>
+            </a:r>
+            <a:endParaRPr lang="en-US" sz="1500" dirty="0"/>
+          </a:p>
+          <a:p>
+            <a:pPr indent="0" marL="0">
+              <a:buNone/>
+            </a:pPr>
+            <a:r>
+              <a:rPr lang="en-US" sz="1500" dirty="0">
+                <a:solidFill>
+                  <a:srgbClr val="F2F2F0"/>
+                </a:solidFill>
+                <a:latin typeface="Menlo" pitchFamily="34" charset="0"/>
+                <a:ea typeface="Menlo" pitchFamily="34" charset="-122"/>
+                <a:cs typeface="Menlo" pitchFamily="34" charset="-120"/>
+              </a:rPr>
+              <a:t>cd social_flow</a:t>
+            </a:r>
+            <a:endParaRPr lang="en-US" sz="1500" dirty="0"/>
+          </a:p>
+          <a:p>
+            <a:pPr indent="0" marL="0">
+              <a:buNone/>
+            </a:pPr>
+            <a:endParaRPr lang="en-US" sz="1500" dirty="0"/>
+          </a:p>
+          <a:p>
+            <a:pPr indent="0" marL="0">
+              <a:buNone/>
+            </a:pPr>
+            <a:r>
+              <a:rPr lang="en-US" sz="1500" dirty="0">
+                <a:solidFill>
+                  <a:srgbClr val="F2F2F0"/>
+                </a:solidFill>
+                <a:latin typeface="Menlo" pitchFamily="34" charset="0"/>
+                <a:ea typeface="Menlo" pitchFamily="34" charset="-122"/>
+                <a:cs typeface="Menlo" pitchFamily="34" charset="-120"/>
+              </a:rPr>
+              <a:t># 웹 (Next.js)</a:t>
+            </a:r>
+            <a:endParaRPr lang="en-US" sz="1500" dirty="0"/>
+          </a:p>
+          <a:p>
+            <a:pPr indent="0" marL="0">
+              <a:buNone/>
+            </a:pPr>
+            <a:r>
+              <a:rPr lang="en-US" sz="1500" dirty="0">
+                <a:solidFill>
+                  <a:srgbClr val="F2F2F0"/>
+                </a:solidFill>
+                <a:latin typeface="Menlo" pitchFamily="34" charset="0"/>
+                <a:ea typeface="Menlo" pitchFamily="34" charset="-122"/>
+                <a:cs typeface="Menlo" pitchFamily="34" charset="-120"/>
+              </a:rPr>
+              <a:t>pnpm install &amp;&amp; pnpm dev        # http://localhost:3721</a:t>
+            </a:r>
+            <a:endParaRPr lang="en-US" sz="1500" dirty="0"/>
+          </a:p>
+          <a:p>
+            <a:pPr indent="0" marL="0">
+              <a:buNone/>
+            </a:pPr>
+            <a:endParaRPr lang="en-US" sz="1500" dirty="0"/>
+          </a:p>
+          <a:p>
+            <a:pPr indent="0" marL="0">
+              <a:buNone/>
+            </a:pPr>
+            <a:r>
+              <a:rPr lang="en-US" sz="1500" dirty="0">
+                <a:solidFill>
+                  <a:srgbClr val="F2F2F0"/>
+                </a:solidFill>
+                <a:latin typeface="Menlo" pitchFamily="34" charset="0"/>
+                <a:ea typeface="Menlo" pitchFamily="34" charset="-122"/>
+                <a:cs typeface="Menlo" pitchFamily="34" charset="-120"/>
+              </a:rPr>
+              <a:t># 관리자 앱</a:t>
+            </a:r>
+            <a:endParaRPr lang="en-US" sz="1500" dirty="0"/>
+          </a:p>
+          <a:p>
+            <a:pPr indent="0" marL="0">
+              <a:buNone/>
+            </a:pPr>
+            <a:r>
+              <a:rPr lang="en-US" sz="1500" dirty="0">
+                <a:solidFill>
+                  <a:srgbClr val="F2F2F0"/>
+                </a:solidFill>
+                <a:latin typeface="Menlo" pitchFamily="34" charset="0"/>
+                <a:ea typeface="Menlo" pitchFamily="34" charset="-122"/>
+                <a:cs typeface="Menlo" pitchFamily="34" charset="-120"/>
+              </a:rPr>
+              <a:t>cd admin &amp;&amp; pnpm install &amp;&amp; pnpm dev   # http://localhost:3722</a:t>
+            </a:r>
+            <a:endParaRPr lang="en-US" sz="1500" dirty="0"/>
+          </a:p>
+          <a:p>
+            <a:pPr indent="0" marL="0">
+              <a:buNone/>
+            </a:pPr>
+            <a:endParaRPr lang="en-US" sz="1500" dirty="0"/>
+          </a:p>
+          <a:p>
+            <a:pPr indent="0" marL="0">
+              <a:buNone/>
+            </a:pPr>
+            <a:r>
+              <a:rPr lang="en-US" sz="1500" dirty="0">
+                <a:solidFill>
+                  <a:srgbClr val="F2F2F0"/>
+                </a:solidFill>
+                <a:latin typeface="Menlo" pitchFamily="34" charset="0"/>
+                <a:ea typeface="Menlo" pitchFamily="34" charset="-122"/>
+                <a:cs typeface="Menlo" pitchFamily="34" charset="-120"/>
+              </a:rPr>
+              <a:t># Flutter</a:t>
+            </a:r>
+            <a:endParaRPr lang="en-US" sz="1500" dirty="0"/>
+          </a:p>
+          <a:p>
+            <a:pPr indent="0" marL="0">
+              <a:buNone/>
+            </a:pPr>
+            <a:r>
+              <a:rPr lang="en-US" sz="1500" dirty="0">
+                <a:solidFill>
+                  <a:srgbClr val="F2F2F0"/>
+                </a:solidFill>
+                <a:latin typeface="Menlo" pitchFamily="34" charset="0"/>
+                <a:ea typeface="Menlo" pitchFamily="34" charset="-122"/>
+                <a:cs typeface="Menlo" pitchFamily="34" charset="-120"/>
+              </a:rPr>
+              <a:t>cd flutter_app &amp;&amp; flutter pub get &amp;&amp; flutter run -d chrome</a:t>
+            </a:r>
+            <a:endParaRPr lang="en-US" sz="1500" dirty="0"/>
+          </a:p>
+          <a:p>
+            <a:pPr indent="0" marL="0">
+              <a:buNone/>
+            </a:pPr>
+            <a:endParaRPr lang="en-US" sz="1500" dirty="0"/>
+          </a:p>
+          <a:p>
+            <a:pPr indent="0" marL="0">
+              <a:buNone/>
+            </a:pPr>
+            <a:r>
+              <a:rPr lang="en-US" sz="1500" dirty="0">
+                <a:solidFill>
+                  <a:srgbClr val="F2F2F0"/>
+                </a:solidFill>
+                <a:latin typeface="Menlo" pitchFamily="34" charset="0"/>
+                <a:ea typeface="Menlo" pitchFamily="34" charset="-122"/>
+                <a:cs typeface="Menlo" pitchFamily="34" charset="-120"/>
+              </a:rPr>
+              <a:t># DB 스키마 적용 (최초 1회, 재실행해도 안전)</a:t>
+            </a:r>
+            <a:endParaRPr lang="en-US" sz="1500" dirty="0"/>
+          </a:p>
+          <a:p>
+            <a:pPr indent="0" marL="0">
+              <a:buNone/>
+            </a:pPr>
+            <a:r>
+              <a:rPr lang="en-US" sz="1500" dirty="0">
+                <a:solidFill>
+                  <a:srgbClr val="F2F2F0"/>
+                </a:solidFill>
+                <a:latin typeface="Menlo" pitchFamily="34" charset="0"/>
+                <a:ea typeface="Menlo" pitchFamily="34" charset="-122"/>
+                <a:cs typeface="Menlo" pitchFamily="34" charset="-120"/>
+              </a:rPr>
+              <a:t>Supabase 대시보드 → SQL Editor → supabase/schema.sql 실행</a:t>
+            </a:r>
+            <a:endParaRPr lang="en-US" sz="1500" dirty="0"/>
           </a:p>
         </p:txBody>
       </p:sp>
@@ -14666,6 +14968,1519 @@
               <a:t>   배포 및 완성</a:t>
             </a:r>
             <a:endParaRPr lang="en-US" sz="1600" dirty="0"/>
+          </a:p>
+        </p:txBody>
+      </p:sp>
+    </p:spTree>
+  </p:cSld>
+  <p:clrMapOvr>
+    <a:masterClrMapping/>
+  </p:clrMapOvr>
+</p:sld>
+</file>
+
+<file path=ppt/slides/slide40.xml><?xml version="1.0" encoding="utf-8"?>
+<p:sld xmlns:a="http://schemas.openxmlformats.org/drawingml/2006/main" xmlns:r="http://schemas.openxmlformats.org/officeDocument/2006/relationships" xmlns:p="http://schemas.openxmlformats.org/presentationml/2006/main">
+  <p:cSld name="Slide 40">
+    <p:bg>
+      <p:bgPr>
+        <a:solidFill>
+          <a:srgbClr val="17181A"/>
+        </a:solidFill>
+      </p:bgPr>
+    </p:bg>
+    <p:spTree>
+      <p:nvGrpSpPr>
+        <p:cNvPr id="1" name=""/>
+        <p:cNvGrpSpPr/>
+        <p:nvPr/>
+      </p:nvGrpSpPr>
+      <p:grpSpPr>
+        <a:xfrm>
+          <a:off x="0" y="0"/>
+          <a:ext cx="0" cy="0"/>
+          <a:chOff x="0" y="0"/>
+          <a:chExt cx="0" cy="0"/>
+        </a:xfrm>
+      </p:grpSpPr>
+      <p:sp>
+        <p:nvSpPr>
+          <p:cNvPr id="2" name="Text 0"/>
+          <p:cNvSpPr/>
+          <p:nvPr/>
+        </p:nvSpPr>
+        <p:spPr>
+          <a:xfrm>
+            <a:off x="548640" y="6510528"/>
+            <a:ext cx="7315200" cy="274320"/>
+          </a:xfrm>
+          <a:prstGeom prst="rect">
+            <a:avLst/>
+          </a:prstGeom>
+          <a:noFill/>
+          <a:ln/>
+        </p:spPr>
+        <p:txBody>
+          <a:bodyPr wrap="square" rtlCol="0" anchor="ctr"/>
+          <a:lstStyle/>
+          <a:p>
+            <a:pPr indent="0" marL="0">
+              <a:buNone/>
+            </a:pPr>
+            <a:r>
+              <a:rPr lang="en-US" sz="1000" dirty="0">
+                <a:solidFill>
+                  <a:srgbClr val="98999D"/>
+                </a:solidFill>
+                <a:latin typeface="Arial" pitchFamily="34" charset="0"/>
+                <a:ea typeface="Arial" pitchFamily="34" charset="-122"/>
+                <a:cs typeface="Arial" pitchFamily="34" charset="-120"/>
+              </a:rPr>
+              <a:t>소셜 플로우 오리엔테이션</a:t>
+            </a:r>
+            <a:endParaRPr lang="en-US" sz="1000" dirty="0"/>
+          </a:p>
+        </p:txBody>
+      </p:sp>
+      <p:sp>
+        <p:nvSpPr>
+          <p:cNvPr id="3" name="Text 1"/>
+          <p:cNvSpPr/>
+          <p:nvPr/>
+        </p:nvSpPr>
+        <p:spPr>
+          <a:xfrm>
+            <a:off x="548640" y="365760"/>
+            <a:ext cx="11064240" cy="822960"/>
+          </a:xfrm>
+          <a:prstGeom prst="rect">
+            <a:avLst/>
+          </a:prstGeom>
+          <a:noFill/>
+          <a:ln/>
+        </p:spPr>
+        <p:txBody>
+          <a:bodyPr wrap="square" rtlCol="0" anchor="ctr"/>
+          <a:lstStyle/>
+          <a:p>
+            <a:pPr indent="0" marL="0">
+              <a:buNone/>
+            </a:pPr>
+            <a:r>
+              <a:rPr lang="en-US" sz="3000" b="1" dirty="0">
+                <a:solidFill>
+                  <a:srgbClr val="F2F2F0"/>
+                </a:solidFill>
+                <a:latin typeface="Arial" pitchFamily="34" charset="0"/>
+                <a:ea typeface="Arial" pitchFamily="34" charset="-122"/>
+                <a:cs typeface="Arial" pitchFamily="34" charset="-120"/>
+              </a:rPr>
+              <a:t>파일 구조 설명</a:t>
+            </a:r>
+            <a:endParaRPr lang="en-US" sz="3000" dirty="0"/>
+          </a:p>
+        </p:txBody>
+      </p:sp>
+      <p:sp>
+        <p:nvSpPr>
+          <p:cNvPr id="4" name="Text 2"/>
+          <p:cNvSpPr/>
+          <p:nvPr/>
+        </p:nvSpPr>
+        <p:spPr>
+          <a:xfrm>
+            <a:off x="548640" y="1005840"/>
+            <a:ext cx="11064240" cy="457200"/>
+          </a:xfrm>
+          <a:prstGeom prst="rect">
+            <a:avLst/>
+          </a:prstGeom>
+          <a:noFill/>
+          <a:ln/>
+        </p:spPr>
+        <p:txBody>
+          <a:bodyPr wrap="square" rtlCol="0" anchor="ctr"/>
+          <a:lstStyle/>
+          <a:p>
+            <a:pPr indent="0" marL="0">
+              <a:buNone/>
+            </a:pPr>
+            <a:r>
+              <a:rPr lang="en-US" sz="1600" dirty="0">
+                <a:solidFill>
+                  <a:srgbClr val="98999D"/>
+                </a:solidFill>
+                <a:latin typeface="Arial" pitchFamily="34" charset="0"/>
+                <a:ea typeface="Arial" pitchFamily="34" charset="-122"/>
+                <a:cs typeface="Arial" pitchFamily="34" charset="-120"/>
+              </a:rPr>
+              <a:t>모노리포 폴더 배치</a:t>
+            </a:r>
+            <a:endParaRPr lang="en-US" sz="1600" dirty="0"/>
+          </a:p>
+        </p:txBody>
+      </p:sp>
+      <p:sp>
+        <p:nvSpPr>
+          <p:cNvPr id="5" name="Shape 3"/>
+          <p:cNvSpPr/>
+          <p:nvPr/>
+        </p:nvSpPr>
+        <p:spPr>
+          <a:xfrm>
+            <a:off x="548640" y="1508760"/>
+            <a:ext cx="11064240" cy="0"/>
+          </a:xfrm>
+          <a:prstGeom prst="line">
+            <a:avLst/>
+          </a:prstGeom>
+          <a:noFill/>
+          <a:ln w="19050">
+            <a:solidFill>
+              <a:srgbClr val="202124"/>
+            </a:solidFill>
+            <a:prstDash val="solid"/>
+          </a:ln>
+        </p:spPr>
+      </p:sp>
+      <p:sp>
+        <p:nvSpPr>
+          <p:cNvPr id="6" name="Shape 4"/>
+          <p:cNvSpPr/>
+          <p:nvPr/>
+        </p:nvSpPr>
+        <p:spPr>
+          <a:xfrm>
+            <a:off x="548640" y="1828800"/>
+            <a:ext cx="11064240" cy="4206240"/>
+          </a:xfrm>
+          <a:prstGeom prst="roundRect">
+            <a:avLst>
+              <a:gd name="adj" fmla="val 1739"/>
+            </a:avLst>
+          </a:prstGeom>
+          <a:solidFill>
+            <a:srgbClr val="202124"/>
+          </a:solidFill>
+          <a:ln w="12700">
+            <a:solidFill>
+              <a:srgbClr val="202124"/>
+            </a:solidFill>
+            <a:prstDash val="solid"/>
+          </a:ln>
+        </p:spPr>
+      </p:sp>
+      <p:sp>
+        <p:nvSpPr>
+          <p:cNvPr id="7" name="Text 5"/>
+          <p:cNvSpPr/>
+          <p:nvPr/>
+        </p:nvSpPr>
+        <p:spPr>
+          <a:xfrm>
+            <a:off x="822960" y="2057400"/>
+            <a:ext cx="10515600" cy="3749040"/>
+          </a:xfrm>
+          <a:prstGeom prst="rect">
+            <a:avLst/>
+          </a:prstGeom>
+          <a:noFill/>
+          <a:ln/>
+        </p:spPr>
+        <p:txBody>
+          <a:bodyPr wrap="square" rtlCol="0" anchor="t"/>
+          <a:lstStyle/>
+          <a:p>
+            <a:pPr indent="0" marL="0">
+              <a:buNone/>
+            </a:pPr>
+            <a:r>
+              <a:rPr lang="en-US" sz="1500" dirty="0">
+                <a:solidFill>
+                  <a:srgbClr val="F2F2F0"/>
+                </a:solidFill>
+                <a:latin typeface="Menlo" pitchFamily="34" charset="0"/>
+                <a:ea typeface="Menlo" pitchFamily="34" charset="-122"/>
+                <a:cs typeface="Menlo" pitchFamily="34" charset="-120"/>
+              </a:rPr>
+              <a:t>social_flows/</a:t>
+            </a:r>
+            <a:endParaRPr lang="en-US" sz="1500" dirty="0"/>
+          </a:p>
+          <a:p>
+            <a:pPr indent="0" marL="0">
+              <a:buNone/>
+            </a:pPr>
+            <a:r>
+              <a:rPr lang="en-US" sz="1500" dirty="0">
+                <a:solidFill>
+                  <a:srgbClr val="F2F2F0"/>
+                </a:solidFill>
+                <a:latin typeface="Menlo" pitchFamily="34" charset="0"/>
+                <a:ea typeface="Menlo" pitchFamily="34" charset="-122"/>
+                <a:cs typeface="Menlo" pitchFamily="34" charset="-120"/>
+              </a:rPr>
+              <a:t>├─ src/                 # Next.js 16 웹 앱 (App Router) · 포트 3721</a:t>
+            </a:r>
+            <a:endParaRPr lang="en-US" sz="1500" dirty="0"/>
+          </a:p>
+          <a:p>
+            <a:pPr indent="0" marL="0">
+              <a:buNone/>
+            </a:pPr>
+            <a:r>
+              <a:rPr lang="en-US" sz="1500" dirty="0">
+                <a:solidFill>
+                  <a:srgbClr val="F2F2F0"/>
+                </a:solidFill>
+                <a:latin typeface="Menlo" pitchFamily="34" charset="0"/>
+                <a:ea typeface="Menlo" pitchFamily="34" charset="-122"/>
+                <a:cs typeface="Menlo" pitchFamily="34" charset="-120"/>
+              </a:rPr>
+              <a:t>│   ├─ app/              # 라우트: /, /login, /signup, /new, /profile/[username]</a:t>
+            </a:r>
+            <a:endParaRPr lang="en-US" sz="1500" dirty="0"/>
+          </a:p>
+          <a:p>
+            <a:pPr indent="0" marL="0">
+              <a:buNone/>
+            </a:pPr>
+            <a:r>
+              <a:rPr lang="en-US" sz="1500" dirty="0">
+                <a:solidFill>
+                  <a:srgbClr val="F2F2F0"/>
+                </a:solidFill>
+                <a:latin typeface="Menlo" pitchFamily="34" charset="0"/>
+                <a:ea typeface="Menlo" pitchFamily="34" charset="-122"/>
+                <a:cs typeface="Menlo" pitchFamily="34" charset="-120"/>
+              </a:rPr>
+              <a:t>│   ├─ components/       # Header, PostCard, LikeButton, FollowButton …</a:t>
+            </a:r>
+            <a:endParaRPr lang="en-US" sz="1500" dirty="0"/>
+          </a:p>
+          <a:p>
+            <a:pPr indent="0" marL="0">
+              <a:buNone/>
+            </a:pPr>
+            <a:r>
+              <a:rPr lang="en-US" sz="1500" dirty="0">
+                <a:solidFill>
+                  <a:srgbClr val="F2F2F0"/>
+                </a:solidFill>
+                <a:latin typeface="Menlo" pitchFamily="34" charset="0"/>
+                <a:ea typeface="Menlo" pitchFamily="34" charset="-122"/>
+                <a:cs typeface="Menlo" pitchFamily="34" charset="-120"/>
+              </a:rPr>
+              <a:t>│   └─ lib/              # supabase 클라이언트, i18n 사전, theme</a:t>
+            </a:r>
+            <a:endParaRPr lang="en-US" sz="1500" dirty="0"/>
+          </a:p>
+          <a:p>
+            <a:pPr indent="0" marL="0">
+              <a:buNone/>
+            </a:pPr>
+            <a:r>
+              <a:rPr lang="en-US" sz="1500" dirty="0">
+                <a:solidFill>
+                  <a:srgbClr val="F2F2F0"/>
+                </a:solidFill>
+                <a:latin typeface="Menlo" pitchFamily="34" charset="0"/>
+                <a:ea typeface="Menlo" pitchFamily="34" charset="-122"/>
+                <a:cs typeface="Menlo" pitchFamily="34" charset="-120"/>
+              </a:rPr>
+              <a:t>├─ admin/                # 관리자 웹 앱 (Next.js) · 포트 3722</a:t>
+            </a:r>
+            <a:endParaRPr lang="en-US" sz="1500" dirty="0"/>
+          </a:p>
+          <a:p>
+            <a:pPr indent="0" marL="0">
+              <a:buNone/>
+            </a:pPr>
+            <a:r>
+              <a:rPr lang="en-US" sz="1500" dirty="0">
+                <a:solidFill>
+                  <a:srgbClr val="F2F2F0"/>
+                </a:solidFill>
+                <a:latin typeface="Menlo" pitchFamily="34" charset="0"/>
+                <a:ea typeface="Menlo" pitchFamily="34" charset="-122"/>
+                <a:cs typeface="Menlo" pitchFamily="34" charset="-120"/>
+              </a:rPr>
+              <a:t>│   └─ src/app/          # /login, /(대시보드), /users, /posts</a:t>
+            </a:r>
+            <a:endParaRPr lang="en-US" sz="1500" dirty="0"/>
+          </a:p>
+          <a:p>
+            <a:pPr indent="0" marL="0">
+              <a:buNone/>
+            </a:pPr>
+            <a:r>
+              <a:rPr lang="en-US" sz="1500" dirty="0">
+                <a:solidFill>
+                  <a:srgbClr val="F2F2F0"/>
+                </a:solidFill>
+                <a:latin typeface="Menlo" pitchFamily="34" charset="0"/>
+                <a:ea typeface="Menlo" pitchFamily="34" charset="-122"/>
+                <a:cs typeface="Menlo" pitchFamily="34" charset="-120"/>
+              </a:rPr>
+              <a:t>├─ supabase/</a:t>
+            </a:r>
+            <a:endParaRPr lang="en-US" sz="1500" dirty="0"/>
+          </a:p>
+          <a:p>
+            <a:pPr indent="0" marL="0">
+              <a:buNone/>
+            </a:pPr>
+            <a:r>
+              <a:rPr lang="en-US" sz="1500" dirty="0">
+                <a:solidFill>
+                  <a:srgbClr val="F2F2F0"/>
+                </a:solidFill>
+                <a:latin typeface="Menlo" pitchFamily="34" charset="0"/>
+                <a:ea typeface="Menlo" pitchFamily="34" charset="-122"/>
+                <a:cs typeface="Menlo" pitchFamily="34" charset="-120"/>
+              </a:rPr>
+              <a:t>│   └─ schema.sql        # 모든 테이블 + RLS + 관리자 정책, 하나의 파일로 통합</a:t>
+            </a:r>
+            <a:endParaRPr lang="en-US" sz="1500" dirty="0"/>
+          </a:p>
+          <a:p>
+            <a:pPr indent="0" marL="0">
+              <a:buNone/>
+            </a:pPr>
+            <a:r>
+              <a:rPr lang="en-US" sz="1500" dirty="0">
+                <a:solidFill>
+                  <a:srgbClr val="F2F2F0"/>
+                </a:solidFill>
+                <a:latin typeface="Menlo" pitchFamily="34" charset="0"/>
+                <a:ea typeface="Menlo" pitchFamily="34" charset="-122"/>
+                <a:cs typeface="Menlo" pitchFamily="34" charset="-120"/>
+              </a:rPr>
+              <a:t>├─ flutter_app/          # Flutter 클라이언트 (macOS/Windows/Android/iOS/Web)</a:t>
+            </a:r>
+            <a:endParaRPr lang="en-US" sz="1500" dirty="0"/>
+          </a:p>
+          <a:p>
+            <a:pPr indent="0" marL="0">
+              <a:buNone/>
+            </a:pPr>
+            <a:r>
+              <a:rPr lang="en-US" sz="1500" dirty="0">
+                <a:solidFill>
+                  <a:srgbClr val="F2F2F0"/>
+                </a:solidFill>
+                <a:latin typeface="Menlo" pitchFamily="34" charset="0"/>
+                <a:ea typeface="Menlo" pitchFamily="34" charset="-122"/>
+                <a:cs typeface="Menlo" pitchFamily="34" charset="-120"/>
+              </a:rPr>
+              <a:t>│   └─ lib/               # screens/, widgets/, services/, i18n/, theme/</a:t>
+            </a:r>
+            <a:endParaRPr lang="en-US" sz="1500" dirty="0"/>
+          </a:p>
+          <a:p>
+            <a:pPr indent="0" marL="0">
+              <a:buNone/>
+            </a:pPr>
+            <a:r>
+              <a:rPr lang="en-US" sz="1500" dirty="0">
+                <a:solidFill>
+                  <a:srgbClr val="F2F2F0"/>
+                </a:solidFill>
+                <a:latin typeface="Menlo" pitchFamily="34" charset="0"/>
+                <a:ea typeface="Menlo" pitchFamily="34" charset="-122"/>
+                <a:cs typeface="Menlo" pitchFamily="34" charset="-120"/>
+              </a:rPr>
+              <a:t>└─ docs/                 # 이 오리엔테이션 자료 생성 스크립트</a:t>
+            </a:r>
+            <a:endParaRPr lang="en-US" sz="1500" dirty="0"/>
+          </a:p>
+        </p:txBody>
+      </p:sp>
+    </p:spTree>
+  </p:cSld>
+  <p:clrMapOvr>
+    <a:masterClrMapping/>
+  </p:clrMapOvr>
+</p:sld>
+</file>
+
+<file path=ppt/slides/slide41.xml><?xml version="1.0" encoding="utf-8"?>
+<p:sld xmlns:a="http://schemas.openxmlformats.org/drawingml/2006/main" xmlns:r="http://schemas.openxmlformats.org/officeDocument/2006/relationships" xmlns:p="http://schemas.openxmlformats.org/presentationml/2006/main">
+  <p:cSld name="Slide 41">
+    <p:bg>
+      <p:bgPr>
+        <a:solidFill>
+          <a:srgbClr val="17181A"/>
+        </a:solidFill>
+      </p:bgPr>
+    </p:bg>
+    <p:spTree>
+      <p:nvGrpSpPr>
+        <p:cNvPr id="1" name=""/>
+        <p:cNvGrpSpPr/>
+        <p:nvPr/>
+      </p:nvGrpSpPr>
+      <p:grpSpPr>
+        <a:xfrm>
+          <a:off x="0" y="0"/>
+          <a:ext cx="0" cy="0"/>
+          <a:chOff x="0" y="0"/>
+          <a:chExt cx="0" cy="0"/>
+        </a:xfrm>
+      </p:grpSpPr>
+      <p:sp>
+        <p:nvSpPr>
+          <p:cNvPr id="2" name="Text 0"/>
+          <p:cNvSpPr/>
+          <p:nvPr/>
+        </p:nvSpPr>
+        <p:spPr>
+          <a:xfrm>
+            <a:off x="548640" y="6510528"/>
+            <a:ext cx="7315200" cy="274320"/>
+          </a:xfrm>
+          <a:prstGeom prst="rect">
+            <a:avLst/>
+          </a:prstGeom>
+          <a:noFill/>
+          <a:ln/>
+        </p:spPr>
+        <p:txBody>
+          <a:bodyPr wrap="square" rtlCol="0" anchor="ctr"/>
+          <a:lstStyle/>
+          <a:p>
+            <a:pPr indent="0" marL="0">
+              <a:buNone/>
+            </a:pPr>
+            <a:r>
+              <a:rPr lang="en-US" sz="1000" dirty="0">
+                <a:solidFill>
+                  <a:srgbClr val="98999D"/>
+                </a:solidFill>
+                <a:latin typeface="Arial" pitchFamily="34" charset="0"/>
+                <a:ea typeface="Arial" pitchFamily="34" charset="-122"/>
+                <a:cs typeface="Arial" pitchFamily="34" charset="-120"/>
+              </a:rPr>
+              <a:t>소셜 플로우 오리엔테이션</a:t>
+            </a:r>
+            <a:endParaRPr lang="en-US" sz="1000" dirty="0"/>
+          </a:p>
+        </p:txBody>
+      </p:sp>
+      <p:sp>
+        <p:nvSpPr>
+          <p:cNvPr id="3" name="Text 1"/>
+          <p:cNvSpPr/>
+          <p:nvPr/>
+        </p:nvSpPr>
+        <p:spPr>
+          <a:xfrm>
+            <a:off x="548640" y="365760"/>
+            <a:ext cx="11064240" cy="822960"/>
+          </a:xfrm>
+          <a:prstGeom prst="rect">
+            <a:avLst/>
+          </a:prstGeom>
+          <a:noFill/>
+          <a:ln/>
+        </p:spPr>
+        <p:txBody>
+          <a:bodyPr wrap="square" rtlCol="0" anchor="ctr"/>
+          <a:lstStyle/>
+          <a:p>
+            <a:pPr indent="0" marL="0">
+              <a:buNone/>
+            </a:pPr>
+            <a:r>
+              <a:rPr lang="en-US" sz="3000" b="1" dirty="0">
+                <a:solidFill>
+                  <a:srgbClr val="F2F2F0"/>
+                </a:solidFill>
+                <a:latin typeface="Arial" pitchFamily="34" charset="0"/>
+                <a:ea typeface="Arial" pitchFamily="34" charset="-122"/>
+                <a:cs typeface="Arial" pitchFamily="34" charset="-120"/>
+              </a:rPr>
+              <a:t>다음 단계</a:t>
+            </a:r>
+            <a:endParaRPr lang="en-US" sz="3000" dirty="0"/>
+          </a:p>
+        </p:txBody>
+      </p:sp>
+      <p:sp>
+        <p:nvSpPr>
+          <p:cNvPr id="4" name="Text 2"/>
+          <p:cNvSpPr/>
+          <p:nvPr/>
+        </p:nvSpPr>
+        <p:spPr>
+          <a:xfrm>
+            <a:off x="548640" y="1005840"/>
+            <a:ext cx="11064240" cy="457200"/>
+          </a:xfrm>
+          <a:prstGeom prst="rect">
+            <a:avLst/>
+          </a:prstGeom>
+          <a:noFill/>
+          <a:ln/>
+        </p:spPr>
+        <p:txBody>
+          <a:bodyPr wrap="square" rtlCol="0" anchor="ctr"/>
+          <a:lstStyle/>
+          <a:p>
+            <a:pPr indent="0" marL="0">
+              <a:buNone/>
+            </a:pPr>
+            <a:r>
+              <a:rPr lang="en-US" sz="1600" dirty="0">
+                <a:solidFill>
+                  <a:srgbClr val="98999D"/>
+                </a:solidFill>
+                <a:latin typeface="Arial" pitchFamily="34" charset="0"/>
+                <a:ea typeface="Arial" pitchFamily="34" charset="-122"/>
+                <a:cs typeface="Arial" pitchFamily="34" charset="-120"/>
+              </a:rPr>
+              <a:t>아직 안 된 것들</a:t>
+            </a:r>
+            <a:endParaRPr lang="en-US" sz="1600" dirty="0"/>
+          </a:p>
+        </p:txBody>
+      </p:sp>
+      <p:sp>
+        <p:nvSpPr>
+          <p:cNvPr id="5" name="Shape 3"/>
+          <p:cNvSpPr/>
+          <p:nvPr/>
+        </p:nvSpPr>
+        <p:spPr>
+          <a:xfrm>
+            <a:off x="548640" y="1508760"/>
+            <a:ext cx="11064240" cy="0"/>
+          </a:xfrm>
+          <a:prstGeom prst="line">
+            <a:avLst/>
+          </a:prstGeom>
+          <a:noFill/>
+          <a:ln w="19050">
+            <a:solidFill>
+              <a:srgbClr val="202124"/>
+            </a:solidFill>
+            <a:prstDash val="solid"/>
+          </a:ln>
+        </p:spPr>
+      </p:sp>
+      <p:sp>
+        <p:nvSpPr>
+          <p:cNvPr id="6" name="Text 4"/>
+          <p:cNvSpPr/>
+          <p:nvPr/>
+        </p:nvSpPr>
+        <p:spPr>
+          <a:xfrm>
+            <a:off x="548640" y="1828800"/>
+            <a:ext cx="11064240" cy="4572000"/>
+          </a:xfrm>
+          <a:prstGeom prst="rect">
+            <a:avLst/>
+          </a:prstGeom>
+          <a:noFill/>
+          <a:ln/>
+        </p:spPr>
+        <p:txBody>
+          <a:bodyPr wrap="square" rtlCol="0" anchor="t"/>
+          <a:lstStyle/>
+          <a:p>
+            <a:pPr marL="342900" indent="-342900">
+              <a:lnSpc>
+                <a:spcPct val="135000"/>
+              </a:lnSpc>
+              <a:buSzPct val="100000"/>
+              <a:buChar char="•"/>
+            </a:pPr>
+            <a:r>
+              <a:rPr lang="en-US" sz="1800" dirty="0">
+                <a:solidFill>
+                  <a:srgbClr val="F2F2F0"/>
+                </a:solidFill>
+                <a:latin typeface="Arial" pitchFamily="34" charset="0"/>
+                <a:ea typeface="Arial" pitchFamily="34" charset="-122"/>
+                <a:cs typeface="Arial" pitchFamily="34" charset="-120"/>
+              </a:rPr>
+              <a:t>답글(스레드) UI — posts.reply_to_id는 이미 스키마에 있음</a:t>
+            </a:r>
+            <a:endParaRPr lang="en-US" sz="1800" dirty="0"/>
+          </a:p>
+          <a:p>
+            <a:pPr marL="342900" indent="-342900">
+              <a:lnSpc>
+                <a:spcPct val="135000"/>
+              </a:lnSpc>
+              <a:buSzPct val="100000"/>
+              <a:buChar char="•"/>
+            </a:pPr>
+            <a:r>
+              <a:rPr lang="en-US" sz="1800" dirty="0">
+                <a:solidFill>
+                  <a:srgbClr val="F2F2F0"/>
+                </a:solidFill>
+                <a:latin typeface="Arial" pitchFamily="34" charset="0"/>
+                <a:ea typeface="Arial" pitchFamily="34" charset="-122"/>
+                <a:cs typeface="Arial" pitchFamily="34" charset="-120"/>
+              </a:rPr>
+              <a:t>이미지 업로드 (Supabase Storage)</a:t>
+            </a:r>
+            <a:endParaRPr lang="en-US" sz="1800" dirty="0"/>
+          </a:p>
+          <a:p>
+            <a:pPr marL="342900" indent="-342900">
+              <a:lnSpc>
+                <a:spcPct val="135000"/>
+              </a:lnSpc>
+              <a:buSzPct val="100000"/>
+              <a:buChar char="•"/>
+            </a:pPr>
+            <a:r>
+              <a:rPr lang="en-US" sz="1800" dirty="0">
+                <a:solidFill>
+                  <a:srgbClr val="F2F2F0"/>
+                </a:solidFill>
+                <a:latin typeface="Arial" pitchFamily="34" charset="0"/>
+                <a:ea typeface="Arial" pitchFamily="34" charset="-122"/>
+                <a:cs typeface="Arial" pitchFamily="34" charset="-120"/>
+              </a:rPr>
+              <a:t>실시간 피드 업데이트 (Supabase Realtime)</a:t>
+            </a:r>
+            <a:endParaRPr lang="en-US" sz="1800" dirty="0"/>
+          </a:p>
+          <a:p>
+            <a:pPr marL="342900" indent="-342900">
+              <a:lnSpc>
+                <a:spcPct val="135000"/>
+              </a:lnSpc>
+              <a:buSzPct val="100000"/>
+              <a:buChar char="•"/>
+            </a:pPr>
+            <a:r>
+              <a:rPr lang="en-US" sz="1800" dirty="0">
+                <a:solidFill>
+                  <a:srgbClr val="F2F2F0"/>
+                </a:solidFill>
+                <a:latin typeface="Arial" pitchFamily="34" charset="0"/>
+                <a:ea typeface="Arial" pitchFamily="34" charset="-122"/>
+                <a:cs typeface="Arial" pitchFamily="34" charset="-120"/>
+              </a:rPr>
+              <a:t>신고/문의 처리 흐름을 관리자 앱에 추가</a:t>
+            </a:r>
+            <a:endParaRPr lang="en-US" sz="1800" dirty="0"/>
+          </a:p>
+          <a:p>
+            <a:pPr marL="342900" indent="-342900">
+              <a:lnSpc>
+                <a:spcPct val="135000"/>
+              </a:lnSpc>
+              <a:buSzPct val="100000"/>
+              <a:buChar char="•"/>
+            </a:pPr>
+            <a:r>
+              <a:rPr lang="en-US" sz="1800" dirty="0">
+                <a:solidFill>
+                  <a:srgbClr val="F2F2F0"/>
+                </a:solidFill>
+                <a:latin typeface="Arial" pitchFamily="34" charset="0"/>
+                <a:ea typeface="Arial" pitchFamily="34" charset="-122"/>
+                <a:cs typeface="Arial" pitchFamily="34" charset="-120"/>
+              </a:rPr>
+              <a:t>Flutter macOS/iOS는 Xcode 전체 설치 후 빌드 검증 필요, Windows는 Windows 머신에서만</a:t>
+            </a:r>
+            <a:endParaRPr lang="en-US" sz="1800" dirty="0"/>
+          </a:p>
+        </p:txBody>
+      </p:sp>
+    </p:spTree>
+  </p:cSld>
+  <p:clrMapOvr>
+    <a:masterClrMapping/>
+  </p:clrMapOvr>
+</p:sld>
+</file>
+
+<file path=ppt/slides/slide42.xml><?xml version="1.0" encoding="utf-8"?>
+<p:sld xmlns:a="http://schemas.openxmlformats.org/drawingml/2006/main" xmlns:r="http://schemas.openxmlformats.org/officeDocument/2006/relationships" xmlns:p="http://schemas.openxmlformats.org/presentationml/2006/main">
+  <p:cSld name="Slide 42">
+    <p:bg>
+      <p:bgPr>
+        <a:solidFill>
+          <a:srgbClr val="17181A"/>
+        </a:solidFill>
+      </p:bgPr>
+    </p:bg>
+    <p:spTree>
+      <p:nvGrpSpPr>
+        <p:cNvPr id="1" name=""/>
+        <p:cNvGrpSpPr/>
+        <p:nvPr/>
+      </p:nvGrpSpPr>
+      <p:grpSpPr>
+        <a:xfrm>
+          <a:off x="0" y="0"/>
+          <a:ext cx="0" cy="0"/>
+          <a:chOff x="0" y="0"/>
+          <a:chExt cx="0" cy="0"/>
+        </a:xfrm>
+      </p:grpSpPr>
+      <p:sp>
+        <p:nvSpPr>
+          <p:cNvPr id="2" name="Text 0"/>
+          <p:cNvSpPr/>
+          <p:nvPr/>
+        </p:nvSpPr>
+        <p:spPr>
+          <a:xfrm>
+            <a:off x="548640" y="6510528"/>
+            <a:ext cx="7315200" cy="274320"/>
+          </a:xfrm>
+          <a:prstGeom prst="rect">
+            <a:avLst/>
+          </a:prstGeom>
+          <a:noFill/>
+          <a:ln/>
+        </p:spPr>
+        <p:txBody>
+          <a:bodyPr wrap="square" rtlCol="0" anchor="ctr"/>
+          <a:lstStyle/>
+          <a:p>
+            <a:pPr indent="0" marL="0">
+              <a:buNone/>
+            </a:pPr>
+            <a:r>
+              <a:rPr lang="en-US" sz="1000" dirty="0">
+                <a:solidFill>
+                  <a:srgbClr val="98999D"/>
+                </a:solidFill>
+                <a:latin typeface="Arial" pitchFamily="34" charset="0"/>
+                <a:ea typeface="Arial" pitchFamily="34" charset="-122"/>
+                <a:cs typeface="Arial" pitchFamily="34" charset="-120"/>
+              </a:rPr>
+              <a:t>소셜 플로우 오리엔테이션</a:t>
+            </a:r>
+            <a:endParaRPr lang="en-US" sz="1000" dirty="0"/>
+          </a:p>
+        </p:txBody>
+      </p:sp>
+      <p:sp>
+        <p:nvSpPr>
+          <p:cNvPr id="3" name="Text 1"/>
+          <p:cNvSpPr/>
+          <p:nvPr/>
+        </p:nvSpPr>
+        <p:spPr>
+          <a:xfrm>
+            <a:off x="731520" y="2560320"/>
+            <a:ext cx="10698480" cy="914400"/>
+          </a:xfrm>
+          <a:prstGeom prst="rect">
+            <a:avLst/>
+          </a:prstGeom>
+          <a:noFill/>
+          <a:ln/>
+        </p:spPr>
+        <p:txBody>
+          <a:bodyPr wrap="square" rtlCol="0" anchor="ctr"/>
+          <a:lstStyle/>
+          <a:p>
+            <a:pPr indent="0" marL="0">
+              <a:buNone/>
+            </a:pPr>
+            <a:r>
+              <a:rPr lang="en-US" sz="4000" b="1" dirty="0">
+                <a:solidFill>
+                  <a:srgbClr val="F2F2F0"/>
+                </a:solidFill>
+                <a:latin typeface="Arial" pitchFamily="34" charset="0"/>
+                <a:ea typeface="Arial" pitchFamily="34" charset="-122"/>
+                <a:cs typeface="Arial" pitchFamily="34" charset="-120"/>
+              </a:rPr>
+              <a:t>별첨</a:t>
+            </a:r>
+            <a:endParaRPr lang="en-US" sz="4000" dirty="0"/>
+          </a:p>
+        </p:txBody>
+      </p:sp>
+      <p:sp>
+        <p:nvSpPr>
+          <p:cNvPr id="4" name="Text 2"/>
+          <p:cNvSpPr/>
+          <p:nvPr/>
+        </p:nvSpPr>
+        <p:spPr>
+          <a:xfrm>
+            <a:off x="731520" y="3383280"/>
+            <a:ext cx="10698480" cy="548640"/>
+          </a:xfrm>
+          <a:prstGeom prst="rect">
+            <a:avLst/>
+          </a:prstGeom>
+          <a:noFill/>
+          <a:ln/>
+        </p:spPr>
+        <p:txBody>
+          <a:bodyPr wrap="square" rtlCol="0" anchor="ctr"/>
+          <a:lstStyle/>
+          <a:p>
+            <a:pPr indent="0" marL="0">
+              <a:buNone/>
+            </a:pPr>
+            <a:r>
+              <a:rPr lang="en-US" sz="2000" dirty="0">
+                <a:solidFill>
+                  <a:srgbClr val="5B8DEF"/>
+                </a:solidFill>
+                <a:latin typeface="Arial" pitchFamily="34" charset="0"/>
+                <a:ea typeface="Arial" pitchFamily="34" charset="-122"/>
+                <a:cs typeface="Arial" pitchFamily="34" charset="-120"/>
+              </a:rPr>
+              <a:t>기초 개념을 처음부터 제대로 쌓고 싶다면</a:t>
+            </a:r>
+            <a:endParaRPr lang="en-US" sz="2000" dirty="0"/>
+          </a:p>
+        </p:txBody>
+      </p:sp>
+    </p:spTree>
+  </p:cSld>
+  <p:clrMapOvr>
+    <a:masterClrMapping/>
+  </p:clrMapOvr>
+</p:sld>
+</file>
+
+<file path=ppt/slides/slide43.xml><?xml version="1.0" encoding="utf-8"?>
+<p:sld xmlns:a="http://schemas.openxmlformats.org/drawingml/2006/main" xmlns:r="http://schemas.openxmlformats.org/officeDocument/2006/relationships" xmlns:p="http://schemas.openxmlformats.org/presentationml/2006/main">
+  <p:cSld name="Slide 43">
+    <p:bg>
+      <p:bgPr>
+        <a:solidFill>
+          <a:srgbClr val="17181A"/>
+        </a:solidFill>
+      </p:bgPr>
+    </p:bg>
+    <p:spTree>
+      <p:nvGrpSpPr>
+        <p:cNvPr id="1" name=""/>
+        <p:cNvGrpSpPr/>
+        <p:nvPr/>
+      </p:nvGrpSpPr>
+      <p:grpSpPr>
+        <a:xfrm>
+          <a:off x="0" y="0"/>
+          <a:ext cx="0" cy="0"/>
+          <a:chOff x="0" y="0"/>
+          <a:chExt cx="0" cy="0"/>
+        </a:xfrm>
+      </p:grpSpPr>
+      <p:sp>
+        <p:nvSpPr>
+          <p:cNvPr id="2" name="Text 0"/>
+          <p:cNvSpPr/>
+          <p:nvPr/>
+        </p:nvSpPr>
+        <p:spPr>
+          <a:xfrm>
+            <a:off x="548640" y="6510528"/>
+            <a:ext cx="7315200" cy="274320"/>
+          </a:xfrm>
+          <a:prstGeom prst="rect">
+            <a:avLst/>
+          </a:prstGeom>
+          <a:noFill/>
+          <a:ln/>
+        </p:spPr>
+        <p:txBody>
+          <a:bodyPr wrap="square" rtlCol="0" anchor="ctr"/>
+          <a:lstStyle/>
+          <a:p>
+            <a:pPr indent="0" marL="0">
+              <a:buNone/>
+            </a:pPr>
+            <a:r>
+              <a:rPr lang="en-US" sz="1000" dirty="0">
+                <a:solidFill>
+                  <a:srgbClr val="98999D"/>
+                </a:solidFill>
+                <a:latin typeface="Arial" pitchFamily="34" charset="0"/>
+                <a:ea typeface="Arial" pitchFamily="34" charset="-122"/>
+                <a:cs typeface="Arial" pitchFamily="34" charset="-120"/>
+              </a:rPr>
+              <a:t>소셜 플로우 오리엔테이션</a:t>
+            </a:r>
+            <a:endParaRPr lang="en-US" sz="1000" dirty="0"/>
+          </a:p>
+        </p:txBody>
+      </p:sp>
+      <p:sp>
+        <p:nvSpPr>
+          <p:cNvPr id="3" name="Text 1"/>
+          <p:cNvSpPr/>
+          <p:nvPr/>
+        </p:nvSpPr>
+        <p:spPr>
+          <a:xfrm>
+            <a:off x="548640" y="365760"/>
+            <a:ext cx="11064240" cy="822960"/>
+          </a:xfrm>
+          <a:prstGeom prst="rect">
+            <a:avLst/>
+          </a:prstGeom>
+          <a:noFill/>
+          <a:ln/>
+        </p:spPr>
+        <p:txBody>
+          <a:bodyPr wrap="square" rtlCol="0" anchor="ctr"/>
+          <a:lstStyle/>
+          <a:p>
+            <a:pPr indent="0" marL="0">
+              <a:buNone/>
+            </a:pPr>
+            <a:r>
+              <a:rPr lang="en-US" sz="3000" b="1" dirty="0">
+                <a:solidFill>
+                  <a:srgbClr val="F2F2F0"/>
+                </a:solidFill>
+                <a:latin typeface="Arial" pitchFamily="34" charset="0"/>
+                <a:ea typeface="Arial" pitchFamily="34" charset="-122"/>
+                <a:cs typeface="Arial" pitchFamily="34" charset="-120"/>
+              </a:rPr>
+              <a:t>추천 사이트</a:t>
+            </a:r>
+            <a:endParaRPr lang="en-US" sz="3000" dirty="0"/>
+          </a:p>
+        </p:txBody>
+      </p:sp>
+      <p:sp>
+        <p:nvSpPr>
+          <p:cNvPr id="4" name="Text 2"/>
+          <p:cNvSpPr/>
+          <p:nvPr/>
+        </p:nvSpPr>
+        <p:spPr>
+          <a:xfrm>
+            <a:off x="548640" y="1005840"/>
+            <a:ext cx="11064240" cy="457200"/>
+          </a:xfrm>
+          <a:prstGeom prst="rect">
+            <a:avLst/>
+          </a:prstGeom>
+          <a:noFill/>
+          <a:ln/>
+        </p:spPr>
+        <p:txBody>
+          <a:bodyPr wrap="square" rtlCol="0" anchor="ctr"/>
+          <a:lstStyle/>
+          <a:p>
+            <a:pPr indent="0" marL="0">
+              <a:buNone/>
+            </a:pPr>
+            <a:r>
+              <a:rPr lang="en-US" sz="1600" dirty="0">
+                <a:solidFill>
+                  <a:srgbClr val="98999D"/>
+                </a:solidFill>
+                <a:latin typeface="Arial" pitchFamily="34" charset="0"/>
+                <a:ea typeface="Arial" pitchFamily="34" charset="-122"/>
+                <a:cs typeface="Arial" pitchFamily="34" charset="-120"/>
+              </a:rPr>
+              <a:t>무료로 기초부터 다질 수 있는 곳들</a:t>
+            </a:r>
+            <a:endParaRPr lang="en-US" sz="1600" dirty="0"/>
+          </a:p>
+        </p:txBody>
+      </p:sp>
+      <p:sp>
+        <p:nvSpPr>
+          <p:cNvPr id="5" name="Shape 3"/>
+          <p:cNvSpPr/>
+          <p:nvPr/>
+        </p:nvSpPr>
+        <p:spPr>
+          <a:xfrm>
+            <a:off x="548640" y="1508760"/>
+            <a:ext cx="11064240" cy="0"/>
+          </a:xfrm>
+          <a:prstGeom prst="line">
+            <a:avLst/>
+          </a:prstGeom>
+          <a:noFill/>
+          <a:ln w="19050">
+            <a:solidFill>
+              <a:srgbClr val="202124"/>
+            </a:solidFill>
+            <a:prstDash val="solid"/>
+          </a:ln>
+        </p:spPr>
+      </p:sp>
+      <p:sp>
+        <p:nvSpPr>
+          <p:cNvPr id="6" name="Text 4"/>
+          <p:cNvSpPr/>
+          <p:nvPr/>
+        </p:nvSpPr>
+        <p:spPr>
+          <a:xfrm>
+            <a:off x="548640" y="1828800"/>
+            <a:ext cx="11064240" cy="4572000"/>
+          </a:xfrm>
+          <a:prstGeom prst="rect">
+            <a:avLst/>
+          </a:prstGeom>
+          <a:noFill/>
+          <a:ln/>
+        </p:spPr>
+        <p:txBody>
+          <a:bodyPr wrap="square" rtlCol="0" anchor="t"/>
+          <a:lstStyle/>
+          <a:p>
+            <a:pPr marL="342900" indent="-342900">
+              <a:lnSpc>
+                <a:spcPct val="135000"/>
+              </a:lnSpc>
+              <a:buSzPct val="100000"/>
+              <a:buChar char="•"/>
+            </a:pPr>
+            <a:r>
+              <a:rPr lang="en-US" sz="1700" dirty="0">
+                <a:solidFill>
+                  <a:srgbClr val="F2F2F0"/>
+                </a:solidFill>
+                <a:latin typeface="Arial" pitchFamily="34" charset="0"/>
+                <a:ea typeface="Arial" pitchFamily="34" charset="-122"/>
+                <a:cs typeface="Arial" pitchFamily="34" charset="-120"/>
+              </a:rPr>
+              <a:t>MDN Web Docs (developer.mozilla.org) — HTML/CSS/JS, 웹 표준 문서의 정석</a:t>
+            </a:r>
+            <a:endParaRPr lang="en-US" sz="1700" dirty="0"/>
+          </a:p>
+          <a:p>
+            <a:pPr marL="342900" indent="-342900">
+              <a:lnSpc>
+                <a:spcPct val="135000"/>
+              </a:lnSpc>
+              <a:buSzPct val="100000"/>
+              <a:buChar char="•"/>
+            </a:pPr>
+            <a:r>
+              <a:rPr lang="en-US" sz="1700" dirty="0">
+                <a:solidFill>
+                  <a:srgbClr val="F2F2F0"/>
+                </a:solidFill>
+                <a:latin typeface="Arial" pitchFamily="34" charset="0"/>
+                <a:ea typeface="Arial" pitchFamily="34" charset="-122"/>
+                <a:cs typeface="Arial" pitchFamily="34" charset="-120"/>
+              </a:rPr>
+              <a:t>생활코딩 (opentutorials.org) — 한국어로 프로그래밍·Git·DB 기초를 처음부터</a:t>
+            </a:r>
+            <a:endParaRPr lang="en-US" sz="1700" dirty="0"/>
+          </a:p>
+          <a:p>
+            <a:pPr marL="342900" indent="-342900">
+              <a:lnSpc>
+                <a:spcPct val="135000"/>
+              </a:lnSpc>
+              <a:buSzPct val="100000"/>
+              <a:buChar char="•"/>
+            </a:pPr>
+            <a:r>
+              <a:rPr lang="en-US" sz="1700" dirty="0">
+                <a:solidFill>
+                  <a:srgbClr val="F2F2F0"/>
+                </a:solidFill>
+                <a:latin typeface="Arial" pitchFamily="34" charset="0"/>
+                <a:ea typeface="Arial" pitchFamily="34" charset="-122"/>
+                <a:cs typeface="Arial" pitchFamily="34" charset="-120"/>
+              </a:rPr>
+              <a:t>freeCodeCamp (freecodecamp.org) — 무료 커리큘럼 + 실습 위주 웹 개발 기초</a:t>
+            </a:r>
+            <a:endParaRPr lang="en-US" sz="1700" dirty="0"/>
+          </a:p>
+          <a:p>
+            <a:pPr marL="342900" indent="-342900">
+              <a:lnSpc>
+                <a:spcPct val="135000"/>
+              </a:lnSpc>
+              <a:buSzPct val="100000"/>
+              <a:buChar char="•"/>
+            </a:pPr>
+            <a:r>
+              <a:rPr lang="en-US" sz="1700" dirty="0">
+                <a:solidFill>
+                  <a:srgbClr val="F2F2F0"/>
+                </a:solidFill>
+                <a:latin typeface="Arial" pitchFamily="34" charset="0"/>
+                <a:ea typeface="Arial" pitchFamily="34" charset="-122"/>
+                <a:cs typeface="Arial" pitchFamily="34" charset="-120"/>
+              </a:rPr>
+              <a:t>roadmap.sh — 프론트엔드/백엔드/풀스택 등 분야별 학습 로드맵 지도</a:t>
+            </a:r>
+            <a:endParaRPr lang="en-US" sz="1700" dirty="0"/>
+          </a:p>
+          <a:p>
+            <a:pPr marL="342900" indent="-342900">
+              <a:lnSpc>
+                <a:spcPct val="135000"/>
+              </a:lnSpc>
+              <a:buSzPct val="100000"/>
+              <a:buChar char="•"/>
+            </a:pPr>
+            <a:r>
+              <a:rPr lang="en-US" sz="1700" dirty="0">
+                <a:solidFill>
+                  <a:srgbClr val="F2F2F0"/>
+                </a:solidFill>
+                <a:latin typeface="Arial" pitchFamily="34" charset="0"/>
+                <a:ea typeface="Arial" pitchFamily="34" charset="-122"/>
+                <a:cs typeface="Arial" pitchFamily="34" charset="-120"/>
+              </a:rPr>
+              <a:t>Next.js Learn (nextjs.org/learn) — Next.js 공식 인터랙티브 튜토리얼</a:t>
+            </a:r>
+            <a:endParaRPr lang="en-US" sz="1700" dirty="0"/>
+          </a:p>
+          <a:p>
+            <a:pPr marL="342900" indent="-342900">
+              <a:lnSpc>
+                <a:spcPct val="135000"/>
+              </a:lnSpc>
+              <a:buSzPct val="100000"/>
+              <a:buChar char="•"/>
+            </a:pPr>
+            <a:r>
+              <a:rPr lang="en-US" sz="1700" dirty="0">
+                <a:solidFill>
+                  <a:srgbClr val="F2F2F0"/>
+                </a:solidFill>
+                <a:latin typeface="Arial" pitchFamily="34" charset="0"/>
+                <a:ea typeface="Arial" pitchFamily="34" charset="-122"/>
+                <a:cs typeface="Arial" pitchFamily="34" charset="-120"/>
+              </a:rPr>
+              <a:t>Supabase Docs (supabase.com/docs) — Auth/DB/RLS 등 공식 가이드 + 예제</a:t>
+            </a:r>
+            <a:endParaRPr lang="en-US" sz="1700" dirty="0"/>
+          </a:p>
+          <a:p>
+            <a:pPr marL="342900" indent="-342900">
+              <a:lnSpc>
+                <a:spcPct val="135000"/>
+              </a:lnSpc>
+              <a:buSzPct val="100000"/>
+              <a:buChar char="•"/>
+            </a:pPr>
+            <a:r>
+              <a:rPr lang="en-US" sz="1700" dirty="0">
+                <a:solidFill>
+                  <a:srgbClr val="F2F2F0"/>
+                </a:solidFill>
+                <a:latin typeface="Arial" pitchFamily="34" charset="0"/>
+                <a:ea typeface="Arial" pitchFamily="34" charset="-122"/>
+                <a:cs typeface="Arial" pitchFamily="34" charset="-120"/>
+              </a:rPr>
+              <a:t>Flutter 공식 Codelabs (docs.flutter.dev/codelabs) — 손으로 따라 하는 Flutter 튜토리얼</a:t>
+            </a:r>
+            <a:endParaRPr lang="en-US" sz="1700" dirty="0"/>
+          </a:p>
+        </p:txBody>
+      </p:sp>
+    </p:spTree>
+  </p:cSld>
+  <p:clrMapOvr>
+    <a:masterClrMapping/>
+  </p:clrMapOvr>
+</p:sld>
+</file>
+
+<file path=ppt/slides/slide44.xml><?xml version="1.0" encoding="utf-8"?>
+<p:sld xmlns:a="http://schemas.openxmlformats.org/drawingml/2006/main" xmlns:r="http://schemas.openxmlformats.org/officeDocument/2006/relationships" xmlns:p="http://schemas.openxmlformats.org/presentationml/2006/main">
+  <p:cSld name="Slide 44">
+    <p:bg>
+      <p:bgPr>
+        <a:solidFill>
+          <a:srgbClr val="17181A"/>
+        </a:solidFill>
+      </p:bgPr>
+    </p:bg>
+    <p:spTree>
+      <p:nvGrpSpPr>
+        <p:cNvPr id="1" name=""/>
+        <p:cNvGrpSpPr/>
+        <p:nvPr/>
+      </p:nvGrpSpPr>
+      <p:grpSpPr>
+        <a:xfrm>
+          <a:off x="0" y="0"/>
+          <a:ext cx="0" cy="0"/>
+          <a:chOff x="0" y="0"/>
+          <a:chExt cx="0" cy="0"/>
+        </a:xfrm>
+      </p:grpSpPr>
+      <p:sp>
+        <p:nvSpPr>
+          <p:cNvPr id="2" name="Text 0"/>
+          <p:cNvSpPr/>
+          <p:nvPr/>
+        </p:nvSpPr>
+        <p:spPr>
+          <a:xfrm>
+            <a:off x="548640" y="6510528"/>
+            <a:ext cx="7315200" cy="274320"/>
+          </a:xfrm>
+          <a:prstGeom prst="rect">
+            <a:avLst/>
+          </a:prstGeom>
+          <a:noFill/>
+          <a:ln/>
+        </p:spPr>
+        <p:txBody>
+          <a:bodyPr wrap="square" rtlCol="0" anchor="ctr"/>
+          <a:lstStyle/>
+          <a:p>
+            <a:pPr indent="0" marL="0">
+              <a:buNone/>
+            </a:pPr>
+            <a:r>
+              <a:rPr lang="en-US" sz="1000" dirty="0">
+                <a:solidFill>
+                  <a:srgbClr val="98999D"/>
+                </a:solidFill>
+                <a:latin typeface="Arial" pitchFamily="34" charset="0"/>
+                <a:ea typeface="Arial" pitchFamily="34" charset="-122"/>
+                <a:cs typeface="Arial" pitchFamily="34" charset="-120"/>
+              </a:rPr>
+              <a:t>소셜 플로우 오리엔테이션</a:t>
+            </a:r>
+            <a:endParaRPr lang="en-US" sz="1000" dirty="0"/>
+          </a:p>
+        </p:txBody>
+      </p:sp>
+      <p:sp>
+        <p:nvSpPr>
+          <p:cNvPr id="3" name="Text 1"/>
+          <p:cNvSpPr/>
+          <p:nvPr/>
+        </p:nvSpPr>
+        <p:spPr>
+          <a:xfrm>
+            <a:off x="548640" y="365760"/>
+            <a:ext cx="11064240" cy="822960"/>
+          </a:xfrm>
+          <a:prstGeom prst="rect">
+            <a:avLst/>
+          </a:prstGeom>
+          <a:noFill/>
+          <a:ln/>
+        </p:spPr>
+        <p:txBody>
+          <a:bodyPr wrap="square" rtlCol="0" anchor="ctr"/>
+          <a:lstStyle/>
+          <a:p>
+            <a:pPr indent="0" marL="0">
+              <a:buNone/>
+            </a:pPr>
+            <a:r>
+              <a:rPr lang="en-US" sz="3000" b="1" dirty="0">
+                <a:solidFill>
+                  <a:srgbClr val="F2F2F0"/>
+                </a:solidFill>
+                <a:latin typeface="Arial" pitchFamily="34" charset="0"/>
+                <a:ea typeface="Arial" pitchFamily="34" charset="-122"/>
+                <a:cs typeface="Arial" pitchFamily="34" charset="-120"/>
+              </a:rPr>
+              <a:t>추천 책</a:t>
+            </a:r>
+            <a:endParaRPr lang="en-US" sz="3000" dirty="0"/>
+          </a:p>
+        </p:txBody>
+      </p:sp>
+      <p:sp>
+        <p:nvSpPr>
+          <p:cNvPr id="4" name="Text 2"/>
+          <p:cNvSpPr/>
+          <p:nvPr/>
+        </p:nvSpPr>
+        <p:spPr>
+          <a:xfrm>
+            <a:off x="548640" y="1005840"/>
+            <a:ext cx="11064240" cy="457200"/>
+          </a:xfrm>
+          <a:prstGeom prst="rect">
+            <a:avLst/>
+          </a:prstGeom>
+          <a:noFill/>
+          <a:ln/>
+        </p:spPr>
+        <p:txBody>
+          <a:bodyPr wrap="square" rtlCol="0" anchor="ctr"/>
+          <a:lstStyle/>
+          <a:p>
+            <a:pPr indent="0" marL="0">
+              <a:buNone/>
+            </a:pPr>
+            <a:r>
+              <a:rPr lang="en-US" sz="1600" dirty="0">
+                <a:solidFill>
+                  <a:srgbClr val="98999D"/>
+                </a:solidFill>
+                <a:latin typeface="Arial" pitchFamily="34" charset="0"/>
+                <a:ea typeface="Arial" pitchFamily="34" charset="-122"/>
+                <a:cs typeface="Arial" pitchFamily="34" charset="-120"/>
+              </a:rPr>
+              <a:t>개념을 깊이 있게 잡고 싶을 때</a:t>
+            </a:r>
+            <a:endParaRPr lang="en-US" sz="1600" dirty="0"/>
+          </a:p>
+        </p:txBody>
+      </p:sp>
+      <p:sp>
+        <p:nvSpPr>
+          <p:cNvPr id="5" name="Shape 3"/>
+          <p:cNvSpPr/>
+          <p:nvPr/>
+        </p:nvSpPr>
+        <p:spPr>
+          <a:xfrm>
+            <a:off x="548640" y="1508760"/>
+            <a:ext cx="11064240" cy="0"/>
+          </a:xfrm>
+          <a:prstGeom prst="line">
+            <a:avLst/>
+          </a:prstGeom>
+          <a:noFill/>
+          <a:ln w="19050">
+            <a:solidFill>
+              <a:srgbClr val="202124"/>
+            </a:solidFill>
+            <a:prstDash val="solid"/>
+          </a:ln>
+        </p:spPr>
+      </p:sp>
+      <p:sp>
+        <p:nvSpPr>
+          <p:cNvPr id="6" name="Text 4"/>
+          <p:cNvSpPr/>
+          <p:nvPr/>
+        </p:nvSpPr>
+        <p:spPr>
+          <a:xfrm>
+            <a:off x="548640" y="1828800"/>
+            <a:ext cx="11064240" cy="4572000"/>
+          </a:xfrm>
+          <a:prstGeom prst="rect">
+            <a:avLst/>
+          </a:prstGeom>
+          <a:noFill/>
+          <a:ln/>
+        </p:spPr>
+        <p:txBody>
+          <a:bodyPr wrap="square" rtlCol="0" anchor="t"/>
+          <a:lstStyle/>
+          <a:p>
+            <a:pPr marL="342900" indent="-342900">
+              <a:lnSpc>
+                <a:spcPct val="135000"/>
+              </a:lnSpc>
+              <a:buSzPct val="100000"/>
+              <a:buChar char="•"/>
+            </a:pPr>
+            <a:r>
+              <a:rPr lang="en-US" sz="1800" dirty="0">
+                <a:solidFill>
+                  <a:srgbClr val="F2F2F0"/>
+                </a:solidFill>
+                <a:latin typeface="Arial" pitchFamily="34" charset="0"/>
+                <a:ea typeface="Arial" pitchFamily="34" charset="-122"/>
+                <a:cs typeface="Arial" pitchFamily="34" charset="-120"/>
+              </a:rPr>
+              <a:t>『클린 코드』 Robert C. Martin — 좋은 코드/나쁜 코드를 가르는 기준 세우기</a:t>
+            </a:r>
+            <a:endParaRPr lang="en-US" sz="1800" dirty="0"/>
+          </a:p>
+          <a:p>
+            <a:pPr marL="342900" indent="-342900">
+              <a:lnSpc>
+                <a:spcPct val="135000"/>
+              </a:lnSpc>
+              <a:buSzPct val="100000"/>
+              <a:buChar char="•"/>
+            </a:pPr>
+            <a:r>
+              <a:rPr lang="en-US" sz="1800" dirty="0">
+                <a:solidFill>
+                  <a:srgbClr val="F2F2F0"/>
+                </a:solidFill>
+                <a:latin typeface="Arial" pitchFamily="34" charset="0"/>
+                <a:ea typeface="Arial" pitchFamily="34" charset="-122"/>
+                <a:cs typeface="Arial" pitchFamily="34" charset="-120"/>
+              </a:rPr>
+              <a:t>『모던 자바스크립트 Deep Dive』 이웅모 — 자바스크립트 문법의 원리를 제대로</a:t>
+            </a:r>
+            <a:endParaRPr lang="en-US" sz="1800" dirty="0"/>
+          </a:p>
+          <a:p>
+            <a:pPr marL="342900" indent="-342900">
+              <a:lnSpc>
+                <a:spcPct val="135000"/>
+              </a:lnSpc>
+              <a:buSzPct val="100000"/>
+              <a:buChar char="•"/>
+            </a:pPr>
+            <a:r>
+              <a:rPr lang="en-US" sz="1800" dirty="0">
+                <a:solidFill>
+                  <a:srgbClr val="F2F2F0"/>
+                </a:solidFill>
+                <a:latin typeface="Arial" pitchFamily="34" charset="0"/>
+                <a:ea typeface="Arial" pitchFamily="34" charset="-122"/>
+                <a:cs typeface="Arial" pitchFamily="34" charset="-120"/>
+              </a:rPr>
+              <a:t>『Learning React』 Alex Banks &amp; Eve Porcello (O'Reilly) — 리액트 개념을 기초부터</a:t>
+            </a:r>
+            <a:endParaRPr lang="en-US" sz="1800" dirty="0"/>
+          </a:p>
+          <a:p>
+            <a:pPr marL="342900" indent="-342900">
+              <a:lnSpc>
+                <a:spcPct val="135000"/>
+              </a:lnSpc>
+              <a:buSzPct val="100000"/>
+              <a:buChar char="•"/>
+            </a:pPr>
+            <a:r>
+              <a:rPr lang="en-US" sz="1800" dirty="0">
+                <a:solidFill>
+                  <a:srgbClr val="F2F2F0"/>
+                </a:solidFill>
+                <a:latin typeface="Arial" pitchFamily="34" charset="0"/>
+                <a:ea typeface="Arial" pitchFamily="34" charset="-122"/>
+                <a:cs typeface="Arial" pitchFamily="34" charset="-120"/>
+              </a:rPr>
+              <a:t>『혼자 공부하는 컴퓨터 구조+운영체제』 강민철 — 코드 너머의 컴퓨터 동작 원리</a:t>
+            </a:r>
+            <a:endParaRPr lang="en-US" sz="1800" dirty="0"/>
+          </a:p>
+          <a:p>
+            <a:pPr marL="342900" indent="-342900">
+              <a:lnSpc>
+                <a:spcPct val="135000"/>
+              </a:lnSpc>
+              <a:buSzPct val="100000"/>
+              <a:buChar char="•"/>
+            </a:pPr>
+            <a:r>
+              <a:rPr lang="en-US" sz="1800" dirty="0">
+                <a:solidFill>
+                  <a:srgbClr val="F2F2F0"/>
+                </a:solidFill>
+                <a:latin typeface="Arial" pitchFamily="34" charset="0"/>
+                <a:ea typeface="Arial" pitchFamily="34" charset="-122"/>
+                <a:cs typeface="Arial" pitchFamily="34" charset="-120"/>
+              </a:rPr>
+              <a:t>『Designing Data-Intensive Applications』 Martin Kleppmann — 데이터베이스/백엔드를 깊게 (중급 이상)</a:t>
+            </a:r>
+            <a:endParaRPr lang="en-US" sz="1800" dirty="0"/>
           </a:p>
         </p:txBody>
       </p:sp>
